--- a/slides/AI_MCN_Final_Presentation_EN.pptx
+++ b/slides/AI_MCN_Final_Presentation_EN.pptx
@@ -21,6 +21,7 @@
     <p:sldId id="269" r:id="rId20"/>
     <p:sldId id="270" r:id="rId21"/>
     <p:sldId id="271" r:id="rId22"/>
+    <p:sldId id="272" r:id="rId23"/>
   </p:sldIdLst>
   <p:sldSz cx="12191695" cy="6858000" type="screen4x3"/>
   <p:notesSz cx="6858000" cy="9144000"/>
@@ -3374,7 +3375,7 @@
               </a:defRPr>
             </a:pPr>
             <a:r>
-              <a:t>Network Diversity Diagnostics</a:t>
+              <a:t>Guardrails Against Bad Recommendations</a:t>
             </a:r>
           </a:p>
         </p:txBody>
@@ -3424,7 +3425,7 @@
       </p:sp>
       <p:pic>
         <p:nvPicPr>
-          <p:cNvPr id="4" name="Picture 3" descr="community_distribution_clean.png"/>
+          <p:cNvPr id="4" name="Picture 3" descr="evidence_vs_finalscore_top10.png"/>
           <p:cNvPicPr>
             <a:picLocks noChangeAspect="1"/>
           </p:cNvPicPr>
@@ -3439,7 +3440,7 @@
         <p:spPr>
           <a:xfrm>
             <a:off x="685800" y="1828800"/>
-            <a:ext cx="8686800" cy="4389120"/>
+            <a:ext cx="6993402" cy="4434840"/>
           </a:xfrm>
           <a:prstGeom prst="rect">
             <a:avLst/>
@@ -3454,8 +3455,8 @@
         </p:nvSpPr>
         <p:spPr>
           <a:xfrm>
-            <a:off x="7315200" y="1828800"/>
-            <a:ext cx="4114800" cy="4389120"/>
+            <a:off x="7342631" y="1828800"/>
+            <a:ext cx="4069080" cy="4434840"/>
           </a:xfrm>
           <a:prstGeom prst="roundRect">
             <a:avLst/>
@@ -3499,8 +3500,8 @@
         </p:nvSpPr>
         <p:spPr>
           <a:xfrm>
-            <a:off x="7516368" y="1938528"/>
-            <a:ext cx="3794760" cy="365760"/>
+            <a:off x="7543800" y="1938528"/>
+            <a:ext cx="3749040" cy="365760"/>
           </a:xfrm>
           <a:prstGeom prst="rect">
             <a:avLst/>
@@ -3522,7 +3523,7 @@
               </a:defRPr>
             </a:pPr>
             <a:r>
-              <a:t>Community results</a:t>
+              <a:t>Bias and quality controls</a:t>
             </a:r>
           </a:p>
         </p:txBody>
@@ -3535,8 +3536,8 @@
         </p:nvSpPr>
         <p:spPr>
           <a:xfrm>
-            <a:off x="7498079" y="2304288"/>
-            <a:ext cx="3794760" cy="3822191"/>
+            <a:off x="7525511" y="2304288"/>
+            <a:ext cx="3749040" cy="3867911"/>
           </a:xfrm>
           <a:prstGeom prst="rect">
             <a:avLst/>
@@ -3561,7 +3562,7 @@
               </a:defRPr>
             </a:pPr>
             <a:r>
-              <a:t>Non-micro communities discovered: 6</a:t>
+              <a:t>Low-evidence channels are automatically down-weighted.</a:t>
             </a:r>
           </a:p>
           <a:p>
@@ -3577,7 +3578,7 @@
               </a:defRPr>
             </a:pPr>
             <a:r>
-              <a:t>Largest non-micro community share: 43.8%</a:t>
+              <a:t>Diversity guardrail prevents single-cluster over-concentration.</a:t>
             </a:r>
           </a:p>
           <a:p>
@@ -3593,7 +3594,7 @@
               </a:defRPr>
             </a:pPr>
             <a:r>
-              <a:t>Micro/isolated channels separated to improve readability</a:t>
+              <a:t>Degree-only vs hybrid overlap: 2/10</a:t>
             </a:r>
           </a:p>
         </p:txBody>
@@ -3629,7 +3630,7 @@
               </a:defRPr>
             </a:pPr>
             <a:r>
-              <a:t>Community-aware matching for healthier shortlist diversity</a:t>
+              <a:t>Reduced popularity bias with evidence-based filtering</a:t>
             </a:r>
           </a:p>
         </p:txBody>
@@ -3683,7 +3684,7 @@
               </a:defRPr>
             </a:pPr>
             <a:r>
-              <a:t>ROI Scenario (Business Lens)</a:t>
+              <a:t>Network Diversity Diagnostics</a:t>
             </a:r>
           </a:p>
         </p:txBody>
@@ -3733,7 +3734,7 @@
       </p:sp>
       <p:pic>
         <p:nvPicPr>
-          <p:cNvPr id="4" name="Picture 3" descr="roi_funnel_base.png"/>
+          <p:cNvPr id="4" name="Picture 3" descr="community_distribution_clean.png"/>
           <p:cNvPicPr>
             <a:picLocks noChangeAspect="1"/>
           </p:cNvPicPr>
@@ -3748,7 +3749,7 @@
         <p:spPr>
           <a:xfrm>
             <a:off x="685800" y="1828800"/>
-            <a:ext cx="8046720" cy="4480560"/>
+            <a:ext cx="8686800" cy="4389120"/>
           </a:xfrm>
           <a:prstGeom prst="rect">
             <a:avLst/>
@@ -3763,8 +3764,8 @@
         </p:nvSpPr>
         <p:spPr>
           <a:xfrm>
-            <a:off x="7178040" y="1828800"/>
-            <a:ext cx="4251960" cy="4480560"/>
+            <a:off x="7315200" y="1828800"/>
+            <a:ext cx="4114800" cy="4389120"/>
           </a:xfrm>
           <a:prstGeom prst="roundRect">
             <a:avLst/>
@@ -3808,8 +3809,8 @@
         </p:nvSpPr>
         <p:spPr>
           <a:xfrm>
-            <a:off x="7379208" y="1938528"/>
-            <a:ext cx="3931920" cy="365760"/>
+            <a:off x="7516368" y="1938528"/>
+            <a:ext cx="3794760" cy="365760"/>
           </a:xfrm>
           <a:prstGeom prst="rect">
             <a:avLst/>
@@ -3831,7 +3832,7 @@
               </a:defRPr>
             </a:pPr>
             <a:r>
-              <a:t>Base scenario outputs</a:t>
+              <a:t>Community results</a:t>
             </a:r>
           </a:p>
         </p:txBody>
@@ -3844,8 +3845,8 @@
         </p:nvSpPr>
         <p:spPr>
           <a:xfrm>
-            <a:off x="7360919" y="2304288"/>
-            <a:ext cx="3931920" cy="3913632"/>
+            <a:off x="7498079" y="2304288"/>
+            <a:ext cx="3794760" cy="3822191"/>
           </a:xfrm>
           <a:prstGeom prst="rect">
             <a:avLst/>
@@ -3870,7 +3871,7 @@
               </a:defRPr>
             </a:pPr>
             <a:r>
-              <a:t>Budget: $50,000</a:t>
+              <a:t>Non-micro communities discovered: 6</a:t>
             </a:r>
           </a:p>
           <a:p>
@@ -3886,7 +3887,7 @@
               </a:defRPr>
             </a:pPr>
             <a:r>
-              <a:t>Impressions: 2,777,777</a:t>
+              <a:t>Largest non-micro community share: 43.8%</a:t>
             </a:r>
           </a:p>
           <a:p>
@@ -3902,39 +3903,7 @@
               </a:defRPr>
             </a:pPr>
             <a:r>
-              <a:t>Clicks: 49,999</a:t>
-            </a:r>
-          </a:p>
-          <a:p>
-            <a:pPr>
-              <a:spcAft>
-                <a:spcPts val="900"/>
-              </a:spcAft>
-              <a:defRPr sz="1600">
-                <a:solidFill>
-                  <a:srgbClr val="1C2D46"/>
-                </a:solidFill>
-                <a:latin typeface="Aptos"/>
-              </a:defRPr>
-            </a:pPr>
-            <a:r>
-              <a:t>Conversions: 1,499</a:t>
-            </a:r>
-          </a:p>
-          <a:p>
-            <a:pPr>
-              <a:spcAft>
-                <a:spcPts val="900"/>
-              </a:spcAft>
-              <a:defRPr sz="1600">
-                <a:solidFill>
-                  <a:srgbClr val="1C2D46"/>
-                </a:solidFill>
-                <a:latin typeface="Aptos"/>
-              </a:defRPr>
-            </a:pPr>
-            <a:r>
-              <a:t>Expected ROAS: 1.14x</a:t>
+              <a:t>Micro/isolated channels separated to improve readability</a:t>
             </a:r>
           </a:p>
         </p:txBody>
@@ -3970,7 +3939,7 @@
               </a:defRPr>
             </a:pPr>
             <a:r>
-              <a:t>Scenario estimate only, not causal guarantee</a:t>
+              <a:t>Community-aware matching for healthier shortlist diversity</a:t>
             </a:r>
           </a:p>
         </p:txBody>
@@ -4024,7 +3993,7 @@
               </a:defRPr>
             </a:pPr>
             <a:r>
-              <a:t>Live Demo Flow</a:t>
+              <a:t>ROI Scenario (Business Lens)</a:t>
             </a:r>
           </a:p>
         </p:txBody>
@@ -4072,16 +4041,121 @@
           </a:p>
         </p:txBody>
       </p:sp>
-      <p:sp>
-        <p:nvSpPr>
-          <p:cNvPr id="4" name="TextBox 3"/>
+      <p:pic>
+        <p:nvPicPr>
+          <p:cNvPr id="4" name="Picture 3" descr="roi_funnel_base.png"/>
+          <p:cNvPicPr>
+            <a:picLocks noChangeAspect="1"/>
+          </p:cNvPicPr>
+          <p:nvPr/>
+        </p:nvPicPr>
+        <p:blipFill>
+          <a:blip r:embed="rId2"/>
+          <a:stretch>
+            <a:fillRect/>
+          </a:stretch>
+        </p:blipFill>
+        <p:spPr>
+          <a:xfrm>
+            <a:off x="685800" y="1828800"/>
+            <a:ext cx="8046720" cy="4480560"/>
+          </a:xfrm>
+          <a:prstGeom prst="rect">
+            <a:avLst/>
+          </a:prstGeom>
+        </p:spPr>
+      </p:pic>
+      <p:sp>
+        <p:nvSpPr>
+          <p:cNvPr id="5" name="Rounded Rectangle 4"/>
+          <p:cNvSpPr/>
+          <p:nvPr/>
+        </p:nvSpPr>
+        <p:spPr>
+          <a:xfrm>
+            <a:off x="7178040" y="1828800"/>
+            <a:ext cx="4251960" cy="4480560"/>
+          </a:xfrm>
+          <a:prstGeom prst="roundRect">
+            <a:avLst/>
+          </a:prstGeom>
+          <a:solidFill>
+            <a:srgbClr val="F2F7FC"/>
+          </a:solidFill>
+          <a:ln w="15875">
+            <a:solidFill>
+              <a:srgbClr val="CDDCEE"/>
+            </a:solidFill>
+          </a:ln>
+        </p:spPr>
+        <p:style>
+          <a:lnRef idx="1">
+            <a:schemeClr val="accent1"/>
+          </a:lnRef>
+          <a:fillRef idx="3">
+            <a:schemeClr val="accent1"/>
+          </a:fillRef>
+          <a:effectRef idx="2">
+            <a:schemeClr val="accent1"/>
+          </a:effectRef>
+          <a:fontRef idx="minor">
+            <a:schemeClr val="lt1"/>
+          </a:fontRef>
+        </p:style>
+        <p:txBody>
+          <a:bodyPr rtlCol="0" anchor="ctr"/>
+          <a:lstStyle/>
+          <a:p>
+            <a:pPr algn="ctr"/>
+          </a:p>
+        </p:txBody>
+      </p:sp>
+      <p:sp>
+        <p:nvSpPr>
+          <p:cNvPr id="6" name="TextBox 5"/>
           <p:cNvSpPr txBox="1"/>
           <p:nvPr/>
         </p:nvSpPr>
         <p:spPr>
           <a:xfrm>
-            <a:off x="731520" y="1920240"/>
-            <a:ext cx="10972800" cy="4297680"/>
+            <a:off x="7379208" y="1938528"/>
+            <a:ext cx="3931920" cy="365760"/>
+          </a:xfrm>
+          <a:prstGeom prst="rect">
+            <a:avLst/>
+          </a:prstGeom>
+          <a:noFill/>
+        </p:spPr>
+        <p:txBody>
+          <a:bodyPr wrap="none">
+            <a:spAutoFit/>
+          </a:bodyPr>
+          <a:lstStyle/>
+          <a:p>
+            <a:pPr>
+              <a:defRPr b="1" sz="1900">
+                <a:solidFill>
+                  <a:srgbClr val="133A66"/>
+                </a:solidFill>
+                <a:latin typeface="Aptos"/>
+              </a:defRPr>
+            </a:pPr>
+            <a:r>
+              <a:t>Base scenario outputs</a:t>
+            </a:r>
+          </a:p>
+        </p:txBody>
+      </p:sp>
+      <p:sp>
+        <p:nvSpPr>
+          <p:cNvPr id="7" name="TextBox 6"/>
+          <p:cNvSpPr txBox="1"/>
+          <p:nvPr/>
+        </p:nvSpPr>
+        <p:spPr>
+          <a:xfrm>
+            <a:off x="7360919" y="2304288"/>
+            <a:ext cx="3931920" cy="3913632"/>
           </a:xfrm>
           <a:prstGeom prst="rect">
             <a:avLst/>
@@ -4098,7 +4172,7 @@
               <a:spcAft>
                 <a:spcPts val="900"/>
               </a:spcAft>
-              <a:defRPr sz="1900">
+              <a:defRPr sz="1600">
                 <a:solidFill>
                   <a:srgbClr val="1C2D46"/>
                 </a:solidFill>
@@ -4106,7 +4180,7 @@
               </a:defRPr>
             </a:pPr>
             <a:r>
-              <a:t>1) Enter campaign input (brand/product/audience/keywords/budget)</a:t>
+              <a:t>Budget: $50,000</a:t>
             </a:r>
           </a:p>
           <a:p>
@@ -4114,7 +4188,7 @@
               <a:spcAft>
                 <a:spcPts val="900"/>
               </a:spcAft>
-              <a:defRPr sz="1900">
+              <a:defRPr sz="1600">
                 <a:solidFill>
                   <a:srgbClr val="1C2D46"/>
                 </a:solidFill>
@@ -4122,7 +4196,7 @@
               </a:defRPr>
             </a:pPr>
             <a:r>
-              <a:t>2) Run analysis and show analyzing workflow</a:t>
+              <a:t>Impressions: 2,777,777</a:t>
             </a:r>
           </a:p>
           <a:p>
@@ -4130,7 +4204,7 @@
               <a:spcAft>
                 <a:spcPts val="900"/>
               </a:spcAft>
-              <a:defRPr sz="1900">
+              <a:defRPr sz="1600">
                 <a:solidFill>
                   <a:srgbClr val="1C2D46"/>
                 </a:solidFill>
@@ -4138,7 +4212,7 @@
               </a:defRPr>
             </a:pPr>
             <a:r>
-              <a:t>3) Inspect Top-N cards with rationale and evidence</a:t>
+              <a:t>Clicks: 49,999</a:t>
             </a:r>
           </a:p>
           <a:p>
@@ -4146,7 +4220,7 @@
               <a:spcAft>
                 <a:spcPts val="900"/>
               </a:spcAft>
-              <a:defRPr sz="1900">
+              <a:defRPr sz="1600">
                 <a:solidFill>
                   <a:srgbClr val="1C2D46"/>
                 </a:solidFill>
@@ -4154,7 +4228,7 @@
               </a:defRPr>
             </a:pPr>
             <a:r>
-              <a:t>4) Change ranking strategy and diversity controls</a:t>
+              <a:t>Conversions: 1,499</a:t>
             </a:r>
           </a:p>
           <a:p>
@@ -4162,7 +4236,7 @@
               <a:spcAft>
                 <a:spcPts val="900"/>
               </a:spcAft>
-              <a:defRPr sz="1900">
+              <a:defRPr sz="1600">
                 <a:solidFill>
                   <a:srgbClr val="1C2D46"/>
                 </a:solidFill>
@@ -4170,46 +4244,14 @@
               </a:defRPr>
             </a:pPr>
             <a:r>
-              <a:t>5) Explore Text Intelligence and Network Studio</a:t>
-            </a:r>
-          </a:p>
-          <a:p>
-            <a:pPr>
-              <a:spcAft>
-                <a:spcPts val="900"/>
-              </a:spcAft>
-              <a:defRPr sz="1900">
-                <a:solidFill>
-                  <a:srgbClr val="1C2D46"/>
-                </a:solidFill>
-                <a:latin typeface="Aptos"/>
-              </a:defRPr>
-            </a:pPr>
-            <a:r>
-              <a:t>6) Review ML Studio (model comparison + SHAP)</a:t>
-            </a:r>
-          </a:p>
-          <a:p>
-            <a:pPr>
-              <a:spcAft>
-                <a:spcPts val="900"/>
-              </a:spcAft>
-              <a:defRPr sz="1900">
-                <a:solidFill>
-                  <a:srgbClr val="1C2D46"/>
-                </a:solidFill>
-                <a:latin typeface="Aptos"/>
-              </a:defRPr>
-            </a:pPr>
-            <a:r>
-              <a:t>7) Adjust ROI assumptions and export memo</a:t>
-            </a:r>
-          </a:p>
-        </p:txBody>
-      </p:sp>
-      <p:sp>
-        <p:nvSpPr>
-          <p:cNvPr id="5" name="TextBox 4"/>
+              <a:t>Expected ROAS: 1.14x</a:t>
+            </a:r>
+          </a:p>
+        </p:txBody>
+      </p:sp>
+      <p:sp>
+        <p:nvSpPr>
+          <p:cNvPr id="8" name="TextBox 7"/>
           <p:cNvSpPr txBox="1"/>
           <p:nvPr/>
         </p:nvSpPr>
@@ -4238,7 +4280,7 @@
               </a:defRPr>
             </a:pPr>
             <a:r>
-              <a:t>Rubric 4: Demo clarity and storytelling flow</a:t>
+              <a:t>Scenario estimate only, not causal guarantee</a:t>
             </a:r>
           </a:p>
         </p:txBody>
@@ -4292,7 +4334,7 @@
               </a:defRPr>
             </a:pPr>
             <a:r>
-              <a:t>Limitations and Future Work</a:t>
+              <a:t>Live Demo Flow</a:t>
             </a:r>
           </a:p>
         </p:txBody>
@@ -4342,46 +4384,136 @@
       </p:sp>
       <p:sp>
         <p:nvSpPr>
-          <p:cNvPr id="4" name="Rounded Rectangle 3"/>
-          <p:cNvSpPr/>
-          <p:nvPr/>
-        </p:nvSpPr>
-        <p:spPr>
-          <a:xfrm>
-            <a:off x="640080" y="1828800"/>
-            <a:ext cx="5440680" cy="4389120"/>
-          </a:xfrm>
-          <a:prstGeom prst="roundRect">
-            <a:avLst/>
-          </a:prstGeom>
-          <a:solidFill>
-            <a:srgbClr val="F2F7FC"/>
-          </a:solidFill>
-          <a:ln w="15875">
-            <a:solidFill>
-              <a:srgbClr val="CDDCEE"/>
-            </a:solidFill>
-          </a:ln>
-        </p:spPr>
-        <p:style>
-          <a:lnRef idx="1">
-            <a:schemeClr val="accent1"/>
-          </a:lnRef>
-          <a:fillRef idx="3">
-            <a:schemeClr val="accent1"/>
-          </a:fillRef>
-          <a:effectRef idx="2">
-            <a:schemeClr val="accent1"/>
-          </a:effectRef>
-          <a:fontRef idx="minor">
-            <a:schemeClr val="lt1"/>
-          </a:fontRef>
-        </p:style>
-        <p:txBody>
-          <a:bodyPr rtlCol="0" anchor="ctr"/>
-          <a:lstStyle/>
-          <a:p>
-            <a:pPr algn="ctr"/>
+          <p:cNvPr id="4" name="TextBox 3"/>
+          <p:cNvSpPr txBox="1"/>
+          <p:nvPr/>
+        </p:nvSpPr>
+        <p:spPr>
+          <a:xfrm>
+            <a:off x="731520" y="1920240"/>
+            <a:ext cx="10972800" cy="4297680"/>
+          </a:xfrm>
+          <a:prstGeom prst="rect">
+            <a:avLst/>
+          </a:prstGeom>
+          <a:noFill/>
+        </p:spPr>
+        <p:txBody>
+          <a:bodyPr wrap="square">
+            <a:spAutoFit/>
+          </a:bodyPr>
+          <a:lstStyle/>
+          <a:p>
+            <a:pPr>
+              <a:spcAft>
+                <a:spcPts val="900"/>
+              </a:spcAft>
+              <a:defRPr sz="1900">
+                <a:solidFill>
+                  <a:srgbClr val="1C2D46"/>
+                </a:solidFill>
+                <a:latin typeface="Aptos"/>
+              </a:defRPr>
+            </a:pPr>
+            <a:r>
+              <a:t>1) Enter campaign input (brand/product/audience/keywords/budget)</a:t>
+            </a:r>
+          </a:p>
+          <a:p>
+            <a:pPr>
+              <a:spcAft>
+                <a:spcPts val="900"/>
+              </a:spcAft>
+              <a:defRPr sz="1900">
+                <a:solidFill>
+                  <a:srgbClr val="1C2D46"/>
+                </a:solidFill>
+                <a:latin typeface="Aptos"/>
+              </a:defRPr>
+            </a:pPr>
+            <a:r>
+              <a:t>2) Run analysis and show analyzing workflow</a:t>
+            </a:r>
+          </a:p>
+          <a:p>
+            <a:pPr>
+              <a:spcAft>
+                <a:spcPts val="900"/>
+              </a:spcAft>
+              <a:defRPr sz="1900">
+                <a:solidFill>
+                  <a:srgbClr val="1C2D46"/>
+                </a:solidFill>
+                <a:latin typeface="Aptos"/>
+              </a:defRPr>
+            </a:pPr>
+            <a:r>
+              <a:t>3) Inspect Top-N cards with rationale and evidence</a:t>
+            </a:r>
+          </a:p>
+          <a:p>
+            <a:pPr>
+              <a:spcAft>
+                <a:spcPts val="900"/>
+              </a:spcAft>
+              <a:defRPr sz="1900">
+                <a:solidFill>
+                  <a:srgbClr val="1C2D46"/>
+                </a:solidFill>
+                <a:latin typeface="Aptos"/>
+              </a:defRPr>
+            </a:pPr>
+            <a:r>
+              <a:t>4) Change ranking strategy and diversity controls</a:t>
+            </a:r>
+          </a:p>
+          <a:p>
+            <a:pPr>
+              <a:spcAft>
+                <a:spcPts val="900"/>
+              </a:spcAft>
+              <a:defRPr sz="1900">
+                <a:solidFill>
+                  <a:srgbClr val="1C2D46"/>
+                </a:solidFill>
+                <a:latin typeface="Aptos"/>
+              </a:defRPr>
+            </a:pPr>
+            <a:r>
+              <a:t>5) Explore Text Intelligence and Network Studio</a:t>
+            </a:r>
+          </a:p>
+          <a:p>
+            <a:pPr>
+              <a:spcAft>
+                <a:spcPts val="900"/>
+              </a:spcAft>
+              <a:defRPr sz="1900">
+                <a:solidFill>
+                  <a:srgbClr val="1C2D46"/>
+                </a:solidFill>
+                <a:latin typeface="Aptos"/>
+              </a:defRPr>
+            </a:pPr>
+            <a:r>
+              <a:t>6) Review ML Studio (model comparison + SHAP)</a:t>
+            </a:r>
+          </a:p>
+          <a:p>
+            <a:pPr>
+              <a:spcAft>
+                <a:spcPts val="900"/>
+              </a:spcAft>
+              <a:defRPr sz="1900">
+                <a:solidFill>
+                  <a:srgbClr val="1C2D46"/>
+                </a:solidFill>
+                <a:latin typeface="Aptos"/>
+              </a:defRPr>
+            </a:pPr>
+            <a:r>
+              <a:t>7) Adjust ROI assumptions and export memo</a:t>
+            </a:r>
           </a:p>
         </p:txBody>
       </p:sp>
@@ -4393,8 +4525,8 @@
         </p:nvSpPr>
         <p:spPr>
           <a:xfrm>
-            <a:off x="841247" y="1938528"/>
-            <a:ext cx="5120640" cy="365760"/>
+            <a:off x="502920" y="6428232"/>
+            <a:ext cx="10972800" cy="292608"/>
           </a:xfrm>
           <a:prstGeom prst="rect">
             <a:avLst/>
@@ -4407,265 +4539,6 @@
           </a:bodyPr>
           <a:lstStyle/>
           <a:p>
-            <a:pPr>
-              <a:defRPr b="1" sz="1900">
-                <a:solidFill>
-                  <a:srgbClr val="133A66"/>
-                </a:solidFill>
-                <a:latin typeface="Aptos"/>
-              </a:defRPr>
-            </a:pPr>
-            <a:r>
-              <a:t>Current limitations</a:t>
-            </a:r>
-          </a:p>
-        </p:txBody>
-      </p:sp>
-      <p:sp>
-        <p:nvSpPr>
-          <p:cNvPr id="6" name="TextBox 5"/>
-          <p:cNvSpPr txBox="1"/>
-          <p:nvPr/>
-        </p:nvSpPr>
-        <p:spPr>
-          <a:xfrm>
-            <a:off x="822959" y="2304288"/>
-            <a:ext cx="5120640" cy="3822191"/>
-          </a:xfrm>
-          <a:prstGeom prst="rect">
-            <a:avLst/>
-          </a:prstGeom>
-          <a:noFill/>
-        </p:spPr>
-        <p:txBody>
-          <a:bodyPr wrap="square">
-            <a:spAutoFit/>
-          </a:bodyPr>
-          <a:lstStyle/>
-          <a:p>
-            <a:pPr>
-              <a:spcAft>
-                <a:spcPts val="900"/>
-              </a:spcAft>
-              <a:defRPr sz="1600">
-                <a:solidFill>
-                  <a:srgbClr val="1C2D46"/>
-                </a:solidFill>
-                <a:latin typeface="Aptos"/>
-              </a:defRPr>
-            </a:pPr>
-            <a:r>
-              <a:t>Prototype uses pre-collected YouTube data.</a:t>
-            </a:r>
-          </a:p>
-          <a:p>
-            <a:pPr>
-              <a:spcAft>
-                <a:spcPts val="900"/>
-              </a:spcAft>
-              <a:defRPr sz="1600">
-                <a:solidFill>
-                  <a:srgbClr val="1C2D46"/>
-                </a:solidFill>
-                <a:latin typeface="Aptos"/>
-              </a:defRPr>
-            </a:pPr>
-            <a:r>
-              <a:t>ROI module is scenario simulation, not causal inference.</a:t>
-            </a:r>
-          </a:p>
-          <a:p>
-            <a:pPr>
-              <a:spcAft>
-                <a:spcPts val="900"/>
-              </a:spcAft>
-              <a:defRPr sz="1600">
-                <a:solidFill>
-                  <a:srgbClr val="1C2D46"/>
-                </a:solidFill>
-                <a:latin typeface="Aptos"/>
-              </a:defRPr>
-            </a:pPr>
-            <a:r>
-              <a:t>Cluster concentration still exists in skincare-heavy niches.</a:t>
-            </a:r>
-          </a:p>
-        </p:txBody>
-      </p:sp>
-      <p:sp>
-        <p:nvSpPr>
-          <p:cNvPr id="7" name="Rounded Rectangle 6"/>
-          <p:cNvSpPr/>
-          <p:nvPr/>
-        </p:nvSpPr>
-        <p:spPr>
-          <a:xfrm>
-            <a:off x="6172200" y="1828800"/>
-            <a:ext cx="5440680" cy="4389120"/>
-          </a:xfrm>
-          <a:prstGeom prst="roundRect">
-            <a:avLst/>
-          </a:prstGeom>
-          <a:solidFill>
-            <a:srgbClr val="F2F7FC"/>
-          </a:solidFill>
-          <a:ln w="15875">
-            <a:solidFill>
-              <a:srgbClr val="CDDCEE"/>
-            </a:solidFill>
-          </a:ln>
-        </p:spPr>
-        <p:style>
-          <a:lnRef idx="1">
-            <a:schemeClr val="accent1"/>
-          </a:lnRef>
-          <a:fillRef idx="3">
-            <a:schemeClr val="accent1"/>
-          </a:fillRef>
-          <a:effectRef idx="2">
-            <a:schemeClr val="accent1"/>
-          </a:effectRef>
-          <a:fontRef idx="minor">
-            <a:schemeClr val="lt1"/>
-          </a:fontRef>
-        </p:style>
-        <p:txBody>
-          <a:bodyPr rtlCol="0" anchor="ctr"/>
-          <a:lstStyle/>
-          <a:p>
-            <a:pPr algn="ctr"/>
-          </a:p>
-        </p:txBody>
-      </p:sp>
-      <p:sp>
-        <p:nvSpPr>
-          <p:cNvPr id="8" name="TextBox 7"/>
-          <p:cNvSpPr txBox="1"/>
-          <p:nvPr/>
-        </p:nvSpPr>
-        <p:spPr>
-          <a:xfrm>
-            <a:off x="6373368" y="1938528"/>
-            <a:ext cx="5120640" cy="365760"/>
-          </a:xfrm>
-          <a:prstGeom prst="rect">
-            <a:avLst/>
-          </a:prstGeom>
-          <a:noFill/>
-        </p:spPr>
-        <p:txBody>
-          <a:bodyPr wrap="none">
-            <a:spAutoFit/>
-          </a:bodyPr>
-          <a:lstStyle/>
-          <a:p>
-            <a:pPr>
-              <a:defRPr b="1" sz="1900">
-                <a:solidFill>
-                  <a:srgbClr val="133A66"/>
-                </a:solidFill>
-                <a:latin typeface="Aptos"/>
-              </a:defRPr>
-            </a:pPr>
-            <a:r>
-              <a:t>Next steps</a:t>
-            </a:r>
-          </a:p>
-        </p:txBody>
-      </p:sp>
-      <p:sp>
-        <p:nvSpPr>
-          <p:cNvPr id="9" name="TextBox 8"/>
-          <p:cNvSpPr txBox="1"/>
-          <p:nvPr/>
-        </p:nvSpPr>
-        <p:spPr>
-          <a:xfrm>
-            <a:off x="6355080" y="2304288"/>
-            <a:ext cx="5120640" cy="3822191"/>
-          </a:xfrm>
-          <a:prstGeom prst="rect">
-            <a:avLst/>
-          </a:prstGeom>
-          <a:noFill/>
-        </p:spPr>
-        <p:txBody>
-          <a:bodyPr wrap="square">
-            <a:spAutoFit/>
-          </a:bodyPr>
-          <a:lstStyle/>
-          <a:p>
-            <a:pPr>
-              <a:spcAft>
-                <a:spcPts val="900"/>
-              </a:spcAft>
-              <a:defRPr sz="1600">
-                <a:solidFill>
-                  <a:srgbClr val="1C2D46"/>
-                </a:solidFill>
-                <a:latin typeface="Aptos"/>
-              </a:defRPr>
-            </a:pPr>
-            <a:r>
-              <a:t>Add live market and competitor enrichment.</a:t>
-            </a:r>
-          </a:p>
-          <a:p>
-            <a:pPr>
-              <a:spcAft>
-                <a:spcPts val="900"/>
-              </a:spcAft>
-              <a:defRPr sz="1600">
-                <a:solidFill>
-                  <a:srgbClr val="1C2D46"/>
-                </a:solidFill>
-                <a:latin typeface="Aptos"/>
-              </a:defRPr>
-            </a:pPr>
-            <a:r>
-              <a:t>Expand to TikTok/Instagram connectors.</a:t>
-            </a:r>
-          </a:p>
-          <a:p>
-            <a:pPr>
-              <a:spcAft>
-                <a:spcPts val="900"/>
-              </a:spcAft>
-              <a:defRPr sz="1600">
-                <a:solidFill>
-                  <a:srgbClr val="1C2D46"/>
-                </a:solidFill>
-                <a:latin typeface="Aptos"/>
-              </a:defRPr>
-            </a:pPr>
-            <a:r>
-              <a:t>Introduce experiment loop for closed-loop learning.</a:t>
-            </a:r>
-          </a:p>
-        </p:txBody>
-      </p:sp>
-      <p:sp>
-        <p:nvSpPr>
-          <p:cNvPr id="10" name="TextBox 9"/>
-          <p:cNvSpPr txBox="1"/>
-          <p:nvPr/>
-        </p:nvSpPr>
-        <p:spPr>
-          <a:xfrm>
-            <a:off x="502920" y="6428232"/>
-            <a:ext cx="10972800" cy="292608"/>
-          </a:xfrm>
-          <a:prstGeom prst="rect">
-            <a:avLst/>
-          </a:prstGeom>
-          <a:noFill/>
-        </p:spPr>
-        <p:txBody>
-          <a:bodyPr wrap="none">
-            <a:spAutoFit/>
-          </a:bodyPr>
-          <a:lstStyle/>
-          <a:p>
             <a:pPr algn="r">
               <a:defRPr sz="1000">
                 <a:solidFill>
@@ -4675,7 +4548,7 @@
               </a:defRPr>
             </a:pPr>
             <a:r>
-              <a:t>Honest caveats + practical roadmap</a:t>
+              <a:t>Rubric 4: Demo clarity and storytelling flow</a:t>
             </a:r>
           </a:p>
         </p:txBody>
@@ -4689,6 +4562,443 @@
 </file>
 
 <file path=ppt/slides/slide14.xml><?xml version="1.0" encoding="utf-8"?>
+<p:sld xmlns:a="http://schemas.openxmlformats.org/drawingml/2006/main" xmlns:p="http://schemas.openxmlformats.org/presentationml/2006/main" xmlns:r="http://schemas.openxmlformats.org/officeDocument/2006/relationships">
+  <p:cSld>
+    <p:spTree>
+      <p:nvGrpSpPr>
+        <p:cNvPr id="1" name=""/>
+        <p:cNvGrpSpPr/>
+        <p:nvPr/>
+      </p:nvGrpSpPr>
+      <p:grpSpPr/>
+      <p:sp>
+        <p:nvSpPr>
+          <p:cNvPr id="2" name="TextBox 1"/>
+          <p:cNvSpPr txBox="1"/>
+          <p:nvPr/>
+        </p:nvSpPr>
+        <p:spPr>
+          <a:xfrm>
+            <a:off x="594360" y="320040"/>
+            <a:ext cx="11064240" cy="914400"/>
+          </a:xfrm>
+          <a:prstGeom prst="rect">
+            <a:avLst/>
+          </a:prstGeom>
+          <a:noFill/>
+        </p:spPr>
+        <p:txBody>
+          <a:bodyPr wrap="none">
+            <a:spAutoFit/>
+          </a:bodyPr>
+          <a:lstStyle/>
+          <a:p>
+            <a:pPr>
+              <a:defRPr sz="3400" b="1">
+                <a:solidFill>
+                  <a:srgbClr val="0F2C59"/>
+                </a:solidFill>
+                <a:latin typeface="Aptos Display"/>
+              </a:defRPr>
+            </a:pPr>
+            <a:r>
+              <a:t>Limitations and Future Work</a:t>
+            </a:r>
+          </a:p>
+        </p:txBody>
+      </p:sp>
+      <p:sp>
+        <p:nvSpPr>
+          <p:cNvPr id="3" name="Rectangle 2"/>
+          <p:cNvSpPr/>
+          <p:nvPr/>
+        </p:nvSpPr>
+        <p:spPr>
+          <a:xfrm>
+            <a:off x="566928" y="1783080"/>
+            <a:ext cx="2377440" cy="73152"/>
+          </a:xfrm>
+          <a:prstGeom prst="rect">
+            <a:avLst/>
+          </a:prstGeom>
+          <a:solidFill>
+            <a:srgbClr val="1A7DBC"/>
+          </a:solidFill>
+          <a:ln>
+            <a:noFill/>
+          </a:ln>
+        </p:spPr>
+        <p:style>
+          <a:lnRef idx="1">
+            <a:schemeClr val="accent1"/>
+          </a:lnRef>
+          <a:fillRef idx="3">
+            <a:schemeClr val="accent1"/>
+          </a:fillRef>
+          <a:effectRef idx="2">
+            <a:schemeClr val="accent1"/>
+          </a:effectRef>
+          <a:fontRef idx="minor">
+            <a:schemeClr val="lt1"/>
+          </a:fontRef>
+        </p:style>
+        <p:txBody>
+          <a:bodyPr rtlCol="0" anchor="ctr"/>
+          <a:lstStyle/>
+          <a:p>
+            <a:pPr algn="ctr"/>
+          </a:p>
+        </p:txBody>
+      </p:sp>
+      <p:sp>
+        <p:nvSpPr>
+          <p:cNvPr id="4" name="Rounded Rectangle 3"/>
+          <p:cNvSpPr/>
+          <p:nvPr/>
+        </p:nvSpPr>
+        <p:spPr>
+          <a:xfrm>
+            <a:off x="640080" y="1828800"/>
+            <a:ext cx="5440680" cy="4389120"/>
+          </a:xfrm>
+          <a:prstGeom prst="roundRect">
+            <a:avLst/>
+          </a:prstGeom>
+          <a:solidFill>
+            <a:srgbClr val="F2F7FC"/>
+          </a:solidFill>
+          <a:ln w="15875">
+            <a:solidFill>
+              <a:srgbClr val="CDDCEE"/>
+            </a:solidFill>
+          </a:ln>
+        </p:spPr>
+        <p:style>
+          <a:lnRef idx="1">
+            <a:schemeClr val="accent1"/>
+          </a:lnRef>
+          <a:fillRef idx="3">
+            <a:schemeClr val="accent1"/>
+          </a:fillRef>
+          <a:effectRef idx="2">
+            <a:schemeClr val="accent1"/>
+          </a:effectRef>
+          <a:fontRef idx="minor">
+            <a:schemeClr val="lt1"/>
+          </a:fontRef>
+        </p:style>
+        <p:txBody>
+          <a:bodyPr rtlCol="0" anchor="ctr"/>
+          <a:lstStyle/>
+          <a:p>
+            <a:pPr algn="ctr"/>
+          </a:p>
+        </p:txBody>
+      </p:sp>
+      <p:sp>
+        <p:nvSpPr>
+          <p:cNvPr id="5" name="TextBox 4"/>
+          <p:cNvSpPr txBox="1"/>
+          <p:nvPr/>
+        </p:nvSpPr>
+        <p:spPr>
+          <a:xfrm>
+            <a:off x="841247" y="1938528"/>
+            <a:ext cx="5120640" cy="365760"/>
+          </a:xfrm>
+          <a:prstGeom prst="rect">
+            <a:avLst/>
+          </a:prstGeom>
+          <a:noFill/>
+        </p:spPr>
+        <p:txBody>
+          <a:bodyPr wrap="none">
+            <a:spAutoFit/>
+          </a:bodyPr>
+          <a:lstStyle/>
+          <a:p>
+            <a:pPr>
+              <a:defRPr b="1" sz="1900">
+                <a:solidFill>
+                  <a:srgbClr val="133A66"/>
+                </a:solidFill>
+                <a:latin typeface="Aptos"/>
+              </a:defRPr>
+            </a:pPr>
+            <a:r>
+              <a:t>Current limitations</a:t>
+            </a:r>
+          </a:p>
+        </p:txBody>
+      </p:sp>
+      <p:sp>
+        <p:nvSpPr>
+          <p:cNvPr id="6" name="TextBox 5"/>
+          <p:cNvSpPr txBox="1"/>
+          <p:nvPr/>
+        </p:nvSpPr>
+        <p:spPr>
+          <a:xfrm>
+            <a:off x="822959" y="2304288"/>
+            <a:ext cx="5120640" cy="3822191"/>
+          </a:xfrm>
+          <a:prstGeom prst="rect">
+            <a:avLst/>
+          </a:prstGeom>
+          <a:noFill/>
+        </p:spPr>
+        <p:txBody>
+          <a:bodyPr wrap="square">
+            <a:spAutoFit/>
+          </a:bodyPr>
+          <a:lstStyle/>
+          <a:p>
+            <a:pPr>
+              <a:spcAft>
+                <a:spcPts val="900"/>
+              </a:spcAft>
+              <a:defRPr sz="1600">
+                <a:solidFill>
+                  <a:srgbClr val="1C2D46"/>
+                </a:solidFill>
+                <a:latin typeface="Aptos"/>
+              </a:defRPr>
+            </a:pPr>
+            <a:r>
+              <a:t>Prototype uses pre-collected YouTube data.</a:t>
+            </a:r>
+          </a:p>
+          <a:p>
+            <a:pPr>
+              <a:spcAft>
+                <a:spcPts val="900"/>
+              </a:spcAft>
+              <a:defRPr sz="1600">
+                <a:solidFill>
+                  <a:srgbClr val="1C2D46"/>
+                </a:solidFill>
+                <a:latin typeface="Aptos"/>
+              </a:defRPr>
+            </a:pPr>
+            <a:r>
+              <a:t>ROI module is scenario simulation, not causal inference.</a:t>
+            </a:r>
+          </a:p>
+          <a:p>
+            <a:pPr>
+              <a:spcAft>
+                <a:spcPts val="900"/>
+              </a:spcAft>
+              <a:defRPr sz="1600">
+                <a:solidFill>
+                  <a:srgbClr val="1C2D46"/>
+                </a:solidFill>
+                <a:latin typeface="Aptos"/>
+              </a:defRPr>
+            </a:pPr>
+            <a:r>
+              <a:t>Cluster concentration still exists in skincare-heavy niches.</a:t>
+            </a:r>
+          </a:p>
+        </p:txBody>
+      </p:sp>
+      <p:sp>
+        <p:nvSpPr>
+          <p:cNvPr id="7" name="Rounded Rectangle 6"/>
+          <p:cNvSpPr/>
+          <p:nvPr/>
+        </p:nvSpPr>
+        <p:spPr>
+          <a:xfrm>
+            <a:off x="6172200" y="1828800"/>
+            <a:ext cx="5440680" cy="4389120"/>
+          </a:xfrm>
+          <a:prstGeom prst="roundRect">
+            <a:avLst/>
+          </a:prstGeom>
+          <a:solidFill>
+            <a:srgbClr val="F2F7FC"/>
+          </a:solidFill>
+          <a:ln w="15875">
+            <a:solidFill>
+              <a:srgbClr val="CDDCEE"/>
+            </a:solidFill>
+          </a:ln>
+        </p:spPr>
+        <p:style>
+          <a:lnRef idx="1">
+            <a:schemeClr val="accent1"/>
+          </a:lnRef>
+          <a:fillRef idx="3">
+            <a:schemeClr val="accent1"/>
+          </a:fillRef>
+          <a:effectRef idx="2">
+            <a:schemeClr val="accent1"/>
+          </a:effectRef>
+          <a:fontRef idx="minor">
+            <a:schemeClr val="lt1"/>
+          </a:fontRef>
+        </p:style>
+        <p:txBody>
+          <a:bodyPr rtlCol="0" anchor="ctr"/>
+          <a:lstStyle/>
+          <a:p>
+            <a:pPr algn="ctr"/>
+          </a:p>
+        </p:txBody>
+      </p:sp>
+      <p:sp>
+        <p:nvSpPr>
+          <p:cNvPr id="8" name="TextBox 7"/>
+          <p:cNvSpPr txBox="1"/>
+          <p:nvPr/>
+        </p:nvSpPr>
+        <p:spPr>
+          <a:xfrm>
+            <a:off x="6373368" y="1938528"/>
+            <a:ext cx="5120640" cy="365760"/>
+          </a:xfrm>
+          <a:prstGeom prst="rect">
+            <a:avLst/>
+          </a:prstGeom>
+          <a:noFill/>
+        </p:spPr>
+        <p:txBody>
+          <a:bodyPr wrap="none">
+            <a:spAutoFit/>
+          </a:bodyPr>
+          <a:lstStyle/>
+          <a:p>
+            <a:pPr>
+              <a:defRPr b="1" sz="1900">
+                <a:solidFill>
+                  <a:srgbClr val="133A66"/>
+                </a:solidFill>
+                <a:latin typeface="Aptos"/>
+              </a:defRPr>
+            </a:pPr>
+            <a:r>
+              <a:t>Next steps</a:t>
+            </a:r>
+          </a:p>
+        </p:txBody>
+      </p:sp>
+      <p:sp>
+        <p:nvSpPr>
+          <p:cNvPr id="9" name="TextBox 8"/>
+          <p:cNvSpPr txBox="1"/>
+          <p:nvPr/>
+        </p:nvSpPr>
+        <p:spPr>
+          <a:xfrm>
+            <a:off x="6355080" y="2304288"/>
+            <a:ext cx="5120640" cy="3822191"/>
+          </a:xfrm>
+          <a:prstGeom prst="rect">
+            <a:avLst/>
+          </a:prstGeom>
+          <a:noFill/>
+        </p:spPr>
+        <p:txBody>
+          <a:bodyPr wrap="square">
+            <a:spAutoFit/>
+          </a:bodyPr>
+          <a:lstStyle/>
+          <a:p>
+            <a:pPr>
+              <a:spcAft>
+                <a:spcPts val="900"/>
+              </a:spcAft>
+              <a:defRPr sz="1600">
+                <a:solidFill>
+                  <a:srgbClr val="1C2D46"/>
+                </a:solidFill>
+                <a:latin typeface="Aptos"/>
+              </a:defRPr>
+            </a:pPr>
+            <a:r>
+              <a:t>Add live market and competitor enrichment.</a:t>
+            </a:r>
+          </a:p>
+          <a:p>
+            <a:pPr>
+              <a:spcAft>
+                <a:spcPts val="900"/>
+              </a:spcAft>
+              <a:defRPr sz="1600">
+                <a:solidFill>
+                  <a:srgbClr val="1C2D46"/>
+                </a:solidFill>
+                <a:latin typeface="Aptos"/>
+              </a:defRPr>
+            </a:pPr>
+            <a:r>
+              <a:t>Expand to TikTok/Instagram connectors.</a:t>
+            </a:r>
+          </a:p>
+          <a:p>
+            <a:pPr>
+              <a:spcAft>
+                <a:spcPts val="900"/>
+              </a:spcAft>
+              <a:defRPr sz="1600">
+                <a:solidFill>
+                  <a:srgbClr val="1C2D46"/>
+                </a:solidFill>
+                <a:latin typeface="Aptos"/>
+              </a:defRPr>
+            </a:pPr>
+            <a:r>
+              <a:t>Introduce experiment loop for closed-loop learning.</a:t>
+            </a:r>
+          </a:p>
+        </p:txBody>
+      </p:sp>
+      <p:sp>
+        <p:nvSpPr>
+          <p:cNvPr id="10" name="TextBox 9"/>
+          <p:cNvSpPr txBox="1"/>
+          <p:nvPr/>
+        </p:nvSpPr>
+        <p:spPr>
+          <a:xfrm>
+            <a:off x="502920" y="6428232"/>
+            <a:ext cx="10972800" cy="292608"/>
+          </a:xfrm>
+          <a:prstGeom prst="rect">
+            <a:avLst/>
+          </a:prstGeom>
+          <a:noFill/>
+        </p:spPr>
+        <p:txBody>
+          <a:bodyPr wrap="none">
+            <a:spAutoFit/>
+          </a:bodyPr>
+          <a:lstStyle/>
+          <a:p>
+            <a:pPr algn="r">
+              <a:defRPr sz="1000">
+                <a:solidFill>
+                  <a:srgbClr val="6E8098"/>
+                </a:solidFill>
+                <a:latin typeface="Aptos"/>
+              </a:defRPr>
+            </a:pPr>
+            <a:r>
+              <a:t>Honest caveats + practical roadmap</a:t>
+            </a:r>
+          </a:p>
+        </p:txBody>
+      </p:sp>
+    </p:spTree>
+  </p:cSld>
+  <p:clrMapOvr>
+    <a:masterClrMapping/>
+  </p:clrMapOvr>
+</p:sld>
+</file>
+
+<file path=ppt/slides/slide15.xml><?xml version="1.0" encoding="utf-8"?>
 <p:sld xmlns:a="http://schemas.openxmlformats.org/drawingml/2006/main" xmlns:p="http://schemas.openxmlformats.org/presentationml/2006/main" xmlns:r="http://schemas.openxmlformats.org/officeDocument/2006/relationships">
   <p:cSld>
     <p:spTree>
@@ -5057,7 +5367,7 @@
 </p:sld>
 </file>
 
-<file path=ppt/slides/slide15.xml><?xml version="1.0" encoding="utf-8"?>
+<file path=ppt/slides/slide16.xml><?xml version="1.0" encoding="utf-8"?>
 <p:sld xmlns:a="http://schemas.openxmlformats.org/drawingml/2006/main" xmlns:p="http://schemas.openxmlformats.org/presentationml/2006/main" xmlns:r="http://schemas.openxmlformats.org/officeDocument/2006/relationships">
   <p:cSld>
     <p:spTree>
@@ -5429,7 +5739,7 @@
 </p:sld>
 </file>
 
-<file path=ppt/slides/slide16.xml><?xml version="1.0" encoding="utf-8"?>
+<file path=ppt/slides/slide17.xml><?xml version="1.0" encoding="utf-8"?>
 <p:sld xmlns:a="http://schemas.openxmlformats.org/drawingml/2006/main" xmlns:p="http://schemas.openxmlformats.org/presentationml/2006/main" xmlns:r="http://schemas.openxmlformats.org/officeDocument/2006/relationships">
   <p:cSld>
     <p:spTree>
@@ -6155,6 +6465,523 @@
 </file>
 
 <file path=ppt/slides/slide3.xml><?xml version="1.0" encoding="utf-8"?>
+<p:sld xmlns:a="http://schemas.openxmlformats.org/drawingml/2006/main" xmlns:p="http://schemas.openxmlformats.org/presentationml/2006/main" xmlns:r="http://schemas.openxmlformats.org/officeDocument/2006/relationships">
+  <p:cSld>
+    <p:spTree>
+      <p:nvGrpSpPr>
+        <p:cNvPr id="1" name=""/>
+        <p:cNvGrpSpPr/>
+        <p:nvPr/>
+      </p:nvGrpSpPr>
+      <p:grpSpPr/>
+      <p:sp>
+        <p:nvSpPr>
+          <p:cNvPr id="2" name="TextBox 1"/>
+          <p:cNvSpPr txBox="1"/>
+          <p:nvPr/>
+        </p:nvSpPr>
+        <p:spPr>
+          <a:xfrm>
+            <a:off x="594360" y="320040"/>
+            <a:ext cx="11064240" cy="914400"/>
+          </a:xfrm>
+          <a:prstGeom prst="rect">
+            <a:avLst/>
+          </a:prstGeom>
+          <a:noFill/>
+        </p:spPr>
+        <p:txBody>
+          <a:bodyPr wrap="none">
+            <a:spAutoFit/>
+          </a:bodyPr>
+          <a:lstStyle/>
+          <a:p>
+            <a:pPr>
+              <a:defRPr sz="3400" b="1">
+                <a:solidFill>
+                  <a:srgbClr val="0F2C59"/>
+                </a:solidFill>
+                <a:latin typeface="Aptos Display"/>
+              </a:defRPr>
+            </a:pPr>
+            <a:r>
+              <a:t>Why Beauty of Joseon? (Selection + Research)</a:t>
+            </a:r>
+          </a:p>
+        </p:txBody>
+      </p:sp>
+      <p:sp>
+        <p:nvSpPr>
+          <p:cNvPr id="3" name="Rectangle 2"/>
+          <p:cNvSpPr/>
+          <p:nvPr/>
+        </p:nvSpPr>
+        <p:spPr>
+          <a:xfrm>
+            <a:off x="566928" y="1783080"/>
+            <a:ext cx="2377440" cy="73152"/>
+          </a:xfrm>
+          <a:prstGeom prst="rect">
+            <a:avLst/>
+          </a:prstGeom>
+          <a:solidFill>
+            <a:srgbClr val="1A7DBC"/>
+          </a:solidFill>
+          <a:ln>
+            <a:noFill/>
+          </a:ln>
+        </p:spPr>
+        <p:style>
+          <a:lnRef idx="1">
+            <a:schemeClr val="accent1"/>
+          </a:lnRef>
+          <a:fillRef idx="3">
+            <a:schemeClr val="accent1"/>
+          </a:fillRef>
+          <a:effectRef idx="2">
+            <a:schemeClr val="accent1"/>
+          </a:effectRef>
+          <a:fontRef idx="minor">
+            <a:schemeClr val="lt1"/>
+          </a:fontRef>
+        </p:style>
+        <p:txBody>
+          <a:bodyPr rtlCol="0" anchor="ctr"/>
+          <a:lstStyle/>
+          <a:p>
+            <a:pPr algn="ctr"/>
+          </a:p>
+        </p:txBody>
+      </p:sp>
+      <p:sp>
+        <p:nvSpPr>
+          <p:cNvPr id="4" name="Rounded Rectangle 3"/>
+          <p:cNvSpPr/>
+          <p:nvPr/>
+        </p:nvSpPr>
+        <p:spPr>
+          <a:xfrm>
+            <a:off x="594360" y="1828800"/>
+            <a:ext cx="5440680" cy="4343400"/>
+          </a:xfrm>
+          <a:prstGeom prst="roundRect">
+            <a:avLst/>
+          </a:prstGeom>
+          <a:solidFill>
+            <a:srgbClr val="F2F7FC"/>
+          </a:solidFill>
+          <a:ln w="15875">
+            <a:solidFill>
+              <a:srgbClr val="CDDCEE"/>
+            </a:solidFill>
+          </a:ln>
+        </p:spPr>
+        <p:style>
+          <a:lnRef idx="1">
+            <a:schemeClr val="accent1"/>
+          </a:lnRef>
+          <a:fillRef idx="3">
+            <a:schemeClr val="accent1"/>
+          </a:fillRef>
+          <a:effectRef idx="2">
+            <a:schemeClr val="accent1"/>
+          </a:effectRef>
+          <a:fontRef idx="minor">
+            <a:schemeClr val="lt1"/>
+          </a:fontRef>
+        </p:style>
+        <p:txBody>
+          <a:bodyPr rtlCol="0" anchor="ctr"/>
+          <a:lstStyle/>
+          <a:p>
+            <a:pPr algn="ctr"/>
+          </a:p>
+        </p:txBody>
+      </p:sp>
+      <p:sp>
+        <p:nvSpPr>
+          <p:cNvPr id="5" name="TextBox 4"/>
+          <p:cNvSpPr txBox="1"/>
+          <p:nvPr/>
+        </p:nvSpPr>
+        <p:spPr>
+          <a:xfrm>
+            <a:off x="795528" y="1938528"/>
+            <a:ext cx="5120640" cy="365760"/>
+          </a:xfrm>
+          <a:prstGeom prst="rect">
+            <a:avLst/>
+          </a:prstGeom>
+          <a:noFill/>
+        </p:spPr>
+        <p:txBody>
+          <a:bodyPr wrap="none">
+            <a:spAutoFit/>
+          </a:bodyPr>
+          <a:lstStyle/>
+          <a:p>
+            <a:pPr>
+              <a:defRPr b="1" sz="1900">
+                <a:solidFill>
+                  <a:srgbClr val="133A66"/>
+                </a:solidFill>
+                <a:latin typeface="Aptos"/>
+              </a:defRPr>
+            </a:pPr>
+            <a:r>
+              <a:t>Why this brand for the project</a:t>
+            </a:r>
+          </a:p>
+        </p:txBody>
+      </p:sp>
+      <p:sp>
+        <p:nvSpPr>
+          <p:cNvPr id="6" name="TextBox 5"/>
+          <p:cNvSpPr txBox="1"/>
+          <p:nvPr/>
+        </p:nvSpPr>
+        <p:spPr>
+          <a:xfrm>
+            <a:off x="777240" y="2304288"/>
+            <a:ext cx="5120640" cy="3776472"/>
+          </a:xfrm>
+          <a:prstGeom prst="rect">
+            <a:avLst/>
+          </a:prstGeom>
+          <a:noFill/>
+        </p:spPr>
+        <p:txBody>
+          <a:bodyPr wrap="square">
+            <a:spAutoFit/>
+          </a:bodyPr>
+          <a:lstStyle/>
+          <a:p>
+            <a:pPr>
+              <a:spcAft>
+                <a:spcPts val="900"/>
+              </a:spcAft>
+              <a:defRPr sz="1600">
+                <a:solidFill>
+                  <a:srgbClr val="1C2D46"/>
+                </a:solidFill>
+                <a:latin typeface="Aptos"/>
+              </a:defRPr>
+            </a:pPr>
+            <a:r>
+              <a:t>Clear campaign narrative: sunscreen + lightweight skincare.</a:t>
+            </a:r>
+          </a:p>
+          <a:p>
+            <a:pPr>
+              <a:spcAft>
+                <a:spcPts val="900"/>
+              </a:spcAft>
+              <a:defRPr sz="1600">
+                <a:solidFill>
+                  <a:srgbClr val="1C2D46"/>
+                </a:solidFill>
+                <a:latin typeface="Aptos"/>
+              </a:defRPr>
+            </a:pPr>
+            <a:r>
+              <a:t>Distinct positioning for storytelling: heritage-inspired K-beauty.</a:t>
+            </a:r>
+          </a:p>
+          <a:p>
+            <a:pPr>
+              <a:spcAft>
+                <a:spcPts val="900"/>
+              </a:spcAft>
+              <a:defRPr sz="1600">
+                <a:solidFill>
+                  <a:srgbClr val="1C2D46"/>
+                </a:solidFill>
+                <a:latin typeface="Aptos"/>
+              </a:defRPr>
+            </a:pPr>
+            <a:r>
+              <a:t>Good benchmark pair with CeraVe in the same category.</a:t>
+            </a:r>
+          </a:p>
+          <a:p>
+            <a:pPr>
+              <a:spcAft>
+                <a:spcPts val="900"/>
+              </a:spcAft>
+              <a:defRPr sz="1600">
+                <a:solidFill>
+                  <a:srgbClr val="1C2D46"/>
+                </a:solidFill>
+                <a:latin typeface="Aptos"/>
+              </a:defRPr>
+            </a:pPr>
+            <a:r>
+              <a:t>Suitable for explainable matching, not only popularity ranking.</a:t>
+            </a:r>
+          </a:p>
+        </p:txBody>
+      </p:sp>
+      <p:sp>
+        <p:nvSpPr>
+          <p:cNvPr id="7" name="Rounded Rectangle 6"/>
+          <p:cNvSpPr/>
+          <p:nvPr/>
+        </p:nvSpPr>
+        <p:spPr>
+          <a:xfrm>
+            <a:off x="6144768" y="1828800"/>
+            <a:ext cx="5440680" cy="4343400"/>
+          </a:xfrm>
+          <a:prstGeom prst="roundRect">
+            <a:avLst/>
+          </a:prstGeom>
+          <a:solidFill>
+            <a:srgbClr val="F2F7FC"/>
+          </a:solidFill>
+          <a:ln w="15875">
+            <a:solidFill>
+              <a:srgbClr val="CDDCEE"/>
+            </a:solidFill>
+          </a:ln>
+        </p:spPr>
+        <p:style>
+          <a:lnRef idx="1">
+            <a:schemeClr val="accent1"/>
+          </a:lnRef>
+          <a:fillRef idx="3">
+            <a:schemeClr val="accent1"/>
+          </a:fillRef>
+          <a:effectRef idx="2">
+            <a:schemeClr val="accent1"/>
+          </a:effectRef>
+          <a:fontRef idx="minor">
+            <a:schemeClr val="lt1"/>
+          </a:fontRef>
+        </p:style>
+        <p:txBody>
+          <a:bodyPr rtlCol="0" anchor="ctr"/>
+          <a:lstStyle/>
+          <a:p>
+            <a:pPr algn="ctr"/>
+          </a:p>
+        </p:txBody>
+      </p:sp>
+      <p:sp>
+        <p:nvSpPr>
+          <p:cNvPr id="8" name="TextBox 7"/>
+          <p:cNvSpPr txBox="1"/>
+          <p:nvPr/>
+        </p:nvSpPr>
+        <p:spPr>
+          <a:xfrm>
+            <a:off x="6345936" y="1938528"/>
+            <a:ext cx="5120640" cy="365760"/>
+          </a:xfrm>
+          <a:prstGeom prst="rect">
+            <a:avLst/>
+          </a:prstGeom>
+          <a:noFill/>
+        </p:spPr>
+        <p:txBody>
+          <a:bodyPr wrap="none">
+            <a:spAutoFit/>
+          </a:bodyPr>
+          <a:lstStyle/>
+          <a:p>
+            <a:pPr>
+              <a:defRPr b="1" sz="1900">
+                <a:solidFill>
+                  <a:srgbClr val="133A66"/>
+                </a:solidFill>
+                <a:latin typeface="Aptos"/>
+              </a:defRPr>
+            </a:pPr>
+            <a:r>
+              <a:t>Brand research and dataset evidence</a:t>
+            </a:r>
+          </a:p>
+        </p:txBody>
+      </p:sp>
+      <p:sp>
+        <p:nvSpPr>
+          <p:cNvPr id="9" name="TextBox 8"/>
+          <p:cNvSpPr txBox="1"/>
+          <p:nvPr/>
+        </p:nvSpPr>
+        <p:spPr>
+          <a:xfrm>
+            <a:off x="6327648" y="2304288"/>
+            <a:ext cx="5120640" cy="3776472"/>
+          </a:xfrm>
+          <a:prstGeom prst="rect">
+            <a:avLst/>
+          </a:prstGeom>
+          <a:noFill/>
+        </p:spPr>
+        <p:txBody>
+          <a:bodyPr wrap="square">
+            <a:spAutoFit/>
+          </a:bodyPr>
+          <a:lstStyle/>
+          <a:p>
+            <a:pPr>
+              <a:spcAft>
+                <a:spcPts val="900"/>
+              </a:spcAft>
+              <a:defRPr sz="1600">
+                <a:solidFill>
+                  <a:srgbClr val="1C2D46"/>
+                </a:solidFill>
+                <a:latin typeface="Aptos"/>
+              </a:defRPr>
+            </a:pPr>
+            <a:r>
+              <a:t>Positioning: gentle, daily-use K-beauty skincare message.</a:t>
+            </a:r>
+          </a:p>
+          <a:p>
+            <a:pPr>
+              <a:spcAft>
+                <a:spcPts val="900"/>
+              </a:spcAft>
+              <a:defRPr sz="1600">
+                <a:solidFill>
+                  <a:srgbClr val="1C2D46"/>
+                </a:solidFill>
+                <a:latin typeface="Aptos"/>
+              </a:defRPr>
+            </a:pPr>
+            <a:r>
+              <a:t>Audience focus: sensitive/acne-aware Gen Z and Millennials.</a:t>
+            </a:r>
+          </a:p>
+          <a:p>
+            <a:pPr>
+              <a:spcAft>
+                <a:spcPts val="900"/>
+              </a:spcAft>
+              <a:defRPr sz="1600">
+                <a:solidFill>
+                  <a:srgbClr val="1C2D46"/>
+                </a:solidFill>
+                <a:latin typeface="Aptos"/>
+              </a:defRPr>
+            </a:pPr>
+            <a:r>
+              <a:t>Dataset source: videos_text_ready_combined.csv (n=67,283 videos)</a:t>
+            </a:r>
+          </a:p>
+          <a:p>
+            <a:pPr>
+              <a:spcAft>
+                <a:spcPts val="900"/>
+              </a:spcAft>
+              <a:defRPr sz="1600">
+                <a:solidFill>
+                  <a:srgbClr val="1C2D46"/>
+                </a:solidFill>
+                <a:latin typeface="Aptos"/>
+              </a:defRPr>
+            </a:pPr>
+            <a:r>
+              <a:t>sunscreen: 3,981 videos | 340 channels</a:t>
+            </a:r>
+          </a:p>
+          <a:p>
+            <a:pPr>
+              <a:spcAft>
+                <a:spcPts val="900"/>
+              </a:spcAft>
+              <a:defRPr sz="1600">
+                <a:solidFill>
+                  <a:srgbClr val="1C2D46"/>
+                </a:solidFill>
+                <a:latin typeface="Aptos"/>
+              </a:defRPr>
+            </a:pPr>
+            <a:r>
+              <a:t>spf: 3,850 videos | 344 channels</a:t>
+            </a:r>
+          </a:p>
+          <a:p>
+            <a:pPr>
+              <a:spcAft>
+                <a:spcPts val="900"/>
+              </a:spcAft>
+              <a:defRPr sz="1600">
+                <a:solidFill>
+                  <a:srgbClr val="1C2D46"/>
+                </a:solidFill>
+                <a:latin typeface="Aptos"/>
+              </a:defRPr>
+            </a:pPr>
+            <a:r>
+              <a:t>beauty of joseon: 286 videos | 69 channels</a:t>
+            </a:r>
+          </a:p>
+          <a:p>
+            <a:pPr>
+              <a:spcAft>
+                <a:spcPts val="900"/>
+              </a:spcAft>
+              <a:defRPr sz="1600">
+                <a:solidFill>
+                  <a:srgbClr val="1C2D46"/>
+                </a:solidFill>
+                <a:latin typeface="Aptos"/>
+              </a:defRPr>
+            </a:pPr>
+            <a:r>
+              <a:t>cerave: 747 videos | 118 channels</a:t>
+            </a:r>
+          </a:p>
+        </p:txBody>
+      </p:sp>
+      <p:sp>
+        <p:nvSpPr>
+          <p:cNvPr id="10" name="TextBox 9"/>
+          <p:cNvSpPr txBox="1"/>
+          <p:nvPr/>
+        </p:nvSpPr>
+        <p:spPr>
+          <a:xfrm>
+            <a:off x="502920" y="6428232"/>
+            <a:ext cx="10972800" cy="292608"/>
+          </a:xfrm>
+          <a:prstGeom prst="rect">
+            <a:avLst/>
+          </a:prstGeom>
+          <a:noFill/>
+        </p:spPr>
+        <p:txBody>
+          <a:bodyPr wrap="none">
+            <a:spAutoFit/>
+          </a:bodyPr>
+          <a:lstStyle/>
+          <a:p>
+            <a:pPr algn="r">
+              <a:defRPr sz="1000">
+                <a:solidFill>
+                  <a:srgbClr val="6E8098"/>
+                </a:solidFill>
+                <a:latin typeface="Aptos"/>
+              </a:defRPr>
+            </a:pPr>
+            <a:r>
+              <a:t>Brand choice is explicit, defensible, and data-backed</a:t>
+            </a:r>
+          </a:p>
+        </p:txBody>
+      </p:sp>
+    </p:spTree>
+  </p:cSld>
+  <p:clrMapOvr>
+    <a:masterClrMapping/>
+  </p:clrMapOvr>
+</p:sld>
+</file>
+
+<file path=ppt/slides/slide4.xml><?xml version="1.0" encoding="utf-8"?>
 <p:sld xmlns:a="http://schemas.openxmlformats.org/drawingml/2006/main" xmlns:p="http://schemas.openxmlformats.org/presentationml/2006/main" xmlns:r="http://schemas.openxmlformats.org/officeDocument/2006/relationships">
   <p:cSld>
     <p:spTree>
@@ -6523,662 +7350,6 @@
 </p:sld>
 </file>
 
-<file path=ppt/slides/slide4.xml><?xml version="1.0" encoding="utf-8"?>
-<p:sld xmlns:a="http://schemas.openxmlformats.org/drawingml/2006/main" xmlns:p="http://schemas.openxmlformats.org/presentationml/2006/main" xmlns:r="http://schemas.openxmlformats.org/officeDocument/2006/relationships">
-  <p:cSld>
-    <p:spTree>
-      <p:nvGrpSpPr>
-        <p:cNvPr id="1" name=""/>
-        <p:cNvGrpSpPr/>
-        <p:nvPr/>
-      </p:nvGrpSpPr>
-      <p:grpSpPr/>
-      <p:sp>
-        <p:nvSpPr>
-          <p:cNvPr id="2" name="TextBox 1"/>
-          <p:cNvSpPr txBox="1"/>
-          <p:nvPr/>
-        </p:nvSpPr>
-        <p:spPr>
-          <a:xfrm>
-            <a:off x="594360" y="320040"/>
-            <a:ext cx="11064240" cy="914400"/>
-          </a:xfrm>
-          <a:prstGeom prst="rect">
-            <a:avLst/>
-          </a:prstGeom>
-          <a:noFill/>
-        </p:spPr>
-        <p:txBody>
-          <a:bodyPr wrap="none">
-            <a:spAutoFit/>
-          </a:bodyPr>
-          <a:lstStyle/>
-          <a:p>
-            <a:pPr>
-              <a:defRPr sz="3400" b="1">
-                <a:solidFill>
-                  <a:srgbClr val="0F2C59"/>
-                </a:solidFill>
-                <a:latin typeface="Aptos Display"/>
-              </a:defRPr>
-            </a:pPr>
-            <a:r>
-              <a:t>Data Overview (BOJ Run)</a:t>
-            </a:r>
-          </a:p>
-        </p:txBody>
-      </p:sp>
-      <p:sp>
-        <p:nvSpPr>
-          <p:cNvPr id="3" name="Rectangle 2"/>
-          <p:cNvSpPr/>
-          <p:nvPr/>
-        </p:nvSpPr>
-        <p:spPr>
-          <a:xfrm>
-            <a:off x="566928" y="1783080"/>
-            <a:ext cx="2377440" cy="73152"/>
-          </a:xfrm>
-          <a:prstGeom prst="rect">
-            <a:avLst/>
-          </a:prstGeom>
-          <a:solidFill>
-            <a:srgbClr val="1A7DBC"/>
-          </a:solidFill>
-          <a:ln>
-            <a:noFill/>
-          </a:ln>
-        </p:spPr>
-        <p:style>
-          <a:lnRef idx="1">
-            <a:schemeClr val="accent1"/>
-          </a:lnRef>
-          <a:fillRef idx="3">
-            <a:schemeClr val="accent1"/>
-          </a:fillRef>
-          <a:effectRef idx="2">
-            <a:schemeClr val="accent1"/>
-          </a:effectRef>
-          <a:fontRef idx="minor">
-            <a:schemeClr val="lt1"/>
-          </a:fontRef>
-        </p:style>
-        <p:txBody>
-          <a:bodyPr rtlCol="0" anchor="ctr"/>
-          <a:lstStyle/>
-          <a:p>
-            <a:pPr algn="ctr"/>
-          </a:p>
-        </p:txBody>
-      </p:sp>
-      <p:sp>
-        <p:nvSpPr>
-          <p:cNvPr id="4" name="Rounded Rectangle 3"/>
-          <p:cNvSpPr/>
-          <p:nvPr/>
-        </p:nvSpPr>
-        <p:spPr>
-          <a:xfrm>
-            <a:off x="685800" y="2057400"/>
-            <a:ext cx="2697480" cy="1417320"/>
-          </a:xfrm>
-          <a:prstGeom prst="roundRect">
-            <a:avLst/>
-          </a:prstGeom>
-          <a:solidFill>
-            <a:srgbClr val="EBF5FF"/>
-          </a:solidFill>
-          <a:ln>
-            <a:solidFill>
-              <a:srgbClr val="BCD4EF"/>
-            </a:solidFill>
-          </a:ln>
-        </p:spPr>
-        <p:style>
-          <a:lnRef idx="1">
-            <a:schemeClr val="accent1"/>
-          </a:lnRef>
-          <a:fillRef idx="3">
-            <a:schemeClr val="accent1"/>
-          </a:fillRef>
-          <a:effectRef idx="2">
-            <a:schemeClr val="accent1"/>
-          </a:effectRef>
-          <a:fontRef idx="minor">
-            <a:schemeClr val="lt1"/>
-          </a:fontRef>
-        </p:style>
-        <p:txBody>
-          <a:bodyPr rtlCol="0" anchor="ctr"/>
-          <a:lstStyle/>
-          <a:p>
-            <a:pPr algn="ctr"/>
-          </a:p>
-        </p:txBody>
-      </p:sp>
-      <p:sp>
-        <p:nvSpPr>
-          <p:cNvPr id="5" name="TextBox 4"/>
-          <p:cNvSpPr txBox="1"/>
-          <p:nvPr/>
-        </p:nvSpPr>
-        <p:spPr>
-          <a:xfrm>
-            <a:off x="822960" y="2240280"/>
-            <a:ext cx="2423160" cy="512064"/>
-          </a:xfrm>
-          <a:prstGeom prst="rect">
-            <a:avLst/>
-          </a:prstGeom>
-          <a:noFill/>
-        </p:spPr>
-        <p:txBody>
-          <a:bodyPr wrap="none">
-            <a:spAutoFit/>
-          </a:bodyPr>
-          <a:lstStyle/>
-          <a:p>
-            <a:pPr>
-              <a:defRPr b="1" sz="2600">
-                <a:solidFill>
-                  <a:srgbClr val="1560A2"/>
-                </a:solidFill>
-                <a:latin typeface="Aptos Display"/>
-              </a:defRPr>
-            </a:pPr>
-            <a:r>
-              <a:t>42,750</a:t>
-            </a:r>
-          </a:p>
-        </p:txBody>
-      </p:sp>
-      <p:sp>
-        <p:nvSpPr>
-          <p:cNvPr id="6" name="TextBox 5"/>
-          <p:cNvSpPr txBox="1"/>
-          <p:nvPr/>
-        </p:nvSpPr>
-        <p:spPr>
-          <a:xfrm>
-            <a:off x="822960" y="2788920"/>
-            <a:ext cx="2423160" cy="365760"/>
-          </a:xfrm>
-          <a:prstGeom prst="rect">
-            <a:avLst/>
-          </a:prstGeom>
-          <a:noFill/>
-        </p:spPr>
-        <p:txBody>
-          <a:bodyPr wrap="none">
-            <a:spAutoFit/>
-          </a:bodyPr>
-          <a:lstStyle/>
-          <a:p>
-            <a:pPr>
-              <a:defRPr sz="1200">
-                <a:solidFill>
-                  <a:srgbClr val="3B577E"/>
-                </a:solidFill>
-                <a:latin typeface="Aptos"/>
-              </a:defRPr>
-            </a:pPr>
-            <a:r>
-              <a:t>Videos analyzed</a:t>
-            </a:r>
-          </a:p>
-        </p:txBody>
-      </p:sp>
-      <p:sp>
-        <p:nvSpPr>
-          <p:cNvPr id="7" name="Rounded Rectangle 6"/>
-          <p:cNvSpPr/>
-          <p:nvPr/>
-        </p:nvSpPr>
-        <p:spPr>
-          <a:xfrm>
-            <a:off x="3566160" y="2057400"/>
-            <a:ext cx="2697480" cy="1417320"/>
-          </a:xfrm>
-          <a:prstGeom prst="roundRect">
-            <a:avLst/>
-          </a:prstGeom>
-          <a:solidFill>
-            <a:srgbClr val="EBF5FF"/>
-          </a:solidFill>
-          <a:ln>
-            <a:solidFill>
-              <a:srgbClr val="BCD4EF"/>
-            </a:solidFill>
-          </a:ln>
-        </p:spPr>
-        <p:style>
-          <a:lnRef idx="1">
-            <a:schemeClr val="accent1"/>
-          </a:lnRef>
-          <a:fillRef idx="3">
-            <a:schemeClr val="accent1"/>
-          </a:fillRef>
-          <a:effectRef idx="2">
-            <a:schemeClr val="accent1"/>
-          </a:effectRef>
-          <a:fontRef idx="minor">
-            <a:schemeClr val="lt1"/>
-          </a:fontRef>
-        </p:style>
-        <p:txBody>
-          <a:bodyPr rtlCol="0" anchor="ctr"/>
-          <a:lstStyle/>
-          <a:p>
-            <a:pPr algn="ctr"/>
-          </a:p>
-        </p:txBody>
-      </p:sp>
-      <p:sp>
-        <p:nvSpPr>
-          <p:cNvPr id="8" name="TextBox 7"/>
-          <p:cNvSpPr txBox="1"/>
-          <p:nvPr/>
-        </p:nvSpPr>
-        <p:spPr>
-          <a:xfrm>
-            <a:off x="3703320" y="2240280"/>
-            <a:ext cx="2423160" cy="512064"/>
-          </a:xfrm>
-          <a:prstGeom prst="rect">
-            <a:avLst/>
-          </a:prstGeom>
-          <a:noFill/>
-        </p:spPr>
-        <p:txBody>
-          <a:bodyPr wrap="none">
-            <a:spAutoFit/>
-          </a:bodyPr>
-          <a:lstStyle/>
-          <a:p>
-            <a:pPr>
-              <a:defRPr b="1" sz="2600">
-                <a:solidFill>
-                  <a:srgbClr val="1560A2"/>
-                </a:solidFill>
-                <a:latin typeface="Aptos Display"/>
-              </a:defRPr>
-            </a:pPr>
-            <a:r>
-              <a:t>1,089</a:t>
-            </a:r>
-          </a:p>
-        </p:txBody>
-      </p:sp>
-      <p:sp>
-        <p:nvSpPr>
-          <p:cNvPr id="9" name="TextBox 8"/>
-          <p:cNvSpPr txBox="1"/>
-          <p:nvPr/>
-        </p:nvSpPr>
-        <p:spPr>
-          <a:xfrm>
-            <a:off x="3703320" y="2788920"/>
-            <a:ext cx="2423160" cy="365760"/>
-          </a:xfrm>
-          <a:prstGeom prst="rect">
-            <a:avLst/>
-          </a:prstGeom>
-          <a:noFill/>
-        </p:spPr>
-        <p:txBody>
-          <a:bodyPr wrap="none">
-            <a:spAutoFit/>
-          </a:bodyPr>
-          <a:lstStyle/>
-          <a:p>
-            <a:pPr>
-              <a:defRPr sz="1200">
-                <a:solidFill>
-                  <a:srgbClr val="3B577E"/>
-                </a:solidFill>
-                <a:latin typeface="Aptos"/>
-              </a:defRPr>
-            </a:pPr>
-            <a:r>
-              <a:t>Channels scored</a:t>
-            </a:r>
-          </a:p>
-        </p:txBody>
-      </p:sp>
-      <p:sp>
-        <p:nvSpPr>
-          <p:cNvPr id="10" name="Rounded Rectangle 9"/>
-          <p:cNvSpPr/>
-          <p:nvPr/>
-        </p:nvSpPr>
-        <p:spPr>
-          <a:xfrm>
-            <a:off x="6446520" y="2057400"/>
-            <a:ext cx="2697480" cy="1417320"/>
-          </a:xfrm>
-          <a:prstGeom prst="roundRect">
-            <a:avLst/>
-          </a:prstGeom>
-          <a:solidFill>
-            <a:srgbClr val="EBF5FF"/>
-          </a:solidFill>
-          <a:ln>
-            <a:solidFill>
-              <a:srgbClr val="BCD4EF"/>
-            </a:solidFill>
-          </a:ln>
-        </p:spPr>
-        <p:style>
-          <a:lnRef idx="1">
-            <a:schemeClr val="accent1"/>
-          </a:lnRef>
-          <a:fillRef idx="3">
-            <a:schemeClr val="accent1"/>
-          </a:fillRef>
-          <a:effectRef idx="2">
-            <a:schemeClr val="accent1"/>
-          </a:effectRef>
-          <a:fontRef idx="minor">
-            <a:schemeClr val="lt1"/>
-          </a:fontRef>
-        </p:style>
-        <p:txBody>
-          <a:bodyPr rtlCol="0" anchor="ctr"/>
-          <a:lstStyle/>
-          <a:p>
-            <a:pPr algn="ctr"/>
-          </a:p>
-        </p:txBody>
-      </p:sp>
-      <p:sp>
-        <p:nvSpPr>
-          <p:cNvPr id="11" name="TextBox 10"/>
-          <p:cNvSpPr txBox="1"/>
-          <p:nvPr/>
-        </p:nvSpPr>
-        <p:spPr>
-          <a:xfrm>
-            <a:off x="6583680" y="2240280"/>
-            <a:ext cx="2423160" cy="512064"/>
-          </a:xfrm>
-          <a:prstGeom prst="rect">
-            <a:avLst/>
-          </a:prstGeom>
-          <a:noFill/>
-        </p:spPr>
-        <p:txBody>
-          <a:bodyPr wrap="none">
-            <a:spAutoFit/>
-          </a:bodyPr>
-          <a:lstStyle/>
-          <a:p>
-            <a:pPr>
-              <a:defRPr b="1" sz="2600">
-                <a:solidFill>
-                  <a:srgbClr val="1560A2"/>
-                </a:solidFill>
-                <a:latin typeface="Aptos Display"/>
-              </a:defRPr>
-            </a:pPr>
-            <a:r>
-              <a:t>Top-10</a:t>
-            </a:r>
-          </a:p>
-        </p:txBody>
-      </p:sp>
-      <p:sp>
-        <p:nvSpPr>
-          <p:cNvPr id="12" name="TextBox 11"/>
-          <p:cNvSpPr txBox="1"/>
-          <p:nvPr/>
-        </p:nvSpPr>
-        <p:spPr>
-          <a:xfrm>
-            <a:off x="6583680" y="2788920"/>
-            <a:ext cx="2423160" cy="365760"/>
-          </a:xfrm>
-          <a:prstGeom prst="rect">
-            <a:avLst/>
-          </a:prstGeom>
-          <a:noFill/>
-        </p:spPr>
-        <p:txBody>
-          <a:bodyPr wrap="none">
-            <a:spAutoFit/>
-          </a:bodyPr>
-          <a:lstStyle/>
-          <a:p>
-            <a:pPr>
-              <a:defRPr sz="1200">
-                <a:solidFill>
-                  <a:srgbClr val="3B577E"/>
-                </a:solidFill>
-                <a:latin typeface="Aptos"/>
-              </a:defRPr>
-            </a:pPr>
-            <a:r>
-              <a:t>Default recommendations</a:t>
-            </a:r>
-          </a:p>
-        </p:txBody>
-      </p:sp>
-      <p:sp>
-        <p:nvSpPr>
-          <p:cNvPr id="13" name="Rounded Rectangle 12"/>
-          <p:cNvSpPr/>
-          <p:nvPr/>
-        </p:nvSpPr>
-        <p:spPr>
-          <a:xfrm>
-            <a:off x="9326880" y="2057400"/>
-            <a:ext cx="2697480" cy="1417320"/>
-          </a:xfrm>
-          <a:prstGeom prst="roundRect">
-            <a:avLst/>
-          </a:prstGeom>
-          <a:solidFill>
-            <a:srgbClr val="EBF5FF"/>
-          </a:solidFill>
-          <a:ln>
-            <a:solidFill>
-              <a:srgbClr val="BCD4EF"/>
-            </a:solidFill>
-          </a:ln>
-        </p:spPr>
-        <p:style>
-          <a:lnRef idx="1">
-            <a:schemeClr val="accent1"/>
-          </a:lnRef>
-          <a:fillRef idx="3">
-            <a:schemeClr val="accent1"/>
-          </a:fillRef>
-          <a:effectRef idx="2">
-            <a:schemeClr val="accent1"/>
-          </a:effectRef>
-          <a:fontRef idx="minor">
-            <a:schemeClr val="lt1"/>
-          </a:fontRef>
-        </p:style>
-        <p:txBody>
-          <a:bodyPr rtlCol="0" anchor="ctr"/>
-          <a:lstStyle/>
-          <a:p>
-            <a:pPr algn="ctr"/>
-          </a:p>
-        </p:txBody>
-      </p:sp>
-      <p:sp>
-        <p:nvSpPr>
-          <p:cNvPr id="14" name="TextBox 13"/>
-          <p:cNvSpPr txBox="1"/>
-          <p:nvPr/>
-        </p:nvSpPr>
-        <p:spPr>
-          <a:xfrm>
-            <a:off x="9464040" y="2240280"/>
-            <a:ext cx="2423160" cy="512064"/>
-          </a:xfrm>
-          <a:prstGeom prst="rect">
-            <a:avLst/>
-          </a:prstGeom>
-          <a:noFill/>
-        </p:spPr>
-        <p:txBody>
-          <a:bodyPr wrap="none">
-            <a:spAutoFit/>
-          </a:bodyPr>
-          <a:lstStyle/>
-          <a:p>
-            <a:pPr>
-              <a:defRPr b="1" sz="2600">
-                <a:solidFill>
-                  <a:srgbClr val="1560A2"/>
-                </a:solidFill>
-                <a:latin typeface="Aptos Display"/>
-              </a:defRPr>
-            </a:pPr>
-            <a:r>
-              <a:t>6</a:t>
-            </a:r>
-          </a:p>
-        </p:txBody>
-      </p:sp>
-      <p:sp>
-        <p:nvSpPr>
-          <p:cNvPr id="15" name="TextBox 14"/>
-          <p:cNvSpPr txBox="1"/>
-          <p:nvPr/>
-        </p:nvSpPr>
-        <p:spPr>
-          <a:xfrm>
-            <a:off x="9464040" y="2788920"/>
-            <a:ext cx="2423160" cy="365760"/>
-          </a:xfrm>
-          <a:prstGeom prst="rect">
-            <a:avLst/>
-          </a:prstGeom>
-          <a:noFill/>
-        </p:spPr>
-        <p:txBody>
-          <a:bodyPr wrap="none">
-            <a:spAutoFit/>
-          </a:bodyPr>
-          <a:lstStyle/>
-          <a:p>
-            <a:pPr>
-              <a:defRPr sz="1200">
-                <a:solidFill>
-                  <a:srgbClr val="3B577E"/>
-                </a:solidFill>
-                <a:latin typeface="Aptos"/>
-              </a:defRPr>
-            </a:pPr>
-            <a:r>
-              <a:t>Non-micro communities</a:t>
-            </a:r>
-          </a:p>
-        </p:txBody>
-      </p:sp>
-      <p:sp>
-        <p:nvSpPr>
-          <p:cNvPr id="16" name="TextBox 15"/>
-          <p:cNvSpPr txBox="1"/>
-          <p:nvPr/>
-        </p:nvSpPr>
-        <p:spPr>
-          <a:xfrm>
-            <a:off x="731520" y="3840480"/>
-            <a:ext cx="10972800" cy="1920240"/>
-          </a:xfrm>
-          <a:prstGeom prst="rect">
-            <a:avLst/>
-          </a:prstGeom>
-          <a:noFill/>
-        </p:spPr>
-        <p:txBody>
-          <a:bodyPr wrap="square">
-            <a:spAutoFit/>
-          </a:bodyPr>
-          <a:lstStyle/>
-          <a:p>
-            <a:pPr>
-              <a:spcAft>
-                <a:spcPts val="900"/>
-              </a:spcAft>
-              <a:defRPr sz="1500">
-                <a:solidFill>
-                  <a:srgbClr val="1C2D46"/>
-                </a:solidFill>
-                <a:latin typeface="Aptos"/>
-              </a:defRPr>
-            </a:pPr>
-            <a:r>
-              <a:t>Input files: videos_text_ready_combined.csv, comments_raw_combined.csv, master_prd_slim_combined.csv</a:t>
-            </a:r>
-          </a:p>
-          <a:p>
-            <a:pPr>
-              <a:spcAft>
-                <a:spcPts val="900"/>
-              </a:spcAft>
-              <a:defRPr sz="1500">
-                <a:solidFill>
-                  <a:srgbClr val="1C2D46"/>
-                </a:solidFill>
-                <a:latin typeface="Aptos"/>
-              </a:defRPr>
-            </a:pPr>
-            <a:r>
-              <a:t>Campaign input: BOJ SPF + Glow Serum, U.S. market, sensitive-skin audience, $50,000 budget</a:t>
-            </a:r>
-          </a:p>
-        </p:txBody>
-      </p:sp>
-      <p:sp>
-        <p:nvSpPr>
-          <p:cNvPr id="17" name="TextBox 16"/>
-          <p:cNvSpPr txBox="1"/>
-          <p:nvPr/>
-        </p:nvSpPr>
-        <p:spPr>
-          <a:xfrm>
-            <a:off x="502920" y="6428232"/>
-            <a:ext cx="10972800" cy="292608"/>
-          </a:xfrm>
-          <a:prstGeom prst="rect">
-            <a:avLst/>
-          </a:prstGeom>
-          <a:noFill/>
-        </p:spPr>
-        <p:txBody>
-          <a:bodyPr wrap="none">
-            <a:spAutoFit/>
-          </a:bodyPr>
-          <a:lstStyle/>
-          <a:p>
-            <a:pPr algn="r">
-              <a:defRPr sz="1000">
-                <a:solidFill>
-                  <a:srgbClr val="6E8098"/>
-                </a:solidFill>
-                <a:latin typeface="Aptos"/>
-              </a:defRPr>
-            </a:pPr>
-            <a:r>
-              <a:t>Data-driven prototype with fixed reproducible input</a:t>
-            </a:r>
-          </a:p>
-        </p:txBody>
-      </p:sp>
-    </p:spTree>
-  </p:cSld>
-  <p:clrMapOvr>
-    <a:masterClrMapping/>
-  </p:clrMapOvr>
-</p:sld>
-</file>
-
 <file path=ppt/slides/slide5.xml><?xml version="1.0" encoding="utf-8"?>
 <p:sld xmlns:a="http://schemas.openxmlformats.org/drawingml/2006/main" xmlns:p="http://schemas.openxmlformats.org/presentationml/2006/main" xmlns:r="http://schemas.openxmlformats.org/officeDocument/2006/relationships">
   <p:cSld>
@@ -7220,7 +7391,7 @@
               </a:defRPr>
             </a:pPr>
             <a:r>
-              <a:t>Method Pipeline</a:t>
+              <a:t>Data Overview (BOJ Run)</a:t>
             </a:r>
           </a:p>
         </p:txBody>
@@ -7270,14 +7441,482 @@
       </p:sp>
       <p:sp>
         <p:nvSpPr>
-          <p:cNvPr id="4" name="TextBox 3"/>
+          <p:cNvPr id="4" name="Rounded Rectangle 3"/>
+          <p:cNvSpPr/>
+          <p:nvPr/>
+        </p:nvSpPr>
+        <p:spPr>
+          <a:xfrm>
+            <a:off x="685800" y="2057400"/>
+            <a:ext cx="2697480" cy="1417320"/>
+          </a:xfrm>
+          <a:prstGeom prst="roundRect">
+            <a:avLst/>
+          </a:prstGeom>
+          <a:solidFill>
+            <a:srgbClr val="EBF5FF"/>
+          </a:solidFill>
+          <a:ln>
+            <a:solidFill>
+              <a:srgbClr val="BCD4EF"/>
+            </a:solidFill>
+          </a:ln>
+        </p:spPr>
+        <p:style>
+          <a:lnRef idx="1">
+            <a:schemeClr val="accent1"/>
+          </a:lnRef>
+          <a:fillRef idx="3">
+            <a:schemeClr val="accent1"/>
+          </a:fillRef>
+          <a:effectRef idx="2">
+            <a:schemeClr val="accent1"/>
+          </a:effectRef>
+          <a:fontRef idx="minor">
+            <a:schemeClr val="lt1"/>
+          </a:fontRef>
+        </p:style>
+        <p:txBody>
+          <a:bodyPr rtlCol="0" anchor="ctr"/>
+          <a:lstStyle/>
+          <a:p>
+            <a:pPr algn="ctr"/>
+          </a:p>
+        </p:txBody>
+      </p:sp>
+      <p:sp>
+        <p:nvSpPr>
+          <p:cNvPr id="5" name="TextBox 4"/>
           <p:cNvSpPr txBox="1"/>
           <p:nvPr/>
         </p:nvSpPr>
         <p:spPr>
           <a:xfrm>
-            <a:off x="685800" y="1828800"/>
-            <a:ext cx="10972800" cy="4480560"/>
+            <a:off x="822960" y="2240280"/>
+            <a:ext cx="2423160" cy="512064"/>
+          </a:xfrm>
+          <a:prstGeom prst="rect">
+            <a:avLst/>
+          </a:prstGeom>
+          <a:noFill/>
+        </p:spPr>
+        <p:txBody>
+          <a:bodyPr wrap="none">
+            <a:spAutoFit/>
+          </a:bodyPr>
+          <a:lstStyle/>
+          <a:p>
+            <a:pPr>
+              <a:defRPr b="1" sz="2600">
+                <a:solidFill>
+                  <a:srgbClr val="1560A2"/>
+                </a:solidFill>
+                <a:latin typeface="Aptos Display"/>
+              </a:defRPr>
+            </a:pPr>
+            <a:r>
+              <a:t>42,750</a:t>
+            </a:r>
+          </a:p>
+        </p:txBody>
+      </p:sp>
+      <p:sp>
+        <p:nvSpPr>
+          <p:cNvPr id="6" name="TextBox 5"/>
+          <p:cNvSpPr txBox="1"/>
+          <p:nvPr/>
+        </p:nvSpPr>
+        <p:spPr>
+          <a:xfrm>
+            <a:off x="822960" y="2788920"/>
+            <a:ext cx="2423160" cy="365760"/>
+          </a:xfrm>
+          <a:prstGeom prst="rect">
+            <a:avLst/>
+          </a:prstGeom>
+          <a:noFill/>
+        </p:spPr>
+        <p:txBody>
+          <a:bodyPr wrap="none">
+            <a:spAutoFit/>
+          </a:bodyPr>
+          <a:lstStyle/>
+          <a:p>
+            <a:pPr>
+              <a:defRPr sz="1200">
+                <a:solidFill>
+                  <a:srgbClr val="3B577E"/>
+                </a:solidFill>
+                <a:latin typeface="Aptos"/>
+              </a:defRPr>
+            </a:pPr>
+            <a:r>
+              <a:t>Videos analyzed</a:t>
+            </a:r>
+          </a:p>
+        </p:txBody>
+      </p:sp>
+      <p:sp>
+        <p:nvSpPr>
+          <p:cNvPr id="7" name="Rounded Rectangle 6"/>
+          <p:cNvSpPr/>
+          <p:nvPr/>
+        </p:nvSpPr>
+        <p:spPr>
+          <a:xfrm>
+            <a:off x="3566160" y="2057400"/>
+            <a:ext cx="2697480" cy="1417320"/>
+          </a:xfrm>
+          <a:prstGeom prst="roundRect">
+            <a:avLst/>
+          </a:prstGeom>
+          <a:solidFill>
+            <a:srgbClr val="EBF5FF"/>
+          </a:solidFill>
+          <a:ln>
+            <a:solidFill>
+              <a:srgbClr val="BCD4EF"/>
+            </a:solidFill>
+          </a:ln>
+        </p:spPr>
+        <p:style>
+          <a:lnRef idx="1">
+            <a:schemeClr val="accent1"/>
+          </a:lnRef>
+          <a:fillRef idx="3">
+            <a:schemeClr val="accent1"/>
+          </a:fillRef>
+          <a:effectRef idx="2">
+            <a:schemeClr val="accent1"/>
+          </a:effectRef>
+          <a:fontRef idx="minor">
+            <a:schemeClr val="lt1"/>
+          </a:fontRef>
+        </p:style>
+        <p:txBody>
+          <a:bodyPr rtlCol="0" anchor="ctr"/>
+          <a:lstStyle/>
+          <a:p>
+            <a:pPr algn="ctr"/>
+          </a:p>
+        </p:txBody>
+      </p:sp>
+      <p:sp>
+        <p:nvSpPr>
+          <p:cNvPr id="8" name="TextBox 7"/>
+          <p:cNvSpPr txBox="1"/>
+          <p:nvPr/>
+        </p:nvSpPr>
+        <p:spPr>
+          <a:xfrm>
+            <a:off x="3703320" y="2240280"/>
+            <a:ext cx="2423160" cy="512064"/>
+          </a:xfrm>
+          <a:prstGeom prst="rect">
+            <a:avLst/>
+          </a:prstGeom>
+          <a:noFill/>
+        </p:spPr>
+        <p:txBody>
+          <a:bodyPr wrap="none">
+            <a:spAutoFit/>
+          </a:bodyPr>
+          <a:lstStyle/>
+          <a:p>
+            <a:pPr>
+              <a:defRPr b="1" sz="2600">
+                <a:solidFill>
+                  <a:srgbClr val="1560A2"/>
+                </a:solidFill>
+                <a:latin typeface="Aptos Display"/>
+              </a:defRPr>
+            </a:pPr>
+            <a:r>
+              <a:t>1,089</a:t>
+            </a:r>
+          </a:p>
+        </p:txBody>
+      </p:sp>
+      <p:sp>
+        <p:nvSpPr>
+          <p:cNvPr id="9" name="TextBox 8"/>
+          <p:cNvSpPr txBox="1"/>
+          <p:nvPr/>
+        </p:nvSpPr>
+        <p:spPr>
+          <a:xfrm>
+            <a:off x="3703320" y="2788920"/>
+            <a:ext cx="2423160" cy="365760"/>
+          </a:xfrm>
+          <a:prstGeom prst="rect">
+            <a:avLst/>
+          </a:prstGeom>
+          <a:noFill/>
+        </p:spPr>
+        <p:txBody>
+          <a:bodyPr wrap="none">
+            <a:spAutoFit/>
+          </a:bodyPr>
+          <a:lstStyle/>
+          <a:p>
+            <a:pPr>
+              <a:defRPr sz="1200">
+                <a:solidFill>
+                  <a:srgbClr val="3B577E"/>
+                </a:solidFill>
+                <a:latin typeface="Aptos"/>
+              </a:defRPr>
+            </a:pPr>
+            <a:r>
+              <a:t>Channels scored</a:t>
+            </a:r>
+          </a:p>
+        </p:txBody>
+      </p:sp>
+      <p:sp>
+        <p:nvSpPr>
+          <p:cNvPr id="10" name="Rounded Rectangle 9"/>
+          <p:cNvSpPr/>
+          <p:nvPr/>
+        </p:nvSpPr>
+        <p:spPr>
+          <a:xfrm>
+            <a:off x="6446520" y="2057400"/>
+            <a:ext cx="2697480" cy="1417320"/>
+          </a:xfrm>
+          <a:prstGeom prst="roundRect">
+            <a:avLst/>
+          </a:prstGeom>
+          <a:solidFill>
+            <a:srgbClr val="EBF5FF"/>
+          </a:solidFill>
+          <a:ln>
+            <a:solidFill>
+              <a:srgbClr val="BCD4EF"/>
+            </a:solidFill>
+          </a:ln>
+        </p:spPr>
+        <p:style>
+          <a:lnRef idx="1">
+            <a:schemeClr val="accent1"/>
+          </a:lnRef>
+          <a:fillRef idx="3">
+            <a:schemeClr val="accent1"/>
+          </a:fillRef>
+          <a:effectRef idx="2">
+            <a:schemeClr val="accent1"/>
+          </a:effectRef>
+          <a:fontRef idx="minor">
+            <a:schemeClr val="lt1"/>
+          </a:fontRef>
+        </p:style>
+        <p:txBody>
+          <a:bodyPr rtlCol="0" anchor="ctr"/>
+          <a:lstStyle/>
+          <a:p>
+            <a:pPr algn="ctr"/>
+          </a:p>
+        </p:txBody>
+      </p:sp>
+      <p:sp>
+        <p:nvSpPr>
+          <p:cNvPr id="11" name="TextBox 10"/>
+          <p:cNvSpPr txBox="1"/>
+          <p:nvPr/>
+        </p:nvSpPr>
+        <p:spPr>
+          <a:xfrm>
+            <a:off x="6583680" y="2240280"/>
+            <a:ext cx="2423160" cy="512064"/>
+          </a:xfrm>
+          <a:prstGeom prst="rect">
+            <a:avLst/>
+          </a:prstGeom>
+          <a:noFill/>
+        </p:spPr>
+        <p:txBody>
+          <a:bodyPr wrap="none">
+            <a:spAutoFit/>
+          </a:bodyPr>
+          <a:lstStyle/>
+          <a:p>
+            <a:pPr>
+              <a:defRPr b="1" sz="2600">
+                <a:solidFill>
+                  <a:srgbClr val="1560A2"/>
+                </a:solidFill>
+                <a:latin typeface="Aptos Display"/>
+              </a:defRPr>
+            </a:pPr>
+            <a:r>
+              <a:t>Top-10</a:t>
+            </a:r>
+          </a:p>
+        </p:txBody>
+      </p:sp>
+      <p:sp>
+        <p:nvSpPr>
+          <p:cNvPr id="12" name="TextBox 11"/>
+          <p:cNvSpPr txBox="1"/>
+          <p:nvPr/>
+        </p:nvSpPr>
+        <p:spPr>
+          <a:xfrm>
+            <a:off x="6583680" y="2788920"/>
+            <a:ext cx="2423160" cy="365760"/>
+          </a:xfrm>
+          <a:prstGeom prst="rect">
+            <a:avLst/>
+          </a:prstGeom>
+          <a:noFill/>
+        </p:spPr>
+        <p:txBody>
+          <a:bodyPr wrap="none">
+            <a:spAutoFit/>
+          </a:bodyPr>
+          <a:lstStyle/>
+          <a:p>
+            <a:pPr>
+              <a:defRPr sz="1200">
+                <a:solidFill>
+                  <a:srgbClr val="3B577E"/>
+                </a:solidFill>
+                <a:latin typeface="Aptos"/>
+              </a:defRPr>
+            </a:pPr>
+            <a:r>
+              <a:t>Default recommendations</a:t>
+            </a:r>
+          </a:p>
+        </p:txBody>
+      </p:sp>
+      <p:sp>
+        <p:nvSpPr>
+          <p:cNvPr id="13" name="Rounded Rectangle 12"/>
+          <p:cNvSpPr/>
+          <p:nvPr/>
+        </p:nvSpPr>
+        <p:spPr>
+          <a:xfrm>
+            <a:off x="9326880" y="2057400"/>
+            <a:ext cx="2697480" cy="1417320"/>
+          </a:xfrm>
+          <a:prstGeom prst="roundRect">
+            <a:avLst/>
+          </a:prstGeom>
+          <a:solidFill>
+            <a:srgbClr val="EBF5FF"/>
+          </a:solidFill>
+          <a:ln>
+            <a:solidFill>
+              <a:srgbClr val="BCD4EF"/>
+            </a:solidFill>
+          </a:ln>
+        </p:spPr>
+        <p:style>
+          <a:lnRef idx="1">
+            <a:schemeClr val="accent1"/>
+          </a:lnRef>
+          <a:fillRef idx="3">
+            <a:schemeClr val="accent1"/>
+          </a:fillRef>
+          <a:effectRef idx="2">
+            <a:schemeClr val="accent1"/>
+          </a:effectRef>
+          <a:fontRef idx="minor">
+            <a:schemeClr val="lt1"/>
+          </a:fontRef>
+        </p:style>
+        <p:txBody>
+          <a:bodyPr rtlCol="0" anchor="ctr"/>
+          <a:lstStyle/>
+          <a:p>
+            <a:pPr algn="ctr"/>
+          </a:p>
+        </p:txBody>
+      </p:sp>
+      <p:sp>
+        <p:nvSpPr>
+          <p:cNvPr id="14" name="TextBox 13"/>
+          <p:cNvSpPr txBox="1"/>
+          <p:nvPr/>
+        </p:nvSpPr>
+        <p:spPr>
+          <a:xfrm>
+            <a:off x="9464040" y="2240280"/>
+            <a:ext cx="2423160" cy="512064"/>
+          </a:xfrm>
+          <a:prstGeom prst="rect">
+            <a:avLst/>
+          </a:prstGeom>
+          <a:noFill/>
+        </p:spPr>
+        <p:txBody>
+          <a:bodyPr wrap="none">
+            <a:spAutoFit/>
+          </a:bodyPr>
+          <a:lstStyle/>
+          <a:p>
+            <a:pPr>
+              <a:defRPr b="1" sz="2600">
+                <a:solidFill>
+                  <a:srgbClr val="1560A2"/>
+                </a:solidFill>
+                <a:latin typeface="Aptos Display"/>
+              </a:defRPr>
+            </a:pPr>
+            <a:r>
+              <a:t>6</a:t>
+            </a:r>
+          </a:p>
+        </p:txBody>
+      </p:sp>
+      <p:sp>
+        <p:nvSpPr>
+          <p:cNvPr id="15" name="TextBox 14"/>
+          <p:cNvSpPr txBox="1"/>
+          <p:nvPr/>
+        </p:nvSpPr>
+        <p:spPr>
+          <a:xfrm>
+            <a:off x="9464040" y="2788920"/>
+            <a:ext cx="2423160" cy="365760"/>
+          </a:xfrm>
+          <a:prstGeom prst="rect">
+            <a:avLst/>
+          </a:prstGeom>
+          <a:noFill/>
+        </p:spPr>
+        <p:txBody>
+          <a:bodyPr wrap="none">
+            <a:spAutoFit/>
+          </a:bodyPr>
+          <a:lstStyle/>
+          <a:p>
+            <a:pPr>
+              <a:defRPr sz="1200">
+                <a:solidFill>
+                  <a:srgbClr val="3B577E"/>
+                </a:solidFill>
+                <a:latin typeface="Aptos"/>
+              </a:defRPr>
+            </a:pPr>
+            <a:r>
+              <a:t>Non-micro communities</a:t>
+            </a:r>
+          </a:p>
+        </p:txBody>
+      </p:sp>
+      <p:sp>
+        <p:nvSpPr>
+          <p:cNvPr id="16" name="TextBox 15"/>
+          <p:cNvSpPr txBox="1"/>
+          <p:nvPr/>
+        </p:nvSpPr>
+        <p:spPr>
+          <a:xfrm>
+            <a:off x="731520" y="3840480"/>
+            <a:ext cx="10972800" cy="1920240"/>
           </a:xfrm>
           <a:prstGeom prst="rect">
             <a:avLst/>
@@ -7294,7 +7933,7 @@
               <a:spcAft>
                 <a:spcPts val="900"/>
               </a:spcAft>
-              <a:defRPr sz="1900">
+              <a:defRPr sz="1500">
                 <a:solidFill>
                   <a:srgbClr val="1C2D46"/>
                 </a:solidFill>
@@ -7302,7 +7941,7 @@
               </a:defRPr>
             </a:pPr>
             <a:r>
-              <a:t>1) Data cleaning + beauty/noise filter</a:t>
+              <a:t>Input files: videos_text_ready_combined.csv, comments_raw_combined.csv, master_prd_slim_combined.csv</a:t>
             </a:r>
           </a:p>
           <a:p>
@@ -7310,7 +7949,7 @@
               <a:spcAft>
                 <a:spcPts val="900"/>
               </a:spcAft>
-              <a:defRPr sz="1900">
+              <a:defRPr sz="1500">
                 <a:solidFill>
                   <a:srgbClr val="1C2D46"/>
                 </a:solidFill>
@@ -7318,94 +7957,14 @@
               </a:defRPr>
             </a:pPr>
             <a:r>
-              <a:t>2) Channel aggregation and text profile generation</a:t>
-            </a:r>
-          </a:p>
-          <a:p>
-            <a:pPr>
-              <a:spcAft>
-                <a:spcPts val="900"/>
-              </a:spcAft>
-              <a:defRPr sz="1900">
-                <a:solidFill>
-                  <a:srgbClr val="1C2D46"/>
-                </a:solidFill>
-                <a:latin typeface="Aptos"/>
-              </a:defRPr>
-            </a:pPr>
-            <a:r>
-              <a:t>3) Network scoring (centrality + community detection)</a:t>
-            </a:r>
-          </a:p>
-          <a:p>
-            <a:pPr>
-              <a:spcAft>
-                <a:spcPts val="900"/>
-              </a:spcAft>
-              <a:defRPr sz="1900">
-                <a:solidFill>
-                  <a:srgbClr val="1C2D46"/>
-                </a:solidFill>
-                <a:latin typeface="Aptos"/>
-              </a:defRPr>
-            </a:pPr>
-            <a:r>
-              <a:t>4) TF-IDF relevance + semantic/tone enrichment</a:t>
-            </a:r>
-          </a:p>
-          <a:p>
-            <a:pPr>
-              <a:spcAft>
-                <a:spcPts val="900"/>
-              </a:spcAft>
-              <a:defRPr sz="1900">
-                <a:solidFill>
-                  <a:srgbClr val="1C2D46"/>
-                </a:solidFill>
-                <a:latin typeface="Aptos"/>
-              </a:defRPr>
-            </a:pPr>
-            <a:r>
-              <a:t>5) Evidence guardrail + diversity-aware ranking</a:t>
-            </a:r>
-          </a:p>
-          <a:p>
-            <a:pPr>
-              <a:spcAft>
-                <a:spcPts val="900"/>
-              </a:spcAft>
-              <a:defRPr sz="1900">
-                <a:solidFill>
-                  <a:srgbClr val="1C2D46"/>
-                </a:solidFill>
-                <a:latin typeface="Aptos"/>
-              </a:defRPr>
-            </a:pPr>
-            <a:r>
-              <a:t>6) ML benchmark (Linear/LASSO/Ridge/CART/RF/LightGBM, GroupKFold 5-fold)</a:t>
-            </a:r>
-          </a:p>
-          <a:p>
-            <a:pPr>
-              <a:spcAft>
-                <a:spcPts val="900"/>
-              </a:spcAft>
-              <a:defRPr sz="1900">
-                <a:solidFill>
-                  <a:srgbClr val="1C2D46"/>
-                </a:solidFill>
-                <a:latin typeface="Aptos"/>
-              </a:defRPr>
-            </a:pPr>
-            <a:r>
-              <a:t>7) ROI simulation + strategy generation + executive memo</a:t>
-            </a:r>
-          </a:p>
-        </p:txBody>
-      </p:sp>
-      <p:sp>
-        <p:nvSpPr>
-          <p:cNvPr id="5" name="TextBox 4"/>
+              <a:t>Campaign input: BOJ SPF + Glow Serum, U.S. market, sensitive-skin audience, $50,000 budget</a:t>
+            </a:r>
+          </a:p>
+        </p:txBody>
+      </p:sp>
+      <p:sp>
+        <p:nvSpPr>
+          <p:cNvPr id="17" name="TextBox 16"/>
           <p:cNvSpPr txBox="1"/>
           <p:nvPr/>
         </p:nvSpPr>
@@ -7434,7 +7993,7 @@
               </a:defRPr>
             </a:pPr>
             <a:r>
-              <a:t>Rubric 3: Technical aspects and method choice</a:t>
+              <a:t>Data-driven prototype with fixed reproducible input</a:t>
             </a:r>
           </a:p>
         </p:txBody>
@@ -7488,7 +8047,7 @@
               </a:defRPr>
             </a:pPr>
             <a:r>
-              <a:t>Model Evaluation Results</a:t>
+              <a:t>Method Pipeline</a:t>
             </a:r>
           </a:p>
         </p:txBody>
@@ -7536,85 +8095,151 @@
           </a:p>
         </p:txBody>
       </p:sp>
-      <p:pic>
-        <p:nvPicPr>
-          <p:cNvPr id="4" name="Picture 3" descr="model_benchmark_rmse.png"/>
-          <p:cNvPicPr>
-            <a:picLocks noChangeAspect="1"/>
-          </p:cNvPicPr>
-          <p:nvPr/>
-        </p:nvPicPr>
-        <p:blipFill>
-          <a:blip r:embed="rId2"/>
-          <a:stretch>
-            <a:fillRect/>
-          </a:stretch>
-        </p:blipFill>
-        <p:spPr>
-          <a:xfrm>
-            <a:off x="731520" y="1828800"/>
-            <a:ext cx="8237220" cy="4297680"/>
-          </a:xfrm>
-          <a:prstGeom prst="rect">
-            <a:avLst/>
-          </a:prstGeom>
-        </p:spPr>
-      </p:pic>
-      <p:sp>
-        <p:nvSpPr>
-          <p:cNvPr id="5" name="Rounded Rectangle 4"/>
-          <p:cNvSpPr/>
-          <p:nvPr/>
-        </p:nvSpPr>
-        <p:spPr>
-          <a:xfrm>
-            <a:off x="7315200" y="1828800"/>
-            <a:ext cx="4114800" cy="4297680"/>
-          </a:xfrm>
-          <a:prstGeom prst="roundRect">
-            <a:avLst/>
-          </a:prstGeom>
-          <a:solidFill>
-            <a:srgbClr val="F2F7FC"/>
-          </a:solidFill>
-          <a:ln w="15875">
-            <a:solidFill>
-              <a:srgbClr val="CDDCEE"/>
-            </a:solidFill>
-          </a:ln>
-        </p:spPr>
-        <p:style>
-          <a:lnRef idx="1">
-            <a:schemeClr val="accent1"/>
-          </a:lnRef>
-          <a:fillRef idx="3">
-            <a:schemeClr val="accent1"/>
-          </a:fillRef>
-          <a:effectRef idx="2">
-            <a:schemeClr val="accent1"/>
-          </a:effectRef>
-          <a:fontRef idx="minor">
-            <a:schemeClr val="lt1"/>
-          </a:fontRef>
-        </p:style>
-        <p:txBody>
-          <a:bodyPr rtlCol="0" anchor="ctr"/>
-          <a:lstStyle/>
-          <a:p>
-            <a:pPr algn="ctr"/>
-          </a:p>
-        </p:txBody>
-      </p:sp>
-      <p:sp>
-        <p:nvSpPr>
-          <p:cNvPr id="6" name="TextBox 5"/>
+      <p:sp>
+        <p:nvSpPr>
+          <p:cNvPr id="4" name="TextBox 3"/>
           <p:cNvSpPr txBox="1"/>
           <p:nvPr/>
         </p:nvSpPr>
         <p:spPr>
           <a:xfrm>
-            <a:off x="7516368" y="1938528"/>
-            <a:ext cx="3794760" cy="365760"/>
+            <a:off x="685800" y="1828800"/>
+            <a:ext cx="10972800" cy="4480560"/>
+          </a:xfrm>
+          <a:prstGeom prst="rect">
+            <a:avLst/>
+          </a:prstGeom>
+          <a:noFill/>
+        </p:spPr>
+        <p:txBody>
+          <a:bodyPr wrap="square">
+            <a:spAutoFit/>
+          </a:bodyPr>
+          <a:lstStyle/>
+          <a:p>
+            <a:pPr>
+              <a:spcAft>
+                <a:spcPts val="900"/>
+              </a:spcAft>
+              <a:defRPr sz="1900">
+                <a:solidFill>
+                  <a:srgbClr val="1C2D46"/>
+                </a:solidFill>
+                <a:latin typeface="Aptos"/>
+              </a:defRPr>
+            </a:pPr>
+            <a:r>
+              <a:t>1) Data cleaning + beauty/noise filter</a:t>
+            </a:r>
+          </a:p>
+          <a:p>
+            <a:pPr>
+              <a:spcAft>
+                <a:spcPts val="900"/>
+              </a:spcAft>
+              <a:defRPr sz="1900">
+                <a:solidFill>
+                  <a:srgbClr val="1C2D46"/>
+                </a:solidFill>
+                <a:latin typeface="Aptos"/>
+              </a:defRPr>
+            </a:pPr>
+            <a:r>
+              <a:t>2) Channel aggregation and text profile generation</a:t>
+            </a:r>
+          </a:p>
+          <a:p>
+            <a:pPr>
+              <a:spcAft>
+                <a:spcPts val="900"/>
+              </a:spcAft>
+              <a:defRPr sz="1900">
+                <a:solidFill>
+                  <a:srgbClr val="1C2D46"/>
+                </a:solidFill>
+                <a:latin typeface="Aptos"/>
+              </a:defRPr>
+            </a:pPr>
+            <a:r>
+              <a:t>3) Network scoring (centrality + community detection)</a:t>
+            </a:r>
+          </a:p>
+          <a:p>
+            <a:pPr>
+              <a:spcAft>
+                <a:spcPts val="900"/>
+              </a:spcAft>
+              <a:defRPr sz="1900">
+                <a:solidFill>
+                  <a:srgbClr val="1C2D46"/>
+                </a:solidFill>
+                <a:latin typeface="Aptos"/>
+              </a:defRPr>
+            </a:pPr>
+            <a:r>
+              <a:t>4) TF-IDF relevance + semantic/tone enrichment</a:t>
+            </a:r>
+          </a:p>
+          <a:p>
+            <a:pPr>
+              <a:spcAft>
+                <a:spcPts val="900"/>
+              </a:spcAft>
+              <a:defRPr sz="1900">
+                <a:solidFill>
+                  <a:srgbClr val="1C2D46"/>
+                </a:solidFill>
+                <a:latin typeface="Aptos"/>
+              </a:defRPr>
+            </a:pPr>
+            <a:r>
+              <a:t>5) Evidence guardrail + diversity-aware ranking</a:t>
+            </a:r>
+          </a:p>
+          <a:p>
+            <a:pPr>
+              <a:spcAft>
+                <a:spcPts val="900"/>
+              </a:spcAft>
+              <a:defRPr sz="1900">
+                <a:solidFill>
+                  <a:srgbClr val="1C2D46"/>
+                </a:solidFill>
+                <a:latin typeface="Aptos"/>
+              </a:defRPr>
+            </a:pPr>
+            <a:r>
+              <a:t>6) ML benchmark (Linear/LASSO/Ridge/CART/RF/LightGBM, GroupKFold 5-fold)</a:t>
+            </a:r>
+          </a:p>
+          <a:p>
+            <a:pPr>
+              <a:spcAft>
+                <a:spcPts val="900"/>
+              </a:spcAft>
+              <a:defRPr sz="1900">
+                <a:solidFill>
+                  <a:srgbClr val="1C2D46"/>
+                </a:solidFill>
+                <a:latin typeface="Aptos"/>
+              </a:defRPr>
+            </a:pPr>
+            <a:r>
+              <a:t>7) ROI simulation + strategy generation + executive memo</a:t>
+            </a:r>
+          </a:p>
+        </p:txBody>
+      </p:sp>
+      <p:sp>
+        <p:nvSpPr>
+          <p:cNvPr id="5" name="TextBox 4"/>
+          <p:cNvSpPr txBox="1"/>
+          <p:nvPr/>
+        </p:nvSpPr>
+        <p:spPr>
+          <a:xfrm>
+            <a:off x="502920" y="6428232"/>
+            <a:ext cx="10972800" cy="292608"/>
           </a:xfrm>
           <a:prstGeom prst="rect">
             <a:avLst/>
@@ -7627,129 +8252,6 @@
           </a:bodyPr>
           <a:lstStyle/>
           <a:p>
-            <a:pPr>
-              <a:defRPr b="1" sz="1900">
-                <a:solidFill>
-                  <a:srgbClr val="133A66"/>
-                </a:solidFill>
-                <a:latin typeface="Aptos"/>
-              </a:defRPr>
-            </a:pPr>
-            <a:r>
-              <a:t>Best model: LightGBM</a:t>
-            </a:r>
-          </a:p>
-        </p:txBody>
-      </p:sp>
-      <p:sp>
-        <p:nvSpPr>
-          <p:cNvPr id="7" name="TextBox 6"/>
-          <p:cNvSpPr txBox="1"/>
-          <p:nvPr/>
-        </p:nvSpPr>
-        <p:spPr>
-          <a:xfrm>
-            <a:off x="7498079" y="2304288"/>
-            <a:ext cx="3794760" cy="3730752"/>
-          </a:xfrm>
-          <a:prstGeom prst="rect">
-            <a:avLst/>
-          </a:prstGeom>
-          <a:noFill/>
-        </p:spPr>
-        <p:txBody>
-          <a:bodyPr wrap="square">
-            <a:spAutoFit/>
-          </a:bodyPr>
-          <a:lstStyle/>
-          <a:p>
-            <a:pPr>
-              <a:spcAft>
-                <a:spcPts val="900"/>
-              </a:spcAft>
-              <a:defRPr sz="1600">
-                <a:solidFill>
-                  <a:srgbClr val="1C2D46"/>
-                </a:solidFill>
-                <a:latin typeface="Aptos"/>
-              </a:defRPr>
-            </a:pPr>
-            <a:r>
-              <a:t>Best RMSE: 0.00996</a:t>
-            </a:r>
-          </a:p>
-          <a:p>
-            <a:pPr>
-              <a:spcAft>
-                <a:spcPts val="900"/>
-              </a:spcAft>
-              <a:defRPr sz="1600">
-                <a:solidFill>
-                  <a:srgbClr val="1C2D46"/>
-                </a:solidFill>
-                <a:latin typeface="Aptos"/>
-              </a:defRPr>
-            </a:pPr>
-            <a:r>
-              <a:t>Baseline RMSE: 0.03800</a:t>
-            </a:r>
-          </a:p>
-          <a:p>
-            <a:pPr>
-              <a:spcAft>
-                <a:spcPts val="900"/>
-              </a:spcAft>
-              <a:defRPr sz="1600">
-                <a:solidFill>
-                  <a:srgbClr val="1C2D46"/>
-                </a:solidFill>
-                <a:latin typeface="Aptos"/>
-              </a:defRPr>
-            </a:pPr>
-            <a:r>
-              <a:t>RMSE reduction vs baseline: 73.8%</a:t>
-            </a:r>
-          </a:p>
-          <a:p>
-            <a:pPr>
-              <a:spcAft>
-                <a:spcPts val="900"/>
-              </a:spcAft>
-              <a:defRPr sz="1600">
-                <a:solidFill>
-                  <a:srgbClr val="1C2D46"/>
-                </a:solidFill>
-                <a:latin typeface="Aptos"/>
-              </a:defRPr>
-            </a:pPr>
-            <a:r>
-              <a:t>Group-based CV used to reduce channel leakage risk</a:t>
-            </a:r>
-          </a:p>
-        </p:txBody>
-      </p:sp>
-      <p:sp>
-        <p:nvSpPr>
-          <p:cNvPr id="8" name="TextBox 7"/>
-          <p:cNvSpPr txBox="1"/>
-          <p:nvPr/>
-        </p:nvSpPr>
-        <p:spPr>
-          <a:xfrm>
-            <a:off x="502920" y="6428232"/>
-            <a:ext cx="10972800" cy="292608"/>
-          </a:xfrm>
-          <a:prstGeom prst="rect">
-            <a:avLst/>
-          </a:prstGeom>
-          <a:noFill/>
-        </p:spPr>
-        <p:txBody>
-          <a:bodyPr wrap="none">
-            <a:spAutoFit/>
-          </a:bodyPr>
-          <a:lstStyle/>
-          <a:p>
             <a:pPr algn="r">
               <a:defRPr sz="1000">
                 <a:solidFill>
@@ -7759,7 +8261,7 @@
               </a:defRPr>
             </a:pPr>
             <a:r>
-              <a:t>6 models compared under the same CV protocol</a:t>
+              <a:t>Rubric 3: Technical aspects and method choice</a:t>
             </a:r>
           </a:p>
         </p:txBody>
@@ -7813,7 +8315,7 @@
               </a:defRPr>
             </a:pPr>
             <a:r>
-              <a:t>Explainability (SHAP)</a:t>
+              <a:t>Model Evaluation Results</a:t>
             </a:r>
           </a:p>
         </p:txBody>
@@ -7863,7 +8365,7 @@
       </p:sp>
       <p:pic>
         <p:nvPicPr>
-          <p:cNvPr id="4" name="Picture 3" descr="shap_summary_LightGBM.png"/>
+          <p:cNvPr id="4" name="Picture 3" descr="model_benchmark_rmse.png"/>
           <p:cNvPicPr>
             <a:picLocks noChangeAspect="1"/>
           </p:cNvPicPr>
@@ -7877,8 +8379,8 @@
         </p:blipFill>
         <p:spPr>
           <a:xfrm>
-            <a:off x="685800" y="1828800"/>
-            <a:ext cx="7340308" cy="4389120"/>
+            <a:off x="731520" y="1828800"/>
+            <a:ext cx="8237220" cy="4297680"/>
           </a:xfrm>
           <a:prstGeom prst="rect">
             <a:avLst/>
@@ -7893,8 +8395,8 @@
         </p:nvSpPr>
         <p:spPr>
           <a:xfrm>
-            <a:off x="7269480" y="1828800"/>
-            <a:ext cx="4206240" cy="4389120"/>
+            <a:off x="7315200" y="1828800"/>
+            <a:ext cx="4114800" cy="4297680"/>
           </a:xfrm>
           <a:prstGeom prst="roundRect">
             <a:avLst/>
@@ -7938,8 +8440,8 @@
         </p:nvSpPr>
         <p:spPr>
           <a:xfrm>
-            <a:off x="7470648" y="1938528"/>
-            <a:ext cx="3886200" cy="365760"/>
+            <a:off x="7516368" y="1938528"/>
+            <a:ext cx="3794760" cy="365760"/>
           </a:xfrm>
           <a:prstGeom prst="rect">
             <a:avLst/>
@@ -7961,7 +8463,7 @@
               </a:defRPr>
             </a:pPr>
             <a:r>
-              <a:t>Why SHAP matters</a:t>
+              <a:t>Best model: LightGBM</a:t>
             </a:r>
           </a:p>
         </p:txBody>
@@ -7974,8 +8476,8 @@
         </p:nvSpPr>
         <p:spPr>
           <a:xfrm>
-            <a:off x="7452360" y="2304288"/>
-            <a:ext cx="3886200" cy="3822191"/>
+            <a:off x="7498079" y="2304288"/>
+            <a:ext cx="3794760" cy="3730752"/>
           </a:xfrm>
           <a:prstGeom prst="rect">
             <a:avLst/>
@@ -8000,7 +8502,7 @@
               </a:defRPr>
             </a:pPr>
             <a:r>
-              <a:t>Shows which features drive engagement predictions.</a:t>
+              <a:t>Best RMSE: 0.00996</a:t>
             </a:r>
           </a:p>
           <a:p>
@@ -8016,7 +8518,7 @@
               </a:defRPr>
             </a:pPr>
             <a:r>
-              <a:t>Improves trust for non-technical stakeholders.</a:t>
+              <a:t>Baseline RMSE: 0.03800</a:t>
             </a:r>
           </a:p>
           <a:p>
@@ -8032,7 +8534,23 @@
               </a:defRPr>
             </a:pPr>
             <a:r>
-              <a:t>Helps diagnose unstable or misleading signals.</a:t>
+              <a:t>RMSE reduction vs baseline: 73.8%</a:t>
+            </a:r>
+          </a:p>
+          <a:p>
+            <a:pPr>
+              <a:spcAft>
+                <a:spcPts val="900"/>
+              </a:spcAft>
+              <a:defRPr sz="1600">
+                <a:solidFill>
+                  <a:srgbClr val="1C2D46"/>
+                </a:solidFill>
+                <a:latin typeface="Aptos"/>
+              </a:defRPr>
+            </a:pPr>
+            <a:r>
+              <a:t>Group-based CV used to reduce channel leakage risk</a:t>
             </a:r>
           </a:p>
         </p:txBody>
@@ -8068,7 +8586,7 @@
               </a:defRPr>
             </a:pPr>
             <a:r>
-              <a:t>Rubric 3: Evaluation and sanity checking</a:t>
+              <a:t>6 models compared under the same CV protocol</a:t>
             </a:r>
           </a:p>
         </p:txBody>
@@ -8122,7 +8640,7 @@
               </a:defRPr>
             </a:pPr>
             <a:r>
-              <a:t>Top-10 BOJ Recommendations</a:t>
+              <a:t>Explainability (SHAP)</a:t>
             </a:r>
           </a:p>
         </p:txBody>
@@ -8172,7 +8690,7 @@
       </p:sp>
       <p:pic>
         <p:nvPicPr>
-          <p:cNvPr id="4" name="Picture 3" descr="top10_final_scores.png"/>
+          <p:cNvPr id="4" name="Picture 3" descr="shap_summary_LightGBM.png"/>
           <p:cNvPicPr>
             <a:picLocks noChangeAspect="1"/>
           </p:cNvPicPr>
@@ -8186,8 +8704,8 @@
         </p:blipFill>
         <p:spPr>
           <a:xfrm>
-            <a:off x="658368" y="1828800"/>
-            <a:ext cx="8704385" cy="4526280"/>
+            <a:off x="685800" y="1828800"/>
+            <a:ext cx="7340308" cy="4389120"/>
           </a:xfrm>
           <a:prstGeom prst="rect">
             <a:avLst/>
@@ -8196,14 +8714,59 @@
       </p:pic>
       <p:sp>
         <p:nvSpPr>
-          <p:cNvPr id="5" name="TextBox 4"/>
+          <p:cNvPr id="5" name="Rounded Rectangle 4"/>
+          <p:cNvSpPr/>
+          <p:nvPr/>
+        </p:nvSpPr>
+        <p:spPr>
+          <a:xfrm>
+            <a:off x="7269480" y="1828800"/>
+            <a:ext cx="4206240" cy="4389120"/>
+          </a:xfrm>
+          <a:prstGeom prst="roundRect">
+            <a:avLst/>
+          </a:prstGeom>
+          <a:solidFill>
+            <a:srgbClr val="F2F7FC"/>
+          </a:solidFill>
+          <a:ln w="15875">
+            <a:solidFill>
+              <a:srgbClr val="CDDCEE"/>
+            </a:solidFill>
+          </a:ln>
+        </p:spPr>
+        <p:style>
+          <a:lnRef idx="1">
+            <a:schemeClr val="accent1"/>
+          </a:lnRef>
+          <a:fillRef idx="3">
+            <a:schemeClr val="accent1"/>
+          </a:fillRef>
+          <a:effectRef idx="2">
+            <a:schemeClr val="accent1"/>
+          </a:effectRef>
+          <a:fontRef idx="minor">
+            <a:schemeClr val="lt1"/>
+          </a:fontRef>
+        </p:style>
+        <p:txBody>
+          <a:bodyPr rtlCol="0" anchor="ctr"/>
+          <a:lstStyle/>
+          <a:p>
+            <a:pPr algn="ctr"/>
+          </a:p>
+        </p:txBody>
+      </p:sp>
+      <p:sp>
+        <p:nvSpPr>
+          <p:cNvPr id="6" name="TextBox 5"/>
           <p:cNvSpPr txBox="1"/>
           <p:nvPr/>
         </p:nvSpPr>
         <p:spPr>
           <a:xfrm>
-            <a:off x="502920" y="6428232"/>
-            <a:ext cx="10972800" cy="292608"/>
+            <a:off x="7470648" y="1938528"/>
+            <a:ext cx="3886200" cy="365760"/>
           </a:xfrm>
           <a:prstGeom prst="rect">
             <a:avLst/>
@@ -8216,6 +8779,113 @@
           </a:bodyPr>
           <a:lstStyle/>
           <a:p>
+            <a:pPr>
+              <a:defRPr b="1" sz="1900">
+                <a:solidFill>
+                  <a:srgbClr val="133A66"/>
+                </a:solidFill>
+                <a:latin typeface="Aptos"/>
+              </a:defRPr>
+            </a:pPr>
+            <a:r>
+              <a:t>Why SHAP matters</a:t>
+            </a:r>
+          </a:p>
+        </p:txBody>
+      </p:sp>
+      <p:sp>
+        <p:nvSpPr>
+          <p:cNvPr id="7" name="TextBox 6"/>
+          <p:cNvSpPr txBox="1"/>
+          <p:nvPr/>
+        </p:nvSpPr>
+        <p:spPr>
+          <a:xfrm>
+            <a:off x="7452360" y="2304288"/>
+            <a:ext cx="3886200" cy="3822191"/>
+          </a:xfrm>
+          <a:prstGeom prst="rect">
+            <a:avLst/>
+          </a:prstGeom>
+          <a:noFill/>
+        </p:spPr>
+        <p:txBody>
+          <a:bodyPr wrap="square">
+            <a:spAutoFit/>
+          </a:bodyPr>
+          <a:lstStyle/>
+          <a:p>
+            <a:pPr>
+              <a:spcAft>
+                <a:spcPts val="900"/>
+              </a:spcAft>
+              <a:defRPr sz="1600">
+                <a:solidFill>
+                  <a:srgbClr val="1C2D46"/>
+                </a:solidFill>
+                <a:latin typeface="Aptos"/>
+              </a:defRPr>
+            </a:pPr>
+            <a:r>
+              <a:t>Shows which features drive engagement predictions.</a:t>
+            </a:r>
+          </a:p>
+          <a:p>
+            <a:pPr>
+              <a:spcAft>
+                <a:spcPts val="900"/>
+              </a:spcAft>
+              <a:defRPr sz="1600">
+                <a:solidFill>
+                  <a:srgbClr val="1C2D46"/>
+                </a:solidFill>
+                <a:latin typeface="Aptos"/>
+              </a:defRPr>
+            </a:pPr>
+            <a:r>
+              <a:t>Improves trust for non-technical stakeholders.</a:t>
+            </a:r>
+          </a:p>
+          <a:p>
+            <a:pPr>
+              <a:spcAft>
+                <a:spcPts val="900"/>
+              </a:spcAft>
+              <a:defRPr sz="1600">
+                <a:solidFill>
+                  <a:srgbClr val="1C2D46"/>
+                </a:solidFill>
+                <a:latin typeface="Aptos"/>
+              </a:defRPr>
+            </a:pPr>
+            <a:r>
+              <a:t>Helps diagnose unstable or misleading signals.</a:t>
+            </a:r>
+          </a:p>
+        </p:txBody>
+      </p:sp>
+      <p:sp>
+        <p:nvSpPr>
+          <p:cNvPr id="8" name="TextBox 7"/>
+          <p:cNvSpPr txBox="1"/>
+          <p:nvPr/>
+        </p:nvSpPr>
+        <p:spPr>
+          <a:xfrm>
+            <a:off x="502920" y="6428232"/>
+            <a:ext cx="10972800" cy="292608"/>
+          </a:xfrm>
+          <a:prstGeom prst="rect">
+            <a:avLst/>
+          </a:prstGeom>
+          <a:noFill/>
+        </p:spPr>
+        <p:txBody>
+          <a:bodyPr wrap="none">
+            <a:spAutoFit/>
+          </a:bodyPr>
+          <a:lstStyle/>
+          <a:p>
             <a:pPr algn="r">
               <a:defRPr sz="1000">
                 <a:solidFill>
@@ -8225,7 +8895,7 @@
               </a:defRPr>
             </a:pPr>
             <a:r>
-              <a:t>Top 3 channels: AliceintheRabbitHole, Dr. Sam Ellis, NikkieTutorials</a:t>
+              <a:t>Rubric 3: Evaluation and sanity checking</a:t>
             </a:r>
           </a:p>
         </p:txBody>
@@ -8279,7 +8949,7 @@
               </a:defRPr>
             </a:pPr>
             <a:r>
-              <a:t>Guardrails Against Bad Recommendations</a:t>
+              <a:t>Top-10 BOJ Recommendations</a:t>
             </a:r>
           </a:p>
         </p:txBody>
@@ -8329,7 +8999,7 @@
       </p:sp>
       <p:pic>
         <p:nvPicPr>
-          <p:cNvPr id="4" name="Picture 3" descr="evidence_vs_finalscore_top10.png"/>
+          <p:cNvPr id="4" name="Picture 3" descr="top10_final_scores.png"/>
           <p:cNvPicPr>
             <a:picLocks noChangeAspect="1"/>
           </p:cNvPicPr>
@@ -8343,8 +9013,8 @@
         </p:blipFill>
         <p:spPr>
           <a:xfrm>
-            <a:off x="685800" y="1828800"/>
-            <a:ext cx="6993402" cy="4434840"/>
+            <a:off x="658368" y="1828800"/>
+            <a:ext cx="8704385" cy="4526280"/>
           </a:xfrm>
           <a:prstGeom prst="rect">
             <a:avLst/>
@@ -8353,59 +9023,14 @@
       </p:pic>
       <p:sp>
         <p:nvSpPr>
-          <p:cNvPr id="5" name="Rounded Rectangle 4"/>
-          <p:cNvSpPr/>
-          <p:nvPr/>
-        </p:nvSpPr>
-        <p:spPr>
-          <a:xfrm>
-            <a:off x="7342631" y="1828800"/>
-            <a:ext cx="4069080" cy="4434840"/>
-          </a:xfrm>
-          <a:prstGeom prst="roundRect">
-            <a:avLst/>
-          </a:prstGeom>
-          <a:solidFill>
-            <a:srgbClr val="F2F7FC"/>
-          </a:solidFill>
-          <a:ln w="15875">
-            <a:solidFill>
-              <a:srgbClr val="CDDCEE"/>
-            </a:solidFill>
-          </a:ln>
-        </p:spPr>
-        <p:style>
-          <a:lnRef idx="1">
-            <a:schemeClr val="accent1"/>
-          </a:lnRef>
-          <a:fillRef idx="3">
-            <a:schemeClr val="accent1"/>
-          </a:fillRef>
-          <a:effectRef idx="2">
-            <a:schemeClr val="accent1"/>
-          </a:effectRef>
-          <a:fontRef idx="minor">
-            <a:schemeClr val="lt1"/>
-          </a:fontRef>
-        </p:style>
-        <p:txBody>
-          <a:bodyPr rtlCol="0" anchor="ctr"/>
-          <a:lstStyle/>
-          <a:p>
-            <a:pPr algn="ctr"/>
-          </a:p>
-        </p:txBody>
-      </p:sp>
-      <p:sp>
-        <p:nvSpPr>
-          <p:cNvPr id="6" name="TextBox 5"/>
+          <p:cNvPr id="5" name="TextBox 4"/>
           <p:cNvSpPr txBox="1"/>
           <p:nvPr/>
         </p:nvSpPr>
         <p:spPr>
           <a:xfrm>
-            <a:off x="7543800" y="1938528"/>
-            <a:ext cx="3749040" cy="365760"/>
+            <a:off x="502920" y="6428232"/>
+            <a:ext cx="10972800" cy="292608"/>
           </a:xfrm>
           <a:prstGeom prst="rect">
             <a:avLst/>
@@ -8418,113 +9043,6 @@
           </a:bodyPr>
           <a:lstStyle/>
           <a:p>
-            <a:pPr>
-              <a:defRPr b="1" sz="1900">
-                <a:solidFill>
-                  <a:srgbClr val="133A66"/>
-                </a:solidFill>
-                <a:latin typeface="Aptos"/>
-              </a:defRPr>
-            </a:pPr>
-            <a:r>
-              <a:t>Bias and quality controls</a:t>
-            </a:r>
-          </a:p>
-        </p:txBody>
-      </p:sp>
-      <p:sp>
-        <p:nvSpPr>
-          <p:cNvPr id="7" name="TextBox 6"/>
-          <p:cNvSpPr txBox="1"/>
-          <p:nvPr/>
-        </p:nvSpPr>
-        <p:spPr>
-          <a:xfrm>
-            <a:off x="7525511" y="2304288"/>
-            <a:ext cx="3749040" cy="3867911"/>
-          </a:xfrm>
-          <a:prstGeom prst="rect">
-            <a:avLst/>
-          </a:prstGeom>
-          <a:noFill/>
-        </p:spPr>
-        <p:txBody>
-          <a:bodyPr wrap="square">
-            <a:spAutoFit/>
-          </a:bodyPr>
-          <a:lstStyle/>
-          <a:p>
-            <a:pPr>
-              <a:spcAft>
-                <a:spcPts val="900"/>
-              </a:spcAft>
-              <a:defRPr sz="1600">
-                <a:solidFill>
-                  <a:srgbClr val="1C2D46"/>
-                </a:solidFill>
-                <a:latin typeface="Aptos"/>
-              </a:defRPr>
-            </a:pPr>
-            <a:r>
-              <a:t>Low-evidence channels are automatically down-weighted.</a:t>
-            </a:r>
-          </a:p>
-          <a:p>
-            <a:pPr>
-              <a:spcAft>
-                <a:spcPts val="900"/>
-              </a:spcAft>
-              <a:defRPr sz="1600">
-                <a:solidFill>
-                  <a:srgbClr val="1C2D46"/>
-                </a:solidFill>
-                <a:latin typeface="Aptos"/>
-              </a:defRPr>
-            </a:pPr>
-            <a:r>
-              <a:t>Diversity guardrail prevents single-cluster over-concentration.</a:t>
-            </a:r>
-          </a:p>
-          <a:p>
-            <a:pPr>
-              <a:spcAft>
-                <a:spcPts val="900"/>
-              </a:spcAft>
-              <a:defRPr sz="1600">
-                <a:solidFill>
-                  <a:srgbClr val="1C2D46"/>
-                </a:solidFill>
-                <a:latin typeface="Aptos"/>
-              </a:defRPr>
-            </a:pPr>
-            <a:r>
-              <a:t>Degree-only vs hybrid overlap: 2/10</a:t>
-            </a:r>
-          </a:p>
-        </p:txBody>
-      </p:sp>
-      <p:sp>
-        <p:nvSpPr>
-          <p:cNvPr id="8" name="TextBox 7"/>
-          <p:cNvSpPr txBox="1"/>
-          <p:nvPr/>
-        </p:nvSpPr>
-        <p:spPr>
-          <a:xfrm>
-            <a:off x="502920" y="6428232"/>
-            <a:ext cx="10972800" cy="292608"/>
-          </a:xfrm>
-          <a:prstGeom prst="rect">
-            <a:avLst/>
-          </a:prstGeom>
-          <a:noFill/>
-        </p:spPr>
-        <p:txBody>
-          <a:bodyPr wrap="none">
-            <a:spAutoFit/>
-          </a:bodyPr>
-          <a:lstStyle/>
-          <a:p>
             <a:pPr algn="r">
               <a:defRPr sz="1000">
                 <a:solidFill>
@@ -8534,7 +9052,7 @@
               </a:defRPr>
             </a:pPr>
             <a:r>
-              <a:t>Reduced popularity bias with evidence-based filtering</a:t>
+              <a:t>Top 3 channels: AliceintheRabbitHole, Dr. Sam Ellis, NikkieTutorials</a:t>
             </a:r>
           </a:p>
         </p:txBody>

--- a/slides/AI_MCN_Final_Presentation_EN.pptx
+++ b/slides/AI_MCN_Final_Presentation_EN.pptx
@@ -20,8 +20,6 @@
     <p:sldId id="268" r:id="rId19"/>
     <p:sldId id="269" r:id="rId20"/>
     <p:sldId id="270" r:id="rId21"/>
-    <p:sldId id="271" r:id="rId22"/>
-    <p:sldId id="272" r:id="rId23"/>
   </p:sldIdLst>
   <p:sldSz cx="12191695" cy="6858000" type="screen4x3"/>
   <p:notesSz cx="6858000" cy="9144000"/>
@@ -3127,7 +3125,7 @@
           <a:lstStyle/>
           <a:p>
             <a:pPr>
-              <a:defRPr sz="3400" b="1">
+              <a:defRPr sz="3200" b="1">
                 <a:solidFill>
                   <a:srgbClr val="0F2C59"/>
                 </a:solidFill>
@@ -3135,7 +3133,7 @@
               </a:defRPr>
             </a:pPr>
             <a:r>
-              <a:t>AI-MCN: AI-Augmented Influencer Matching for Beauty Campaigns</a:t>
+              <a:t>AI-MCN: Replacing Traditional MCN Matching with an AI Decision System</a:t>
             </a:r>
           </a:p>
         </p:txBody>
@@ -3148,8 +3146,8 @@
         </p:nvSpPr>
         <p:spPr>
           <a:xfrm>
-            <a:off x="658368" y="1188720"/>
-            <a:ext cx="10789920" cy="594360"/>
+            <a:off x="658368" y="1170432"/>
+            <a:ext cx="10789920" cy="621792"/>
           </a:xfrm>
           <a:prstGeom prst="rect">
             <a:avLst/>
@@ -3171,7 +3169,7 @@
               </a:defRPr>
             </a:pPr>
             <a:r>
-              <a:t>MSIS 521 Course Project | Team Presentation (15 minutes)</a:t>
+              <a:t>MSIS 521 Course Project | 15-minute Presentation</a:t>
             </a:r>
           </a:p>
         </p:txBody>
@@ -3184,8 +3182,8 @@
         </p:nvSpPr>
         <p:spPr>
           <a:xfrm>
-            <a:off x="566928" y="1783080"/>
-            <a:ext cx="2377440" cy="73152"/>
+            <a:off x="566928" y="1755648"/>
+            <a:ext cx="2651760" cy="73152"/>
           </a:xfrm>
           <a:prstGeom prst="rect">
             <a:avLst/>
@@ -3228,7 +3226,7 @@
         <p:spPr>
           <a:xfrm>
             <a:off x="658368" y="2011680"/>
-            <a:ext cx="10881360" cy="2560320"/>
+            <a:ext cx="10881360" cy="2286000"/>
           </a:xfrm>
           <a:prstGeom prst="rect">
             <a:avLst/>
@@ -3243,49 +3241,49 @@
           <a:p>
             <a:pPr>
               <a:spcAft>
-                <a:spcPts val="900"/>
-              </a:spcAft>
-              <a:defRPr sz="2400">
-                <a:solidFill>
-                  <a:srgbClr val="1C2D46"/>
-                </a:solidFill>
-                <a:latin typeface="Aptos"/>
-              </a:defRPr>
-            </a:pPr>
-            <a:r>
-              <a:t>Case: Beauty of Joseon (BOJ), U.S. sunscreen campaign scenario</a:t>
-            </a:r>
-          </a:p>
-          <a:p>
-            <a:pPr>
-              <a:spcAft>
-                <a:spcPts val="900"/>
-              </a:spcAft>
-              <a:defRPr sz="2400">
-                <a:solidFill>
-                  <a:srgbClr val="1C2D46"/>
-                </a:solidFill>
-                <a:latin typeface="Aptos"/>
-              </a:defRPr>
-            </a:pPr>
-            <a:r>
-              <a:t>Prototype: Streamlit app + modular Python AI pipeline</a:t>
-            </a:r>
-          </a:p>
-          <a:p>
-            <a:pPr>
-              <a:spcAft>
-                <a:spcPts val="900"/>
-              </a:spcAft>
-              <a:defRPr sz="2400">
-                <a:solidFill>
-                  <a:srgbClr val="1C2D46"/>
-                </a:solidFill>
-                <a:latin typeface="Aptos"/>
-              </a:defRPr>
-            </a:pPr>
-            <a:r>
-              <a:t>Output: Top-N recommendations, model benchmark, explainability, ROI simulator, memo</a:t>
+                <a:spcPts val="800"/>
+              </a:spcAft>
+              <a:defRPr sz="2300">
+                <a:solidFill>
+                  <a:srgbClr val="1C2D46"/>
+                </a:solidFill>
+                <a:latin typeface="Aptos"/>
+              </a:defRPr>
+            </a:pPr>
+            <a:r>
+              <a:t>Client case: Beauty of Joseon (BOJ), U.S. sunscreen campaign</a:t>
+            </a:r>
+          </a:p>
+          <a:p>
+            <a:pPr>
+              <a:spcAft>
+                <a:spcPts val="800"/>
+              </a:spcAft>
+              <a:defRPr sz="2300">
+                <a:solidFill>
+                  <a:srgbClr val="1C2D46"/>
+                </a:solidFill>
+                <a:latin typeface="Aptos"/>
+              </a:defRPr>
+            </a:pPr>
+            <a:r>
+              <a:t>Goal: help brands find best-fit influencers directly with transparent AI logic</a:t>
+            </a:r>
+          </a:p>
+          <a:p>
+            <a:pPr>
+              <a:spcAft>
+                <a:spcPts val="800"/>
+              </a:spcAft>
+              <a:defRPr sz="2300">
+                <a:solidFill>
+                  <a:srgbClr val="1C2D46"/>
+                </a:solidFill>
+                <a:latin typeface="Aptos"/>
+              </a:defRPr>
+            </a:pPr>
+            <a:r>
+              <a:t>Team: [Add names]</a:t>
             </a:r>
           </a:p>
         </p:txBody>
@@ -3321,7 +3319,7 @@
               </a:defRPr>
             </a:pPr>
             <a:r>
-              <a:t>AI-MCN | MSIS 521</a:t>
+              <a:t>Section 1 | Title and Team</a:t>
             </a:r>
           </a:p>
         </p:txBody>
@@ -3367,7 +3365,7 @@
           <a:lstStyle/>
           <a:p>
             <a:pPr>
-              <a:defRPr sz="3400" b="1">
+              <a:defRPr sz="3200" b="1">
                 <a:solidFill>
                   <a:srgbClr val="0F2C59"/>
                 </a:solidFill>
@@ -3375,7 +3373,7 @@
               </a:defRPr>
             </a:pPr>
             <a:r>
-              <a:t>Guardrails Against Bad Recommendations</a:t>
+              <a:t>Model Results and Validation</a:t>
             </a:r>
           </a:p>
         </p:txBody>
@@ -3388,8 +3386,8 @@
         </p:nvSpPr>
         <p:spPr>
           <a:xfrm>
-            <a:off x="566928" y="1783080"/>
-            <a:ext cx="2377440" cy="73152"/>
+            <a:off x="566928" y="1755648"/>
+            <a:ext cx="2651760" cy="73152"/>
           </a:xfrm>
           <a:prstGeom prst="rect">
             <a:avLst/>
@@ -3425,7 +3423,7 @@
       </p:sp>
       <p:pic>
         <p:nvPicPr>
-          <p:cNvPr id="4" name="Picture 3" descr="evidence_vs_finalscore_top10.png"/>
+          <p:cNvPr id="4" name="Picture 3" descr="model_benchmark_rmse.png"/>
           <p:cNvPicPr>
             <a:picLocks noChangeAspect="1"/>
           </p:cNvPicPr>
@@ -3439,8 +3437,8 @@
         </p:blipFill>
         <p:spPr>
           <a:xfrm>
-            <a:off x="685800" y="1828800"/>
-            <a:ext cx="6993402" cy="4434840"/>
+            <a:off x="713232" y="1828800"/>
+            <a:ext cx="8500110" cy="4434840"/>
           </a:xfrm>
           <a:prstGeom prst="rect">
             <a:avLst/>
@@ -3455,7 +3453,7 @@
         </p:nvSpPr>
         <p:spPr>
           <a:xfrm>
-            <a:off x="7342631" y="1828800"/>
+            <a:off x="7315200" y="1828800"/>
             <a:ext cx="4069080" cy="4434840"/>
           </a:xfrm>
           <a:prstGeom prst="roundRect">
@@ -3500,8 +3498,8 @@
         </p:nvSpPr>
         <p:spPr>
           <a:xfrm>
-            <a:off x="7543800" y="1938528"/>
-            <a:ext cx="3749040" cy="365760"/>
+            <a:off x="7498079" y="1938528"/>
+            <a:ext cx="3794760" cy="347472"/>
           </a:xfrm>
           <a:prstGeom prst="rect">
             <a:avLst/>
@@ -3515,7 +3513,7 @@
           <a:lstStyle/>
           <a:p>
             <a:pPr>
-              <a:defRPr b="1" sz="1900">
+              <a:defRPr b="1" sz="1800">
                 <a:solidFill>
                   <a:srgbClr val="133A66"/>
                 </a:solidFill>
@@ -3523,7 +3521,7 @@
               </a:defRPr>
             </a:pPr>
             <a:r>
-              <a:t>Bias and quality controls</a:t>
+              <a:t>Best model: LightGBM</a:t>
             </a:r>
           </a:p>
         </p:txBody>
@@ -3536,8 +3534,8 @@
         </p:nvSpPr>
         <p:spPr>
           <a:xfrm>
-            <a:off x="7525511" y="2304288"/>
-            <a:ext cx="3749040" cy="3867911"/>
+            <a:off x="7479792" y="2267712"/>
+            <a:ext cx="3813048" cy="3904487"/>
           </a:xfrm>
           <a:prstGeom prst="rect">
             <a:avLst/>
@@ -3552,49 +3550,65 @@
           <a:p>
             <a:pPr>
               <a:spcAft>
-                <a:spcPts val="900"/>
-              </a:spcAft>
-              <a:defRPr sz="1600">
-                <a:solidFill>
-                  <a:srgbClr val="1C2D46"/>
-                </a:solidFill>
-                <a:latin typeface="Aptos"/>
-              </a:defRPr>
-            </a:pPr>
-            <a:r>
-              <a:t>Low-evidence channels are automatically down-weighted.</a:t>
-            </a:r>
-          </a:p>
-          <a:p>
-            <a:pPr>
-              <a:spcAft>
-                <a:spcPts val="900"/>
-              </a:spcAft>
-              <a:defRPr sz="1600">
-                <a:solidFill>
-                  <a:srgbClr val="1C2D46"/>
-                </a:solidFill>
-                <a:latin typeface="Aptos"/>
-              </a:defRPr>
-            </a:pPr>
-            <a:r>
-              <a:t>Diversity guardrail prevents single-cluster over-concentration.</a:t>
-            </a:r>
-          </a:p>
-          <a:p>
-            <a:pPr>
-              <a:spcAft>
-                <a:spcPts val="900"/>
-              </a:spcAft>
-              <a:defRPr sz="1600">
-                <a:solidFill>
-                  <a:srgbClr val="1C2D46"/>
-                </a:solidFill>
-                <a:latin typeface="Aptos"/>
-              </a:defRPr>
-            </a:pPr>
-            <a:r>
-              <a:t>Degree-only vs hybrid overlap: 2/10</a:t>
+                <a:spcPts val="800"/>
+              </a:spcAft>
+              <a:defRPr sz="1500">
+                <a:solidFill>
+                  <a:srgbClr val="1C2D46"/>
+                </a:solidFill>
+                <a:latin typeface="Aptos"/>
+              </a:defRPr>
+            </a:pPr>
+            <a:r>
+              <a:t>Best RMSE: 0.00996</a:t>
+            </a:r>
+          </a:p>
+          <a:p>
+            <a:pPr>
+              <a:spcAft>
+                <a:spcPts val="800"/>
+              </a:spcAft>
+              <a:defRPr sz="1500">
+                <a:solidFill>
+                  <a:srgbClr val="1C2D46"/>
+                </a:solidFill>
+                <a:latin typeface="Aptos"/>
+              </a:defRPr>
+            </a:pPr>
+            <a:r>
+              <a:t>Baseline RMSE: 0.03800</a:t>
+            </a:r>
+          </a:p>
+          <a:p>
+            <a:pPr>
+              <a:spcAft>
+                <a:spcPts val="800"/>
+              </a:spcAft>
+              <a:defRPr sz="1500">
+                <a:solidFill>
+                  <a:srgbClr val="1C2D46"/>
+                </a:solidFill>
+                <a:latin typeface="Aptos"/>
+              </a:defRPr>
+            </a:pPr>
+            <a:r>
+              <a:t>Relative RMSE reduction: 73.8%</a:t>
+            </a:r>
+          </a:p>
+          <a:p>
+            <a:pPr>
+              <a:spcAft>
+                <a:spcPts val="800"/>
+              </a:spcAft>
+              <a:defRPr sz="1500">
+                <a:solidFill>
+                  <a:srgbClr val="1C2D46"/>
+                </a:solidFill>
+                <a:latin typeface="Aptos"/>
+              </a:defRPr>
+            </a:pPr>
+            <a:r>
+              <a:t>Interpretation: meaningful uplift over naive baseline</a:t>
             </a:r>
           </a:p>
         </p:txBody>
@@ -3630,7 +3644,7 @@
               </a:defRPr>
             </a:pPr>
             <a:r>
-              <a:t>Reduced popularity bias with evidence-based filtering</a:t>
+              <a:t>Section 5 | Validation Output</a:t>
             </a:r>
           </a:p>
         </p:txBody>
@@ -3676,7 +3690,7 @@
           <a:lstStyle/>
           <a:p>
             <a:pPr>
-              <a:defRPr sz="3400" b="1">
+              <a:defRPr sz="3200" b="1">
                 <a:solidFill>
                   <a:srgbClr val="0F2C59"/>
                 </a:solidFill>
@@ -3684,7 +3698,7 @@
               </a:defRPr>
             </a:pPr>
             <a:r>
-              <a:t>Network Diversity Diagnostics</a:t>
+              <a:t>Prototype Demo: Input to Output</a:t>
             </a:r>
           </a:p>
         </p:txBody>
@@ -3697,8 +3711,8 @@
         </p:nvSpPr>
         <p:spPr>
           <a:xfrm>
-            <a:off x="566928" y="1783080"/>
-            <a:ext cx="2377440" cy="73152"/>
+            <a:off x="566928" y="1755648"/>
+            <a:ext cx="2651760" cy="73152"/>
           </a:xfrm>
           <a:prstGeom prst="rect">
             <a:avLst/>
@@ -3734,7 +3748,7 @@
       </p:sp>
       <p:pic>
         <p:nvPicPr>
-          <p:cNvPr id="4" name="Picture 3" descr="community_distribution_clean.png"/>
+          <p:cNvPr id="4" name="Picture 3" descr="top10_final_scores.png"/>
           <p:cNvPicPr>
             <a:picLocks noChangeAspect="1"/>
           </p:cNvPicPr>
@@ -3748,8 +3762,8 @@
         </p:blipFill>
         <p:spPr>
           <a:xfrm>
-            <a:off x="685800" y="1828800"/>
-            <a:ext cx="8686800" cy="4389120"/>
+            <a:off x="6400800" y="1920240"/>
+            <a:ext cx="5029200" cy="2615184"/>
           </a:xfrm>
           <a:prstGeom prst="rect">
             <a:avLst/>
@@ -3758,46 +3772,104 @@
       </p:pic>
       <p:sp>
         <p:nvSpPr>
-          <p:cNvPr id="5" name="Rounded Rectangle 4"/>
-          <p:cNvSpPr/>
-          <p:nvPr/>
-        </p:nvSpPr>
-        <p:spPr>
-          <a:xfrm>
-            <a:off x="7315200" y="1828800"/>
-            <a:ext cx="4114800" cy="4389120"/>
-          </a:xfrm>
-          <a:prstGeom prst="roundRect">
-            <a:avLst/>
-          </a:prstGeom>
-          <a:solidFill>
-            <a:srgbClr val="F2F7FC"/>
-          </a:solidFill>
-          <a:ln w="15875">
-            <a:solidFill>
-              <a:srgbClr val="CDDCEE"/>
-            </a:solidFill>
-          </a:ln>
-        </p:spPr>
-        <p:style>
-          <a:lnRef idx="1">
-            <a:schemeClr val="accent1"/>
-          </a:lnRef>
-          <a:fillRef idx="3">
-            <a:schemeClr val="accent1"/>
-          </a:fillRef>
-          <a:effectRef idx="2">
-            <a:schemeClr val="accent1"/>
-          </a:effectRef>
-          <a:fontRef idx="minor">
-            <a:schemeClr val="lt1"/>
-          </a:fontRef>
-        </p:style>
-        <p:txBody>
-          <a:bodyPr rtlCol="0" anchor="ctr"/>
-          <a:lstStyle/>
-          <a:p>
-            <a:pPr algn="ctr"/>
+          <p:cNvPr id="5" name="TextBox 4"/>
+          <p:cNvSpPr txBox="1"/>
+          <p:nvPr/>
+        </p:nvSpPr>
+        <p:spPr>
+          <a:xfrm>
+            <a:off x="731520" y="1828800"/>
+            <a:ext cx="5486400" cy="4480560"/>
+          </a:xfrm>
+          <a:prstGeom prst="rect">
+            <a:avLst/>
+          </a:prstGeom>
+          <a:noFill/>
+        </p:spPr>
+        <p:txBody>
+          <a:bodyPr wrap="square">
+            <a:spAutoFit/>
+          </a:bodyPr>
+          <a:lstStyle/>
+          <a:p>
+            <a:pPr>
+              <a:spcAft>
+                <a:spcPts val="800"/>
+              </a:spcAft>
+              <a:defRPr sz="1700">
+                <a:solidFill>
+                  <a:srgbClr val="1C2D46"/>
+                </a:solidFill>
+                <a:latin typeface="Aptos"/>
+              </a:defRPr>
+            </a:pPr>
+            <a:r>
+              <a:t>Live flow: campaign input -&gt; Top-N shortlist -&gt; rationale/risk</a:t>
+            </a:r>
+          </a:p>
+          <a:p>
+            <a:pPr>
+              <a:spcAft>
+                <a:spcPts val="800"/>
+              </a:spcAft>
+              <a:defRPr sz="1700">
+                <a:solidFill>
+                  <a:srgbClr val="1C2D46"/>
+                </a:solidFill>
+                <a:latin typeface="Aptos"/>
+              </a:defRPr>
+            </a:pPr>
+            <a:r>
+              <a:t>Interactive tabs: Network, Text Intelligence, ML, ROI</a:t>
+            </a:r>
+          </a:p>
+          <a:p>
+            <a:pPr>
+              <a:spcAft>
+                <a:spcPts val="800"/>
+              </a:spcAft>
+              <a:defRPr sz="1700">
+                <a:solidFill>
+                  <a:srgbClr val="1C2D46"/>
+                </a:solidFill>
+                <a:latin typeface="Aptos"/>
+              </a:defRPr>
+            </a:pPr>
+            <a:r>
+              <a:t>Use case A: BOJ sunscreen launch planning</a:t>
+            </a:r>
+          </a:p>
+          <a:p>
+            <a:pPr>
+              <a:spcAft>
+                <a:spcPts val="800"/>
+              </a:spcAft>
+              <a:defRPr sz="1700">
+                <a:solidFill>
+                  <a:srgbClr val="1C2D46"/>
+                </a:solidFill>
+                <a:latin typeface="Aptos"/>
+              </a:defRPr>
+            </a:pPr>
+            <a:r>
+              <a:t>Use case B: CeraVe benchmark for shortlist calibration</a:t>
+            </a:r>
+          </a:p>
+          <a:p>
+            <a:pPr>
+              <a:spcAft>
+                <a:spcPts val="800"/>
+              </a:spcAft>
+              <a:defRPr sz="1700">
+                <a:solidFill>
+                  <a:srgbClr val="1C2D46"/>
+                </a:solidFill>
+                <a:latin typeface="Aptos"/>
+              </a:defRPr>
+            </a:pPr>
+            <a:r>
+              <a:t>Decision output: ranked creators + risk notes + memo export</a:t>
+            </a:r>
           </a:p>
         </p:txBody>
       </p:sp>
@@ -3809,8 +3881,8 @@
         </p:nvSpPr>
         <p:spPr>
           <a:xfrm>
-            <a:off x="7516368" y="1938528"/>
-            <a:ext cx="3794760" cy="365760"/>
+            <a:off x="502920" y="6428232"/>
+            <a:ext cx="10972800" cy="292608"/>
           </a:xfrm>
           <a:prstGeom prst="rect">
             <a:avLst/>
@@ -3823,113 +3895,6 @@
           </a:bodyPr>
           <a:lstStyle/>
           <a:p>
-            <a:pPr>
-              <a:defRPr b="1" sz="1900">
-                <a:solidFill>
-                  <a:srgbClr val="133A66"/>
-                </a:solidFill>
-                <a:latin typeface="Aptos"/>
-              </a:defRPr>
-            </a:pPr>
-            <a:r>
-              <a:t>Community results</a:t>
-            </a:r>
-          </a:p>
-        </p:txBody>
-      </p:sp>
-      <p:sp>
-        <p:nvSpPr>
-          <p:cNvPr id="7" name="TextBox 6"/>
-          <p:cNvSpPr txBox="1"/>
-          <p:nvPr/>
-        </p:nvSpPr>
-        <p:spPr>
-          <a:xfrm>
-            <a:off x="7498079" y="2304288"/>
-            <a:ext cx="3794760" cy="3822191"/>
-          </a:xfrm>
-          <a:prstGeom prst="rect">
-            <a:avLst/>
-          </a:prstGeom>
-          <a:noFill/>
-        </p:spPr>
-        <p:txBody>
-          <a:bodyPr wrap="square">
-            <a:spAutoFit/>
-          </a:bodyPr>
-          <a:lstStyle/>
-          <a:p>
-            <a:pPr>
-              <a:spcAft>
-                <a:spcPts val="900"/>
-              </a:spcAft>
-              <a:defRPr sz="1600">
-                <a:solidFill>
-                  <a:srgbClr val="1C2D46"/>
-                </a:solidFill>
-                <a:latin typeface="Aptos"/>
-              </a:defRPr>
-            </a:pPr>
-            <a:r>
-              <a:t>Non-micro communities discovered: 6</a:t>
-            </a:r>
-          </a:p>
-          <a:p>
-            <a:pPr>
-              <a:spcAft>
-                <a:spcPts val="900"/>
-              </a:spcAft>
-              <a:defRPr sz="1600">
-                <a:solidFill>
-                  <a:srgbClr val="1C2D46"/>
-                </a:solidFill>
-                <a:latin typeface="Aptos"/>
-              </a:defRPr>
-            </a:pPr>
-            <a:r>
-              <a:t>Largest non-micro community share: 43.8%</a:t>
-            </a:r>
-          </a:p>
-          <a:p>
-            <a:pPr>
-              <a:spcAft>
-                <a:spcPts val="900"/>
-              </a:spcAft>
-              <a:defRPr sz="1600">
-                <a:solidFill>
-                  <a:srgbClr val="1C2D46"/>
-                </a:solidFill>
-                <a:latin typeface="Aptos"/>
-              </a:defRPr>
-            </a:pPr>
-            <a:r>
-              <a:t>Micro/isolated channels separated to improve readability</a:t>
-            </a:r>
-          </a:p>
-        </p:txBody>
-      </p:sp>
-      <p:sp>
-        <p:nvSpPr>
-          <p:cNvPr id="8" name="TextBox 7"/>
-          <p:cNvSpPr txBox="1"/>
-          <p:nvPr/>
-        </p:nvSpPr>
-        <p:spPr>
-          <a:xfrm>
-            <a:off x="502920" y="6428232"/>
-            <a:ext cx="10972800" cy="292608"/>
-          </a:xfrm>
-          <a:prstGeom prst="rect">
-            <a:avLst/>
-          </a:prstGeom>
-          <a:noFill/>
-        </p:spPr>
-        <p:txBody>
-          <a:bodyPr wrap="none">
-            <a:spAutoFit/>
-          </a:bodyPr>
-          <a:lstStyle/>
-          <a:p>
             <a:pPr algn="r">
               <a:defRPr sz="1000">
                 <a:solidFill>
@@ -3939,7 +3904,7 @@
               </a:defRPr>
             </a:pPr>
             <a:r>
-              <a:t>Community-aware matching for healthier shortlist diversity</a:t>
+              <a:t>Section 6 | Live Demo</a:t>
             </a:r>
           </a:p>
         </p:txBody>
@@ -3985,7 +3950,7 @@
           <a:lstStyle/>
           <a:p>
             <a:pPr>
-              <a:defRPr sz="3400" b="1">
+              <a:defRPr sz="3200" b="1">
                 <a:solidFill>
                   <a:srgbClr val="0F2C59"/>
                 </a:solidFill>
@@ -3993,7 +3958,7 @@
               </a:defRPr>
             </a:pPr>
             <a:r>
-              <a:t>ROI Scenario (Business Lens)</a:t>
+              <a:t>Business Impact</a:t>
             </a:r>
           </a:p>
         </p:txBody>
@@ -4006,8 +3971,8 @@
         </p:nvSpPr>
         <p:spPr>
           <a:xfrm>
-            <a:off x="566928" y="1783080"/>
-            <a:ext cx="2377440" cy="73152"/>
+            <a:off x="566928" y="1755648"/>
+            <a:ext cx="2651760" cy="73152"/>
           </a:xfrm>
           <a:prstGeom prst="rect">
             <a:avLst/>
@@ -4041,40 +4006,16 @@
           </a:p>
         </p:txBody>
       </p:sp>
-      <p:pic>
-        <p:nvPicPr>
-          <p:cNvPr id="4" name="Picture 3" descr="roi_funnel_base.png"/>
-          <p:cNvPicPr>
-            <a:picLocks noChangeAspect="1"/>
-          </p:cNvPicPr>
-          <p:nvPr/>
-        </p:nvPicPr>
-        <p:blipFill>
-          <a:blip r:embed="rId2"/>
-          <a:stretch>
-            <a:fillRect/>
-          </a:stretch>
-        </p:blipFill>
-        <p:spPr>
-          <a:xfrm>
-            <a:off x="685800" y="1828800"/>
-            <a:ext cx="8046720" cy="4480560"/>
-          </a:xfrm>
-          <a:prstGeom prst="rect">
-            <a:avLst/>
-          </a:prstGeom>
-        </p:spPr>
-      </p:pic>
-      <p:sp>
-        <p:nvSpPr>
-          <p:cNvPr id="5" name="Rounded Rectangle 4"/>
+      <p:sp>
+        <p:nvSpPr>
+          <p:cNvPr id="4" name="Rounded Rectangle 3"/>
           <p:cNvSpPr/>
           <p:nvPr/>
         </p:nvSpPr>
         <p:spPr>
           <a:xfrm>
-            <a:off x="7178040" y="1828800"/>
-            <a:ext cx="4251960" cy="4480560"/>
+            <a:off x="621792" y="1828800"/>
+            <a:ext cx="5486400" cy="4389120"/>
           </a:xfrm>
           <a:prstGeom prst="roundRect">
             <a:avLst/>
@@ -4112,14 +4053,14 @@
       </p:sp>
       <p:sp>
         <p:nvSpPr>
-          <p:cNvPr id="6" name="TextBox 5"/>
+          <p:cNvPr id="5" name="TextBox 4"/>
           <p:cNvSpPr txBox="1"/>
           <p:nvPr/>
         </p:nvSpPr>
         <p:spPr>
           <a:xfrm>
-            <a:off x="7379208" y="1938528"/>
-            <a:ext cx="3931920" cy="365760"/>
+            <a:off x="804672" y="1938528"/>
+            <a:ext cx="5212080" cy="347472"/>
           </a:xfrm>
           <a:prstGeom prst="rect">
             <a:avLst/>
@@ -4133,7 +4074,7 @@
           <a:lstStyle/>
           <a:p>
             <a:pPr>
-              <a:defRPr b="1" sz="1900">
+              <a:defRPr b="1" sz="1800">
                 <a:solidFill>
                   <a:srgbClr val="133A66"/>
                 </a:solidFill>
@@ -4141,21 +4082,21 @@
               </a:defRPr>
             </a:pPr>
             <a:r>
-              <a:t>Base scenario outputs</a:t>
-            </a:r>
-          </a:p>
-        </p:txBody>
-      </p:sp>
-      <p:sp>
-        <p:nvSpPr>
-          <p:cNvPr id="7" name="TextBox 6"/>
+              <a:t>How this helps the client</a:t>
+            </a:r>
+          </a:p>
+        </p:txBody>
+      </p:sp>
+      <p:sp>
+        <p:nvSpPr>
+          <p:cNvPr id="6" name="TextBox 5"/>
           <p:cNvSpPr txBox="1"/>
           <p:nvPr/>
         </p:nvSpPr>
         <p:spPr>
           <a:xfrm>
-            <a:off x="7360919" y="2304288"/>
-            <a:ext cx="3931920" cy="3913632"/>
+            <a:off x="786384" y="2267712"/>
+            <a:ext cx="5230368" cy="3858768"/>
           </a:xfrm>
           <a:prstGeom prst="rect">
             <a:avLst/>
@@ -4170,82 +4111,111 @@
           <a:p>
             <a:pPr>
               <a:spcAft>
-                <a:spcPts val="900"/>
-              </a:spcAft>
-              <a:defRPr sz="1600">
-                <a:solidFill>
-                  <a:srgbClr val="1C2D46"/>
-                </a:solidFill>
-                <a:latin typeface="Aptos"/>
-              </a:defRPr>
-            </a:pPr>
-            <a:r>
-              <a:t>Budget: $50,000</a:t>
-            </a:r>
-          </a:p>
-          <a:p>
-            <a:pPr>
-              <a:spcAft>
-                <a:spcPts val="900"/>
-              </a:spcAft>
-              <a:defRPr sz="1600">
-                <a:solidFill>
-                  <a:srgbClr val="1C2D46"/>
-                </a:solidFill>
-                <a:latin typeface="Aptos"/>
-              </a:defRPr>
-            </a:pPr>
-            <a:r>
-              <a:t>Impressions: 2,777,777</a:t>
-            </a:r>
-          </a:p>
-          <a:p>
-            <a:pPr>
-              <a:spcAft>
-                <a:spcPts val="900"/>
-              </a:spcAft>
-              <a:defRPr sz="1600">
-                <a:solidFill>
-                  <a:srgbClr val="1C2D46"/>
-                </a:solidFill>
-                <a:latin typeface="Aptos"/>
-              </a:defRPr>
-            </a:pPr>
-            <a:r>
-              <a:t>Clicks: 49,999</a:t>
-            </a:r>
-          </a:p>
-          <a:p>
-            <a:pPr>
-              <a:spcAft>
-                <a:spcPts val="900"/>
-              </a:spcAft>
-              <a:defRPr sz="1600">
-                <a:solidFill>
-                  <a:srgbClr val="1C2D46"/>
-                </a:solidFill>
-                <a:latin typeface="Aptos"/>
-              </a:defRPr>
-            </a:pPr>
-            <a:r>
-              <a:t>Conversions: 1,499</a:t>
-            </a:r>
-          </a:p>
-          <a:p>
-            <a:pPr>
-              <a:spcAft>
-                <a:spcPts val="900"/>
-              </a:spcAft>
-              <a:defRPr sz="1600">
-                <a:solidFill>
-                  <a:srgbClr val="1C2D46"/>
-                </a:solidFill>
-                <a:latin typeface="Aptos"/>
-              </a:defRPr>
-            </a:pPr>
-            <a:r>
-              <a:t>Expected ROAS: 1.14x</a:t>
-            </a:r>
+                <a:spcPts val="800"/>
+              </a:spcAft>
+              <a:defRPr sz="1500">
+                <a:solidFill>
+                  <a:srgbClr val="1C2D46"/>
+                </a:solidFill>
+                <a:latin typeface="Aptos"/>
+              </a:defRPr>
+            </a:pPr>
+            <a:r>
+              <a:t>Faster influencer shortlisting and campaign planning</a:t>
+            </a:r>
+          </a:p>
+          <a:p>
+            <a:pPr>
+              <a:spcAft>
+                <a:spcPts val="800"/>
+              </a:spcAft>
+              <a:defRPr sz="1500">
+                <a:solidFill>
+                  <a:srgbClr val="1C2D46"/>
+                </a:solidFill>
+                <a:latin typeface="Aptos"/>
+              </a:defRPr>
+            </a:pPr>
+            <a:r>
+              <a:t>Transparent recommendation logic for stakeholder trust</a:t>
+            </a:r>
+          </a:p>
+          <a:p>
+            <a:pPr>
+              <a:spcAft>
+                <a:spcPts val="800"/>
+              </a:spcAft>
+              <a:defRPr sz="1500">
+                <a:solidFill>
+                  <a:srgbClr val="1C2D46"/>
+                </a:solidFill>
+                <a:latin typeface="Aptos"/>
+              </a:defRPr>
+            </a:pPr>
+            <a:r>
+              <a:t>Reduced mismatch risk before spending budget</a:t>
+            </a:r>
+          </a:p>
+          <a:p>
+            <a:pPr>
+              <a:spcAft>
+                <a:spcPts val="800"/>
+              </a:spcAft>
+              <a:defRPr sz="1500">
+                <a:solidFill>
+                  <a:srgbClr val="1C2D46"/>
+                </a:solidFill>
+                <a:latin typeface="Aptos"/>
+              </a:defRPr>
+            </a:pPr>
+            <a:r>
+              <a:t>Scenario-based ROI planning and expectation setting</a:t>
+            </a:r>
+          </a:p>
+        </p:txBody>
+      </p:sp>
+      <p:sp>
+        <p:nvSpPr>
+          <p:cNvPr id="7" name="Rounded Rectangle 6"/>
+          <p:cNvSpPr/>
+          <p:nvPr/>
+        </p:nvSpPr>
+        <p:spPr>
+          <a:xfrm>
+            <a:off x="6172200" y="1828800"/>
+            <a:ext cx="5394960" cy="4389120"/>
+          </a:xfrm>
+          <a:prstGeom prst="roundRect">
+            <a:avLst/>
+          </a:prstGeom>
+          <a:solidFill>
+            <a:srgbClr val="F2F7FC"/>
+          </a:solidFill>
+          <a:ln w="15875">
+            <a:solidFill>
+              <a:srgbClr val="CDDCEE"/>
+            </a:solidFill>
+          </a:ln>
+        </p:spPr>
+        <p:style>
+          <a:lnRef idx="1">
+            <a:schemeClr val="accent1"/>
+          </a:lnRef>
+          <a:fillRef idx="3">
+            <a:schemeClr val="accent1"/>
+          </a:fillRef>
+          <a:effectRef idx="2">
+            <a:schemeClr val="accent1"/>
+          </a:effectRef>
+          <a:fontRef idx="minor">
+            <a:schemeClr val="lt1"/>
+          </a:fontRef>
+        </p:style>
+        <p:txBody>
+          <a:bodyPr rtlCol="0" anchor="ctr"/>
+          <a:lstStyle/>
+          <a:p>
+            <a:pPr algn="ctr"/>
           </a:p>
         </p:txBody>
       </p:sp>
@@ -4257,8 +4227,8 @@
         </p:nvSpPr>
         <p:spPr>
           <a:xfrm>
-            <a:off x="502920" y="6428232"/>
-            <a:ext cx="10972800" cy="292608"/>
+            <a:off x="6355080" y="1938528"/>
+            <a:ext cx="5120640" cy="347472"/>
           </a:xfrm>
           <a:prstGeom prst="rect">
             <a:avLst/>
@@ -4271,6 +4241,129 @@
           </a:bodyPr>
           <a:lstStyle/>
           <a:p>
+            <a:pPr>
+              <a:defRPr b="1" sz="1800">
+                <a:solidFill>
+                  <a:srgbClr val="133A66"/>
+                </a:solidFill>
+                <a:latin typeface="Aptos"/>
+              </a:defRPr>
+            </a:pPr>
+            <a:r>
+              <a:t>Decisions improved</a:t>
+            </a:r>
+          </a:p>
+        </p:txBody>
+      </p:sp>
+      <p:sp>
+        <p:nvSpPr>
+          <p:cNvPr id="9" name="TextBox 8"/>
+          <p:cNvSpPr txBox="1"/>
+          <p:nvPr/>
+        </p:nvSpPr>
+        <p:spPr>
+          <a:xfrm>
+            <a:off x="6336792" y="2267712"/>
+            <a:ext cx="5138928" cy="3858768"/>
+          </a:xfrm>
+          <a:prstGeom prst="rect">
+            <a:avLst/>
+          </a:prstGeom>
+          <a:noFill/>
+        </p:spPr>
+        <p:txBody>
+          <a:bodyPr wrap="square">
+            <a:spAutoFit/>
+          </a:bodyPr>
+          <a:lstStyle/>
+          <a:p>
+            <a:pPr>
+              <a:spcAft>
+                <a:spcPts val="800"/>
+              </a:spcAft>
+              <a:defRPr sz="1500">
+                <a:solidFill>
+                  <a:srgbClr val="1C2D46"/>
+                </a:solidFill>
+                <a:latin typeface="Aptos"/>
+              </a:defRPr>
+            </a:pPr>
+            <a:r>
+              <a:t>Who to prioritize in outreach</a:t>
+            </a:r>
+          </a:p>
+          <a:p>
+            <a:pPr>
+              <a:spcAft>
+                <a:spcPts val="800"/>
+              </a:spcAft>
+              <a:defRPr sz="1500">
+                <a:solidFill>
+                  <a:srgbClr val="1C2D46"/>
+                </a:solidFill>
+                <a:latin typeface="Aptos"/>
+              </a:defRPr>
+            </a:pPr>
+            <a:r>
+              <a:t>How many creators to activate by objective</a:t>
+            </a:r>
+          </a:p>
+          <a:p>
+            <a:pPr>
+              <a:spcAft>
+                <a:spcPts val="800"/>
+              </a:spcAft>
+              <a:defRPr sz="1500">
+                <a:solidFill>
+                  <a:srgbClr val="1C2D46"/>
+                </a:solidFill>
+                <a:latin typeface="Aptos"/>
+              </a:defRPr>
+            </a:pPr>
+            <a:r>
+              <a:t>How much budget risk is acceptable</a:t>
+            </a:r>
+          </a:p>
+          <a:p>
+            <a:pPr>
+              <a:spcAft>
+                <a:spcPts val="800"/>
+              </a:spcAft>
+              <a:defRPr sz="1500">
+                <a:solidFill>
+                  <a:srgbClr val="1C2D46"/>
+                </a:solidFill>
+                <a:latin typeface="Aptos"/>
+              </a:defRPr>
+            </a:pPr>
+            <a:r>
+              <a:t>Base ROI scenario in run: 1.14x expected ROAS</a:t>
+            </a:r>
+          </a:p>
+        </p:txBody>
+      </p:sp>
+      <p:sp>
+        <p:nvSpPr>
+          <p:cNvPr id="10" name="TextBox 9"/>
+          <p:cNvSpPr txBox="1"/>
+          <p:nvPr/>
+        </p:nvSpPr>
+        <p:spPr>
+          <a:xfrm>
+            <a:off x="502920" y="6428232"/>
+            <a:ext cx="10972800" cy="292608"/>
+          </a:xfrm>
+          <a:prstGeom prst="rect">
+            <a:avLst/>
+          </a:prstGeom>
+          <a:noFill/>
+        </p:spPr>
+        <p:txBody>
+          <a:bodyPr wrap="none">
+            <a:spAutoFit/>
+          </a:bodyPr>
+          <a:lstStyle/>
+          <a:p>
             <a:pPr algn="r">
               <a:defRPr sz="1000">
                 <a:solidFill>
@@ -4280,7 +4373,7 @@
               </a:defRPr>
             </a:pPr>
             <a:r>
-              <a:t>Scenario estimate only, not causal guarantee</a:t>
+              <a:t>Section 7 | Business Value</a:t>
             </a:r>
           </a:p>
         </p:txBody>
@@ -4326,7 +4419,7 @@
           <a:lstStyle/>
           <a:p>
             <a:pPr>
-              <a:defRPr sz="3400" b="1">
+              <a:defRPr sz="3200" b="1">
                 <a:solidFill>
                   <a:srgbClr val="0F2C59"/>
                 </a:solidFill>
@@ -4334,7 +4427,7 @@
               </a:defRPr>
             </a:pPr>
             <a:r>
-              <a:t>Live Demo Flow</a:t>
+              <a:t>Limitations, Ethics, and Next Steps</a:t>
             </a:r>
           </a:p>
         </p:txBody>
@@ -4347,8 +4440,8 @@
         </p:nvSpPr>
         <p:spPr>
           <a:xfrm>
-            <a:off x="566928" y="1783080"/>
-            <a:ext cx="2377440" cy="73152"/>
+            <a:off x="566928" y="1755648"/>
+            <a:ext cx="2651760" cy="73152"/>
           </a:xfrm>
           <a:prstGeom prst="rect">
             <a:avLst/>
@@ -4384,14 +4477,95 @@
       </p:sp>
       <p:sp>
         <p:nvSpPr>
-          <p:cNvPr id="4" name="TextBox 3"/>
+          <p:cNvPr id="4" name="Rounded Rectangle 3"/>
+          <p:cNvSpPr/>
+          <p:nvPr/>
+        </p:nvSpPr>
+        <p:spPr>
+          <a:xfrm>
+            <a:off x="640080" y="1828800"/>
+            <a:ext cx="5440680" cy="4389120"/>
+          </a:xfrm>
+          <a:prstGeom prst="roundRect">
+            <a:avLst/>
+          </a:prstGeom>
+          <a:solidFill>
+            <a:srgbClr val="F2F7FC"/>
+          </a:solidFill>
+          <a:ln w="15875">
+            <a:solidFill>
+              <a:srgbClr val="CDDCEE"/>
+            </a:solidFill>
+          </a:ln>
+        </p:spPr>
+        <p:style>
+          <a:lnRef idx="1">
+            <a:schemeClr val="accent1"/>
+          </a:lnRef>
+          <a:fillRef idx="3">
+            <a:schemeClr val="accent1"/>
+          </a:fillRef>
+          <a:effectRef idx="2">
+            <a:schemeClr val="accent1"/>
+          </a:effectRef>
+          <a:fontRef idx="minor">
+            <a:schemeClr val="lt1"/>
+          </a:fontRef>
+        </p:style>
+        <p:txBody>
+          <a:bodyPr rtlCol="0" anchor="ctr"/>
+          <a:lstStyle/>
+          <a:p>
+            <a:pPr algn="ctr"/>
+          </a:p>
+        </p:txBody>
+      </p:sp>
+      <p:sp>
+        <p:nvSpPr>
+          <p:cNvPr id="5" name="TextBox 4"/>
           <p:cNvSpPr txBox="1"/>
           <p:nvPr/>
         </p:nvSpPr>
         <p:spPr>
           <a:xfrm>
-            <a:off x="731520" y="1920240"/>
-            <a:ext cx="10972800" cy="4297680"/>
+            <a:off x="822959" y="1938528"/>
+            <a:ext cx="5166360" cy="347472"/>
+          </a:xfrm>
+          <a:prstGeom prst="rect">
+            <a:avLst/>
+          </a:prstGeom>
+          <a:noFill/>
+        </p:spPr>
+        <p:txBody>
+          <a:bodyPr wrap="none">
+            <a:spAutoFit/>
+          </a:bodyPr>
+          <a:lstStyle/>
+          <a:p>
+            <a:pPr>
+              <a:defRPr b="1" sz="1800">
+                <a:solidFill>
+                  <a:srgbClr val="133A66"/>
+                </a:solidFill>
+                <a:latin typeface="Aptos"/>
+              </a:defRPr>
+            </a:pPr>
+            <a:r>
+              <a:t>Current limitations</a:t>
+            </a:r>
+          </a:p>
+        </p:txBody>
+      </p:sp>
+      <p:sp>
+        <p:nvSpPr>
+          <p:cNvPr id="6" name="TextBox 5"/>
+          <p:cNvSpPr txBox="1"/>
+          <p:nvPr/>
+        </p:nvSpPr>
+        <p:spPr>
+          <a:xfrm>
+            <a:off x="804671" y="2267712"/>
+            <a:ext cx="5184648" cy="3858768"/>
           </a:xfrm>
           <a:prstGeom prst="rect">
             <a:avLst/>
@@ -4406,127 +4580,124 @@
           <a:p>
             <a:pPr>
               <a:spcAft>
-                <a:spcPts val="900"/>
-              </a:spcAft>
-              <a:defRPr sz="1900">
-                <a:solidFill>
-                  <a:srgbClr val="1C2D46"/>
-                </a:solidFill>
-                <a:latin typeface="Aptos"/>
-              </a:defRPr>
-            </a:pPr>
-            <a:r>
-              <a:t>1) Enter campaign input (brand/product/audience/keywords/budget)</a:t>
-            </a:r>
-          </a:p>
-          <a:p>
-            <a:pPr>
-              <a:spcAft>
-                <a:spcPts val="900"/>
-              </a:spcAft>
-              <a:defRPr sz="1900">
-                <a:solidFill>
-                  <a:srgbClr val="1C2D46"/>
-                </a:solidFill>
-                <a:latin typeface="Aptos"/>
-              </a:defRPr>
-            </a:pPr>
-            <a:r>
-              <a:t>2) Run analysis and show analyzing workflow</a:t>
-            </a:r>
-          </a:p>
-          <a:p>
-            <a:pPr>
-              <a:spcAft>
-                <a:spcPts val="900"/>
-              </a:spcAft>
-              <a:defRPr sz="1900">
-                <a:solidFill>
-                  <a:srgbClr val="1C2D46"/>
-                </a:solidFill>
-                <a:latin typeface="Aptos"/>
-              </a:defRPr>
-            </a:pPr>
-            <a:r>
-              <a:t>3) Inspect Top-N cards with rationale and evidence</a:t>
-            </a:r>
-          </a:p>
-          <a:p>
-            <a:pPr>
-              <a:spcAft>
-                <a:spcPts val="900"/>
-              </a:spcAft>
-              <a:defRPr sz="1900">
-                <a:solidFill>
-                  <a:srgbClr val="1C2D46"/>
-                </a:solidFill>
-                <a:latin typeface="Aptos"/>
-              </a:defRPr>
-            </a:pPr>
-            <a:r>
-              <a:t>4) Change ranking strategy and diversity controls</a:t>
-            </a:r>
-          </a:p>
-          <a:p>
-            <a:pPr>
-              <a:spcAft>
-                <a:spcPts val="900"/>
-              </a:spcAft>
-              <a:defRPr sz="1900">
-                <a:solidFill>
-                  <a:srgbClr val="1C2D46"/>
-                </a:solidFill>
-                <a:latin typeface="Aptos"/>
-              </a:defRPr>
-            </a:pPr>
-            <a:r>
-              <a:t>5) Explore Text Intelligence and Network Studio</a:t>
-            </a:r>
-          </a:p>
-          <a:p>
-            <a:pPr>
-              <a:spcAft>
-                <a:spcPts val="900"/>
-              </a:spcAft>
-              <a:defRPr sz="1900">
-                <a:solidFill>
-                  <a:srgbClr val="1C2D46"/>
-                </a:solidFill>
-                <a:latin typeface="Aptos"/>
-              </a:defRPr>
-            </a:pPr>
-            <a:r>
-              <a:t>6) Review ML Studio (model comparison + SHAP)</a:t>
-            </a:r>
-          </a:p>
-          <a:p>
-            <a:pPr>
-              <a:spcAft>
-                <a:spcPts val="900"/>
-              </a:spcAft>
-              <a:defRPr sz="1900">
-                <a:solidFill>
-                  <a:srgbClr val="1C2D46"/>
-                </a:solidFill>
-                <a:latin typeface="Aptos"/>
-              </a:defRPr>
-            </a:pPr>
-            <a:r>
-              <a:t>7) Adjust ROI assumptions and export memo</a:t>
-            </a:r>
-          </a:p>
-        </p:txBody>
-      </p:sp>
-      <p:sp>
-        <p:nvSpPr>
-          <p:cNvPr id="5" name="TextBox 4"/>
+                <a:spcPts val="800"/>
+              </a:spcAft>
+              <a:defRPr sz="1500">
+                <a:solidFill>
+                  <a:srgbClr val="1C2D46"/>
+                </a:solidFill>
+                <a:latin typeface="Aptos"/>
+              </a:defRPr>
+            </a:pPr>
+            <a:r>
+              <a:t>Pre-collected YouTube dataset (not live cross-platform feed)</a:t>
+            </a:r>
+          </a:p>
+          <a:p>
+            <a:pPr>
+              <a:spcAft>
+                <a:spcPts val="800"/>
+              </a:spcAft>
+              <a:defRPr sz="1500">
+                <a:solidFill>
+                  <a:srgbClr val="1C2D46"/>
+                </a:solidFill>
+                <a:latin typeface="Aptos"/>
+              </a:defRPr>
+            </a:pPr>
+            <a:r>
+              <a:t>ROI is scenario estimate, not causal proof</a:t>
+            </a:r>
+          </a:p>
+          <a:p>
+            <a:pPr>
+              <a:spcAft>
+                <a:spcPts val="800"/>
+              </a:spcAft>
+              <a:defRPr sz="1500">
+                <a:solidFill>
+                  <a:srgbClr val="1C2D46"/>
+                </a:solidFill>
+                <a:latin typeface="Aptos"/>
+              </a:defRPr>
+            </a:pPr>
+            <a:r>
+              <a:t>Remaining cluster concentration in skincare niches</a:t>
+            </a:r>
+          </a:p>
+          <a:p>
+            <a:pPr>
+              <a:spcAft>
+                <a:spcPts val="800"/>
+              </a:spcAft>
+              <a:defRPr sz="1500">
+                <a:solidFill>
+                  <a:srgbClr val="1C2D46"/>
+                </a:solidFill>
+                <a:latin typeface="Aptos"/>
+              </a:defRPr>
+            </a:pPr>
+            <a:r>
+              <a:t>Need larger-scale operational monitoring</a:t>
+            </a:r>
+          </a:p>
+        </p:txBody>
+      </p:sp>
+      <p:sp>
+        <p:nvSpPr>
+          <p:cNvPr id="7" name="Rounded Rectangle 6"/>
+          <p:cNvSpPr/>
+          <p:nvPr/>
+        </p:nvSpPr>
+        <p:spPr>
+          <a:xfrm>
+            <a:off x="6172200" y="1828800"/>
+            <a:ext cx="5440680" cy="4389120"/>
+          </a:xfrm>
+          <a:prstGeom prst="roundRect">
+            <a:avLst/>
+          </a:prstGeom>
+          <a:solidFill>
+            <a:srgbClr val="F2F7FC"/>
+          </a:solidFill>
+          <a:ln w="15875">
+            <a:solidFill>
+              <a:srgbClr val="CDDCEE"/>
+            </a:solidFill>
+          </a:ln>
+        </p:spPr>
+        <p:style>
+          <a:lnRef idx="1">
+            <a:schemeClr val="accent1"/>
+          </a:lnRef>
+          <a:fillRef idx="3">
+            <a:schemeClr val="accent1"/>
+          </a:fillRef>
+          <a:effectRef idx="2">
+            <a:schemeClr val="accent1"/>
+          </a:effectRef>
+          <a:fontRef idx="minor">
+            <a:schemeClr val="lt1"/>
+          </a:fontRef>
+        </p:style>
+        <p:txBody>
+          <a:bodyPr rtlCol="0" anchor="ctr"/>
+          <a:lstStyle/>
+          <a:p>
+            <a:pPr algn="ctr"/>
+          </a:p>
+        </p:txBody>
+      </p:sp>
+      <p:sp>
+        <p:nvSpPr>
+          <p:cNvPr id="8" name="TextBox 7"/>
           <p:cNvSpPr txBox="1"/>
           <p:nvPr/>
         </p:nvSpPr>
         <p:spPr>
           <a:xfrm>
-            <a:off x="502920" y="6428232"/>
-            <a:ext cx="10972800" cy="292608"/>
+            <a:off x="6355080" y="1938528"/>
+            <a:ext cx="5166360" cy="347472"/>
           </a:xfrm>
           <a:prstGeom prst="rect">
             <a:avLst/>
@@ -4539,6 +4710,129 @@
           </a:bodyPr>
           <a:lstStyle/>
           <a:p>
+            <a:pPr>
+              <a:defRPr b="1" sz="1800">
+                <a:solidFill>
+                  <a:srgbClr val="133A66"/>
+                </a:solidFill>
+                <a:latin typeface="Aptos"/>
+              </a:defRPr>
+            </a:pPr>
+            <a:r>
+              <a:t>Ethics and roadmap</a:t>
+            </a:r>
+          </a:p>
+        </p:txBody>
+      </p:sp>
+      <p:sp>
+        <p:nvSpPr>
+          <p:cNvPr id="9" name="TextBox 8"/>
+          <p:cNvSpPr txBox="1"/>
+          <p:nvPr/>
+        </p:nvSpPr>
+        <p:spPr>
+          <a:xfrm>
+            <a:off x="6336792" y="2267712"/>
+            <a:ext cx="5184648" cy="3858768"/>
+          </a:xfrm>
+          <a:prstGeom prst="rect">
+            <a:avLst/>
+          </a:prstGeom>
+          <a:noFill/>
+        </p:spPr>
+        <p:txBody>
+          <a:bodyPr wrap="square">
+            <a:spAutoFit/>
+          </a:bodyPr>
+          <a:lstStyle/>
+          <a:p>
+            <a:pPr>
+              <a:spcAft>
+                <a:spcPts val="800"/>
+              </a:spcAft>
+              <a:defRPr sz="1500">
+                <a:solidFill>
+                  <a:srgbClr val="1C2D46"/>
+                </a:solidFill>
+                <a:latin typeface="Aptos"/>
+              </a:defRPr>
+            </a:pPr>
+            <a:r>
+              <a:t>Bias checks: degree-overlap diagnostics + evidence penalty</a:t>
+            </a:r>
+          </a:p>
+          <a:p>
+            <a:pPr>
+              <a:spcAft>
+                <a:spcPts val="800"/>
+              </a:spcAft>
+              <a:defRPr sz="1500">
+                <a:solidFill>
+                  <a:srgbClr val="1C2D46"/>
+                </a:solidFill>
+                <a:latin typeface="Aptos"/>
+              </a:defRPr>
+            </a:pPr>
+            <a:r>
+              <a:t>Privacy: no sensitive personal profiling in prototype</a:t>
+            </a:r>
+          </a:p>
+          <a:p>
+            <a:pPr>
+              <a:spcAft>
+                <a:spcPts val="800"/>
+              </a:spcAft>
+              <a:defRPr sz="1500">
+                <a:solidFill>
+                  <a:srgbClr val="1C2D46"/>
+                </a:solidFill>
+                <a:latin typeface="Aptos"/>
+              </a:defRPr>
+            </a:pPr>
+            <a:r>
+              <a:t>Next: live connectors + fairness constraints + pilot calibration</a:t>
+            </a:r>
+          </a:p>
+          <a:p>
+            <a:pPr>
+              <a:spcAft>
+                <a:spcPts val="800"/>
+              </a:spcAft>
+              <a:defRPr sz="1500">
+                <a:solidFill>
+                  <a:srgbClr val="1C2D46"/>
+                </a:solidFill>
+                <a:latin typeface="Aptos"/>
+              </a:defRPr>
+            </a:pPr>
+            <a:r>
+              <a:t>Target: weekly decision-support workflow for brand teams</a:t>
+            </a:r>
+          </a:p>
+        </p:txBody>
+      </p:sp>
+      <p:sp>
+        <p:nvSpPr>
+          <p:cNvPr id="10" name="TextBox 9"/>
+          <p:cNvSpPr txBox="1"/>
+          <p:nvPr/>
+        </p:nvSpPr>
+        <p:spPr>
+          <a:xfrm>
+            <a:off x="502920" y="6428232"/>
+            <a:ext cx="10972800" cy="292608"/>
+          </a:xfrm>
+          <a:prstGeom prst="rect">
+            <a:avLst/>
+          </a:prstGeom>
+          <a:noFill/>
+        </p:spPr>
+        <p:txBody>
+          <a:bodyPr wrap="none">
+            <a:spAutoFit/>
+          </a:bodyPr>
+          <a:lstStyle/>
+          <a:p>
             <a:pPr algn="r">
               <a:defRPr sz="1000">
                 <a:solidFill>
@@ -4548,7 +4842,7 @@
               </a:defRPr>
             </a:pPr>
             <a:r>
-              <a:t>Rubric 4: Demo clarity and storytelling flow</a:t>
+              <a:t>Section 7 | Caveats and Roadmap</a:t>
             </a:r>
           </a:p>
         </p:txBody>
@@ -4594,7 +4888,7 @@
           <a:lstStyle/>
           <a:p>
             <a:pPr>
-              <a:defRPr sz="3400" b="1">
+              <a:defRPr sz="3200" b="1">
                 <a:solidFill>
                   <a:srgbClr val="0F2C59"/>
                 </a:solidFill>
@@ -4602,7 +4896,7 @@
               </a:defRPr>
             </a:pPr>
             <a:r>
-              <a:t>Limitations and Future Work</a:t>
+              <a:t>How We Used AI Tools</a:t>
             </a:r>
           </a:p>
         </p:txBody>
@@ -4615,8 +4909,8 @@
         </p:nvSpPr>
         <p:spPr>
           <a:xfrm>
-            <a:off x="566928" y="1783080"/>
-            <a:ext cx="2377440" cy="73152"/>
+            <a:off x="566928" y="1755648"/>
+            <a:ext cx="2651760" cy="73152"/>
           </a:xfrm>
           <a:prstGeom prst="rect">
             <a:avLst/>
@@ -4659,7 +4953,7 @@
         <p:spPr>
           <a:xfrm>
             <a:off x="640080" y="1828800"/>
-            <a:ext cx="5440680" cy="4389120"/>
+            <a:ext cx="5440680" cy="4343400"/>
           </a:xfrm>
           <a:prstGeom prst="roundRect">
             <a:avLst/>
@@ -4703,8 +4997,8 @@
         </p:nvSpPr>
         <p:spPr>
           <a:xfrm>
-            <a:off x="841247" y="1938528"/>
-            <a:ext cx="5120640" cy="365760"/>
+            <a:off x="822959" y="1938528"/>
+            <a:ext cx="5166360" cy="347472"/>
           </a:xfrm>
           <a:prstGeom prst="rect">
             <a:avLst/>
@@ -4718,7 +5012,7 @@
           <a:lstStyle/>
           <a:p>
             <a:pPr>
-              <a:defRPr b="1" sz="1900">
+              <a:defRPr b="1" sz="1800">
                 <a:solidFill>
                   <a:srgbClr val="133A66"/>
                 </a:solidFill>
@@ -4726,7 +5020,7 @@
               </a:defRPr>
             </a:pPr>
             <a:r>
-              <a:t>Current limitations</a:t>
+              <a:t>Where AI tools helped</a:t>
             </a:r>
           </a:p>
         </p:txBody>
@@ -4739,8 +5033,8 @@
         </p:nvSpPr>
         <p:spPr>
           <a:xfrm>
-            <a:off x="822959" y="2304288"/>
-            <a:ext cx="5120640" cy="3822191"/>
+            <a:off x="804671" y="2267712"/>
+            <a:ext cx="5184648" cy="3813048"/>
           </a:xfrm>
           <a:prstGeom prst="rect">
             <a:avLst/>
@@ -4755,49 +5049,65 @@
           <a:p>
             <a:pPr>
               <a:spcAft>
-                <a:spcPts val="900"/>
-              </a:spcAft>
-              <a:defRPr sz="1600">
-                <a:solidFill>
-                  <a:srgbClr val="1C2D46"/>
-                </a:solidFill>
-                <a:latin typeface="Aptos"/>
-              </a:defRPr>
-            </a:pPr>
-            <a:r>
-              <a:t>Prototype uses pre-collected YouTube data.</a:t>
-            </a:r>
-          </a:p>
-          <a:p>
-            <a:pPr>
-              <a:spcAft>
-                <a:spcPts val="900"/>
-              </a:spcAft>
-              <a:defRPr sz="1600">
-                <a:solidFill>
-                  <a:srgbClr val="1C2D46"/>
-                </a:solidFill>
-                <a:latin typeface="Aptos"/>
-              </a:defRPr>
-            </a:pPr>
-            <a:r>
-              <a:t>ROI module is scenario simulation, not causal inference.</a:t>
-            </a:r>
-          </a:p>
-          <a:p>
-            <a:pPr>
-              <a:spcAft>
-                <a:spcPts val="900"/>
-              </a:spcAft>
-              <a:defRPr sz="1600">
-                <a:solidFill>
-                  <a:srgbClr val="1C2D46"/>
-                </a:solidFill>
-                <a:latin typeface="Aptos"/>
-              </a:defRPr>
-            </a:pPr>
-            <a:r>
-              <a:t>Cluster concentration still exists in skincare-heavy niches.</a:t>
+                <a:spcPts val="800"/>
+              </a:spcAft>
+              <a:defRPr sz="1500">
+                <a:solidFill>
+                  <a:srgbClr val="1C2D46"/>
+                </a:solidFill>
+                <a:latin typeface="Aptos"/>
+              </a:defRPr>
+            </a:pPr>
+            <a:r>
+              <a:t>Ideation and scope refinement</a:t>
+            </a:r>
+          </a:p>
+          <a:p>
+            <a:pPr>
+              <a:spcAft>
+                <a:spcPts val="800"/>
+              </a:spcAft>
+              <a:defRPr sz="1500">
+                <a:solidFill>
+                  <a:srgbClr val="1C2D46"/>
+                </a:solidFill>
+                <a:latin typeface="Aptos"/>
+              </a:defRPr>
+            </a:pPr>
+            <a:r>
+              <a:t>Implementation acceleration and debugging</a:t>
+            </a:r>
+          </a:p>
+          <a:p>
+            <a:pPr>
+              <a:spcAft>
+                <a:spcPts val="800"/>
+              </a:spcAft>
+              <a:defRPr sz="1500">
+                <a:solidFill>
+                  <a:srgbClr val="1C2D46"/>
+                </a:solidFill>
+                <a:latin typeface="Aptos"/>
+              </a:defRPr>
+            </a:pPr>
+            <a:r>
+              <a:t>Documentation and memo drafting</a:t>
+            </a:r>
+          </a:p>
+          <a:p>
+            <a:pPr>
+              <a:spcAft>
+                <a:spcPts val="800"/>
+              </a:spcAft>
+              <a:defRPr sz="1500">
+                <a:solidFill>
+                  <a:srgbClr val="1C2D46"/>
+                </a:solidFill>
+                <a:latin typeface="Aptos"/>
+              </a:defRPr>
+            </a:pPr>
+            <a:r>
+              <a:t>Slide polishing and presentation prep</a:t>
             </a:r>
           </a:p>
         </p:txBody>
@@ -4811,7 +5121,7 @@
         <p:spPr>
           <a:xfrm>
             <a:off x="6172200" y="1828800"/>
-            <a:ext cx="5440680" cy="4389120"/>
+            <a:ext cx="5440680" cy="4343400"/>
           </a:xfrm>
           <a:prstGeom prst="roundRect">
             <a:avLst/>
@@ -4855,8 +5165,8 @@
         </p:nvSpPr>
         <p:spPr>
           <a:xfrm>
-            <a:off x="6373368" y="1938528"/>
-            <a:ext cx="5120640" cy="365760"/>
+            <a:off x="6355080" y="1938528"/>
+            <a:ext cx="5166360" cy="347472"/>
           </a:xfrm>
           <a:prstGeom prst="rect">
             <a:avLst/>
@@ -4870,7 +5180,7 @@
           <a:lstStyle/>
           <a:p>
             <a:pPr>
-              <a:defRPr b="1" sz="1900">
+              <a:defRPr b="1" sz="1800">
                 <a:solidFill>
                   <a:srgbClr val="133A66"/>
                 </a:solidFill>
@@ -4878,7 +5188,7 @@
               </a:defRPr>
             </a:pPr>
             <a:r>
-              <a:t>Next steps</a:t>
+              <a:t>Human responsibility</a:t>
             </a:r>
           </a:p>
         </p:txBody>
@@ -4891,8 +5201,8 @@
         </p:nvSpPr>
         <p:spPr>
           <a:xfrm>
-            <a:off x="6355080" y="2304288"/>
-            <a:ext cx="5120640" cy="3822191"/>
+            <a:off x="6336792" y="2267712"/>
+            <a:ext cx="5184648" cy="3813048"/>
           </a:xfrm>
           <a:prstGeom prst="rect">
             <a:avLst/>
@@ -4907,49 +5217,65 @@
           <a:p>
             <a:pPr>
               <a:spcAft>
-                <a:spcPts val="900"/>
-              </a:spcAft>
-              <a:defRPr sz="1600">
-                <a:solidFill>
-                  <a:srgbClr val="1C2D46"/>
-                </a:solidFill>
-                <a:latin typeface="Aptos"/>
-              </a:defRPr>
-            </a:pPr>
-            <a:r>
-              <a:t>Add live market and competitor enrichment.</a:t>
-            </a:r>
-          </a:p>
-          <a:p>
-            <a:pPr>
-              <a:spcAft>
-                <a:spcPts val="900"/>
-              </a:spcAft>
-              <a:defRPr sz="1600">
-                <a:solidFill>
-                  <a:srgbClr val="1C2D46"/>
-                </a:solidFill>
-                <a:latin typeface="Aptos"/>
-              </a:defRPr>
-            </a:pPr>
-            <a:r>
-              <a:t>Expand to TikTok/Instagram connectors.</a:t>
-            </a:r>
-          </a:p>
-          <a:p>
-            <a:pPr>
-              <a:spcAft>
-                <a:spcPts val="900"/>
-              </a:spcAft>
-              <a:defRPr sz="1600">
-                <a:solidFill>
-                  <a:srgbClr val="1C2D46"/>
-                </a:solidFill>
-                <a:latin typeface="Aptos"/>
-              </a:defRPr>
-            </a:pPr>
-            <a:r>
-              <a:t>Introduce experiment loop for closed-loop learning.</a:t>
+                <a:spcPts val="800"/>
+              </a:spcAft>
+              <a:defRPr sz="1500">
+                <a:solidFill>
+                  <a:srgbClr val="1C2D46"/>
+                </a:solidFill>
+                <a:latin typeface="Aptos"/>
+              </a:defRPr>
+            </a:pPr>
+            <a:r>
+              <a:t>Problem framing and business assumptions</a:t>
+            </a:r>
+          </a:p>
+          <a:p>
+            <a:pPr>
+              <a:spcAft>
+                <a:spcPts val="800"/>
+              </a:spcAft>
+              <a:defRPr sz="1500">
+                <a:solidFill>
+                  <a:srgbClr val="1C2D46"/>
+                </a:solidFill>
+                <a:latin typeface="Aptos"/>
+              </a:defRPr>
+            </a:pPr>
+            <a:r>
+              <a:t>Model choice, validation, and guardrail design</a:t>
+            </a:r>
+          </a:p>
+          <a:p>
+            <a:pPr>
+              <a:spcAft>
+                <a:spcPts val="800"/>
+              </a:spcAft>
+              <a:defRPr sz="1500">
+                <a:solidFill>
+                  <a:srgbClr val="1C2D46"/>
+                </a:solidFill>
+                <a:latin typeface="Aptos"/>
+              </a:defRPr>
+            </a:pPr>
+            <a:r>
+              <a:t>Result interpretation and recommendation decisions</a:t>
+            </a:r>
+          </a:p>
+          <a:p>
+            <a:pPr>
+              <a:spcAft>
+                <a:spcPts val="800"/>
+              </a:spcAft>
+              <a:defRPr sz="1500">
+                <a:solidFill>
+                  <a:srgbClr val="1C2D46"/>
+                </a:solidFill>
+                <a:latin typeface="Aptos"/>
+              </a:defRPr>
+            </a:pPr>
+            <a:r>
+              <a:t>Final accountability stayed with the team</a:t>
             </a:r>
           </a:p>
         </p:txBody>
@@ -4985,7 +5311,7 @@
               </a:defRPr>
             </a:pPr>
             <a:r>
-              <a:t>Honest caveats + practical roadmap</a:t>
+              <a:t>Section 8 | AI Tooling Disclosure</a:t>
             </a:r>
           </a:p>
         </p:txBody>
@@ -5031,7 +5357,7 @@
           <a:lstStyle/>
           <a:p>
             <a:pPr>
-              <a:defRPr sz="3400" b="1">
+              <a:defRPr sz="3200" b="1">
                 <a:solidFill>
                   <a:srgbClr val="0F2C59"/>
                 </a:solidFill>
@@ -5039,7 +5365,7 @@
               </a:defRPr>
             </a:pPr>
             <a:r>
-              <a:t>Rubric Alignment (Target: 9-10)</a:t>
+              <a:t>Conclusion, References, and Q&amp;A</a:t>
             </a:r>
           </a:p>
         </p:txBody>
@@ -5052,8 +5378,8 @@
         </p:nvSpPr>
         <p:spPr>
           <a:xfrm>
-            <a:off x="566928" y="1783080"/>
-            <a:ext cx="2377440" cy="73152"/>
+            <a:off x="566928" y="1755648"/>
+            <a:ext cx="2651760" cy="73152"/>
           </a:xfrm>
           <a:prstGeom prst="rect">
             <a:avLst/>
@@ -5087,242 +5413,125 @@
           </a:p>
         </p:txBody>
       </p:sp>
-      <p:graphicFrame>
-        <p:nvGraphicFramePr>
-          <p:cNvPr id="4" name="Table 3"/>
-          <p:cNvGraphicFramePr>
-            <a:graphicFrameLocks noGrp="1"/>
-          </p:cNvGraphicFramePr>
-          <p:nvPr/>
-        </p:nvGraphicFramePr>
-        <p:xfrm>
-          <a:off x="713232" y="1828800"/>
-          <a:ext cx="10927080" cy="4526280"/>
-        </p:xfrm>
-        <a:graphic>
-          <a:graphicData uri="http://schemas.openxmlformats.org/drawingml/2006/table">
-            <a:tbl>
-              <a:tblPr firstRow="1" bandRow="1">
-                <a:tableStyleId>{5C22544A-7EE6-4342-B048-85BDC9FD1C3A}</a:tableStyleId>
-              </a:tblPr>
-              <a:tblGrid>
-                <a:gridCol w="3657600"/>
-                <a:gridCol w="7269480"/>
-              </a:tblGrid>
-              <a:tr h="905256">
-                <a:tc>
-                  <a:txBody>
-                    <a:bodyPr/>
-                    <a:lstStyle/>
-                    <a:p>
-                      <a:pPr>
-                        <a:defRPr sz="1400" b="1">
-                          <a:solidFill>
-                            <a:srgbClr val="142642"/>
-                          </a:solidFill>
-                          <a:latin typeface="Aptos"/>
-                        </a:defRPr>
-                      </a:pPr>
-                      <a:r>
-                        <a:t>Rubric Criterion</a:t>
-                      </a:r>
-                    </a:p>
-                  </a:txBody>
-                  <a:tcPr/>
-                </a:tc>
-                <a:tc>
-                  <a:txBody>
-                    <a:bodyPr/>
-                    <a:lstStyle/>
-                    <a:p>
-                      <a:pPr>
-                        <a:defRPr sz="1400" b="1">
-                          <a:solidFill>
-                            <a:srgbClr val="142642"/>
-                          </a:solidFill>
-                          <a:latin typeface="Aptos"/>
-                        </a:defRPr>
-                      </a:pPr>
-                      <a:r>
-                        <a:t>Project Evidence</a:t>
-                      </a:r>
-                    </a:p>
-                  </a:txBody>
-                  <a:tcPr/>
-                </a:tc>
-              </a:tr>
-              <a:tr h="905256">
-                <a:tc>
-                  <a:txBody>
-                    <a:bodyPr/>
-                    <a:lstStyle/>
-                    <a:p>
-                      <a:pPr>
-                        <a:defRPr sz="1300" b="0">
-                          <a:solidFill>
-                            <a:srgbClr val="142642"/>
-                          </a:solidFill>
-                          <a:latin typeface="Aptos"/>
-                        </a:defRPr>
-                      </a:pPr>
-                      <a:r>
-                        <a:t>Topic choice, scope, interest</a:t>
-                      </a:r>
-                    </a:p>
-                  </a:txBody>
-                  <a:tcPr/>
-                </a:tc>
-                <a:tc>
-                  <a:txBody>
-                    <a:bodyPr/>
-                    <a:lstStyle/>
-                    <a:p>
-                      <a:pPr>
-                        <a:defRPr sz="1300" b="0">
-                          <a:solidFill>
-                            <a:srgbClr val="142642"/>
-                          </a:solidFill>
-                          <a:latin typeface="Aptos"/>
-                        </a:defRPr>
-                      </a:pPr>
-                      <a:r>
-                        <a:t>Clear marketing problem, creative hybrid AI scope, feasible for course timeline</a:t>
-                      </a:r>
-                    </a:p>
-                  </a:txBody>
-                  <a:tcPr/>
-                </a:tc>
-              </a:tr>
-              <a:tr h="905256">
-                <a:tc>
-                  <a:txBody>
-                    <a:bodyPr/>
-                    <a:lstStyle/>
-                    <a:p>
-                      <a:pPr>
-                        <a:defRPr sz="1300" b="0">
-                          <a:solidFill>
-                            <a:srgbClr val="142642"/>
-                          </a:solidFill>
-                          <a:latin typeface="Aptos"/>
-                        </a:defRPr>
-                      </a:pPr>
-                      <a:r>
-                        <a:t>Potential impact and relevance</a:t>
-                      </a:r>
-                    </a:p>
-                  </a:txBody>
-                  <a:tcPr/>
-                </a:tc>
-                <a:tc>
-                  <a:txBody>
-                    <a:bodyPr/>
-                    <a:lstStyle/>
-                    <a:p>
-                      <a:pPr>
-                        <a:defRPr sz="1300" b="0">
-                          <a:solidFill>
-                            <a:srgbClr val="142642"/>
-                          </a:solidFill>
-                          <a:latin typeface="Aptos"/>
-                        </a:defRPr>
-                      </a:pPr>
-                      <a:r>
-                        <a:t>Directly supports influencer and budget decisions for brand teams</a:t>
-                      </a:r>
-                    </a:p>
-                  </a:txBody>
-                  <a:tcPr/>
-                </a:tc>
-              </a:tr>
-              <a:tr h="905256">
-                <a:tc>
-                  <a:txBody>
-                    <a:bodyPr/>
-                    <a:lstStyle/>
-                    <a:p>
-                      <a:pPr>
-                        <a:defRPr sz="1300" b="0">
-                          <a:solidFill>
-                            <a:srgbClr val="142642"/>
-                          </a:solidFill>
-                          <a:latin typeface="Aptos"/>
-                        </a:defRPr>
-                      </a:pPr>
-                      <a:r>
-                        <a:t>Technical aspects of prototype</a:t>
-                      </a:r>
-                    </a:p>
-                  </a:txBody>
-                  <a:tcPr/>
-                </a:tc>
-                <a:tc>
-                  <a:txBody>
-                    <a:bodyPr/>
-                    <a:lstStyle/>
-                    <a:p>
-                      <a:pPr>
-                        <a:defRPr sz="1300" b="0">
-                          <a:solidFill>
-                            <a:srgbClr val="142642"/>
-                          </a:solidFill>
-                          <a:latin typeface="Aptos"/>
-                        </a:defRPr>
-                      </a:pPr>
-                      <a:r>
-                        <a:t>Working end-to-end app, 6-model benchmark, SHAP, bias diagnostics</a:t>
-                      </a:r>
-                    </a:p>
-                  </a:txBody>
-                  <a:tcPr/>
-                </a:tc>
-              </a:tr>
-              <a:tr h="905256">
-                <a:tc>
-                  <a:txBody>
-                    <a:bodyPr/>
-                    <a:lstStyle/>
-                    <a:p>
-                      <a:pPr>
-                        <a:defRPr sz="1300" b="0">
-                          <a:solidFill>
-                            <a:srgbClr val="142642"/>
-                          </a:solidFill>
-                          <a:latin typeface="Aptos"/>
-                        </a:defRPr>
-                      </a:pPr>
-                      <a:r>
-                        <a:t>Presentation quality/storytelling</a:t>
-                      </a:r>
-                    </a:p>
-                  </a:txBody>
-                  <a:tcPr/>
-                </a:tc>
-                <a:tc>
-                  <a:txBody>
-                    <a:bodyPr/>
-                    <a:lstStyle/>
-                    <a:p>
-                      <a:pPr>
-                        <a:defRPr sz="1300" b="0">
-                          <a:solidFill>
-                            <a:srgbClr val="142642"/>
-                          </a:solidFill>
-                          <a:latin typeface="Aptos"/>
-                        </a:defRPr>
-                      </a:pPr>
-                      <a:r>
-                        <a:t>Context -&gt; method -&gt; evidence -&gt; demo -&gt; impact narrative with visuals</a:t>
-                      </a:r>
-                    </a:p>
-                  </a:txBody>
-                  <a:tcPr/>
-                </a:tc>
-              </a:tr>
-            </a:tbl>
-          </a:graphicData>
-        </a:graphic>
-      </p:graphicFrame>
+      <p:sp>
+        <p:nvSpPr>
+          <p:cNvPr id="4" name="TextBox 3"/>
+          <p:cNvSpPr txBox="1"/>
+          <p:nvPr/>
+        </p:nvSpPr>
+        <p:spPr>
+          <a:xfrm>
+            <a:off x="749808" y="1828800"/>
+            <a:ext cx="10972800" cy="3566160"/>
+          </a:xfrm>
+          <a:prstGeom prst="rect">
+            <a:avLst/>
+          </a:prstGeom>
+          <a:noFill/>
+        </p:spPr>
+        <p:txBody>
+          <a:bodyPr wrap="square">
+            <a:spAutoFit/>
+          </a:bodyPr>
+          <a:lstStyle/>
+          <a:p>
+            <a:pPr>
+              <a:spcAft>
+                <a:spcPts val="800"/>
+              </a:spcAft>
+              <a:defRPr sz="1600">
+                <a:solidFill>
+                  <a:srgbClr val="1C2D46"/>
+                </a:solidFill>
+                <a:latin typeface="Aptos"/>
+              </a:defRPr>
+            </a:pPr>
+            <a:r>
+              <a:t>Conclusion: AI-MCN can reduce manual MCN dependence and improve influencer decision quality.</a:t>
+            </a:r>
+          </a:p>
+          <a:p>
+            <a:pPr>
+              <a:spcAft>
+                <a:spcPts val="800"/>
+              </a:spcAft>
+              <a:defRPr sz="1600">
+                <a:solidFill>
+                  <a:srgbClr val="1C2D46"/>
+                </a:solidFill>
+                <a:latin typeface="Aptos"/>
+              </a:defRPr>
+            </a:pPr>
+            <a:r>
+              <a:t>EMARKETER (Mar 13, 2025): US influencer spend and YouTube marketer adoption</a:t>
+            </a:r>
+          </a:p>
+          <a:p>
+            <a:pPr>
+              <a:spcAft>
+                <a:spcPts val="800"/>
+              </a:spcAft>
+              <a:defRPr sz="1600">
+                <a:solidFill>
+                  <a:srgbClr val="1C2D46"/>
+                </a:solidFill>
+                <a:latin typeface="Aptos"/>
+              </a:defRPr>
+            </a:pPr>
+            <a:r>
+              <a:t>NIQ (Feb 25, 2025): beauty growth and e-commerce/social commerce indicators</a:t>
+            </a:r>
+          </a:p>
+          <a:p>
+            <a:pPr>
+              <a:spcAft>
+                <a:spcPts val="800"/>
+              </a:spcAft>
+              <a:defRPr sz="1600">
+                <a:solidFill>
+                  <a:srgbClr val="1C2D46"/>
+                </a:solidFill>
+                <a:latin typeface="Aptos"/>
+              </a:defRPr>
+            </a:pPr>
+            <a:r>
+              <a:t>McKinsey (Aug 28, 2025): beauty market outlook to 2030</a:t>
+            </a:r>
+          </a:p>
+          <a:p>
+            <a:pPr>
+              <a:spcAft>
+                <a:spcPts val="800"/>
+              </a:spcAft>
+              <a:defRPr sz="1600">
+                <a:solidFill>
+                  <a:srgbClr val="1C2D46"/>
+                </a:solidFill>
+                <a:latin typeface="Aptos"/>
+              </a:defRPr>
+            </a:pPr>
+            <a:r>
+              <a:t>Fashionista (Nov 13, 2024): BOJ virality and U.S. market context</a:t>
+            </a:r>
+          </a:p>
+          <a:p>
+            <a:pPr>
+              <a:spcAft>
+                <a:spcPts val="800"/>
+              </a:spcAft>
+              <a:defRPr sz="1600">
+                <a:solidFill>
+                  <a:srgbClr val="1C2D46"/>
+                </a:solidFill>
+                <a:latin typeface="Aptos"/>
+              </a:defRPr>
+            </a:pPr>
+            <a:r>
+              <a:t>Technical refs: YouTube API, scikit-learn, LightGBM, SHAP, Streamlit</a:t>
+            </a:r>
+          </a:p>
+        </p:txBody>
+      </p:sp>
       <p:sp>
         <p:nvSpPr>
           <p:cNvPr id="5" name="TextBox 4"/>
@@ -5331,8 +5540,8 @@
         </p:nvSpPr>
         <p:spPr>
           <a:xfrm>
-            <a:off x="502920" y="6428232"/>
-            <a:ext cx="10972800" cy="292608"/>
+            <a:off x="749808" y="5577840"/>
+            <a:ext cx="10789920" cy="731520"/>
           </a:xfrm>
           <a:prstGeom prst="rect">
             <a:avLst/>
@@ -5345,48 +5554,30 @@
           </a:bodyPr>
           <a:lstStyle/>
           <a:p>
-            <a:pPr algn="r">
-              <a:defRPr sz="1000">
-                <a:solidFill>
-                  <a:srgbClr val="6E8098"/>
-                </a:solidFill>
-                <a:latin typeface="Aptos"/>
-              </a:defRPr>
-            </a:pPr>
-            <a:r>
-              <a:t>Directly mapped to MSIS 521 project rubric</a:t>
-            </a:r>
-          </a:p>
-        </p:txBody>
-      </p:sp>
-    </p:spTree>
-  </p:cSld>
-  <p:clrMapOvr>
-    <a:masterClrMapping/>
-  </p:clrMapOvr>
-</p:sld>
-</file>
-
-<file path=ppt/slides/slide16.xml><?xml version="1.0" encoding="utf-8"?>
-<p:sld xmlns:a="http://schemas.openxmlformats.org/drawingml/2006/main" xmlns:p="http://schemas.openxmlformats.org/presentationml/2006/main" xmlns:r="http://schemas.openxmlformats.org/officeDocument/2006/relationships">
-  <p:cSld>
-    <p:spTree>
-      <p:nvGrpSpPr>
-        <p:cNvPr id="1" name=""/>
-        <p:cNvGrpSpPr/>
-        <p:nvPr/>
-      </p:nvGrpSpPr>
-      <p:grpSpPr/>
-      <p:sp>
-        <p:nvSpPr>
-          <p:cNvPr id="2" name="TextBox 1"/>
+            <a:pPr algn="ctr">
+              <a:defRPr sz="3000" b="1">
+                <a:solidFill>
+                  <a:srgbClr val="105696"/>
+                </a:solidFill>
+                <a:latin typeface="Aptos Display"/>
+              </a:defRPr>
+            </a:pPr>
+            <a:r>
+              <a:t>Thank you. Q&amp;A</a:t>
+            </a:r>
+          </a:p>
+        </p:txBody>
+      </p:sp>
+      <p:sp>
+        <p:nvSpPr>
+          <p:cNvPr id="6" name="TextBox 5"/>
           <p:cNvSpPr txBox="1"/>
           <p:nvPr/>
         </p:nvSpPr>
         <p:spPr>
           <a:xfrm>
-            <a:off x="594360" y="320040"/>
-            <a:ext cx="11064240" cy="914400"/>
+            <a:off x="502920" y="6428232"/>
+            <a:ext cx="10972800" cy="292608"/>
           </a:xfrm>
           <a:prstGeom prst="rect">
             <a:avLst/>
@@ -5399,324 +5590,6 @@
           </a:bodyPr>
           <a:lstStyle/>
           <a:p>
-            <a:pPr>
-              <a:defRPr sz="3400" b="1">
-                <a:solidFill>
-                  <a:srgbClr val="0F2C59"/>
-                </a:solidFill>
-                <a:latin typeface="Aptos Display"/>
-              </a:defRPr>
-            </a:pPr>
-            <a:r>
-              <a:t>15-Minute Delivery Plan</a:t>
-            </a:r>
-          </a:p>
-        </p:txBody>
-      </p:sp>
-      <p:sp>
-        <p:nvSpPr>
-          <p:cNvPr id="3" name="Rectangle 2"/>
-          <p:cNvSpPr/>
-          <p:nvPr/>
-        </p:nvSpPr>
-        <p:spPr>
-          <a:xfrm>
-            <a:off x="566928" y="1783080"/>
-            <a:ext cx="2377440" cy="73152"/>
-          </a:xfrm>
-          <a:prstGeom prst="rect">
-            <a:avLst/>
-          </a:prstGeom>
-          <a:solidFill>
-            <a:srgbClr val="1A7DBC"/>
-          </a:solidFill>
-          <a:ln>
-            <a:noFill/>
-          </a:ln>
-        </p:spPr>
-        <p:style>
-          <a:lnRef idx="1">
-            <a:schemeClr val="accent1"/>
-          </a:lnRef>
-          <a:fillRef idx="3">
-            <a:schemeClr val="accent1"/>
-          </a:fillRef>
-          <a:effectRef idx="2">
-            <a:schemeClr val="accent1"/>
-          </a:effectRef>
-          <a:fontRef idx="minor">
-            <a:schemeClr val="lt1"/>
-          </a:fontRef>
-        </p:style>
-        <p:txBody>
-          <a:bodyPr rtlCol="0" anchor="ctr"/>
-          <a:lstStyle/>
-          <a:p>
-            <a:pPr algn="ctr"/>
-          </a:p>
-        </p:txBody>
-      </p:sp>
-      <p:sp>
-        <p:nvSpPr>
-          <p:cNvPr id="4" name="TextBox 3"/>
-          <p:cNvSpPr txBox="1"/>
-          <p:nvPr/>
-        </p:nvSpPr>
-        <p:spPr>
-          <a:xfrm>
-            <a:off x="822960" y="1920240"/>
-            <a:ext cx="10789920" cy="3291840"/>
-          </a:xfrm>
-          <a:prstGeom prst="rect">
-            <a:avLst/>
-          </a:prstGeom>
-          <a:noFill/>
-        </p:spPr>
-        <p:txBody>
-          <a:bodyPr wrap="square">
-            <a:spAutoFit/>
-          </a:bodyPr>
-          <a:lstStyle/>
-          <a:p>
-            <a:pPr>
-              <a:spcAft>
-                <a:spcPts val="900"/>
-              </a:spcAft>
-              <a:defRPr sz="2100">
-                <a:solidFill>
-                  <a:srgbClr val="1C2D46"/>
-                </a:solidFill>
-                <a:latin typeface="Aptos"/>
-              </a:defRPr>
-            </a:pPr>
-            <a:r>
-              <a:t>0:00-2:00 Problem and scope</a:t>
-            </a:r>
-          </a:p>
-          <a:p>
-            <a:pPr>
-              <a:spcAft>
-                <a:spcPts val="900"/>
-              </a:spcAft>
-              <a:defRPr sz="2100">
-                <a:solidFill>
-                  <a:srgbClr val="1C2D46"/>
-                </a:solidFill>
-                <a:latin typeface="Aptos"/>
-              </a:defRPr>
-            </a:pPr>
-            <a:r>
-              <a:t>2:00-5:30 Data and method pipeline</a:t>
-            </a:r>
-          </a:p>
-          <a:p>
-            <a:pPr>
-              <a:spcAft>
-                <a:spcPts val="900"/>
-              </a:spcAft>
-              <a:defRPr sz="2100">
-                <a:solidFill>
-                  <a:srgbClr val="1C2D46"/>
-                </a:solidFill>
-                <a:latin typeface="Aptos"/>
-              </a:defRPr>
-            </a:pPr>
-            <a:r>
-              <a:t>5:30-8:30 Evaluation and explainability</a:t>
-            </a:r>
-          </a:p>
-          <a:p>
-            <a:pPr>
-              <a:spcAft>
-                <a:spcPts val="900"/>
-              </a:spcAft>
-              <a:defRPr sz="2100">
-                <a:solidFill>
-                  <a:srgbClr val="1C2D46"/>
-                </a:solidFill>
-                <a:latin typeface="Aptos"/>
-              </a:defRPr>
-            </a:pPr>
-            <a:r>
-              <a:t>8:30-12:30 Live demo</a:t>
-            </a:r>
-          </a:p>
-          <a:p>
-            <a:pPr>
-              <a:spcAft>
-                <a:spcPts val="900"/>
-              </a:spcAft>
-              <a:defRPr sz="2100">
-                <a:solidFill>
-                  <a:srgbClr val="1C2D46"/>
-                </a:solidFill>
-                <a:latin typeface="Aptos"/>
-              </a:defRPr>
-            </a:pPr>
-            <a:r>
-              <a:t>12:30-14:00 Impact, caveats, roadmap</a:t>
-            </a:r>
-          </a:p>
-          <a:p>
-            <a:pPr>
-              <a:spcAft>
-                <a:spcPts val="900"/>
-              </a:spcAft>
-              <a:defRPr sz="2100">
-                <a:solidFill>
-                  <a:srgbClr val="1C2D46"/>
-                </a:solidFill>
-                <a:latin typeface="Aptos"/>
-              </a:defRPr>
-            </a:pPr>
-            <a:r>
-              <a:t>14:00-15:00 Q&amp;A</a:t>
-            </a:r>
-          </a:p>
-        </p:txBody>
-      </p:sp>
-      <p:sp>
-        <p:nvSpPr>
-          <p:cNvPr id="5" name="Rounded Rectangle 4"/>
-          <p:cNvSpPr/>
-          <p:nvPr/>
-        </p:nvSpPr>
-        <p:spPr>
-          <a:xfrm>
-            <a:off x="822960" y="5303520"/>
-            <a:ext cx="10789920" cy="914400"/>
-          </a:xfrm>
-          <a:prstGeom prst="roundRect">
-            <a:avLst/>
-          </a:prstGeom>
-          <a:solidFill>
-            <a:srgbClr val="F2F7FC"/>
-          </a:solidFill>
-          <a:ln w="15875">
-            <a:solidFill>
-              <a:srgbClr val="CDDCEE"/>
-            </a:solidFill>
-          </a:ln>
-        </p:spPr>
-        <p:style>
-          <a:lnRef idx="1">
-            <a:schemeClr val="accent1"/>
-          </a:lnRef>
-          <a:fillRef idx="3">
-            <a:schemeClr val="accent1"/>
-          </a:fillRef>
-          <a:effectRef idx="2">
-            <a:schemeClr val="accent1"/>
-          </a:effectRef>
-          <a:fontRef idx="minor">
-            <a:schemeClr val="lt1"/>
-          </a:fontRef>
-        </p:style>
-        <p:txBody>
-          <a:bodyPr rtlCol="0" anchor="ctr"/>
-          <a:lstStyle/>
-          <a:p>
-            <a:pPr algn="ctr"/>
-          </a:p>
-        </p:txBody>
-      </p:sp>
-      <p:sp>
-        <p:nvSpPr>
-          <p:cNvPr id="6" name="TextBox 5"/>
-          <p:cNvSpPr txBox="1"/>
-          <p:nvPr/>
-        </p:nvSpPr>
-        <p:spPr>
-          <a:xfrm>
-            <a:off x="1024128" y="5413248"/>
-            <a:ext cx="10469880" cy="365760"/>
-          </a:xfrm>
-          <a:prstGeom prst="rect">
-            <a:avLst/>
-          </a:prstGeom>
-          <a:noFill/>
-        </p:spPr>
-        <p:txBody>
-          <a:bodyPr wrap="none">
-            <a:spAutoFit/>
-          </a:bodyPr>
-          <a:lstStyle/>
-          <a:p>
-            <a:pPr>
-              <a:defRPr b="1" sz="1900">
-                <a:solidFill>
-                  <a:srgbClr val="133A66"/>
-                </a:solidFill>
-                <a:latin typeface="Aptos"/>
-              </a:defRPr>
-            </a:pPr>
-            <a:r>
-              <a:t>Speaking split suggestion</a:t>
-            </a:r>
-          </a:p>
-        </p:txBody>
-      </p:sp>
-      <p:sp>
-        <p:nvSpPr>
-          <p:cNvPr id="7" name="TextBox 6"/>
-          <p:cNvSpPr txBox="1"/>
-          <p:nvPr/>
-        </p:nvSpPr>
-        <p:spPr>
-          <a:xfrm>
-            <a:off x="1005840" y="5779008"/>
-            <a:ext cx="10469880" cy="347472"/>
-          </a:xfrm>
-          <a:prstGeom prst="rect">
-            <a:avLst/>
-          </a:prstGeom>
-          <a:noFill/>
-        </p:spPr>
-        <p:txBody>
-          <a:bodyPr wrap="square">
-            <a:spAutoFit/>
-          </a:bodyPr>
-          <a:lstStyle/>
-          <a:p>
-            <a:pPr>
-              <a:spcAft>
-                <a:spcPts val="900"/>
-              </a:spcAft>
-              <a:defRPr sz="1600">
-                <a:solidFill>
-                  <a:srgbClr val="1C2D46"/>
-                </a:solidFill>
-                <a:latin typeface="Aptos"/>
-              </a:defRPr>
-            </a:pPr>
-            <a:r>
-              <a:t>Speaker A: business context | Speaker B: technical pipeline | Speaker C: demo + impact + Q&amp;A</a:t>
-            </a:r>
-          </a:p>
-        </p:txBody>
-      </p:sp>
-      <p:sp>
-        <p:nvSpPr>
-          <p:cNvPr id="8" name="TextBox 7"/>
-          <p:cNvSpPr txBox="1"/>
-          <p:nvPr/>
-        </p:nvSpPr>
-        <p:spPr>
-          <a:xfrm>
-            <a:off x="502920" y="6428232"/>
-            <a:ext cx="10972800" cy="292608"/>
-          </a:xfrm>
-          <a:prstGeom prst="rect">
-            <a:avLst/>
-          </a:prstGeom>
-          <a:noFill/>
-        </p:spPr>
-        <p:txBody>
-          <a:bodyPr wrap="none">
-            <a:spAutoFit/>
-          </a:bodyPr>
-          <a:lstStyle/>
-          <a:p>
             <a:pPr algn="r">
               <a:defRPr sz="1000">
                 <a:solidFill>
@@ -5726,295 +5599,7 @@
               </a:defRPr>
             </a:pPr>
             <a:r>
-              <a:t>Time and role clarity improves delivery score</a:t>
-            </a:r>
-          </a:p>
-        </p:txBody>
-      </p:sp>
-    </p:spTree>
-  </p:cSld>
-  <p:clrMapOvr>
-    <a:masterClrMapping/>
-  </p:clrMapOvr>
-</p:sld>
-</file>
-
-<file path=ppt/slides/slide17.xml><?xml version="1.0" encoding="utf-8"?>
-<p:sld xmlns:a="http://schemas.openxmlformats.org/drawingml/2006/main" xmlns:p="http://schemas.openxmlformats.org/presentationml/2006/main" xmlns:r="http://schemas.openxmlformats.org/officeDocument/2006/relationships">
-  <p:cSld>
-    <p:spTree>
-      <p:nvGrpSpPr>
-        <p:cNvPr id="1" name=""/>
-        <p:cNvGrpSpPr/>
-        <p:nvPr/>
-      </p:nvGrpSpPr>
-      <p:grpSpPr/>
-      <p:sp>
-        <p:nvSpPr>
-          <p:cNvPr id="2" name="TextBox 1"/>
-          <p:cNvSpPr txBox="1"/>
-          <p:nvPr/>
-        </p:nvSpPr>
-        <p:spPr>
-          <a:xfrm>
-            <a:off x="594360" y="320040"/>
-            <a:ext cx="11064240" cy="914400"/>
-          </a:xfrm>
-          <a:prstGeom prst="rect">
-            <a:avLst/>
-          </a:prstGeom>
-          <a:noFill/>
-        </p:spPr>
-        <p:txBody>
-          <a:bodyPr wrap="none">
-            <a:spAutoFit/>
-          </a:bodyPr>
-          <a:lstStyle/>
-          <a:p>
-            <a:pPr>
-              <a:defRPr sz="3400" b="1">
-                <a:solidFill>
-                  <a:srgbClr val="0F2C59"/>
-                </a:solidFill>
-                <a:latin typeface="Aptos Display"/>
-              </a:defRPr>
-            </a:pPr>
-            <a:r>
-              <a:t>References and Q&amp;A</a:t>
-            </a:r>
-          </a:p>
-        </p:txBody>
-      </p:sp>
-      <p:sp>
-        <p:nvSpPr>
-          <p:cNvPr id="3" name="Rectangle 2"/>
-          <p:cNvSpPr/>
-          <p:nvPr/>
-        </p:nvSpPr>
-        <p:spPr>
-          <a:xfrm>
-            <a:off x="566928" y="1783080"/>
-            <a:ext cx="2377440" cy="73152"/>
-          </a:xfrm>
-          <a:prstGeom prst="rect">
-            <a:avLst/>
-          </a:prstGeom>
-          <a:solidFill>
-            <a:srgbClr val="1A7DBC"/>
-          </a:solidFill>
-          <a:ln>
-            <a:noFill/>
-          </a:ln>
-        </p:spPr>
-        <p:style>
-          <a:lnRef idx="1">
-            <a:schemeClr val="accent1"/>
-          </a:lnRef>
-          <a:fillRef idx="3">
-            <a:schemeClr val="accent1"/>
-          </a:fillRef>
-          <a:effectRef idx="2">
-            <a:schemeClr val="accent1"/>
-          </a:effectRef>
-          <a:fontRef idx="minor">
-            <a:schemeClr val="lt1"/>
-          </a:fontRef>
-        </p:style>
-        <p:txBody>
-          <a:bodyPr rtlCol="0" anchor="ctr"/>
-          <a:lstStyle/>
-          <a:p>
-            <a:pPr algn="ctr"/>
-          </a:p>
-        </p:txBody>
-      </p:sp>
-      <p:sp>
-        <p:nvSpPr>
-          <p:cNvPr id="4" name="TextBox 3"/>
-          <p:cNvSpPr txBox="1"/>
-          <p:nvPr/>
-        </p:nvSpPr>
-        <p:spPr>
-          <a:xfrm>
-            <a:off x="822960" y="1920240"/>
-            <a:ext cx="10789920" cy="3383280"/>
-          </a:xfrm>
-          <a:prstGeom prst="rect">
-            <a:avLst/>
-          </a:prstGeom>
-          <a:noFill/>
-        </p:spPr>
-        <p:txBody>
-          <a:bodyPr wrap="square">
-            <a:spAutoFit/>
-          </a:bodyPr>
-          <a:lstStyle/>
-          <a:p>
-            <a:pPr>
-              <a:spcAft>
-                <a:spcPts val="900"/>
-              </a:spcAft>
-              <a:defRPr sz="1900">
-                <a:solidFill>
-                  <a:srgbClr val="1C2D46"/>
-                </a:solidFill>
-                <a:latin typeface="Aptos"/>
-              </a:defRPr>
-            </a:pPr>
-            <a:r>
-              <a:t>MSIS 521 assignment brief and evaluation rubric (Canvas)</a:t>
-            </a:r>
-          </a:p>
-          <a:p>
-            <a:pPr>
-              <a:spcAft>
-                <a:spcPts val="900"/>
-              </a:spcAft>
-              <a:defRPr sz="1900">
-                <a:solidFill>
-                  <a:srgbClr val="1C2D46"/>
-                </a:solidFill>
-                <a:latin typeface="Aptos"/>
-              </a:defRPr>
-            </a:pPr>
-            <a:r>
-              <a:t>YouTube Data API documentation</a:t>
-            </a:r>
-          </a:p>
-          <a:p>
-            <a:pPr>
-              <a:spcAft>
-                <a:spcPts val="900"/>
-              </a:spcAft>
-              <a:defRPr sz="1900">
-                <a:solidFill>
-                  <a:srgbClr val="1C2D46"/>
-                </a:solidFill>
-                <a:latin typeface="Aptos"/>
-              </a:defRPr>
-            </a:pPr>
-            <a:r>
-              <a:t>scikit-learn documentation (regression, tree models, GroupKFold)</a:t>
-            </a:r>
-          </a:p>
-          <a:p>
-            <a:pPr>
-              <a:spcAft>
-                <a:spcPts val="900"/>
-              </a:spcAft>
-              <a:defRPr sz="1900">
-                <a:solidFill>
-                  <a:srgbClr val="1C2D46"/>
-                </a:solidFill>
-                <a:latin typeface="Aptos"/>
-              </a:defRPr>
-            </a:pPr>
-            <a:r>
-              <a:t>LightGBM documentation</a:t>
-            </a:r>
-          </a:p>
-          <a:p>
-            <a:pPr>
-              <a:spcAft>
-                <a:spcPts val="900"/>
-              </a:spcAft>
-              <a:defRPr sz="1900">
-                <a:solidFill>
-                  <a:srgbClr val="1C2D46"/>
-                </a:solidFill>
-                <a:latin typeface="Aptos"/>
-              </a:defRPr>
-            </a:pPr>
-            <a:r>
-              <a:t>SHAP documentation</a:t>
-            </a:r>
-          </a:p>
-          <a:p>
-            <a:pPr>
-              <a:spcAft>
-                <a:spcPts val="900"/>
-              </a:spcAft>
-              <a:defRPr sz="1900">
-                <a:solidFill>
-                  <a:srgbClr val="1C2D46"/>
-                </a:solidFill>
-                <a:latin typeface="Aptos"/>
-              </a:defRPr>
-            </a:pPr>
-            <a:r>
-              <a:t>Streamlit documentation</a:t>
-            </a:r>
-          </a:p>
-        </p:txBody>
-      </p:sp>
-      <p:sp>
-        <p:nvSpPr>
-          <p:cNvPr id="5" name="TextBox 4"/>
-          <p:cNvSpPr txBox="1"/>
-          <p:nvPr/>
-        </p:nvSpPr>
-        <p:spPr>
-          <a:xfrm>
-            <a:off x="822960" y="5486400"/>
-            <a:ext cx="10515600" cy="731520"/>
-          </a:xfrm>
-          <a:prstGeom prst="rect">
-            <a:avLst/>
-          </a:prstGeom>
-          <a:noFill/>
-        </p:spPr>
-        <p:txBody>
-          <a:bodyPr wrap="none">
-            <a:spAutoFit/>
-          </a:bodyPr>
-          <a:lstStyle/>
-          <a:p>
-            <a:pPr algn="ctr">
-              <a:defRPr sz="3000" b="1">
-                <a:solidFill>
-                  <a:srgbClr val="105696"/>
-                </a:solidFill>
-                <a:latin typeface="Aptos Display"/>
-              </a:defRPr>
-            </a:pPr>
-            <a:r>
-              <a:t>Thank you. Questions?</a:t>
-            </a:r>
-          </a:p>
-        </p:txBody>
-      </p:sp>
-      <p:sp>
-        <p:nvSpPr>
-          <p:cNvPr id="6" name="TextBox 5"/>
-          <p:cNvSpPr txBox="1"/>
-          <p:nvPr/>
-        </p:nvSpPr>
-        <p:spPr>
-          <a:xfrm>
-            <a:off x="502920" y="6428232"/>
-            <a:ext cx="10972800" cy="292608"/>
-          </a:xfrm>
-          <a:prstGeom prst="rect">
-            <a:avLst/>
-          </a:prstGeom>
-          <a:noFill/>
-        </p:spPr>
-        <p:txBody>
-          <a:bodyPr wrap="none">
-            <a:spAutoFit/>
-          </a:bodyPr>
-          <a:lstStyle/>
-          <a:p>
-            <a:pPr algn="r">
-              <a:defRPr sz="1000">
-                <a:solidFill>
-                  <a:srgbClr val="6E8098"/>
-                </a:solidFill>
-                <a:latin typeface="Aptos"/>
-              </a:defRPr>
-            </a:pPr>
-            <a:r>
-              <a:t>AI-MCN team</a:t>
+              <a:t>AI-MCN | MSIS 521</a:t>
             </a:r>
           </a:p>
         </p:txBody>
@@ -6060,7 +5645,7 @@
           <a:lstStyle/>
           <a:p>
             <a:pPr>
-              <a:defRPr sz="3400" b="1">
+              <a:defRPr sz="3200" b="1">
                 <a:solidFill>
                   <a:srgbClr val="0F2C59"/>
                 </a:solidFill>
@@ -6068,7 +5653,7 @@
               </a:defRPr>
             </a:pPr>
             <a:r>
-              <a:t>Problem and Scope</a:t>
+              <a:t>Agenda and Timing (Professor Guide)</a:t>
             </a:r>
           </a:p>
         </p:txBody>
@@ -6081,8 +5666,8 @@
         </p:nvSpPr>
         <p:spPr>
           <a:xfrm>
-            <a:off x="566928" y="1783080"/>
-            <a:ext cx="2377440" cy="73152"/>
+            <a:off x="566928" y="1755648"/>
+            <a:ext cx="2651760" cy="73152"/>
           </a:xfrm>
           <a:prstGeom prst="rect">
             <a:avLst/>
@@ -6118,46 +5703,136 @@
       </p:sp>
       <p:sp>
         <p:nvSpPr>
-          <p:cNvPr id="4" name="Rounded Rectangle 3"/>
-          <p:cNvSpPr/>
-          <p:nvPr/>
-        </p:nvSpPr>
-        <p:spPr>
-          <a:xfrm>
-            <a:off x="594360" y="1828800"/>
-            <a:ext cx="5440680" cy="4297680"/>
-          </a:xfrm>
-          <a:prstGeom prst="roundRect">
-            <a:avLst/>
-          </a:prstGeom>
-          <a:solidFill>
-            <a:srgbClr val="F2F7FC"/>
-          </a:solidFill>
-          <a:ln w="15875">
-            <a:solidFill>
-              <a:srgbClr val="CDDCEE"/>
-            </a:solidFill>
-          </a:ln>
-        </p:spPr>
-        <p:style>
-          <a:lnRef idx="1">
-            <a:schemeClr val="accent1"/>
-          </a:lnRef>
-          <a:fillRef idx="3">
-            <a:schemeClr val="accent1"/>
-          </a:fillRef>
-          <a:effectRef idx="2">
-            <a:schemeClr val="accent1"/>
-          </a:effectRef>
-          <a:fontRef idx="minor">
-            <a:schemeClr val="lt1"/>
-          </a:fontRef>
-        </p:style>
-        <p:txBody>
-          <a:bodyPr rtlCol="0" anchor="ctr"/>
-          <a:lstStyle/>
-          <a:p>
-            <a:pPr algn="ctr"/>
+          <p:cNvPr id="4" name="TextBox 3"/>
+          <p:cNvSpPr txBox="1"/>
+          <p:nvPr/>
+        </p:nvSpPr>
+        <p:spPr>
+          <a:xfrm>
+            <a:off x="749808" y="1920240"/>
+            <a:ext cx="10972800" cy="4389120"/>
+          </a:xfrm>
+          <a:prstGeom prst="rect">
+            <a:avLst/>
+          </a:prstGeom>
+          <a:noFill/>
+        </p:spPr>
+        <p:txBody>
+          <a:bodyPr wrap="square">
+            <a:spAutoFit/>
+          </a:bodyPr>
+          <a:lstStyle/>
+          <a:p>
+            <a:pPr>
+              <a:spcAft>
+                <a:spcPts val="800"/>
+              </a:spcAft>
+              <a:defRPr sz="2100">
+                <a:solidFill>
+                  <a:srgbClr val="1C2D46"/>
+                </a:solidFill>
+                <a:latin typeface="Aptos"/>
+              </a:defRPr>
+            </a:pPr>
+            <a:r>
+              <a:t>1) Title and team (1 min)</a:t>
+            </a:r>
+          </a:p>
+          <a:p>
+            <a:pPr>
+              <a:spcAft>
+                <a:spcPts val="800"/>
+              </a:spcAft>
+              <a:defRPr sz="2100">
+                <a:solidFill>
+                  <a:srgbClr val="1C2D46"/>
+                </a:solidFill>
+                <a:latin typeface="Aptos"/>
+              </a:defRPr>
+            </a:pPr>
+            <a:r>
+              <a:t>2) Business context and problem (2-3 min)</a:t>
+            </a:r>
+          </a:p>
+          <a:p>
+            <a:pPr>
+              <a:spcAft>
+                <a:spcPts val="800"/>
+              </a:spcAft>
+              <a:defRPr sz="2100">
+                <a:solidFill>
+                  <a:srgbClr val="1C2D46"/>
+                </a:solidFill>
+                <a:latin typeface="Aptos"/>
+              </a:defRPr>
+            </a:pPr>
+            <a:r>
+              <a:t>3) Data and features (1-3 min)</a:t>
+            </a:r>
+          </a:p>
+          <a:p>
+            <a:pPr>
+              <a:spcAft>
+                <a:spcPts val="800"/>
+              </a:spcAft>
+              <a:defRPr sz="2100">
+                <a:solidFill>
+                  <a:srgbClr val="1C2D46"/>
+                </a:solidFill>
+                <a:latin typeface="Aptos"/>
+              </a:defRPr>
+            </a:pPr>
+            <a:r>
+              <a:t>4) AI/ML approach (3-4 min)</a:t>
+            </a:r>
+          </a:p>
+          <a:p>
+            <a:pPr>
+              <a:spcAft>
+                <a:spcPts val="800"/>
+              </a:spcAft>
+              <a:defRPr sz="2100">
+                <a:solidFill>
+                  <a:srgbClr val="1C2D46"/>
+                </a:solidFill>
+                <a:latin typeface="Aptos"/>
+              </a:defRPr>
+            </a:pPr>
+            <a:r>
+              <a:t>5) Prototype demo (3-4 min)</a:t>
+            </a:r>
+          </a:p>
+          <a:p>
+            <a:pPr>
+              <a:spcAft>
+                <a:spcPts val="800"/>
+              </a:spcAft>
+              <a:defRPr sz="2100">
+                <a:solidFill>
+                  <a:srgbClr val="1C2D46"/>
+                </a:solidFill>
+                <a:latin typeface="Aptos"/>
+              </a:defRPr>
+            </a:pPr>
+            <a:r>
+              <a:t>6) Impact, limitations, next steps (2-3 min)</a:t>
+            </a:r>
+          </a:p>
+          <a:p>
+            <a:pPr>
+              <a:spcAft>
+                <a:spcPts val="800"/>
+              </a:spcAft>
+              <a:defRPr sz="2100">
+                <a:solidFill>
+                  <a:srgbClr val="1C2D46"/>
+                </a:solidFill>
+                <a:latin typeface="Aptos"/>
+              </a:defRPr>
+            </a:pPr>
+            <a:r>
+              <a:t>7) How we used AI tools (1-2 min)</a:t>
+            </a:r>
           </a:p>
         </p:txBody>
       </p:sp>
@@ -6169,8 +5844,8 @@
         </p:nvSpPr>
         <p:spPr>
           <a:xfrm>
-            <a:off x="795528" y="1938528"/>
-            <a:ext cx="5120640" cy="365760"/>
+            <a:off x="502920" y="6428232"/>
+            <a:ext cx="10972800" cy="292608"/>
           </a:xfrm>
           <a:prstGeom prst="rect">
             <a:avLst/>
@@ -6183,265 +5858,6 @@
           </a:bodyPr>
           <a:lstStyle/>
           <a:p>
-            <a:pPr>
-              <a:defRPr b="1" sz="1900">
-                <a:solidFill>
-                  <a:srgbClr val="133A66"/>
-                </a:solidFill>
-                <a:latin typeface="Aptos"/>
-              </a:defRPr>
-            </a:pPr>
-            <a:r>
-              <a:t>Business Problem</a:t>
-            </a:r>
-          </a:p>
-        </p:txBody>
-      </p:sp>
-      <p:sp>
-        <p:nvSpPr>
-          <p:cNvPr id="6" name="TextBox 5"/>
-          <p:cNvSpPr txBox="1"/>
-          <p:nvPr/>
-        </p:nvSpPr>
-        <p:spPr>
-          <a:xfrm>
-            <a:off x="777240" y="2304288"/>
-            <a:ext cx="5120640" cy="3730752"/>
-          </a:xfrm>
-          <a:prstGeom prst="rect">
-            <a:avLst/>
-          </a:prstGeom>
-          <a:noFill/>
-        </p:spPr>
-        <p:txBody>
-          <a:bodyPr wrap="square">
-            <a:spAutoFit/>
-          </a:bodyPr>
-          <a:lstStyle/>
-          <a:p>
-            <a:pPr>
-              <a:spcAft>
-                <a:spcPts val="900"/>
-              </a:spcAft>
-              <a:defRPr sz="1600">
-                <a:solidFill>
-                  <a:srgbClr val="1C2D46"/>
-                </a:solidFill>
-                <a:latin typeface="Aptos"/>
-              </a:defRPr>
-            </a:pPr>
-            <a:r>
-              <a:t>Influencer discovery is often manual, slow, and popularity-biased.</a:t>
-            </a:r>
-          </a:p>
-          <a:p>
-            <a:pPr>
-              <a:spcAft>
-                <a:spcPts val="900"/>
-              </a:spcAft>
-              <a:defRPr sz="1600">
-                <a:solidFill>
-                  <a:srgbClr val="1C2D46"/>
-                </a:solidFill>
-                <a:latin typeface="Aptos"/>
-              </a:defRPr>
-            </a:pPr>
-            <a:r>
-              <a:t>Teams need transparent, evidence-based creator selection.</a:t>
-            </a:r>
-          </a:p>
-          <a:p>
-            <a:pPr>
-              <a:spcAft>
-                <a:spcPts val="900"/>
-              </a:spcAft>
-              <a:defRPr sz="1600">
-                <a:solidFill>
-                  <a:srgbClr val="1C2D46"/>
-                </a:solidFill>
-                <a:latin typeface="Aptos"/>
-              </a:defRPr>
-            </a:pPr>
-            <a:r>
-              <a:t>Campaign planning needs measurable support, not only intuition.</a:t>
-            </a:r>
-          </a:p>
-        </p:txBody>
-      </p:sp>
-      <p:sp>
-        <p:nvSpPr>
-          <p:cNvPr id="7" name="Rounded Rectangle 6"/>
-          <p:cNvSpPr/>
-          <p:nvPr/>
-        </p:nvSpPr>
-        <p:spPr>
-          <a:xfrm>
-            <a:off x="6144768" y="1828800"/>
-            <a:ext cx="5440680" cy="4297680"/>
-          </a:xfrm>
-          <a:prstGeom prst="roundRect">
-            <a:avLst/>
-          </a:prstGeom>
-          <a:solidFill>
-            <a:srgbClr val="F2F7FC"/>
-          </a:solidFill>
-          <a:ln w="15875">
-            <a:solidFill>
-              <a:srgbClr val="CDDCEE"/>
-            </a:solidFill>
-          </a:ln>
-        </p:spPr>
-        <p:style>
-          <a:lnRef idx="1">
-            <a:schemeClr val="accent1"/>
-          </a:lnRef>
-          <a:fillRef idx="3">
-            <a:schemeClr val="accent1"/>
-          </a:fillRef>
-          <a:effectRef idx="2">
-            <a:schemeClr val="accent1"/>
-          </a:effectRef>
-          <a:fontRef idx="minor">
-            <a:schemeClr val="lt1"/>
-          </a:fontRef>
-        </p:style>
-        <p:txBody>
-          <a:bodyPr rtlCol="0" anchor="ctr"/>
-          <a:lstStyle/>
-          <a:p>
-            <a:pPr algn="ctr"/>
-          </a:p>
-        </p:txBody>
-      </p:sp>
-      <p:sp>
-        <p:nvSpPr>
-          <p:cNvPr id="8" name="TextBox 7"/>
-          <p:cNvSpPr txBox="1"/>
-          <p:nvPr/>
-        </p:nvSpPr>
-        <p:spPr>
-          <a:xfrm>
-            <a:off x="6345936" y="1938528"/>
-            <a:ext cx="5120640" cy="365760"/>
-          </a:xfrm>
-          <a:prstGeom prst="rect">
-            <a:avLst/>
-          </a:prstGeom>
-          <a:noFill/>
-        </p:spPr>
-        <p:txBody>
-          <a:bodyPr wrap="none">
-            <a:spAutoFit/>
-          </a:bodyPr>
-          <a:lstStyle/>
-          <a:p>
-            <a:pPr>
-              <a:defRPr b="1" sz="1900">
-                <a:solidFill>
-                  <a:srgbClr val="133A66"/>
-                </a:solidFill>
-                <a:latin typeface="Aptos"/>
-              </a:defRPr>
-            </a:pPr>
-            <a:r>
-              <a:t>Scope Discipline</a:t>
-            </a:r>
-          </a:p>
-        </p:txBody>
-      </p:sp>
-      <p:sp>
-        <p:nvSpPr>
-          <p:cNvPr id="9" name="TextBox 8"/>
-          <p:cNvSpPr txBox="1"/>
-          <p:nvPr/>
-        </p:nvSpPr>
-        <p:spPr>
-          <a:xfrm>
-            <a:off x="6327648" y="2304288"/>
-            <a:ext cx="5120640" cy="3730752"/>
-          </a:xfrm>
-          <a:prstGeom prst="rect">
-            <a:avLst/>
-          </a:prstGeom>
-          <a:noFill/>
-        </p:spPr>
-        <p:txBody>
-          <a:bodyPr wrap="square">
-            <a:spAutoFit/>
-          </a:bodyPr>
-          <a:lstStyle/>
-          <a:p>
-            <a:pPr>
-              <a:spcAft>
-                <a:spcPts val="900"/>
-              </a:spcAft>
-              <a:defRPr sz="1600">
-                <a:solidFill>
-                  <a:srgbClr val="1C2D46"/>
-                </a:solidFill>
-                <a:latin typeface="Aptos"/>
-              </a:defRPr>
-            </a:pPr>
-            <a:r>
-              <a:t>In-scope: end-to-end matching prototype and live demo.</a:t>
-            </a:r>
-          </a:p>
-          <a:p>
-            <a:pPr>
-              <a:spcAft>
-                <a:spcPts val="900"/>
-              </a:spcAft>
-              <a:defRPr sz="1600">
-                <a:solidFill>
-                  <a:srgbClr val="1C2D46"/>
-                </a:solidFill>
-                <a:latin typeface="Aptos"/>
-              </a:defRPr>
-            </a:pPr>
-            <a:r>
-              <a:t>Out-of-scope: full production MLOps and multi-platform live ingestion.</a:t>
-            </a:r>
-          </a:p>
-          <a:p>
-            <a:pPr>
-              <a:spcAft>
-                <a:spcPts val="900"/>
-              </a:spcAft>
-              <a:defRPr sz="1600">
-                <a:solidFill>
-                  <a:srgbClr val="1C2D46"/>
-                </a:solidFill>
-                <a:latin typeface="Aptos"/>
-              </a:defRPr>
-            </a:pPr>
-            <a:r>
-              <a:t>Quarter-feasible scope with meaningful technical depth.</a:t>
-            </a:r>
-          </a:p>
-        </p:txBody>
-      </p:sp>
-      <p:sp>
-        <p:nvSpPr>
-          <p:cNvPr id="10" name="TextBox 9"/>
-          <p:cNvSpPr txBox="1"/>
-          <p:nvPr/>
-        </p:nvSpPr>
-        <p:spPr>
-          <a:xfrm>
-            <a:off x="502920" y="6428232"/>
-            <a:ext cx="10972800" cy="292608"/>
-          </a:xfrm>
-          <a:prstGeom prst="rect">
-            <a:avLst/>
-          </a:prstGeom>
-          <a:noFill/>
-        </p:spPr>
-        <p:txBody>
-          <a:bodyPr wrap="none">
-            <a:spAutoFit/>
-          </a:bodyPr>
-          <a:lstStyle/>
-          <a:p>
             <a:pPr algn="r">
               <a:defRPr sz="1000">
                 <a:solidFill>
@@ -6451,7 +5867,7 @@
               </a:defRPr>
             </a:pPr>
             <a:r>
-              <a:t>Rubric 1: Topic choice, scope, interest</a:t>
+              <a:t>Section 2 | Roadmap</a:t>
             </a:r>
           </a:p>
         </p:txBody>
@@ -6497,7 +5913,7 @@
           <a:lstStyle/>
           <a:p>
             <a:pPr>
-              <a:defRPr sz="3400" b="1">
+              <a:defRPr sz="3200" b="1">
                 <a:solidFill>
                   <a:srgbClr val="0F2C59"/>
                 </a:solidFill>
@@ -6505,7 +5921,7 @@
               </a:defRPr>
             </a:pPr>
             <a:r>
-              <a:t>Why Beauty of Joseon? (Selection + Research)</a:t>
+              <a:t>Business Context and Problem</a:t>
             </a:r>
           </a:p>
         </p:txBody>
@@ -6518,8 +5934,8 @@
         </p:nvSpPr>
         <p:spPr>
           <a:xfrm>
-            <a:off x="566928" y="1783080"/>
-            <a:ext cx="2377440" cy="73152"/>
+            <a:off x="566928" y="1755648"/>
+            <a:ext cx="2651760" cy="73152"/>
           </a:xfrm>
           <a:prstGeom prst="rect">
             <a:avLst/>
@@ -6562,7 +5978,7 @@
         <p:spPr>
           <a:xfrm>
             <a:off x="594360" y="1828800"/>
-            <a:ext cx="5440680" cy="4343400"/>
+            <a:ext cx="5440680" cy="4389120"/>
           </a:xfrm>
           <a:prstGeom prst="roundRect">
             <a:avLst/>
@@ -6606,8 +6022,8 @@
         </p:nvSpPr>
         <p:spPr>
           <a:xfrm>
-            <a:off x="795528" y="1938528"/>
-            <a:ext cx="5120640" cy="365760"/>
+            <a:off x="777240" y="1938528"/>
+            <a:ext cx="5166360" cy="347472"/>
           </a:xfrm>
           <a:prstGeom prst="rect">
             <a:avLst/>
@@ -6621,7 +6037,7 @@
           <a:lstStyle/>
           <a:p>
             <a:pPr>
-              <a:defRPr b="1" sz="1900">
+              <a:defRPr b="1" sz="1800">
                 <a:solidFill>
                   <a:srgbClr val="133A66"/>
                 </a:solidFill>
@@ -6629,7 +6045,7 @@
               </a:defRPr>
             </a:pPr>
             <a:r>
-              <a:t>Why this brand for the project</a:t>
+              <a:t>Current MCN-Style Workflow</a:t>
             </a:r>
           </a:p>
         </p:txBody>
@@ -6642,8 +6058,8 @@
         </p:nvSpPr>
         <p:spPr>
           <a:xfrm>
-            <a:off x="777240" y="2304288"/>
-            <a:ext cx="5120640" cy="3776472"/>
+            <a:off x="758952" y="2267712"/>
+            <a:ext cx="5184648" cy="3858768"/>
           </a:xfrm>
           <a:prstGeom prst="rect">
             <a:avLst/>
@@ -6658,65 +6074,49 @@
           <a:p>
             <a:pPr>
               <a:spcAft>
-                <a:spcPts val="900"/>
-              </a:spcAft>
-              <a:defRPr sz="1600">
-                <a:solidFill>
-                  <a:srgbClr val="1C2D46"/>
-                </a:solidFill>
-                <a:latin typeface="Aptos"/>
-              </a:defRPr>
-            </a:pPr>
-            <a:r>
-              <a:t>Clear campaign narrative: sunscreen + lightweight skincare.</a:t>
-            </a:r>
-          </a:p>
-          <a:p>
-            <a:pPr>
-              <a:spcAft>
-                <a:spcPts val="900"/>
-              </a:spcAft>
-              <a:defRPr sz="1600">
-                <a:solidFill>
-                  <a:srgbClr val="1C2D46"/>
-                </a:solidFill>
-                <a:latin typeface="Aptos"/>
-              </a:defRPr>
-            </a:pPr>
-            <a:r>
-              <a:t>Distinct positioning for storytelling: heritage-inspired K-beauty.</a:t>
-            </a:r>
-          </a:p>
-          <a:p>
-            <a:pPr>
-              <a:spcAft>
-                <a:spcPts val="900"/>
-              </a:spcAft>
-              <a:defRPr sz="1600">
-                <a:solidFill>
-                  <a:srgbClr val="1C2D46"/>
-                </a:solidFill>
-                <a:latin typeface="Aptos"/>
-              </a:defRPr>
-            </a:pPr>
-            <a:r>
-              <a:t>Good benchmark pair with CeraVe in the same category.</a:t>
-            </a:r>
-          </a:p>
-          <a:p>
-            <a:pPr>
-              <a:spcAft>
-                <a:spcPts val="900"/>
-              </a:spcAft>
-              <a:defRPr sz="1600">
-                <a:solidFill>
-                  <a:srgbClr val="1C2D46"/>
-                </a:solidFill>
-                <a:latin typeface="Aptos"/>
-              </a:defRPr>
-            </a:pPr>
-            <a:r>
-              <a:t>Suitable for explainable matching, not only popularity ranking.</a:t>
+                <a:spcPts val="800"/>
+              </a:spcAft>
+              <a:defRPr sz="1500">
+                <a:solidFill>
+                  <a:srgbClr val="1C2D46"/>
+                </a:solidFill>
+                <a:latin typeface="Aptos"/>
+              </a:defRPr>
+            </a:pPr>
+            <a:r>
+              <a:t>MCNs aggregate influencer data and broker brand-creator matching.</a:t>
+            </a:r>
+          </a:p>
+          <a:p>
+            <a:pPr>
+              <a:spcAft>
+                <a:spcPts val="800"/>
+              </a:spcAft>
+              <a:defRPr sz="1500">
+                <a:solidFill>
+                  <a:srgbClr val="1C2D46"/>
+                </a:solidFill>
+                <a:latin typeface="Aptos"/>
+              </a:defRPr>
+            </a:pPr>
+            <a:r>
+              <a:t>Brands pay agency/management fees plus campaign budget.</a:t>
+            </a:r>
+          </a:p>
+          <a:p>
+            <a:pPr>
+              <a:spcAft>
+                <a:spcPts val="800"/>
+              </a:spcAft>
+              <a:defRPr sz="1500">
+                <a:solidFill>
+                  <a:srgbClr val="1C2D46"/>
+                </a:solidFill>
+                <a:latin typeface="Aptos"/>
+              </a:defRPr>
+            </a:pPr>
+            <a:r>
+              <a:t>Matching logic is often hard to audit for brand teams.</a:t>
             </a:r>
           </a:p>
         </p:txBody>
@@ -6730,7 +6130,7 @@
         <p:spPr>
           <a:xfrm>
             <a:off x="6144768" y="1828800"/>
-            <a:ext cx="5440680" cy="4343400"/>
+            <a:ext cx="5440680" cy="4389120"/>
           </a:xfrm>
           <a:prstGeom prst="roundRect">
             <a:avLst/>
@@ -6774,8 +6174,8 @@
         </p:nvSpPr>
         <p:spPr>
           <a:xfrm>
-            <a:off x="6345936" y="1938528"/>
-            <a:ext cx="5120640" cy="365760"/>
+            <a:off x="6327648" y="1938528"/>
+            <a:ext cx="5166360" cy="347472"/>
           </a:xfrm>
           <a:prstGeom prst="rect">
             <a:avLst/>
@@ -6789,7 +6189,7 @@
           <a:lstStyle/>
           <a:p>
             <a:pPr>
-              <a:defRPr b="1" sz="1900">
+              <a:defRPr b="1" sz="1800">
                 <a:solidFill>
                   <a:srgbClr val="133A66"/>
                 </a:solidFill>
@@ -6797,7 +6197,7 @@
               </a:defRPr>
             </a:pPr>
             <a:r>
-              <a:t>Brand research and dataset evidence</a:t>
+              <a:t>Decision We Improve</a:t>
             </a:r>
           </a:p>
         </p:txBody>
@@ -6810,8 +6210,8 @@
         </p:nvSpPr>
         <p:spPr>
           <a:xfrm>
-            <a:off x="6327648" y="2304288"/>
-            <a:ext cx="5120640" cy="3776472"/>
+            <a:off x="6309359" y="2267712"/>
+            <a:ext cx="5184648" cy="3858768"/>
           </a:xfrm>
           <a:prstGeom prst="rect">
             <a:avLst/>
@@ -6826,113 +6226,49 @@
           <a:p>
             <a:pPr>
               <a:spcAft>
-                <a:spcPts val="900"/>
-              </a:spcAft>
-              <a:defRPr sz="1600">
-                <a:solidFill>
-                  <a:srgbClr val="1C2D46"/>
-                </a:solidFill>
-                <a:latin typeface="Aptos"/>
-              </a:defRPr>
-            </a:pPr>
-            <a:r>
-              <a:t>Positioning: gentle, daily-use K-beauty skincare message.</a:t>
-            </a:r>
-          </a:p>
-          <a:p>
-            <a:pPr>
-              <a:spcAft>
-                <a:spcPts val="900"/>
-              </a:spcAft>
-              <a:defRPr sz="1600">
-                <a:solidFill>
-                  <a:srgbClr val="1C2D46"/>
-                </a:solidFill>
-                <a:latin typeface="Aptos"/>
-              </a:defRPr>
-            </a:pPr>
-            <a:r>
-              <a:t>Audience focus: sensitive/acne-aware Gen Z and Millennials.</a:t>
-            </a:r>
-          </a:p>
-          <a:p>
-            <a:pPr>
-              <a:spcAft>
-                <a:spcPts val="900"/>
-              </a:spcAft>
-              <a:defRPr sz="1600">
-                <a:solidFill>
-                  <a:srgbClr val="1C2D46"/>
-                </a:solidFill>
-                <a:latin typeface="Aptos"/>
-              </a:defRPr>
-            </a:pPr>
-            <a:r>
-              <a:t>Dataset source: videos_text_ready_combined.csv (n=67,283 videos)</a:t>
-            </a:r>
-          </a:p>
-          <a:p>
-            <a:pPr>
-              <a:spcAft>
-                <a:spcPts val="900"/>
-              </a:spcAft>
-              <a:defRPr sz="1600">
-                <a:solidFill>
-                  <a:srgbClr val="1C2D46"/>
-                </a:solidFill>
-                <a:latin typeface="Aptos"/>
-              </a:defRPr>
-            </a:pPr>
-            <a:r>
-              <a:t>sunscreen: 3,981 videos | 340 channels</a:t>
-            </a:r>
-          </a:p>
-          <a:p>
-            <a:pPr>
-              <a:spcAft>
-                <a:spcPts val="900"/>
-              </a:spcAft>
-              <a:defRPr sz="1600">
-                <a:solidFill>
-                  <a:srgbClr val="1C2D46"/>
-                </a:solidFill>
-                <a:latin typeface="Aptos"/>
-              </a:defRPr>
-            </a:pPr>
-            <a:r>
-              <a:t>spf: 3,850 videos | 344 channels</a:t>
-            </a:r>
-          </a:p>
-          <a:p>
-            <a:pPr>
-              <a:spcAft>
-                <a:spcPts val="900"/>
-              </a:spcAft>
-              <a:defRPr sz="1600">
-                <a:solidFill>
-                  <a:srgbClr val="1C2D46"/>
-                </a:solidFill>
-                <a:latin typeface="Aptos"/>
-              </a:defRPr>
-            </a:pPr>
-            <a:r>
-              <a:t>beauty of joseon: 286 videos | 69 channels</a:t>
-            </a:r>
-          </a:p>
-          <a:p>
-            <a:pPr>
-              <a:spcAft>
-                <a:spcPts val="900"/>
-              </a:spcAft>
-              <a:defRPr sz="1600">
-                <a:solidFill>
-                  <a:srgbClr val="1C2D46"/>
-                </a:solidFill>
-                <a:latin typeface="Aptos"/>
-              </a:defRPr>
-            </a:pPr>
-            <a:r>
-              <a:t>cerave: 747 videos | 118 channels</a:t>
+                <a:spcPts val="800"/>
+              </a:spcAft>
+              <a:defRPr sz="1500">
+                <a:solidFill>
+                  <a:srgbClr val="1C2D46"/>
+                </a:solidFill>
+                <a:latin typeface="Aptos"/>
+              </a:defRPr>
+            </a:pPr>
+            <a:r>
+              <a:t>From manual or popularity-led creator selection</a:t>
+            </a:r>
+          </a:p>
+          <a:p>
+            <a:pPr>
+              <a:spcAft>
+                <a:spcPts val="800"/>
+              </a:spcAft>
+              <a:defRPr sz="1500">
+                <a:solidFill>
+                  <a:srgbClr val="1C2D46"/>
+                </a:solidFill>
+                <a:latin typeface="Aptos"/>
+              </a:defRPr>
+            </a:pPr>
+            <a:r>
+              <a:t>To evidence-based, product-specific creator ranking</a:t>
+            </a:r>
+          </a:p>
+          <a:p>
+            <a:pPr>
+              <a:spcAft>
+                <a:spcPts val="800"/>
+              </a:spcAft>
+              <a:defRPr sz="1500">
+                <a:solidFill>
+                  <a:srgbClr val="1C2D46"/>
+                </a:solidFill>
+                <a:latin typeface="Aptos"/>
+              </a:defRPr>
+            </a:pPr>
+            <a:r>
+              <a:t>Goal: reduce expensive mismatch risk before launch</a:t>
             </a:r>
           </a:p>
         </p:txBody>
@@ -6968,7 +6304,7 @@
               </a:defRPr>
             </a:pPr>
             <a:r>
-              <a:t>Brand choice is explicit, defensible, and data-backed</a:t>
+              <a:t>Section 3 | Context and Decision</a:t>
             </a:r>
           </a:p>
         </p:txBody>
@@ -7014,7 +6350,7 @@
           <a:lstStyle/>
           <a:p>
             <a:pPr>
-              <a:defRPr sz="3400" b="1">
+              <a:defRPr sz="3200" b="1">
                 <a:solidFill>
                   <a:srgbClr val="0F2C59"/>
                 </a:solidFill>
@@ -7022,7 +6358,7 @@
               </a:defRPr>
             </a:pPr>
             <a:r>
-              <a:t>Assignment Requirements Check</a:t>
+              <a:t>Why Now: Market Evidence</a:t>
             </a:r>
           </a:p>
         </p:txBody>
@@ -7035,8 +6371,8 @@
         </p:nvSpPr>
         <p:spPr>
           <a:xfrm>
-            <a:off x="566928" y="1783080"/>
-            <a:ext cx="2377440" cy="73152"/>
+            <a:off x="566928" y="1755648"/>
+            <a:ext cx="2651760" cy="73152"/>
           </a:xfrm>
           <a:prstGeom prst="rect">
             <a:avLst/>
@@ -7070,242 +6406,93 @@
           </a:p>
         </p:txBody>
       </p:sp>
-      <p:graphicFrame>
-        <p:nvGraphicFramePr>
-          <p:cNvPr id="4" name="Table 3"/>
-          <p:cNvGraphicFramePr>
-            <a:graphicFrameLocks noGrp="1"/>
-          </p:cNvGraphicFramePr>
-          <p:nvPr/>
-        </p:nvGraphicFramePr>
-        <p:xfrm>
-          <a:off x="731520" y="1828800"/>
-          <a:ext cx="10881360" cy="3566160"/>
-        </p:xfrm>
-        <a:graphic>
-          <a:graphicData uri="http://schemas.openxmlformats.org/drawingml/2006/table">
-            <a:tbl>
-              <a:tblPr firstRow="1" bandRow="1">
-                <a:tableStyleId>{5C22544A-7EE6-4342-B048-85BDC9FD1C3A}</a:tableStyleId>
-              </a:tblPr>
-              <a:tblGrid>
-                <a:gridCol w="4023360"/>
-                <a:gridCol w="6858000"/>
-              </a:tblGrid>
-              <a:tr h="713232">
-                <a:tc>
-                  <a:txBody>
-                    <a:bodyPr/>
-                    <a:lstStyle/>
-                    <a:p>
-                      <a:pPr>
-                        <a:defRPr sz="1500" b="1">
-                          <a:solidFill>
-                            <a:srgbClr val="11223F"/>
-                          </a:solidFill>
-                          <a:latin typeface="Aptos"/>
-                        </a:defRPr>
-                      </a:pPr>
-                      <a:r>
-                        <a:t>Assignment Requirement</a:t>
-                      </a:r>
-                    </a:p>
-                  </a:txBody>
-                  <a:tcPr/>
-                </a:tc>
-                <a:tc>
-                  <a:txBody>
-                    <a:bodyPr/>
-                    <a:lstStyle/>
-                    <a:p>
-                      <a:pPr>
-                        <a:defRPr sz="1500" b="1">
-                          <a:solidFill>
-                            <a:srgbClr val="11223F"/>
-                          </a:solidFill>
-                          <a:latin typeface="Aptos"/>
-                        </a:defRPr>
-                      </a:pPr>
-                      <a:r>
-                        <a:t>Our Implementation</a:t>
-                      </a:r>
-                    </a:p>
-                  </a:txBody>
-                  <a:tcPr/>
-                </a:tc>
-              </a:tr>
-              <a:tr h="713232">
-                <a:tc>
-                  <a:txBody>
-                    <a:bodyPr/>
-                    <a:lstStyle/>
-                    <a:p>
-                      <a:pPr>
-                        <a:defRPr sz="1400" b="0">
-                          <a:solidFill>
-                            <a:srgbClr val="11223F"/>
-                          </a:solidFill>
-                          <a:latin typeface="Aptos"/>
-                        </a:defRPr>
-                      </a:pPr>
-                      <a:r>
-                        <a:t>Pick a problem and client</a:t>
-                      </a:r>
-                    </a:p>
-                  </a:txBody>
-                  <a:tcPr/>
-                </a:tc>
-                <a:tc>
-                  <a:txBody>
-                    <a:bodyPr/>
-                    <a:lstStyle/>
-                    <a:p>
-                      <a:pPr>
-                        <a:defRPr sz="1400" b="0">
-                          <a:solidFill>
-                            <a:srgbClr val="11223F"/>
-                          </a:solidFill>
-                          <a:latin typeface="Aptos"/>
-                        </a:defRPr>
-                      </a:pPr>
-                      <a:r>
-                        <a:t>BOJ influencer matching scenario</a:t>
-                      </a:r>
-                    </a:p>
-                  </a:txBody>
-                  <a:tcPr/>
-                </a:tc>
-              </a:tr>
-              <a:tr h="713232">
-                <a:tc>
-                  <a:txBody>
-                    <a:bodyPr/>
-                    <a:lstStyle/>
-                    <a:p>
-                      <a:pPr>
-                        <a:defRPr sz="1400" b="0">
-                          <a:solidFill>
-                            <a:srgbClr val="11223F"/>
-                          </a:solidFill>
-                          <a:latin typeface="Aptos"/>
-                        </a:defRPr>
-                      </a:pPr>
-                      <a:r>
-                        <a:t>Collect/obtain data</a:t>
-                      </a:r>
-                    </a:p>
-                  </a:txBody>
-                  <a:tcPr/>
-                </a:tc>
-                <a:tc>
-                  <a:txBody>
-                    <a:bodyPr/>
-                    <a:lstStyle/>
-                    <a:p>
-                      <a:pPr>
-                        <a:defRPr sz="1400" b="0">
-                          <a:solidFill>
-                            <a:srgbClr val="11223F"/>
-                          </a:solidFill>
-                          <a:latin typeface="Aptos"/>
-                        </a:defRPr>
-                      </a:pPr>
-                      <a:r>
-                        <a:t>Team-collected YouTube videos/channels/comments</a:t>
-                      </a:r>
-                    </a:p>
-                  </a:txBody>
-                  <a:tcPr/>
-                </a:tc>
-              </a:tr>
-              <a:tr h="713232">
-                <a:tc>
-                  <a:txBody>
-                    <a:bodyPr/>
-                    <a:lstStyle/>
-                    <a:p>
-                      <a:pPr>
-                        <a:defRPr sz="1400" b="0">
-                          <a:solidFill>
-                            <a:srgbClr val="11223F"/>
-                          </a:solidFill>
-                          <a:latin typeface="Aptos"/>
-                        </a:defRPr>
-                      </a:pPr>
-                      <a:r>
-                        <a:t>Prototype in Python</a:t>
-                      </a:r>
-                    </a:p>
-                  </a:txBody>
-                  <a:tcPr/>
-                </a:tc>
-                <a:tc>
-                  <a:txBody>
-                    <a:bodyPr/>
-                    <a:lstStyle/>
-                    <a:p>
-                      <a:pPr>
-                        <a:defRPr sz="1400" b="0">
-                          <a:solidFill>
-                            <a:srgbClr val="11223F"/>
-                          </a:solidFill>
-                          <a:latin typeface="Aptos"/>
-                        </a:defRPr>
-                      </a:pPr>
-                      <a:r>
-                        <a:t>Streamlit + AI pipeline modules</a:t>
-                      </a:r>
-                    </a:p>
-                  </a:txBody>
-                  <a:tcPr/>
-                </a:tc>
-              </a:tr>
-              <a:tr h="713232">
-                <a:tc>
-                  <a:txBody>
-                    <a:bodyPr/>
-                    <a:lstStyle/>
-                    <a:p>
-                      <a:pPr>
-                        <a:defRPr sz="1400" b="0">
-                          <a:solidFill>
-                            <a:srgbClr val="11223F"/>
-                          </a:solidFill>
-                          <a:latin typeface="Aptos"/>
-                        </a:defRPr>
-                      </a:pPr>
-                      <a:r>
-                        <a:t>Present process + story + demo</a:t>
-                      </a:r>
-                    </a:p>
-                  </a:txBody>
-                  <a:tcPr/>
-                </a:tc>
-                <a:tc>
-                  <a:txBody>
-                    <a:bodyPr/>
-                    <a:lstStyle/>
-                    <a:p>
-                      <a:pPr>
-                        <a:defRPr sz="1400" b="0">
-                          <a:solidFill>
-                            <a:srgbClr val="11223F"/>
-                          </a:solidFill>
-                          <a:latin typeface="Aptos"/>
-                        </a:defRPr>
-                      </a:pPr>
-                      <a:r>
-                        <a:t>This deck + live app walkthrough</a:t>
-                      </a:r>
-                    </a:p>
-                  </a:txBody>
-                  <a:tcPr/>
-                </a:tc>
-              </a:tr>
-            </a:tbl>
-          </a:graphicData>
-        </a:graphic>
-      </p:graphicFrame>
+      <p:sp>
+        <p:nvSpPr>
+          <p:cNvPr id="4" name="TextBox 3"/>
+          <p:cNvSpPr txBox="1"/>
+          <p:nvPr/>
+        </p:nvSpPr>
+        <p:spPr>
+          <a:xfrm>
+            <a:off x="731520" y="1828800"/>
+            <a:ext cx="10972800" cy="4297680"/>
+          </a:xfrm>
+          <a:prstGeom prst="rect">
+            <a:avLst/>
+          </a:prstGeom>
+          <a:noFill/>
+        </p:spPr>
+        <p:txBody>
+          <a:bodyPr wrap="square">
+            <a:spAutoFit/>
+          </a:bodyPr>
+          <a:lstStyle/>
+          <a:p>
+            <a:pPr>
+              <a:spcAft>
+                <a:spcPts val="800"/>
+              </a:spcAft>
+              <a:defRPr sz="1800">
+                <a:solidFill>
+                  <a:srgbClr val="1C2D46"/>
+                </a:solidFill>
+                <a:latin typeface="Aptos"/>
+              </a:defRPr>
+            </a:pPr>
+            <a:r>
+              <a:t>US influencer marketing spend is projected at $10.52B in 2025 (EMARKETER, Mar 13, 2025).</a:t>
+            </a:r>
+          </a:p>
+          <a:p>
+            <a:pPr>
+              <a:spcAft>
+                <a:spcPts val="800"/>
+              </a:spcAft>
+              <a:defRPr sz="1800">
+                <a:solidFill>
+                  <a:srgbClr val="1C2D46"/>
+                </a:solidFill>
+                <a:latin typeface="Aptos"/>
+              </a:defRPr>
+            </a:pPr>
+            <a:r>
+              <a:t>YouTube influencer use among US marketers is projected to exceed 50% in 2025 (EMARKETER).</a:t>
+            </a:r>
+          </a:p>
+          <a:p>
+            <a:pPr>
+              <a:spcAft>
+                <a:spcPts val="800"/>
+              </a:spcAft>
+              <a:defRPr sz="1800">
+                <a:solidFill>
+                  <a:srgbClr val="1C2D46"/>
+                </a:solidFill>
+                <a:latin typeface="Aptos"/>
+              </a:defRPr>
+            </a:pPr>
+            <a:r>
+              <a:t>Global beauty grew 7.3% YoY in 2025; US beauty sales are 41% e-commerce (NIQ, Feb 25, 2025).</a:t>
+            </a:r>
+          </a:p>
+          <a:p>
+            <a:pPr>
+              <a:spcAft>
+                <a:spcPts val="800"/>
+              </a:spcAft>
+              <a:defRPr sz="1800">
+                <a:solidFill>
+                  <a:srgbClr val="1C2D46"/>
+                </a:solidFill>
+                <a:latin typeface="Aptos"/>
+              </a:defRPr>
+            </a:pPr>
+            <a:r>
+              <a:t>McKinsey projects core beauty segments to reach about $590B by 2030, with skincare as the largest segment (Aug 28, 2025).</a:t>
+            </a:r>
+          </a:p>
+        </p:txBody>
+      </p:sp>
       <p:sp>
         <p:nvSpPr>
           <p:cNvPr id="5" name="TextBox 4"/>
@@ -7337,7 +6524,7 @@
               </a:defRPr>
             </a:pPr>
             <a:r>
-              <a:t>Assignment deliverables: code + slides</a:t>
+              <a:t>Section 3 | External Industry Context</a:t>
             </a:r>
           </a:p>
         </p:txBody>
@@ -7383,7 +6570,7 @@
           <a:lstStyle/>
           <a:p>
             <a:pPr>
-              <a:defRPr sz="3400" b="1">
+              <a:defRPr sz="3200" b="1">
                 <a:solidFill>
                   <a:srgbClr val="0F2C59"/>
                 </a:solidFill>
@@ -7391,7 +6578,7 @@
               </a:defRPr>
             </a:pPr>
             <a:r>
-              <a:t>Data Overview (BOJ Run)</a:t>
+              <a:t>Why Beauty and Why BOJ</a:t>
             </a:r>
           </a:p>
         </p:txBody>
@@ -7404,8 +6591,8 @@
         </p:nvSpPr>
         <p:spPr>
           <a:xfrm>
-            <a:off x="566928" y="1783080"/>
-            <a:ext cx="2377440" cy="73152"/>
+            <a:off x="566928" y="1755648"/>
+            <a:ext cx="2651760" cy="73152"/>
           </a:xfrm>
           <a:prstGeom prst="rect">
             <a:avLst/>
@@ -7447,18 +6634,18 @@
         </p:nvSpPr>
         <p:spPr>
           <a:xfrm>
-            <a:off x="685800" y="2057400"/>
-            <a:ext cx="2697480" cy="1417320"/>
+            <a:off x="594360" y="1828800"/>
+            <a:ext cx="5440680" cy="4343400"/>
           </a:xfrm>
           <a:prstGeom prst="roundRect">
             <a:avLst/>
           </a:prstGeom>
           <a:solidFill>
-            <a:srgbClr val="EBF5FF"/>
+            <a:srgbClr val="F2F7FC"/>
           </a:solidFill>
-          <a:ln>
+          <a:ln w="15875">
             <a:solidFill>
-              <a:srgbClr val="BCD4EF"/>
+              <a:srgbClr val="CDDCEE"/>
             </a:solidFill>
           </a:ln>
         </p:spPr>
@@ -7492,8 +6679,8 @@
         </p:nvSpPr>
         <p:spPr>
           <a:xfrm>
-            <a:off x="822960" y="2240280"/>
-            <a:ext cx="2423160" cy="512064"/>
+            <a:off x="777240" y="1938528"/>
+            <a:ext cx="5166360" cy="347472"/>
           </a:xfrm>
           <a:prstGeom prst="rect">
             <a:avLst/>
@@ -7507,15 +6694,15 @@
           <a:lstStyle/>
           <a:p>
             <a:pPr>
-              <a:defRPr b="1" sz="2600">
-                <a:solidFill>
-                  <a:srgbClr val="1560A2"/>
-                </a:solidFill>
-                <a:latin typeface="Aptos Display"/>
-              </a:defRPr>
-            </a:pPr>
-            <a:r>
-              <a:t>42,750</a:t>
+              <a:defRPr b="1" sz="1800">
+                <a:solidFill>
+                  <a:srgbClr val="133A66"/>
+                </a:solidFill>
+                <a:latin typeface="Aptos"/>
+              </a:defRPr>
+            </a:pPr>
+            <a:r>
+              <a:t>Case Fit</a:t>
             </a:r>
           </a:p>
         </p:txBody>
@@ -7528,8 +6715,8 @@
         </p:nvSpPr>
         <p:spPr>
           <a:xfrm>
-            <a:off x="822960" y="2788920"/>
-            <a:ext cx="2423160" cy="365760"/>
+            <a:off x="758952" y="2267712"/>
+            <a:ext cx="5184648" cy="3813048"/>
           </a:xfrm>
           <a:prstGeom prst="rect">
             <a:avLst/>
@@ -7537,21 +6724,72 @@
           <a:noFill/>
         </p:spPr>
         <p:txBody>
-          <a:bodyPr wrap="none">
+          <a:bodyPr wrap="square">
             <a:spAutoFit/>
           </a:bodyPr>
           <a:lstStyle/>
           <a:p>
             <a:pPr>
-              <a:defRPr sz="1200">
-                <a:solidFill>
-                  <a:srgbClr val="3B577E"/>
-                </a:solidFill>
-                <a:latin typeface="Aptos"/>
-              </a:defRPr>
-            </a:pPr>
-            <a:r>
-              <a:t>Videos analyzed</a:t>
+              <a:spcAft>
+                <a:spcPts val="800"/>
+              </a:spcAft>
+              <a:defRPr sz="1500">
+                <a:solidFill>
+                  <a:srgbClr val="1C2D46"/>
+                </a:solidFill>
+                <a:latin typeface="Aptos"/>
+              </a:defRPr>
+            </a:pPr>
+            <a:r>
+              <a:t>Beauty creator marketing is large and highly content-driven.</a:t>
+            </a:r>
+          </a:p>
+          <a:p>
+            <a:pPr>
+              <a:spcAft>
+                <a:spcPts val="800"/>
+              </a:spcAft>
+              <a:defRPr sz="1500">
+                <a:solidFill>
+                  <a:srgbClr val="1C2D46"/>
+                </a:solidFill>
+                <a:latin typeface="Aptos"/>
+              </a:defRPr>
+            </a:pPr>
+            <a:r>
+              <a:t>BOJ has visible social momentum and a product-specific campaign story.</a:t>
+            </a:r>
+          </a:p>
+          <a:p>
+            <a:pPr>
+              <a:spcAft>
+                <a:spcPts val="800"/>
+              </a:spcAft>
+              <a:defRPr sz="1500">
+                <a:solidFill>
+                  <a:srgbClr val="1C2D46"/>
+                </a:solidFill>
+                <a:latin typeface="Aptos"/>
+              </a:defRPr>
+            </a:pPr>
+            <a:r>
+              <a:t>BOJ U.S. expansion + sunscreen focus make a practical demo scenario.</a:t>
+            </a:r>
+          </a:p>
+          <a:p>
+            <a:pPr>
+              <a:spcAft>
+                <a:spcPts val="800"/>
+              </a:spcAft>
+              <a:defRPr sz="1500">
+                <a:solidFill>
+                  <a:srgbClr val="1C2D46"/>
+                </a:solidFill>
+                <a:latin typeface="Aptos"/>
+              </a:defRPr>
+            </a:pPr>
+            <a:r>
+              <a:t>(Fashionista coverage, Nov 13, 2024)</a:t>
             </a:r>
           </a:p>
         </p:txBody>
@@ -7564,18 +6802,18 @@
         </p:nvSpPr>
         <p:spPr>
           <a:xfrm>
-            <a:off x="3566160" y="2057400"/>
-            <a:ext cx="2697480" cy="1417320"/>
+            <a:off x="6144768" y="1828800"/>
+            <a:ext cx="5440680" cy="4343400"/>
           </a:xfrm>
           <a:prstGeom prst="roundRect">
             <a:avLst/>
           </a:prstGeom>
           <a:solidFill>
-            <a:srgbClr val="EBF5FF"/>
+            <a:srgbClr val="F2F7FC"/>
           </a:solidFill>
-          <a:ln>
+          <a:ln w="15875">
             <a:solidFill>
-              <a:srgbClr val="BCD4EF"/>
+              <a:srgbClr val="CDDCEE"/>
             </a:solidFill>
           </a:ln>
         </p:spPr>
@@ -7609,8 +6847,8 @@
         </p:nvSpPr>
         <p:spPr>
           <a:xfrm>
-            <a:off x="3703320" y="2240280"/>
-            <a:ext cx="2423160" cy="512064"/>
+            <a:off x="6327648" y="1938528"/>
+            <a:ext cx="5166360" cy="347472"/>
           </a:xfrm>
           <a:prstGeom prst="rect">
             <a:avLst/>
@@ -7624,15 +6862,15 @@
           <a:lstStyle/>
           <a:p>
             <a:pPr>
-              <a:defRPr b="1" sz="2600">
-                <a:solidFill>
-                  <a:srgbClr val="1560A2"/>
-                </a:solidFill>
-                <a:latin typeface="Aptos Display"/>
-              </a:defRPr>
-            </a:pPr>
-            <a:r>
-              <a:t>1,089</a:t>
+              <a:defRPr b="1" sz="1800">
+                <a:solidFill>
+                  <a:srgbClr val="133A66"/>
+                </a:solidFill>
+                <a:latin typeface="Aptos"/>
+              </a:defRPr>
+            </a:pPr>
+            <a:r>
+              <a:t>Dataset Feasibility Signals</a:t>
             </a:r>
           </a:p>
         </p:txBody>
@@ -7645,8 +6883,111 @@
         </p:nvSpPr>
         <p:spPr>
           <a:xfrm>
-            <a:off x="3703320" y="2788920"/>
-            <a:ext cx="2423160" cy="365760"/>
+            <a:off x="6309359" y="2267712"/>
+            <a:ext cx="5184648" cy="3813048"/>
+          </a:xfrm>
+          <a:prstGeom prst="rect">
+            <a:avLst/>
+          </a:prstGeom>
+          <a:noFill/>
+        </p:spPr>
+        <p:txBody>
+          <a:bodyPr wrap="square">
+            <a:spAutoFit/>
+          </a:bodyPr>
+          <a:lstStyle/>
+          <a:p>
+            <a:pPr>
+              <a:spcAft>
+                <a:spcPts val="800"/>
+              </a:spcAft>
+              <a:defRPr sz="1500">
+                <a:solidFill>
+                  <a:srgbClr val="1C2D46"/>
+                </a:solidFill>
+                <a:latin typeface="Aptos"/>
+              </a:defRPr>
+            </a:pPr>
+            <a:r>
+              <a:t>Source file: videos_text_ready_combined.csv (n=67,283 videos)</a:t>
+            </a:r>
+          </a:p>
+          <a:p>
+            <a:pPr>
+              <a:spcAft>
+                <a:spcPts val="800"/>
+              </a:spcAft>
+              <a:defRPr sz="1500">
+                <a:solidFill>
+                  <a:srgbClr val="1C2D46"/>
+                </a:solidFill>
+                <a:latin typeface="Aptos"/>
+              </a:defRPr>
+            </a:pPr>
+            <a:r>
+              <a:t>sunscreen: 3,981 videos | 340 channels</a:t>
+            </a:r>
+          </a:p>
+          <a:p>
+            <a:pPr>
+              <a:spcAft>
+                <a:spcPts val="800"/>
+              </a:spcAft>
+              <a:defRPr sz="1500">
+                <a:solidFill>
+                  <a:srgbClr val="1C2D46"/>
+                </a:solidFill>
+                <a:latin typeface="Aptos"/>
+              </a:defRPr>
+            </a:pPr>
+            <a:r>
+              <a:t>spf: 3,850 videos | 344 channels</a:t>
+            </a:r>
+          </a:p>
+          <a:p>
+            <a:pPr>
+              <a:spcAft>
+                <a:spcPts val="800"/>
+              </a:spcAft>
+              <a:defRPr sz="1500">
+                <a:solidFill>
+                  <a:srgbClr val="1C2D46"/>
+                </a:solidFill>
+                <a:latin typeface="Aptos"/>
+              </a:defRPr>
+            </a:pPr>
+            <a:r>
+              <a:t>beauty of joseon: 286 videos | 69 channels</a:t>
+            </a:r>
+          </a:p>
+          <a:p>
+            <a:pPr>
+              <a:spcAft>
+                <a:spcPts val="800"/>
+              </a:spcAft>
+              <a:defRPr sz="1500">
+                <a:solidFill>
+                  <a:srgbClr val="1C2D46"/>
+                </a:solidFill>
+                <a:latin typeface="Aptos"/>
+              </a:defRPr>
+            </a:pPr>
+            <a:r>
+              <a:t>cerave: 747 videos | 118 channels</a:t>
+            </a:r>
+          </a:p>
+        </p:txBody>
+      </p:sp>
+      <p:sp>
+        <p:nvSpPr>
+          <p:cNvPr id="10" name="TextBox 9"/>
+          <p:cNvSpPr txBox="1"/>
+          <p:nvPr/>
+        </p:nvSpPr>
+        <p:spPr>
+          <a:xfrm>
+            <a:off x="502920" y="6428232"/>
+            <a:ext cx="10972800" cy="292608"/>
           </a:xfrm>
           <a:prstGeom prst="rect">
             <a:avLst/>
@@ -7659,331 +7000,6 @@
           </a:bodyPr>
           <a:lstStyle/>
           <a:p>
-            <a:pPr>
-              <a:defRPr sz="1200">
-                <a:solidFill>
-                  <a:srgbClr val="3B577E"/>
-                </a:solidFill>
-                <a:latin typeface="Aptos"/>
-              </a:defRPr>
-            </a:pPr>
-            <a:r>
-              <a:t>Channels scored</a:t>
-            </a:r>
-          </a:p>
-        </p:txBody>
-      </p:sp>
-      <p:sp>
-        <p:nvSpPr>
-          <p:cNvPr id="10" name="Rounded Rectangle 9"/>
-          <p:cNvSpPr/>
-          <p:nvPr/>
-        </p:nvSpPr>
-        <p:spPr>
-          <a:xfrm>
-            <a:off x="6446520" y="2057400"/>
-            <a:ext cx="2697480" cy="1417320"/>
-          </a:xfrm>
-          <a:prstGeom prst="roundRect">
-            <a:avLst/>
-          </a:prstGeom>
-          <a:solidFill>
-            <a:srgbClr val="EBF5FF"/>
-          </a:solidFill>
-          <a:ln>
-            <a:solidFill>
-              <a:srgbClr val="BCD4EF"/>
-            </a:solidFill>
-          </a:ln>
-        </p:spPr>
-        <p:style>
-          <a:lnRef idx="1">
-            <a:schemeClr val="accent1"/>
-          </a:lnRef>
-          <a:fillRef idx="3">
-            <a:schemeClr val="accent1"/>
-          </a:fillRef>
-          <a:effectRef idx="2">
-            <a:schemeClr val="accent1"/>
-          </a:effectRef>
-          <a:fontRef idx="minor">
-            <a:schemeClr val="lt1"/>
-          </a:fontRef>
-        </p:style>
-        <p:txBody>
-          <a:bodyPr rtlCol="0" anchor="ctr"/>
-          <a:lstStyle/>
-          <a:p>
-            <a:pPr algn="ctr"/>
-          </a:p>
-        </p:txBody>
-      </p:sp>
-      <p:sp>
-        <p:nvSpPr>
-          <p:cNvPr id="11" name="TextBox 10"/>
-          <p:cNvSpPr txBox="1"/>
-          <p:nvPr/>
-        </p:nvSpPr>
-        <p:spPr>
-          <a:xfrm>
-            <a:off x="6583680" y="2240280"/>
-            <a:ext cx="2423160" cy="512064"/>
-          </a:xfrm>
-          <a:prstGeom prst="rect">
-            <a:avLst/>
-          </a:prstGeom>
-          <a:noFill/>
-        </p:spPr>
-        <p:txBody>
-          <a:bodyPr wrap="none">
-            <a:spAutoFit/>
-          </a:bodyPr>
-          <a:lstStyle/>
-          <a:p>
-            <a:pPr>
-              <a:defRPr b="1" sz="2600">
-                <a:solidFill>
-                  <a:srgbClr val="1560A2"/>
-                </a:solidFill>
-                <a:latin typeface="Aptos Display"/>
-              </a:defRPr>
-            </a:pPr>
-            <a:r>
-              <a:t>Top-10</a:t>
-            </a:r>
-          </a:p>
-        </p:txBody>
-      </p:sp>
-      <p:sp>
-        <p:nvSpPr>
-          <p:cNvPr id="12" name="TextBox 11"/>
-          <p:cNvSpPr txBox="1"/>
-          <p:nvPr/>
-        </p:nvSpPr>
-        <p:spPr>
-          <a:xfrm>
-            <a:off x="6583680" y="2788920"/>
-            <a:ext cx="2423160" cy="365760"/>
-          </a:xfrm>
-          <a:prstGeom prst="rect">
-            <a:avLst/>
-          </a:prstGeom>
-          <a:noFill/>
-        </p:spPr>
-        <p:txBody>
-          <a:bodyPr wrap="none">
-            <a:spAutoFit/>
-          </a:bodyPr>
-          <a:lstStyle/>
-          <a:p>
-            <a:pPr>
-              <a:defRPr sz="1200">
-                <a:solidFill>
-                  <a:srgbClr val="3B577E"/>
-                </a:solidFill>
-                <a:latin typeface="Aptos"/>
-              </a:defRPr>
-            </a:pPr>
-            <a:r>
-              <a:t>Default recommendations</a:t>
-            </a:r>
-          </a:p>
-        </p:txBody>
-      </p:sp>
-      <p:sp>
-        <p:nvSpPr>
-          <p:cNvPr id="13" name="Rounded Rectangle 12"/>
-          <p:cNvSpPr/>
-          <p:nvPr/>
-        </p:nvSpPr>
-        <p:spPr>
-          <a:xfrm>
-            <a:off x="9326880" y="2057400"/>
-            <a:ext cx="2697480" cy="1417320"/>
-          </a:xfrm>
-          <a:prstGeom prst="roundRect">
-            <a:avLst/>
-          </a:prstGeom>
-          <a:solidFill>
-            <a:srgbClr val="EBF5FF"/>
-          </a:solidFill>
-          <a:ln>
-            <a:solidFill>
-              <a:srgbClr val="BCD4EF"/>
-            </a:solidFill>
-          </a:ln>
-        </p:spPr>
-        <p:style>
-          <a:lnRef idx="1">
-            <a:schemeClr val="accent1"/>
-          </a:lnRef>
-          <a:fillRef idx="3">
-            <a:schemeClr val="accent1"/>
-          </a:fillRef>
-          <a:effectRef idx="2">
-            <a:schemeClr val="accent1"/>
-          </a:effectRef>
-          <a:fontRef idx="minor">
-            <a:schemeClr val="lt1"/>
-          </a:fontRef>
-        </p:style>
-        <p:txBody>
-          <a:bodyPr rtlCol="0" anchor="ctr"/>
-          <a:lstStyle/>
-          <a:p>
-            <a:pPr algn="ctr"/>
-          </a:p>
-        </p:txBody>
-      </p:sp>
-      <p:sp>
-        <p:nvSpPr>
-          <p:cNvPr id="14" name="TextBox 13"/>
-          <p:cNvSpPr txBox="1"/>
-          <p:nvPr/>
-        </p:nvSpPr>
-        <p:spPr>
-          <a:xfrm>
-            <a:off x="9464040" y="2240280"/>
-            <a:ext cx="2423160" cy="512064"/>
-          </a:xfrm>
-          <a:prstGeom prst="rect">
-            <a:avLst/>
-          </a:prstGeom>
-          <a:noFill/>
-        </p:spPr>
-        <p:txBody>
-          <a:bodyPr wrap="none">
-            <a:spAutoFit/>
-          </a:bodyPr>
-          <a:lstStyle/>
-          <a:p>
-            <a:pPr>
-              <a:defRPr b="1" sz="2600">
-                <a:solidFill>
-                  <a:srgbClr val="1560A2"/>
-                </a:solidFill>
-                <a:latin typeface="Aptos Display"/>
-              </a:defRPr>
-            </a:pPr>
-            <a:r>
-              <a:t>6</a:t>
-            </a:r>
-          </a:p>
-        </p:txBody>
-      </p:sp>
-      <p:sp>
-        <p:nvSpPr>
-          <p:cNvPr id="15" name="TextBox 14"/>
-          <p:cNvSpPr txBox="1"/>
-          <p:nvPr/>
-        </p:nvSpPr>
-        <p:spPr>
-          <a:xfrm>
-            <a:off x="9464040" y="2788920"/>
-            <a:ext cx="2423160" cy="365760"/>
-          </a:xfrm>
-          <a:prstGeom prst="rect">
-            <a:avLst/>
-          </a:prstGeom>
-          <a:noFill/>
-        </p:spPr>
-        <p:txBody>
-          <a:bodyPr wrap="none">
-            <a:spAutoFit/>
-          </a:bodyPr>
-          <a:lstStyle/>
-          <a:p>
-            <a:pPr>
-              <a:defRPr sz="1200">
-                <a:solidFill>
-                  <a:srgbClr val="3B577E"/>
-                </a:solidFill>
-                <a:latin typeface="Aptos"/>
-              </a:defRPr>
-            </a:pPr>
-            <a:r>
-              <a:t>Non-micro communities</a:t>
-            </a:r>
-          </a:p>
-        </p:txBody>
-      </p:sp>
-      <p:sp>
-        <p:nvSpPr>
-          <p:cNvPr id="16" name="TextBox 15"/>
-          <p:cNvSpPr txBox="1"/>
-          <p:nvPr/>
-        </p:nvSpPr>
-        <p:spPr>
-          <a:xfrm>
-            <a:off x="731520" y="3840480"/>
-            <a:ext cx="10972800" cy="1920240"/>
-          </a:xfrm>
-          <a:prstGeom prst="rect">
-            <a:avLst/>
-          </a:prstGeom>
-          <a:noFill/>
-        </p:spPr>
-        <p:txBody>
-          <a:bodyPr wrap="square">
-            <a:spAutoFit/>
-          </a:bodyPr>
-          <a:lstStyle/>
-          <a:p>
-            <a:pPr>
-              <a:spcAft>
-                <a:spcPts val="900"/>
-              </a:spcAft>
-              <a:defRPr sz="1500">
-                <a:solidFill>
-                  <a:srgbClr val="1C2D46"/>
-                </a:solidFill>
-                <a:latin typeface="Aptos"/>
-              </a:defRPr>
-            </a:pPr>
-            <a:r>
-              <a:t>Input files: videos_text_ready_combined.csv, comments_raw_combined.csv, master_prd_slim_combined.csv</a:t>
-            </a:r>
-          </a:p>
-          <a:p>
-            <a:pPr>
-              <a:spcAft>
-                <a:spcPts val="900"/>
-              </a:spcAft>
-              <a:defRPr sz="1500">
-                <a:solidFill>
-                  <a:srgbClr val="1C2D46"/>
-                </a:solidFill>
-                <a:latin typeface="Aptos"/>
-              </a:defRPr>
-            </a:pPr>
-            <a:r>
-              <a:t>Campaign input: BOJ SPF + Glow Serum, U.S. market, sensitive-skin audience, $50,000 budget</a:t>
-            </a:r>
-          </a:p>
-        </p:txBody>
-      </p:sp>
-      <p:sp>
-        <p:nvSpPr>
-          <p:cNvPr id="17" name="TextBox 16"/>
-          <p:cNvSpPr txBox="1"/>
-          <p:nvPr/>
-        </p:nvSpPr>
-        <p:spPr>
-          <a:xfrm>
-            <a:off x="502920" y="6428232"/>
-            <a:ext cx="10972800" cy="292608"/>
-          </a:xfrm>
-          <a:prstGeom prst="rect">
-            <a:avLst/>
-          </a:prstGeom>
-          <a:noFill/>
-        </p:spPr>
-        <p:txBody>
-          <a:bodyPr wrap="none">
-            <a:spAutoFit/>
-          </a:bodyPr>
-          <a:lstStyle/>
-          <a:p>
             <a:pPr algn="r">
               <a:defRPr sz="1000">
                 <a:solidFill>
@@ -7993,7 +7009,7 @@
               </a:defRPr>
             </a:pPr>
             <a:r>
-              <a:t>Data-driven prototype with fixed reproducible input</a:t>
+              <a:t>Section 3 | Client and Case Selection</a:t>
             </a:r>
           </a:p>
         </p:txBody>
@@ -8039,7 +7055,7 @@
           <a:lstStyle/>
           <a:p>
             <a:pPr>
-              <a:defRPr sz="3400" b="1">
+              <a:defRPr sz="3200" b="1">
                 <a:solidFill>
                   <a:srgbClr val="0F2C59"/>
                 </a:solidFill>
@@ -8047,7 +7063,7 @@
               </a:defRPr>
             </a:pPr>
             <a:r>
-              <a:t>Method Pipeline</a:t>
+              <a:t>Data and Features</a:t>
             </a:r>
           </a:p>
         </p:txBody>
@@ -8060,8 +7076,8 @@
         </p:nvSpPr>
         <p:spPr>
           <a:xfrm>
-            <a:off x="566928" y="1783080"/>
-            <a:ext cx="2377440" cy="73152"/>
+            <a:off x="566928" y="1755648"/>
+            <a:ext cx="2651760" cy="73152"/>
           </a:xfrm>
           <a:prstGeom prst="rect">
             <a:avLst/>
@@ -8097,14 +7113,95 @@
       </p:sp>
       <p:sp>
         <p:nvSpPr>
-          <p:cNvPr id="4" name="TextBox 3"/>
+          <p:cNvPr id="4" name="Rounded Rectangle 3"/>
+          <p:cNvSpPr/>
+          <p:nvPr/>
+        </p:nvSpPr>
+        <p:spPr>
+          <a:xfrm>
+            <a:off x="640080" y="1828800"/>
+            <a:ext cx="5486400" cy="4297680"/>
+          </a:xfrm>
+          <a:prstGeom prst="roundRect">
+            <a:avLst/>
+          </a:prstGeom>
+          <a:solidFill>
+            <a:srgbClr val="F2F7FC"/>
+          </a:solidFill>
+          <a:ln w="15875">
+            <a:solidFill>
+              <a:srgbClr val="CDDCEE"/>
+            </a:solidFill>
+          </a:ln>
+        </p:spPr>
+        <p:style>
+          <a:lnRef idx="1">
+            <a:schemeClr val="accent1"/>
+          </a:lnRef>
+          <a:fillRef idx="3">
+            <a:schemeClr val="accent1"/>
+          </a:fillRef>
+          <a:effectRef idx="2">
+            <a:schemeClr val="accent1"/>
+          </a:effectRef>
+          <a:fontRef idx="minor">
+            <a:schemeClr val="lt1"/>
+          </a:fontRef>
+        </p:style>
+        <p:txBody>
+          <a:bodyPr rtlCol="0" anchor="ctr"/>
+          <a:lstStyle/>
+          <a:p>
+            <a:pPr algn="ctr"/>
+          </a:p>
+        </p:txBody>
+      </p:sp>
+      <p:sp>
+        <p:nvSpPr>
+          <p:cNvPr id="5" name="TextBox 4"/>
           <p:cNvSpPr txBox="1"/>
           <p:nvPr/>
         </p:nvSpPr>
         <p:spPr>
           <a:xfrm>
-            <a:off x="685800" y="1828800"/>
-            <a:ext cx="10972800" cy="4480560"/>
+            <a:off x="822959" y="1938528"/>
+            <a:ext cx="5212080" cy="347472"/>
+          </a:xfrm>
+          <a:prstGeom prst="rect">
+            <a:avLst/>
+          </a:prstGeom>
+          <a:noFill/>
+        </p:spPr>
+        <p:txBody>
+          <a:bodyPr wrap="none">
+            <a:spAutoFit/>
+          </a:bodyPr>
+          <a:lstStyle/>
+          <a:p>
+            <a:pPr>
+              <a:defRPr b="1" sz="1800">
+                <a:solidFill>
+                  <a:srgbClr val="133A66"/>
+                </a:solidFill>
+                <a:latin typeface="Aptos"/>
+              </a:defRPr>
+            </a:pPr>
+            <a:r>
+              <a:t>Data Used</a:t>
+            </a:r>
+          </a:p>
+        </p:txBody>
+      </p:sp>
+      <p:sp>
+        <p:nvSpPr>
+          <p:cNvPr id="6" name="TextBox 5"/>
+          <p:cNvSpPr txBox="1"/>
+          <p:nvPr/>
+        </p:nvSpPr>
+        <p:spPr>
+          <a:xfrm>
+            <a:off x="804671" y="2267712"/>
+            <a:ext cx="5230368" cy="3767328"/>
           </a:xfrm>
           <a:prstGeom prst="rect">
             <a:avLst/>
@@ -8119,127 +7216,124 @@
           <a:p>
             <a:pPr>
               <a:spcAft>
-                <a:spcPts val="900"/>
-              </a:spcAft>
-              <a:defRPr sz="1900">
-                <a:solidFill>
-                  <a:srgbClr val="1C2D46"/>
-                </a:solidFill>
-                <a:latin typeface="Aptos"/>
-              </a:defRPr>
-            </a:pPr>
-            <a:r>
-              <a:t>1) Data cleaning + beauty/noise filter</a:t>
-            </a:r>
-          </a:p>
-          <a:p>
-            <a:pPr>
-              <a:spcAft>
-                <a:spcPts val="900"/>
-              </a:spcAft>
-              <a:defRPr sz="1900">
-                <a:solidFill>
-                  <a:srgbClr val="1C2D46"/>
-                </a:solidFill>
-                <a:latin typeface="Aptos"/>
-              </a:defRPr>
-            </a:pPr>
-            <a:r>
-              <a:t>2) Channel aggregation and text profile generation</a:t>
-            </a:r>
-          </a:p>
-          <a:p>
-            <a:pPr>
-              <a:spcAft>
-                <a:spcPts val="900"/>
-              </a:spcAft>
-              <a:defRPr sz="1900">
-                <a:solidFill>
-                  <a:srgbClr val="1C2D46"/>
-                </a:solidFill>
-                <a:latin typeface="Aptos"/>
-              </a:defRPr>
-            </a:pPr>
-            <a:r>
-              <a:t>3) Network scoring (centrality + community detection)</a:t>
-            </a:r>
-          </a:p>
-          <a:p>
-            <a:pPr>
-              <a:spcAft>
-                <a:spcPts val="900"/>
-              </a:spcAft>
-              <a:defRPr sz="1900">
-                <a:solidFill>
-                  <a:srgbClr val="1C2D46"/>
-                </a:solidFill>
-                <a:latin typeface="Aptos"/>
-              </a:defRPr>
-            </a:pPr>
-            <a:r>
-              <a:t>4) TF-IDF relevance + semantic/tone enrichment</a:t>
-            </a:r>
-          </a:p>
-          <a:p>
-            <a:pPr>
-              <a:spcAft>
-                <a:spcPts val="900"/>
-              </a:spcAft>
-              <a:defRPr sz="1900">
-                <a:solidFill>
-                  <a:srgbClr val="1C2D46"/>
-                </a:solidFill>
-                <a:latin typeface="Aptos"/>
-              </a:defRPr>
-            </a:pPr>
-            <a:r>
-              <a:t>5) Evidence guardrail + diversity-aware ranking</a:t>
-            </a:r>
-          </a:p>
-          <a:p>
-            <a:pPr>
-              <a:spcAft>
-                <a:spcPts val="900"/>
-              </a:spcAft>
-              <a:defRPr sz="1900">
-                <a:solidFill>
-                  <a:srgbClr val="1C2D46"/>
-                </a:solidFill>
-                <a:latin typeface="Aptos"/>
-              </a:defRPr>
-            </a:pPr>
-            <a:r>
-              <a:t>6) ML benchmark (Linear/LASSO/Ridge/CART/RF/LightGBM, GroupKFold 5-fold)</a:t>
-            </a:r>
-          </a:p>
-          <a:p>
-            <a:pPr>
-              <a:spcAft>
-                <a:spcPts val="900"/>
-              </a:spcAft>
-              <a:defRPr sz="1900">
-                <a:solidFill>
-                  <a:srgbClr val="1C2D46"/>
-                </a:solidFill>
-                <a:latin typeface="Aptos"/>
-              </a:defRPr>
-            </a:pPr>
-            <a:r>
-              <a:t>7) ROI simulation + strategy generation + executive memo</a:t>
-            </a:r>
-          </a:p>
-        </p:txBody>
-      </p:sp>
-      <p:sp>
-        <p:nvSpPr>
-          <p:cNvPr id="5" name="TextBox 4"/>
+                <a:spcPts val="800"/>
+              </a:spcAft>
+              <a:defRPr sz="1500">
+                <a:solidFill>
+                  <a:srgbClr val="1C2D46"/>
+                </a:solidFill>
+                <a:latin typeface="Aptos"/>
+              </a:defRPr>
+            </a:pPr>
+            <a:r>
+              <a:t>Team-collected YouTube API exports (videos/comments/channel fields)</a:t>
+            </a:r>
+          </a:p>
+          <a:p>
+            <a:pPr>
+              <a:spcAft>
+                <a:spcPts val="800"/>
+              </a:spcAft>
+              <a:defRPr sz="1500">
+                <a:solidFill>
+                  <a:srgbClr val="1C2D46"/>
+                </a:solidFill>
+                <a:latin typeface="Aptos"/>
+              </a:defRPr>
+            </a:pPr>
+            <a:r>
+              <a:t>Videos analyzed (full run): 42,750</a:t>
+            </a:r>
+          </a:p>
+          <a:p>
+            <a:pPr>
+              <a:spcAft>
+                <a:spcPts val="800"/>
+              </a:spcAft>
+              <a:defRPr sz="1500">
+                <a:solidFill>
+                  <a:srgbClr val="1C2D46"/>
+                </a:solidFill>
+                <a:latin typeface="Aptos"/>
+              </a:defRPr>
+            </a:pPr>
+            <a:r>
+              <a:t>Channels scored: 1,089</a:t>
+            </a:r>
+          </a:p>
+          <a:p>
+            <a:pPr>
+              <a:spcAft>
+                <a:spcPts val="800"/>
+              </a:spcAft>
+              <a:defRPr sz="1500">
+                <a:solidFill>
+                  <a:srgbClr val="1C2D46"/>
+                </a:solidFill>
+                <a:latin typeface="Aptos"/>
+              </a:defRPr>
+            </a:pPr>
+            <a:r>
+              <a:t>Main files: videos_text_ready, comments_raw, master_prd_slim</a:t>
+            </a:r>
+          </a:p>
+        </p:txBody>
+      </p:sp>
+      <p:sp>
+        <p:nvSpPr>
+          <p:cNvPr id="7" name="Rounded Rectangle 6"/>
+          <p:cNvSpPr/>
+          <p:nvPr/>
+        </p:nvSpPr>
+        <p:spPr>
+          <a:xfrm>
+            <a:off x="6172200" y="1828800"/>
+            <a:ext cx="5394960" cy="4297680"/>
+          </a:xfrm>
+          <a:prstGeom prst="roundRect">
+            <a:avLst/>
+          </a:prstGeom>
+          <a:solidFill>
+            <a:srgbClr val="F2F7FC"/>
+          </a:solidFill>
+          <a:ln w="15875">
+            <a:solidFill>
+              <a:srgbClr val="CDDCEE"/>
+            </a:solidFill>
+          </a:ln>
+        </p:spPr>
+        <p:style>
+          <a:lnRef idx="1">
+            <a:schemeClr val="accent1"/>
+          </a:lnRef>
+          <a:fillRef idx="3">
+            <a:schemeClr val="accent1"/>
+          </a:fillRef>
+          <a:effectRef idx="2">
+            <a:schemeClr val="accent1"/>
+          </a:effectRef>
+          <a:fontRef idx="minor">
+            <a:schemeClr val="lt1"/>
+          </a:fontRef>
+        </p:style>
+        <p:txBody>
+          <a:bodyPr rtlCol="0" anchor="ctr"/>
+          <a:lstStyle/>
+          <a:p>
+            <a:pPr algn="ctr"/>
+          </a:p>
+        </p:txBody>
+      </p:sp>
+      <p:sp>
+        <p:nvSpPr>
+          <p:cNvPr id="8" name="TextBox 7"/>
           <p:cNvSpPr txBox="1"/>
           <p:nvPr/>
         </p:nvSpPr>
         <p:spPr>
           <a:xfrm>
-            <a:off x="502920" y="6428232"/>
-            <a:ext cx="10972800" cy="292608"/>
+            <a:off x="6355080" y="1938528"/>
+            <a:ext cx="5120640" cy="347472"/>
           </a:xfrm>
           <a:prstGeom prst="rect">
             <a:avLst/>
@@ -8252,6 +7346,129 @@
           </a:bodyPr>
           <a:lstStyle/>
           <a:p>
+            <a:pPr>
+              <a:defRPr b="1" sz="1800">
+                <a:solidFill>
+                  <a:srgbClr val="133A66"/>
+                </a:solidFill>
+                <a:latin typeface="Aptos"/>
+              </a:defRPr>
+            </a:pPr>
+            <a:r>
+              <a:t>Feature Groups</a:t>
+            </a:r>
+          </a:p>
+        </p:txBody>
+      </p:sp>
+      <p:sp>
+        <p:nvSpPr>
+          <p:cNvPr id="9" name="TextBox 8"/>
+          <p:cNvSpPr txBox="1"/>
+          <p:nvPr/>
+        </p:nvSpPr>
+        <p:spPr>
+          <a:xfrm>
+            <a:off x="6336792" y="2267712"/>
+            <a:ext cx="5138928" cy="3767328"/>
+          </a:xfrm>
+          <a:prstGeom prst="rect">
+            <a:avLst/>
+          </a:prstGeom>
+          <a:noFill/>
+        </p:spPr>
+        <p:txBody>
+          <a:bodyPr wrap="square">
+            <a:spAutoFit/>
+          </a:bodyPr>
+          <a:lstStyle/>
+          <a:p>
+            <a:pPr>
+              <a:spcAft>
+                <a:spcPts val="800"/>
+              </a:spcAft>
+              <a:defRPr sz="1500">
+                <a:solidFill>
+                  <a:srgbClr val="1C2D46"/>
+                </a:solidFill>
+                <a:latin typeface="Aptos"/>
+              </a:defRPr>
+            </a:pPr>
+            <a:r>
+              <a:t>Network features: centrality + community</a:t>
+            </a:r>
+          </a:p>
+          <a:p>
+            <a:pPr>
+              <a:spcAft>
+                <a:spcPts val="800"/>
+              </a:spcAft>
+              <a:defRPr sz="1500">
+                <a:solidFill>
+                  <a:srgbClr val="1C2D46"/>
+                </a:solidFill>
+                <a:latin typeface="Aptos"/>
+              </a:defRPr>
+            </a:pPr>
+            <a:r>
+              <a:t>Text features: TF-IDF + semantic/tone alignment</a:t>
+            </a:r>
+          </a:p>
+          <a:p>
+            <a:pPr>
+              <a:spcAft>
+                <a:spcPts val="800"/>
+              </a:spcAft>
+              <a:defRPr sz="1500">
+                <a:solidFill>
+                  <a:srgbClr val="1C2D46"/>
+                </a:solidFill>
+                <a:latin typeface="Aptos"/>
+              </a:defRPr>
+            </a:pPr>
+            <a:r>
+              <a:t>Behavioral features: views/likes/comments/engagement</a:t>
+            </a:r>
+          </a:p>
+          <a:p>
+            <a:pPr>
+              <a:spcAft>
+                <a:spcPts val="800"/>
+              </a:spcAft>
+              <a:defRPr sz="1500">
+                <a:solidFill>
+                  <a:srgbClr val="1C2D46"/>
+                </a:solidFill>
+                <a:latin typeface="Aptos"/>
+              </a:defRPr>
+            </a:pPr>
+            <a:r>
+              <a:t>Reliability features: evidence score + credibility multiplier</a:t>
+            </a:r>
+          </a:p>
+        </p:txBody>
+      </p:sp>
+      <p:sp>
+        <p:nvSpPr>
+          <p:cNvPr id="10" name="TextBox 9"/>
+          <p:cNvSpPr txBox="1"/>
+          <p:nvPr/>
+        </p:nvSpPr>
+        <p:spPr>
+          <a:xfrm>
+            <a:off x="502920" y="6428232"/>
+            <a:ext cx="10972800" cy="292608"/>
+          </a:xfrm>
+          <a:prstGeom prst="rect">
+            <a:avLst/>
+          </a:prstGeom>
+          <a:noFill/>
+        </p:spPr>
+        <p:txBody>
+          <a:bodyPr wrap="none">
+            <a:spAutoFit/>
+          </a:bodyPr>
+          <a:lstStyle/>
+          <a:p>
             <a:pPr algn="r">
               <a:defRPr sz="1000">
                 <a:solidFill>
@@ -8261,7 +7478,7 @@
               </a:defRPr>
             </a:pPr>
             <a:r>
-              <a:t>Rubric 3: Technical aspects and method choice</a:t>
+              <a:t>Section 4 | Data and Feature Engineering</a:t>
             </a:r>
           </a:p>
         </p:txBody>
@@ -8307,7 +7524,7 @@
           <a:lstStyle/>
           <a:p>
             <a:pPr>
-              <a:defRPr sz="3400" b="1">
+              <a:defRPr sz="3200" b="1">
                 <a:solidFill>
                   <a:srgbClr val="0F2C59"/>
                 </a:solidFill>
@@ -8315,7 +7532,7 @@
               </a:defRPr>
             </a:pPr>
             <a:r>
-              <a:t>Model Evaluation Results</a:t>
+              <a:t>Preprocessing and EDA</a:t>
             </a:r>
           </a:p>
         </p:txBody>
@@ -8328,8 +7545,8 @@
         </p:nvSpPr>
         <p:spPr>
           <a:xfrm>
-            <a:off x="566928" y="1783080"/>
-            <a:ext cx="2377440" cy="73152"/>
+            <a:off x="566928" y="1755648"/>
+            <a:ext cx="2651760" cy="73152"/>
           </a:xfrm>
           <a:prstGeom prst="rect">
             <a:avLst/>
@@ -8365,7 +7582,7 @@
       </p:sp>
       <p:pic>
         <p:nvPicPr>
-          <p:cNvPr id="4" name="Picture 3" descr="model_benchmark_rmse.png"/>
+          <p:cNvPr id="4" name="Picture 3" descr="community_distribution_clean.png"/>
           <p:cNvPicPr>
             <a:picLocks noChangeAspect="1"/>
           </p:cNvPicPr>
@@ -8379,8 +7596,8 @@
         </p:blipFill>
         <p:spPr>
           <a:xfrm>
-            <a:off x="731520" y="1828800"/>
-            <a:ext cx="8237220" cy="4297680"/>
+            <a:off x="713232" y="1828800"/>
+            <a:ext cx="8686800" cy="4389120"/>
           </a:xfrm>
           <a:prstGeom prst="rect">
             <a:avLst/>
@@ -8396,7 +7613,7 @@
         <p:spPr>
           <a:xfrm>
             <a:off x="7315200" y="1828800"/>
-            <a:ext cx="4114800" cy="4297680"/>
+            <a:ext cx="4114800" cy="4389120"/>
           </a:xfrm>
           <a:prstGeom prst="roundRect">
             <a:avLst/>
@@ -8440,8 +7657,8 @@
         </p:nvSpPr>
         <p:spPr>
           <a:xfrm>
-            <a:off x="7516368" y="1938528"/>
-            <a:ext cx="3794760" cy="365760"/>
+            <a:off x="7498079" y="1938528"/>
+            <a:ext cx="3840480" cy="347472"/>
           </a:xfrm>
           <a:prstGeom prst="rect">
             <a:avLst/>
@@ -8455,7 +7672,7 @@
           <a:lstStyle/>
           <a:p>
             <a:pPr>
-              <a:defRPr b="1" sz="1900">
+              <a:defRPr b="1" sz="1800">
                 <a:solidFill>
                   <a:srgbClr val="133A66"/>
                 </a:solidFill>
@@ -8463,7 +7680,7 @@
               </a:defRPr>
             </a:pPr>
             <a:r>
-              <a:t>Best model: LightGBM</a:t>
+              <a:t>What we did</a:t>
             </a:r>
           </a:p>
         </p:txBody>
@@ -8476,8 +7693,8 @@
         </p:nvSpPr>
         <p:spPr>
           <a:xfrm>
-            <a:off x="7498079" y="2304288"/>
-            <a:ext cx="3794760" cy="3730752"/>
+            <a:off x="7479792" y="2267712"/>
+            <a:ext cx="3858768" cy="3858768"/>
           </a:xfrm>
           <a:prstGeom prst="rect">
             <a:avLst/>
@@ -8492,65 +7709,65 @@
           <a:p>
             <a:pPr>
               <a:spcAft>
-                <a:spcPts val="900"/>
-              </a:spcAft>
-              <a:defRPr sz="1600">
-                <a:solidFill>
-                  <a:srgbClr val="1C2D46"/>
-                </a:solidFill>
-                <a:latin typeface="Aptos"/>
-              </a:defRPr>
-            </a:pPr>
-            <a:r>
-              <a:t>Best RMSE: 0.00996</a:t>
-            </a:r>
-          </a:p>
-          <a:p>
-            <a:pPr>
-              <a:spcAft>
-                <a:spcPts val="900"/>
-              </a:spcAft>
-              <a:defRPr sz="1600">
-                <a:solidFill>
-                  <a:srgbClr val="1C2D46"/>
-                </a:solidFill>
-                <a:latin typeface="Aptos"/>
-              </a:defRPr>
-            </a:pPr>
-            <a:r>
-              <a:t>Baseline RMSE: 0.03800</a:t>
-            </a:r>
-          </a:p>
-          <a:p>
-            <a:pPr>
-              <a:spcAft>
-                <a:spcPts val="900"/>
-              </a:spcAft>
-              <a:defRPr sz="1600">
-                <a:solidFill>
-                  <a:srgbClr val="1C2D46"/>
-                </a:solidFill>
-                <a:latin typeface="Aptos"/>
-              </a:defRPr>
-            </a:pPr>
-            <a:r>
-              <a:t>RMSE reduction vs baseline: 73.8%</a:t>
-            </a:r>
-          </a:p>
-          <a:p>
-            <a:pPr>
-              <a:spcAft>
-                <a:spcPts val="900"/>
-              </a:spcAft>
-              <a:defRPr sz="1600">
-                <a:solidFill>
-                  <a:srgbClr val="1C2D46"/>
-                </a:solidFill>
-                <a:latin typeface="Aptos"/>
-              </a:defRPr>
-            </a:pPr>
-            <a:r>
-              <a:t>Group-based CV used to reduce channel leakage risk</a:t>
+                <a:spcPts val="800"/>
+              </a:spcAft>
+              <a:defRPr sz="1400">
+                <a:solidFill>
+                  <a:srgbClr val="1C2D46"/>
+                </a:solidFill>
+                <a:latin typeface="Aptos"/>
+              </a:defRPr>
+            </a:pPr>
+            <a:r>
+              <a:t>Deduplication + type normalization</a:t>
+            </a:r>
+          </a:p>
+          <a:p>
+            <a:pPr>
+              <a:spcAft>
+                <a:spcPts val="800"/>
+              </a:spcAft>
+              <a:defRPr sz="1400">
+                <a:solidFill>
+                  <a:srgbClr val="1C2D46"/>
+                </a:solidFill>
+                <a:latin typeface="Aptos"/>
+              </a:defRPr>
+            </a:pPr>
+            <a:r>
+              <a:t>Beauty include filter + non-beauty noise exclusion</a:t>
+            </a:r>
+          </a:p>
+          <a:p>
+            <a:pPr>
+              <a:spcAft>
+                <a:spcPts val="800"/>
+              </a:spcAft>
+              <a:defRPr sz="1400">
+                <a:solidFill>
+                  <a:srgbClr val="1C2D46"/>
+                </a:solidFill>
+                <a:latin typeface="Aptos"/>
+              </a:defRPr>
+            </a:pPr>
+            <a:r>
+              <a:t>Channel-level aggregation and recency features</a:t>
+            </a:r>
+          </a:p>
+          <a:p>
+            <a:pPr>
+              <a:spcAft>
+                <a:spcPts val="800"/>
+              </a:spcAft>
+              <a:defRPr sz="1400">
+                <a:solidFill>
+                  <a:srgbClr val="1C2D46"/>
+                </a:solidFill>
+                <a:latin typeface="Aptos"/>
+              </a:defRPr>
+            </a:pPr>
+            <a:r>
+              <a:t>EDA confirmed cluster concentration -&gt; diversity guardrail needed</a:t>
             </a:r>
           </a:p>
         </p:txBody>
@@ -8586,7 +7803,7 @@
               </a:defRPr>
             </a:pPr>
             <a:r>
-              <a:t>6 models compared under the same CV protocol</a:t>
+              <a:t>Section 4 | Data Understanding</a:t>
             </a:r>
           </a:p>
         </p:txBody>
@@ -8632,7 +7849,7 @@
           <a:lstStyle/>
           <a:p>
             <a:pPr>
-              <a:defRPr sz="3400" b="1">
+              <a:defRPr sz="3200" b="1">
                 <a:solidFill>
                   <a:srgbClr val="0F2C59"/>
                 </a:solidFill>
@@ -8640,7 +7857,7 @@
               </a:defRPr>
             </a:pPr>
             <a:r>
-              <a:t>Explainability (SHAP)</a:t>
+              <a:t>AI/ML Approach (Class-Learned Methods Focus)</a:t>
             </a:r>
           </a:p>
         </p:txBody>
@@ -8653,8 +7870,8 @@
         </p:nvSpPr>
         <p:spPr>
           <a:xfrm>
-            <a:off x="566928" y="1783080"/>
-            <a:ext cx="2377440" cy="73152"/>
+            <a:off x="566928" y="1755648"/>
+            <a:ext cx="2651760" cy="73152"/>
           </a:xfrm>
           <a:prstGeom prst="rect">
             <a:avLst/>
@@ -8688,85 +7905,135 @@
           </a:p>
         </p:txBody>
       </p:sp>
-      <p:pic>
-        <p:nvPicPr>
-          <p:cNvPr id="4" name="Picture 3" descr="shap_summary_LightGBM.png"/>
-          <p:cNvPicPr>
-            <a:picLocks noChangeAspect="1"/>
-          </p:cNvPicPr>
-          <p:nvPr/>
-        </p:nvPicPr>
-        <p:blipFill>
-          <a:blip r:embed="rId2"/>
-          <a:stretch>
-            <a:fillRect/>
-          </a:stretch>
-        </p:blipFill>
+      <p:sp>
+        <p:nvSpPr>
+          <p:cNvPr id="4" name="TextBox 3"/>
+          <p:cNvSpPr txBox="1"/>
+          <p:nvPr/>
+        </p:nvSpPr>
         <p:spPr>
           <a:xfrm>
             <a:off x="685800" y="1828800"/>
-            <a:ext cx="7340308" cy="4389120"/>
-          </a:xfrm>
-          <a:prstGeom prst="rect">
-            <a:avLst/>
-          </a:prstGeom>
-        </p:spPr>
-      </p:pic>
-      <p:sp>
-        <p:nvSpPr>
-          <p:cNvPr id="5" name="Rounded Rectangle 4"/>
-          <p:cNvSpPr/>
-          <p:nvPr/>
-        </p:nvSpPr>
-        <p:spPr>
-          <a:xfrm>
-            <a:off x="7269480" y="1828800"/>
-            <a:ext cx="4206240" cy="4389120"/>
-          </a:xfrm>
-          <a:prstGeom prst="roundRect">
-            <a:avLst/>
-          </a:prstGeom>
-          <a:solidFill>
-            <a:srgbClr val="F2F7FC"/>
-          </a:solidFill>
-          <a:ln w="15875">
-            <a:solidFill>
-              <a:srgbClr val="CDDCEE"/>
-            </a:solidFill>
-          </a:ln>
-        </p:spPr>
-        <p:style>
-          <a:lnRef idx="1">
-            <a:schemeClr val="accent1"/>
-          </a:lnRef>
-          <a:fillRef idx="3">
-            <a:schemeClr val="accent1"/>
-          </a:fillRef>
-          <a:effectRef idx="2">
-            <a:schemeClr val="accent1"/>
-          </a:effectRef>
-          <a:fontRef idx="minor">
-            <a:schemeClr val="lt1"/>
-          </a:fontRef>
-        </p:style>
-        <p:txBody>
-          <a:bodyPr rtlCol="0" anchor="ctr"/>
-          <a:lstStyle/>
-          <a:p>
-            <a:pPr algn="ctr"/>
-          </a:p>
-        </p:txBody>
-      </p:sp>
-      <p:sp>
-        <p:nvSpPr>
-          <p:cNvPr id="6" name="TextBox 5"/>
+            <a:ext cx="10972800" cy="4480560"/>
+          </a:xfrm>
+          <a:prstGeom prst="rect">
+            <a:avLst/>
+          </a:prstGeom>
+          <a:noFill/>
+        </p:spPr>
+        <p:txBody>
+          <a:bodyPr wrap="square">
+            <a:spAutoFit/>
+          </a:bodyPr>
+          <a:lstStyle/>
+          <a:p>
+            <a:pPr>
+              <a:spcAft>
+                <a:spcPts val="800"/>
+              </a:spcAft>
+              <a:defRPr sz="1800">
+                <a:solidFill>
+                  <a:srgbClr val="1C2D46"/>
+                </a:solidFill>
+                <a:latin typeface="Aptos"/>
+              </a:defRPr>
+            </a:pPr>
+            <a:r>
+              <a:t>1) Social Network Analysis: creator graph, centrality, communities</a:t>
+            </a:r>
+          </a:p>
+          <a:p>
+            <a:pPr>
+              <a:spcAft>
+                <a:spcPts val="800"/>
+              </a:spcAft>
+              <a:defRPr sz="1800">
+                <a:solidFill>
+                  <a:srgbClr val="1C2D46"/>
+                </a:solidFill>
+                <a:latin typeface="Aptos"/>
+              </a:defRPr>
+            </a:pPr>
+            <a:r>
+              <a:t>2) Text Analytics: TF-IDF relevance + semantic/tone enrichment</a:t>
+            </a:r>
+          </a:p>
+          <a:p>
+            <a:pPr>
+              <a:spcAft>
+                <a:spcPts val="800"/>
+              </a:spcAft>
+              <a:defRPr sz="1800">
+                <a:solidFill>
+                  <a:srgbClr val="1C2D46"/>
+                </a:solidFill>
+                <a:latin typeface="Aptos"/>
+              </a:defRPr>
+            </a:pPr>
+            <a:r>
+              <a:t>3) Supervised Regression: Linear, LASSO, Ridge, CART, RandomForest, LightGBM</a:t>
+            </a:r>
+          </a:p>
+          <a:p>
+            <a:pPr>
+              <a:spcAft>
+                <a:spcPts val="800"/>
+              </a:spcAft>
+              <a:defRPr sz="1800">
+                <a:solidFill>
+                  <a:srgbClr val="1C2D46"/>
+                </a:solidFill>
+                <a:latin typeface="Aptos"/>
+              </a:defRPr>
+            </a:pPr>
+            <a:r>
+              <a:t>4) Validation: GroupKFold(5) by channel to reduce leakage</a:t>
+            </a:r>
+          </a:p>
+          <a:p>
+            <a:pPr>
+              <a:spcAft>
+                <a:spcPts val="800"/>
+              </a:spcAft>
+              <a:defRPr sz="1800">
+                <a:solidFill>
+                  <a:srgbClr val="1C2D46"/>
+                </a:solidFill>
+                <a:latin typeface="Aptos"/>
+              </a:defRPr>
+            </a:pPr>
+            <a:r>
+              <a:t>5) Explainability: SHAP for feature contribution</a:t>
+            </a:r>
+          </a:p>
+          <a:p>
+            <a:pPr>
+              <a:spcAft>
+                <a:spcPts val="800"/>
+              </a:spcAft>
+              <a:defRPr sz="1800">
+                <a:solidFill>
+                  <a:srgbClr val="1C2D46"/>
+                </a:solidFill>
+                <a:latin typeface="Aptos"/>
+              </a:defRPr>
+            </a:pPr>
+            <a:r>
+              <a:t>Extensions shown in demo: ROI simulator, strategy and memo generation</a:t>
+            </a:r>
+          </a:p>
+        </p:txBody>
+      </p:sp>
+      <p:sp>
+        <p:nvSpPr>
+          <p:cNvPr id="5" name="TextBox 4"/>
           <p:cNvSpPr txBox="1"/>
           <p:nvPr/>
         </p:nvSpPr>
         <p:spPr>
           <a:xfrm>
-            <a:off x="7470648" y="1938528"/>
-            <a:ext cx="3886200" cy="365760"/>
+            <a:off x="502920" y="6428232"/>
+            <a:ext cx="10972800" cy="292608"/>
           </a:xfrm>
           <a:prstGeom prst="rect">
             <a:avLst/>
@@ -8779,113 +8046,6 @@
           </a:bodyPr>
           <a:lstStyle/>
           <a:p>
-            <a:pPr>
-              <a:defRPr b="1" sz="1900">
-                <a:solidFill>
-                  <a:srgbClr val="133A66"/>
-                </a:solidFill>
-                <a:latin typeface="Aptos"/>
-              </a:defRPr>
-            </a:pPr>
-            <a:r>
-              <a:t>Why SHAP matters</a:t>
-            </a:r>
-          </a:p>
-        </p:txBody>
-      </p:sp>
-      <p:sp>
-        <p:nvSpPr>
-          <p:cNvPr id="7" name="TextBox 6"/>
-          <p:cNvSpPr txBox="1"/>
-          <p:nvPr/>
-        </p:nvSpPr>
-        <p:spPr>
-          <a:xfrm>
-            <a:off x="7452360" y="2304288"/>
-            <a:ext cx="3886200" cy="3822191"/>
-          </a:xfrm>
-          <a:prstGeom prst="rect">
-            <a:avLst/>
-          </a:prstGeom>
-          <a:noFill/>
-        </p:spPr>
-        <p:txBody>
-          <a:bodyPr wrap="square">
-            <a:spAutoFit/>
-          </a:bodyPr>
-          <a:lstStyle/>
-          <a:p>
-            <a:pPr>
-              <a:spcAft>
-                <a:spcPts val="900"/>
-              </a:spcAft>
-              <a:defRPr sz="1600">
-                <a:solidFill>
-                  <a:srgbClr val="1C2D46"/>
-                </a:solidFill>
-                <a:latin typeface="Aptos"/>
-              </a:defRPr>
-            </a:pPr>
-            <a:r>
-              <a:t>Shows which features drive engagement predictions.</a:t>
-            </a:r>
-          </a:p>
-          <a:p>
-            <a:pPr>
-              <a:spcAft>
-                <a:spcPts val="900"/>
-              </a:spcAft>
-              <a:defRPr sz="1600">
-                <a:solidFill>
-                  <a:srgbClr val="1C2D46"/>
-                </a:solidFill>
-                <a:latin typeface="Aptos"/>
-              </a:defRPr>
-            </a:pPr>
-            <a:r>
-              <a:t>Improves trust for non-technical stakeholders.</a:t>
-            </a:r>
-          </a:p>
-          <a:p>
-            <a:pPr>
-              <a:spcAft>
-                <a:spcPts val="900"/>
-              </a:spcAft>
-              <a:defRPr sz="1600">
-                <a:solidFill>
-                  <a:srgbClr val="1C2D46"/>
-                </a:solidFill>
-                <a:latin typeface="Aptos"/>
-              </a:defRPr>
-            </a:pPr>
-            <a:r>
-              <a:t>Helps diagnose unstable or misleading signals.</a:t>
-            </a:r>
-          </a:p>
-        </p:txBody>
-      </p:sp>
-      <p:sp>
-        <p:nvSpPr>
-          <p:cNvPr id="8" name="TextBox 7"/>
-          <p:cNvSpPr txBox="1"/>
-          <p:nvPr/>
-        </p:nvSpPr>
-        <p:spPr>
-          <a:xfrm>
-            <a:off x="502920" y="6428232"/>
-            <a:ext cx="10972800" cy="292608"/>
-          </a:xfrm>
-          <a:prstGeom prst="rect">
-            <a:avLst/>
-          </a:prstGeom>
-          <a:noFill/>
-        </p:spPr>
-        <p:txBody>
-          <a:bodyPr wrap="none">
-            <a:spAutoFit/>
-          </a:bodyPr>
-          <a:lstStyle/>
-          <a:p>
             <a:pPr algn="r">
               <a:defRPr sz="1000">
                 <a:solidFill>
@@ -8895,7 +8055,7 @@
               </a:defRPr>
             </a:pPr>
             <a:r>
-              <a:t>Rubric 3: Evaluation and sanity checking</a:t>
+              <a:t>Section 5 | Methods</a:t>
             </a:r>
           </a:p>
         </p:txBody>
@@ -8941,7 +8101,7 @@
           <a:lstStyle/>
           <a:p>
             <a:pPr>
-              <a:defRPr sz="3400" b="1">
+              <a:defRPr sz="3200" b="1">
                 <a:solidFill>
                   <a:srgbClr val="0F2C59"/>
                 </a:solidFill>
@@ -8949,7 +8109,7 @@
               </a:defRPr>
             </a:pPr>
             <a:r>
-              <a:t>Top-10 BOJ Recommendations</a:t>
+              <a:t>Why This Method Mix</a:t>
             </a:r>
           </a:p>
         </p:txBody>
@@ -8962,8 +8122,8 @@
         </p:nvSpPr>
         <p:spPr>
           <a:xfrm>
-            <a:off x="566928" y="1783080"/>
-            <a:ext cx="2377440" cy="73152"/>
+            <a:off x="566928" y="1755648"/>
+            <a:ext cx="2651760" cy="73152"/>
           </a:xfrm>
           <a:prstGeom prst="rect">
             <a:avLst/>
@@ -8997,30 +8157,51 @@
           </a:p>
         </p:txBody>
       </p:sp>
-      <p:pic>
-        <p:nvPicPr>
-          <p:cNvPr id="4" name="Picture 3" descr="top10_final_scores.png"/>
-          <p:cNvPicPr>
-            <a:picLocks noChangeAspect="1"/>
-          </p:cNvPicPr>
-          <p:nvPr/>
-        </p:nvPicPr>
-        <p:blipFill>
-          <a:blip r:embed="rId2"/>
-          <a:stretch>
-            <a:fillRect/>
-          </a:stretch>
-        </p:blipFill>
-        <p:spPr>
-          <a:xfrm>
-            <a:off x="658368" y="1828800"/>
-            <a:ext cx="8704385" cy="4526280"/>
-          </a:xfrm>
-          <a:prstGeom prst="rect">
-            <a:avLst/>
-          </a:prstGeom>
-        </p:spPr>
-      </p:pic>
+      <p:sp>
+        <p:nvSpPr>
+          <p:cNvPr id="4" name="Rounded Rectangle 3"/>
+          <p:cNvSpPr/>
+          <p:nvPr/>
+        </p:nvSpPr>
+        <p:spPr>
+          <a:xfrm>
+            <a:off x="594360" y="1828800"/>
+            <a:ext cx="5440680" cy="4389120"/>
+          </a:xfrm>
+          <a:prstGeom prst="roundRect">
+            <a:avLst/>
+          </a:prstGeom>
+          <a:solidFill>
+            <a:srgbClr val="F2F7FC"/>
+          </a:solidFill>
+          <a:ln w="15875">
+            <a:solidFill>
+              <a:srgbClr val="CDDCEE"/>
+            </a:solidFill>
+          </a:ln>
+        </p:spPr>
+        <p:style>
+          <a:lnRef idx="1">
+            <a:schemeClr val="accent1"/>
+          </a:lnRef>
+          <a:fillRef idx="3">
+            <a:schemeClr val="accent1"/>
+          </a:fillRef>
+          <a:effectRef idx="2">
+            <a:schemeClr val="accent1"/>
+          </a:effectRef>
+          <a:fontRef idx="minor">
+            <a:schemeClr val="lt1"/>
+          </a:fontRef>
+        </p:style>
+        <p:txBody>
+          <a:bodyPr rtlCol="0" anchor="ctr"/>
+          <a:lstStyle/>
+          <a:p>
+            <a:pPr algn="ctr"/>
+          </a:p>
+        </p:txBody>
+      </p:sp>
       <p:sp>
         <p:nvSpPr>
           <p:cNvPr id="5" name="TextBox 4"/>
@@ -9029,8 +8210,8 @@
         </p:nvSpPr>
         <p:spPr>
           <a:xfrm>
-            <a:off x="502920" y="6428232"/>
-            <a:ext cx="10972800" cy="292608"/>
+            <a:off x="777240" y="1938528"/>
+            <a:ext cx="5166360" cy="347472"/>
           </a:xfrm>
           <a:prstGeom prst="rect">
             <a:avLst/>
@@ -9043,6 +8224,297 @@
           </a:bodyPr>
           <a:lstStyle/>
           <a:p>
+            <a:pPr>
+              <a:defRPr b="1" sz="1800">
+                <a:solidFill>
+                  <a:srgbClr val="133A66"/>
+                </a:solidFill>
+                <a:latin typeface="Aptos"/>
+              </a:defRPr>
+            </a:pPr>
+            <a:r>
+              <a:t>Why not follower-count only</a:t>
+            </a:r>
+          </a:p>
+        </p:txBody>
+      </p:sp>
+      <p:sp>
+        <p:nvSpPr>
+          <p:cNvPr id="6" name="TextBox 5"/>
+          <p:cNvSpPr txBox="1"/>
+          <p:nvPr/>
+        </p:nvSpPr>
+        <p:spPr>
+          <a:xfrm>
+            <a:off x="758952" y="2267712"/>
+            <a:ext cx="5184648" cy="3858768"/>
+          </a:xfrm>
+          <a:prstGeom prst="rect">
+            <a:avLst/>
+          </a:prstGeom>
+          <a:noFill/>
+        </p:spPr>
+        <p:txBody>
+          <a:bodyPr wrap="square">
+            <a:spAutoFit/>
+          </a:bodyPr>
+          <a:lstStyle/>
+          <a:p>
+            <a:pPr>
+              <a:spcAft>
+                <a:spcPts val="800"/>
+              </a:spcAft>
+              <a:defRPr sz="1500">
+                <a:solidFill>
+                  <a:srgbClr val="1C2D46"/>
+                </a:solidFill>
+                <a:latin typeface="Aptos"/>
+              </a:defRPr>
+            </a:pPr>
+            <a:r>
+              <a:t>Misses campaign-language fit</a:t>
+            </a:r>
+          </a:p>
+          <a:p>
+            <a:pPr>
+              <a:spcAft>
+                <a:spcPts val="800"/>
+              </a:spcAft>
+              <a:defRPr sz="1500">
+                <a:solidFill>
+                  <a:srgbClr val="1C2D46"/>
+                </a:solidFill>
+                <a:latin typeface="Aptos"/>
+              </a:defRPr>
+            </a:pPr>
+            <a:r>
+              <a:t>Misses network position and community overlap</a:t>
+            </a:r>
+          </a:p>
+          <a:p>
+            <a:pPr>
+              <a:spcAft>
+                <a:spcPts val="800"/>
+              </a:spcAft>
+              <a:defRPr sz="1500">
+                <a:solidFill>
+                  <a:srgbClr val="1C2D46"/>
+                </a:solidFill>
+                <a:latin typeface="Aptos"/>
+              </a:defRPr>
+            </a:pPr>
+            <a:r>
+              <a:t>Misses quality/reliability signals</a:t>
+            </a:r>
+          </a:p>
+          <a:p>
+            <a:pPr>
+              <a:spcAft>
+                <a:spcPts val="800"/>
+              </a:spcAft>
+              <a:defRPr sz="1500">
+                <a:solidFill>
+                  <a:srgbClr val="1C2D46"/>
+                </a:solidFill>
+                <a:latin typeface="Aptos"/>
+              </a:defRPr>
+            </a:pPr>
+            <a:r>
+              <a:t>High chance of expensive creator mismatch</a:t>
+            </a:r>
+          </a:p>
+        </p:txBody>
+      </p:sp>
+      <p:sp>
+        <p:nvSpPr>
+          <p:cNvPr id="7" name="Rounded Rectangle 6"/>
+          <p:cNvSpPr/>
+          <p:nvPr/>
+        </p:nvSpPr>
+        <p:spPr>
+          <a:xfrm>
+            <a:off x="6144768" y="1828800"/>
+            <a:ext cx="5440680" cy="4389120"/>
+          </a:xfrm>
+          <a:prstGeom prst="roundRect">
+            <a:avLst/>
+          </a:prstGeom>
+          <a:solidFill>
+            <a:srgbClr val="F2F7FC"/>
+          </a:solidFill>
+          <a:ln w="15875">
+            <a:solidFill>
+              <a:srgbClr val="CDDCEE"/>
+            </a:solidFill>
+          </a:ln>
+        </p:spPr>
+        <p:style>
+          <a:lnRef idx="1">
+            <a:schemeClr val="accent1"/>
+          </a:lnRef>
+          <a:fillRef idx="3">
+            <a:schemeClr val="accent1"/>
+          </a:fillRef>
+          <a:effectRef idx="2">
+            <a:schemeClr val="accent1"/>
+          </a:effectRef>
+          <a:fontRef idx="minor">
+            <a:schemeClr val="lt1"/>
+          </a:fontRef>
+        </p:style>
+        <p:txBody>
+          <a:bodyPr rtlCol="0" anchor="ctr"/>
+          <a:lstStyle/>
+          <a:p>
+            <a:pPr algn="ctr"/>
+          </a:p>
+        </p:txBody>
+      </p:sp>
+      <p:sp>
+        <p:nvSpPr>
+          <p:cNvPr id="8" name="TextBox 7"/>
+          <p:cNvSpPr txBox="1"/>
+          <p:nvPr/>
+        </p:nvSpPr>
+        <p:spPr>
+          <a:xfrm>
+            <a:off x="6327648" y="1938528"/>
+            <a:ext cx="5166360" cy="347472"/>
+          </a:xfrm>
+          <a:prstGeom prst="rect">
+            <a:avLst/>
+          </a:prstGeom>
+          <a:noFill/>
+        </p:spPr>
+        <p:txBody>
+          <a:bodyPr wrap="none">
+            <a:spAutoFit/>
+          </a:bodyPr>
+          <a:lstStyle/>
+          <a:p>
+            <a:pPr>
+              <a:defRPr b="1" sz="1800">
+                <a:solidFill>
+                  <a:srgbClr val="133A66"/>
+                </a:solidFill>
+                <a:latin typeface="Aptos"/>
+              </a:defRPr>
+            </a:pPr>
+            <a:r>
+              <a:t>Hybrid ranking logic</a:t>
+            </a:r>
+          </a:p>
+        </p:txBody>
+      </p:sp>
+      <p:sp>
+        <p:nvSpPr>
+          <p:cNvPr id="9" name="TextBox 8"/>
+          <p:cNvSpPr txBox="1"/>
+          <p:nvPr/>
+        </p:nvSpPr>
+        <p:spPr>
+          <a:xfrm>
+            <a:off x="6309359" y="2267712"/>
+            <a:ext cx="5184648" cy="3858768"/>
+          </a:xfrm>
+          <a:prstGeom prst="rect">
+            <a:avLst/>
+          </a:prstGeom>
+          <a:noFill/>
+        </p:spPr>
+        <p:txBody>
+          <a:bodyPr wrap="square">
+            <a:spAutoFit/>
+          </a:bodyPr>
+          <a:lstStyle/>
+          <a:p>
+            <a:pPr>
+              <a:spcAft>
+                <a:spcPts val="800"/>
+              </a:spcAft>
+              <a:defRPr sz="1500">
+                <a:solidFill>
+                  <a:srgbClr val="1C2D46"/>
+                </a:solidFill>
+                <a:latin typeface="Aptos"/>
+              </a:defRPr>
+            </a:pPr>
+            <a:r>
+              <a:t>Network influence + text fit + engagement potential</a:t>
+            </a:r>
+          </a:p>
+          <a:p>
+            <a:pPr>
+              <a:spcAft>
+                <a:spcPts val="800"/>
+              </a:spcAft>
+              <a:defRPr sz="1500">
+                <a:solidFill>
+                  <a:srgbClr val="1C2D46"/>
+                </a:solidFill>
+                <a:latin typeface="Aptos"/>
+              </a:defRPr>
+            </a:pPr>
+            <a:r>
+              <a:t>Reliability multiplier to penalize low-signal channels</a:t>
+            </a:r>
+          </a:p>
+          <a:p>
+            <a:pPr>
+              <a:spcAft>
+                <a:spcPts val="800"/>
+              </a:spcAft>
+              <a:defRPr sz="1500">
+                <a:solidFill>
+                  <a:srgbClr val="1C2D46"/>
+                </a:solidFill>
+                <a:latin typeface="Aptos"/>
+              </a:defRPr>
+            </a:pPr>
+            <a:r>
+              <a:t>Diversity constraint for healthier final shortlist</a:t>
+            </a:r>
+          </a:p>
+          <a:p>
+            <a:pPr>
+              <a:spcAft>
+                <a:spcPts val="800"/>
+              </a:spcAft>
+              <a:defRPr sz="1500">
+                <a:solidFill>
+                  <a:srgbClr val="1C2D46"/>
+                </a:solidFill>
+                <a:latin typeface="Aptos"/>
+              </a:defRPr>
+            </a:pPr>
+            <a:r>
+              <a:t>More robust than single-signal ranking</a:t>
+            </a:r>
+          </a:p>
+        </p:txBody>
+      </p:sp>
+      <p:sp>
+        <p:nvSpPr>
+          <p:cNvPr id="10" name="TextBox 9"/>
+          <p:cNvSpPr txBox="1"/>
+          <p:nvPr/>
+        </p:nvSpPr>
+        <p:spPr>
+          <a:xfrm>
+            <a:off x="502920" y="6428232"/>
+            <a:ext cx="10972800" cy="292608"/>
+          </a:xfrm>
+          <a:prstGeom prst="rect">
+            <a:avLst/>
+          </a:prstGeom>
+          <a:noFill/>
+        </p:spPr>
+        <p:txBody>
+          <a:bodyPr wrap="none">
+            <a:spAutoFit/>
+          </a:bodyPr>
+          <a:lstStyle/>
+          <a:p>
             <a:pPr algn="r">
               <a:defRPr sz="1000">
                 <a:solidFill>
@@ -9052,7 +8524,7 @@
               </a:defRPr>
             </a:pPr>
             <a:r>
-              <a:t>Top 3 channels: AliceintheRabbitHole, Dr. Sam Ellis, NikkieTutorials</a:t>
+              <a:t>Section 5 | Method Choice Rationale</a:t>
             </a:r>
           </a:p>
         </p:txBody>

--- a/slides/AI_MCN_Final_Presentation_EN.pptx
+++ b/slides/AI_MCN_Final_Presentation_EN.pptx
@@ -3297,7 +3297,7 @@
         <p:spPr>
           <a:xfrm>
             <a:off x="502920" y="6428232"/>
-            <a:ext cx="10972800" cy="292608"/>
+            <a:ext cx="8503920" cy="310896"/>
           </a:xfrm>
           <a:prstGeom prst="rect">
             <a:avLst/>
@@ -3310,8 +3310,76 @@
           </a:bodyPr>
           <a:lstStyle/>
           <a:p>
+            <a:pPr algn="l">
+              <a:spcAft>
+                <a:spcPts val="0"/>
+              </a:spcAft>
+            </a:pPr>
+            <a:r>
+              <a:rPr sz="850">
+                <a:solidFill>
+                  <a:srgbClr val="6E8098"/>
+                </a:solidFill>
+                <a:latin typeface="Aptos"/>
+              </a:rPr>
+              <a:t>Sources: </a:t>
+            </a:r>
+            <a:r>
+              <a:rPr sz="850" u="sng">
+                <a:solidFill>
+                  <a:srgbClr val="1A7DBC"/>
+                </a:solidFill>
+                <a:latin typeface="Aptos"/>
+                <a:hlinkClick r:id="rId2"/>
+              </a:rPr>
+              <a:t>GitHub repo</a:t>
+            </a:r>
+            <a:r>
+              <a:rPr sz="850">
+                <a:solidFill>
+                  <a:srgbClr val="8291A5"/>
+                </a:solidFill>
+                <a:latin typeface="Aptos"/>
+              </a:rPr>
+              <a:t> | </a:t>
+            </a:r>
+            <a:r>
+              <a:rPr sz="850" u="sng">
+                <a:solidFill>
+                  <a:srgbClr val="1A7DBC"/>
+                </a:solidFill>
+                <a:latin typeface="Aptos"/>
+                <a:hlinkClick r:id="rId3"/>
+              </a:rPr>
+              <a:t>EMARKETER 2025</a:t>
+            </a:r>
+          </a:p>
+        </p:txBody>
+      </p:sp>
+      <p:sp>
+        <p:nvSpPr>
+          <p:cNvPr id="7" name="TextBox 6"/>
+          <p:cNvSpPr txBox="1"/>
+          <p:nvPr/>
+        </p:nvSpPr>
+        <p:spPr>
+          <a:xfrm>
+            <a:off x="9189720" y="6428232"/>
+            <a:ext cx="2514600" cy="292608"/>
+          </a:xfrm>
+          <a:prstGeom prst="rect">
+            <a:avLst/>
+          </a:prstGeom>
+          <a:noFill/>
+        </p:spPr>
+        <p:txBody>
+          <a:bodyPr wrap="none">
+            <a:spAutoFit/>
+          </a:bodyPr>
+          <a:lstStyle/>
+          <a:p>
             <a:pPr algn="r">
-              <a:defRPr sz="1000">
+              <a:defRPr sz="900">
                 <a:solidFill>
                   <a:srgbClr val="6E8098"/>
                 </a:solidFill>
@@ -3622,7 +3690,7 @@
         <p:spPr>
           <a:xfrm>
             <a:off x="502920" y="6428232"/>
-            <a:ext cx="10972800" cy="292608"/>
+            <a:ext cx="8503920" cy="310896"/>
           </a:xfrm>
           <a:prstGeom prst="rect">
             <a:avLst/>
@@ -3635,8 +3703,75 @@
           </a:bodyPr>
           <a:lstStyle/>
           <a:p>
+            <a:pPr algn="l">
+              <a:spcAft>
+                <a:spcPts val="0"/>
+              </a:spcAft>
+            </a:pPr>
+            <a:r>
+              <a:rPr sz="850">
+                <a:solidFill>
+                  <a:srgbClr val="6E8098"/>
+                </a:solidFill>
+                <a:latin typeface="Aptos"/>
+              </a:rPr>
+              <a:t>Sources: </a:t>
+            </a:r>
+            <a:r>
+              <a:rPr sz="850">
+                <a:solidFill>
+                  <a:srgbClr val="6E8098"/>
+                </a:solidFill>
+                <a:latin typeface="Aptos"/>
+              </a:rPr>
+              <a:t>ML CV outputs (internal)</a:t>
+            </a:r>
+            <a:r>
+              <a:rPr sz="850">
+                <a:solidFill>
+                  <a:srgbClr val="8291A5"/>
+                </a:solidFill>
+                <a:latin typeface="Aptos"/>
+              </a:rPr>
+              <a:t> | </a:t>
+            </a:r>
+            <a:r>
+              <a:rPr sz="850" u="sng">
+                <a:solidFill>
+                  <a:srgbClr val="1A7DBC"/>
+                </a:solidFill>
+                <a:latin typeface="Aptos"/>
+                <a:hlinkClick r:id="rId3"/>
+              </a:rPr>
+              <a:t>LightGBM docs</a:t>
+            </a:r>
+          </a:p>
+        </p:txBody>
+      </p:sp>
+      <p:sp>
+        <p:nvSpPr>
+          <p:cNvPr id="9" name="TextBox 8"/>
+          <p:cNvSpPr txBox="1"/>
+          <p:nvPr/>
+        </p:nvSpPr>
+        <p:spPr>
+          <a:xfrm>
+            <a:off x="9189720" y="6428232"/>
+            <a:ext cx="2514600" cy="292608"/>
+          </a:xfrm>
+          <a:prstGeom prst="rect">
+            <a:avLst/>
+          </a:prstGeom>
+          <a:noFill/>
+        </p:spPr>
+        <p:txBody>
+          <a:bodyPr wrap="none">
+            <a:spAutoFit/>
+          </a:bodyPr>
+          <a:lstStyle/>
+          <a:p>
             <a:pPr algn="r">
-              <a:defRPr sz="1000">
+              <a:defRPr sz="900">
                 <a:solidFill>
                   <a:srgbClr val="6E8098"/>
                 </a:solidFill>
@@ -3882,7 +4017,7 @@
         <p:spPr>
           <a:xfrm>
             <a:off x="502920" y="6428232"/>
-            <a:ext cx="10972800" cy="292608"/>
+            <a:ext cx="8503920" cy="310896"/>
           </a:xfrm>
           <a:prstGeom prst="rect">
             <a:avLst/>
@@ -3895,8 +4030,75 @@
           </a:bodyPr>
           <a:lstStyle/>
           <a:p>
+            <a:pPr algn="l">
+              <a:spcAft>
+                <a:spcPts val="0"/>
+              </a:spcAft>
+            </a:pPr>
+            <a:r>
+              <a:rPr sz="850">
+                <a:solidFill>
+                  <a:srgbClr val="6E8098"/>
+                </a:solidFill>
+                <a:latin typeface="Aptos"/>
+              </a:rPr>
+              <a:t>Sources: </a:t>
+            </a:r>
+            <a:r>
+              <a:rPr sz="850" u="sng">
+                <a:solidFill>
+                  <a:srgbClr val="1A7DBC"/>
+                </a:solidFill>
+                <a:latin typeface="Aptos"/>
+                <a:hlinkClick r:id="rId3"/>
+              </a:rPr>
+              <a:t>Streamlit docs</a:t>
+            </a:r>
+            <a:r>
+              <a:rPr sz="850">
+                <a:solidFill>
+                  <a:srgbClr val="8291A5"/>
+                </a:solidFill>
+                <a:latin typeface="Aptos"/>
+              </a:rPr>
+              <a:t> | </a:t>
+            </a:r>
+            <a:r>
+              <a:rPr sz="850">
+                <a:solidFill>
+                  <a:srgbClr val="6E8098"/>
+                </a:solidFill>
+                <a:latin typeface="Aptos"/>
+              </a:rPr>
+              <a:t>Prototype app/pipeline (internal)</a:t>
+            </a:r>
+          </a:p>
+        </p:txBody>
+      </p:sp>
+      <p:sp>
+        <p:nvSpPr>
+          <p:cNvPr id="7" name="TextBox 6"/>
+          <p:cNvSpPr txBox="1"/>
+          <p:nvPr/>
+        </p:nvSpPr>
+        <p:spPr>
+          <a:xfrm>
+            <a:off x="9189720" y="6428232"/>
+            <a:ext cx="2514600" cy="292608"/>
+          </a:xfrm>
+          <a:prstGeom prst="rect">
+            <a:avLst/>
+          </a:prstGeom>
+          <a:noFill/>
+        </p:spPr>
+        <p:txBody>
+          <a:bodyPr wrap="none">
+            <a:spAutoFit/>
+          </a:bodyPr>
+          <a:lstStyle/>
+          <a:p>
             <a:pPr algn="r">
-              <a:defRPr sz="1000">
+              <a:defRPr sz="900">
                 <a:solidFill>
                   <a:srgbClr val="6E8098"/>
                 </a:solidFill>
@@ -4351,7 +4553,7 @@
         <p:spPr>
           <a:xfrm>
             <a:off x="502920" y="6428232"/>
-            <a:ext cx="10972800" cy="292608"/>
+            <a:ext cx="8503920" cy="310896"/>
           </a:xfrm>
           <a:prstGeom prst="rect">
             <a:avLst/>
@@ -4364,8 +4566,76 @@
           </a:bodyPr>
           <a:lstStyle/>
           <a:p>
+            <a:pPr algn="l">
+              <a:spcAft>
+                <a:spcPts val="0"/>
+              </a:spcAft>
+            </a:pPr>
+            <a:r>
+              <a:rPr sz="850">
+                <a:solidFill>
+                  <a:srgbClr val="6E8098"/>
+                </a:solidFill>
+                <a:latin typeface="Aptos"/>
+              </a:rPr>
+              <a:t>Sources: </a:t>
+            </a:r>
+            <a:r>
+              <a:rPr sz="850" u="sng">
+                <a:solidFill>
+                  <a:srgbClr val="1A7DBC"/>
+                </a:solidFill>
+                <a:latin typeface="Aptos"/>
+                <a:hlinkClick r:id="rId2"/>
+              </a:rPr>
+              <a:t>IAB Creator Economy</a:t>
+            </a:r>
+            <a:r>
+              <a:rPr sz="850">
+                <a:solidFill>
+                  <a:srgbClr val="8291A5"/>
+                </a:solidFill>
+                <a:latin typeface="Aptos"/>
+              </a:rPr>
+              <a:t> | </a:t>
+            </a:r>
+            <a:r>
+              <a:rPr sz="850" u="sng">
+                <a:solidFill>
+                  <a:srgbClr val="1A7DBC"/>
+                </a:solidFill>
+                <a:latin typeface="Aptos"/>
+                <a:hlinkClick r:id="rId3"/>
+              </a:rPr>
+              <a:t>YouTube U.S. Impact 2024</a:t>
+            </a:r>
+          </a:p>
+        </p:txBody>
+      </p:sp>
+      <p:sp>
+        <p:nvSpPr>
+          <p:cNvPr id="11" name="TextBox 10"/>
+          <p:cNvSpPr txBox="1"/>
+          <p:nvPr/>
+        </p:nvSpPr>
+        <p:spPr>
+          <a:xfrm>
+            <a:off x="9189720" y="6428232"/>
+            <a:ext cx="2514600" cy="292608"/>
+          </a:xfrm>
+          <a:prstGeom prst="rect">
+            <a:avLst/>
+          </a:prstGeom>
+          <a:noFill/>
+        </p:spPr>
+        <p:txBody>
+          <a:bodyPr wrap="none">
+            <a:spAutoFit/>
+          </a:bodyPr>
+          <a:lstStyle/>
+          <a:p>
             <a:pPr algn="r">
-              <a:defRPr sz="1000">
+              <a:defRPr sz="900">
                 <a:solidFill>
                   <a:srgbClr val="6E8098"/>
                 </a:solidFill>
@@ -4820,7 +5090,7 @@
         <p:spPr>
           <a:xfrm>
             <a:off x="502920" y="6428232"/>
-            <a:ext cx="10972800" cy="292608"/>
+            <a:ext cx="8503920" cy="310896"/>
           </a:xfrm>
           <a:prstGeom prst="rect">
             <a:avLst/>
@@ -4833,8 +5103,95 @@
           </a:bodyPr>
           <a:lstStyle/>
           <a:p>
+            <a:pPr algn="l">
+              <a:spcAft>
+                <a:spcPts val="0"/>
+              </a:spcAft>
+            </a:pPr>
+            <a:r>
+              <a:rPr sz="850">
+                <a:solidFill>
+                  <a:srgbClr val="6E8098"/>
+                </a:solidFill>
+                <a:latin typeface="Aptos"/>
+              </a:rPr>
+              <a:t>Sources: </a:t>
+            </a:r>
+            <a:r>
+              <a:rPr sz="850" u="sng">
+                <a:solidFill>
+                  <a:srgbClr val="1A7DBC"/>
+                </a:solidFill>
+                <a:latin typeface="Aptos"/>
+                <a:hlinkClick r:id="rId2"/>
+              </a:rPr>
+              <a:t>FTC Influencer Disclosures</a:t>
+            </a:r>
+            <a:r>
+              <a:rPr sz="850">
+                <a:solidFill>
+                  <a:srgbClr val="8291A5"/>
+                </a:solidFill>
+                <a:latin typeface="Aptos"/>
+              </a:rPr>
+              <a:t> | </a:t>
+            </a:r>
+            <a:r>
+              <a:rPr sz="850" u="sng">
+                <a:solidFill>
+                  <a:srgbClr val="1A7DBC"/>
+                </a:solidFill>
+                <a:latin typeface="Aptos"/>
+                <a:hlinkClick r:id="rId3"/>
+              </a:rPr>
+              <a:t>SAFE Sunscreen (House)</a:t>
+            </a:r>
+            <a:r>
+              <a:rPr sz="850">
+                <a:solidFill>
+                  <a:srgbClr val="8291A5"/>
+                </a:solidFill>
+                <a:latin typeface="Aptos"/>
+              </a:rPr>
+              <a:t> | </a:t>
+            </a:r>
+            <a:r>
+              <a:rPr sz="850" u="sng">
+                <a:solidFill>
+                  <a:srgbClr val="1A7DBC"/>
+                </a:solidFill>
+                <a:latin typeface="Aptos"/>
+                <a:hlinkClick r:id="rId4"/>
+              </a:rPr>
+              <a:t>FDA SIA</a:t>
+            </a:r>
+          </a:p>
+        </p:txBody>
+      </p:sp>
+      <p:sp>
+        <p:nvSpPr>
+          <p:cNvPr id="11" name="TextBox 10"/>
+          <p:cNvSpPr txBox="1"/>
+          <p:nvPr/>
+        </p:nvSpPr>
+        <p:spPr>
+          <a:xfrm>
+            <a:off x="9189720" y="6428232"/>
+            <a:ext cx="2514600" cy="292608"/>
+          </a:xfrm>
+          <a:prstGeom prst="rect">
+            <a:avLst/>
+          </a:prstGeom>
+          <a:noFill/>
+        </p:spPr>
+        <p:txBody>
+          <a:bodyPr wrap="none">
+            <a:spAutoFit/>
+          </a:bodyPr>
+          <a:lstStyle/>
+          <a:p>
             <a:pPr algn="r">
-              <a:defRPr sz="1000">
+              <a:defRPr sz="900">
                 <a:solidFill>
                   <a:srgbClr val="6E8098"/>
                 </a:solidFill>
@@ -5289,7 +5646,7 @@
         <p:spPr>
           <a:xfrm>
             <a:off x="502920" y="6428232"/>
-            <a:ext cx="10972800" cy="292608"/>
+            <a:ext cx="8503920" cy="310896"/>
           </a:xfrm>
           <a:prstGeom prst="rect">
             <a:avLst/>
@@ -5302,8 +5659,75 @@
           </a:bodyPr>
           <a:lstStyle/>
           <a:p>
+            <a:pPr algn="l">
+              <a:spcAft>
+                <a:spcPts val="0"/>
+              </a:spcAft>
+            </a:pPr>
+            <a:r>
+              <a:rPr sz="850">
+                <a:solidFill>
+                  <a:srgbClr val="6E8098"/>
+                </a:solidFill>
+                <a:latin typeface="Aptos"/>
+              </a:rPr>
+              <a:t>Sources: </a:t>
+            </a:r>
+            <a:r>
+              <a:rPr sz="850">
+                <a:solidFill>
+                  <a:srgbClr val="6E8098"/>
+                </a:solidFill>
+                <a:latin typeface="Aptos"/>
+              </a:rPr>
+              <a:t>Project commits/artifacts (internal)</a:t>
+            </a:r>
+            <a:r>
+              <a:rPr sz="850">
+                <a:solidFill>
+                  <a:srgbClr val="8291A5"/>
+                </a:solidFill>
+                <a:latin typeface="Aptos"/>
+              </a:rPr>
+              <a:t> | </a:t>
+            </a:r>
+            <a:r>
+              <a:rPr sz="850" u="sng">
+                <a:solidFill>
+                  <a:srgbClr val="1A7DBC"/>
+                </a:solidFill>
+                <a:latin typeface="Aptos"/>
+                <a:hlinkClick r:id="rId2"/>
+              </a:rPr>
+              <a:t>OpenAI platform docs</a:t>
+            </a:r>
+          </a:p>
+        </p:txBody>
+      </p:sp>
+      <p:sp>
+        <p:nvSpPr>
+          <p:cNvPr id="11" name="TextBox 10"/>
+          <p:cNvSpPr txBox="1"/>
+          <p:nvPr/>
+        </p:nvSpPr>
+        <p:spPr>
+          <a:xfrm>
+            <a:off x="9189720" y="6428232"/>
+            <a:ext cx="2514600" cy="292608"/>
+          </a:xfrm>
+          <a:prstGeom prst="rect">
+            <a:avLst/>
+          </a:prstGeom>
+          <a:noFill/>
+        </p:spPr>
+        <p:txBody>
+          <a:bodyPr wrap="none">
+            <a:spAutoFit/>
+          </a:bodyPr>
+          <a:lstStyle/>
+          <a:p>
             <a:pPr algn="r">
-              <a:defRPr sz="1000">
+              <a:defRPr sz="900">
                 <a:solidFill>
                   <a:srgbClr val="6E8098"/>
                 </a:solidFill>
@@ -5540,8 +5964,8 @@
         </p:nvSpPr>
         <p:spPr>
           <a:xfrm>
-            <a:off x="749808" y="5577840"/>
-            <a:ext cx="10789920" cy="731520"/>
+            <a:off x="749808" y="5349240"/>
+            <a:ext cx="10789920" cy="594360"/>
           </a:xfrm>
           <a:prstGeom prst="rect">
             <a:avLst/>
@@ -5577,7 +6001,7 @@
         <p:spPr>
           <a:xfrm>
             <a:off x="502920" y="6428232"/>
-            <a:ext cx="10972800" cy="292608"/>
+            <a:ext cx="8503920" cy="310896"/>
           </a:xfrm>
           <a:prstGeom prst="rect">
             <a:avLst/>
@@ -5590,8 +6014,95 @@
           </a:bodyPr>
           <a:lstStyle/>
           <a:p>
+            <a:pPr algn="l">
+              <a:spcAft>
+                <a:spcPts val="0"/>
+              </a:spcAft>
+            </a:pPr>
+            <a:r>
+              <a:rPr sz="850">
+                <a:solidFill>
+                  <a:srgbClr val="6E8098"/>
+                </a:solidFill>
+                <a:latin typeface="Aptos"/>
+              </a:rPr>
+              <a:t>Sources: </a:t>
+            </a:r>
+            <a:r>
+              <a:rPr sz="850" u="sng">
+                <a:solidFill>
+                  <a:srgbClr val="1A7DBC"/>
+                </a:solidFill>
+                <a:latin typeface="Aptos"/>
+                <a:hlinkClick r:id="rId2"/>
+              </a:rPr>
+              <a:t>EMARKETER</a:t>
+            </a:r>
+            <a:r>
+              <a:rPr sz="850">
+                <a:solidFill>
+                  <a:srgbClr val="8291A5"/>
+                </a:solidFill>
+                <a:latin typeface="Aptos"/>
+              </a:rPr>
+              <a:t> | </a:t>
+            </a:r>
+            <a:r>
+              <a:rPr sz="850" u="sng">
+                <a:solidFill>
+                  <a:srgbClr val="1A7DBC"/>
+                </a:solidFill>
+                <a:latin typeface="Aptos"/>
+                <a:hlinkClick r:id="rId3"/>
+              </a:rPr>
+              <a:t>NIQ</a:t>
+            </a:r>
+            <a:r>
+              <a:rPr sz="850">
+                <a:solidFill>
+                  <a:srgbClr val="8291A5"/>
+                </a:solidFill>
+                <a:latin typeface="Aptos"/>
+              </a:rPr>
+              <a:t> | </a:t>
+            </a:r>
+            <a:r>
+              <a:rPr sz="850" u="sng">
+                <a:solidFill>
+                  <a:srgbClr val="1A7DBC"/>
+                </a:solidFill>
+                <a:latin typeface="Aptos"/>
+                <a:hlinkClick r:id="rId4"/>
+              </a:rPr>
+              <a:t>McKinsey</a:t>
+            </a:r>
+          </a:p>
+        </p:txBody>
+      </p:sp>
+      <p:sp>
+        <p:nvSpPr>
+          <p:cNvPr id="7" name="TextBox 6"/>
+          <p:cNvSpPr txBox="1"/>
+          <p:nvPr/>
+        </p:nvSpPr>
+        <p:spPr>
+          <a:xfrm>
+            <a:off x="9189720" y="6428232"/>
+            <a:ext cx="2514600" cy="292608"/>
+          </a:xfrm>
+          <a:prstGeom prst="rect">
+            <a:avLst/>
+          </a:prstGeom>
+          <a:noFill/>
+        </p:spPr>
+        <p:txBody>
+          <a:bodyPr wrap="none">
+            <a:spAutoFit/>
+          </a:bodyPr>
+          <a:lstStyle/>
+          <a:p>
             <a:pPr algn="r">
-              <a:defRPr sz="1000">
+              <a:defRPr sz="900">
                 <a:solidFill>
                   <a:srgbClr val="6E8098"/>
                 </a:solidFill>
@@ -5845,7 +6356,7 @@
         <p:spPr>
           <a:xfrm>
             <a:off x="502920" y="6428232"/>
-            <a:ext cx="10972800" cy="292608"/>
+            <a:ext cx="8503920" cy="310896"/>
           </a:xfrm>
           <a:prstGeom prst="rect">
             <a:avLst/>
@@ -5858,8 +6369,56 @@
           </a:bodyPr>
           <a:lstStyle/>
           <a:p>
+            <a:pPr algn="l">
+              <a:spcAft>
+                <a:spcPts val="0"/>
+              </a:spcAft>
+            </a:pPr>
+            <a:r>
+              <a:rPr sz="850">
+                <a:solidFill>
+                  <a:srgbClr val="6E8098"/>
+                </a:solidFill>
+                <a:latin typeface="Aptos"/>
+              </a:rPr>
+              <a:t>Sources: </a:t>
+            </a:r>
+            <a:r>
+              <a:rPr sz="850">
+                <a:solidFill>
+                  <a:srgbClr val="6E8098"/>
+                </a:solidFill>
+                <a:latin typeface="Aptos"/>
+              </a:rPr>
+              <a:t>MSIS 521 assignment/rubric (internal PDFs)</a:t>
+            </a:r>
+          </a:p>
+        </p:txBody>
+      </p:sp>
+      <p:sp>
+        <p:nvSpPr>
+          <p:cNvPr id="6" name="TextBox 5"/>
+          <p:cNvSpPr txBox="1"/>
+          <p:nvPr/>
+        </p:nvSpPr>
+        <p:spPr>
+          <a:xfrm>
+            <a:off x="9189720" y="6428232"/>
+            <a:ext cx="2514600" cy="292608"/>
+          </a:xfrm>
+          <a:prstGeom prst="rect">
+            <a:avLst/>
+          </a:prstGeom>
+          <a:noFill/>
+        </p:spPr>
+        <p:txBody>
+          <a:bodyPr wrap="none">
+            <a:spAutoFit/>
+          </a:bodyPr>
+          <a:lstStyle/>
+          <a:p>
             <a:pPr algn="r">
-              <a:defRPr sz="1000">
+              <a:defRPr sz="900">
                 <a:solidFill>
                   <a:srgbClr val="6E8098"/>
                 </a:solidFill>
@@ -6282,7 +6841,7 @@
         <p:spPr>
           <a:xfrm>
             <a:off x="502920" y="6428232"/>
-            <a:ext cx="10972800" cy="292608"/>
+            <a:ext cx="8503920" cy="310896"/>
           </a:xfrm>
           <a:prstGeom prst="rect">
             <a:avLst/>
@@ -6295,8 +6854,95 @@
           </a:bodyPr>
           <a:lstStyle/>
           <a:p>
+            <a:pPr algn="l">
+              <a:spcAft>
+                <a:spcPts val="0"/>
+              </a:spcAft>
+            </a:pPr>
+            <a:r>
+              <a:rPr sz="850">
+                <a:solidFill>
+                  <a:srgbClr val="6E8098"/>
+                </a:solidFill>
+                <a:latin typeface="Aptos"/>
+              </a:rPr>
+              <a:t>Sources: </a:t>
+            </a:r>
+            <a:r>
+              <a:rPr sz="850" u="sng">
+                <a:solidFill>
+                  <a:srgbClr val="1A7DBC"/>
+                </a:solidFill>
+                <a:latin typeface="Aptos"/>
+                <a:hlinkClick r:id="rId2"/>
+              </a:rPr>
+              <a:t>YouTube Content Manager</a:t>
+            </a:r>
+            <a:r>
+              <a:rPr sz="850">
+                <a:solidFill>
+                  <a:srgbClr val="8291A5"/>
+                </a:solidFill>
+                <a:latin typeface="Aptos"/>
+              </a:rPr>
+              <a:t> | </a:t>
+            </a:r>
+            <a:r>
+              <a:rPr sz="850" u="sng">
+                <a:solidFill>
+                  <a:srgbClr val="1A7DBC"/>
+                </a:solidFill>
+                <a:latin typeface="Aptos"/>
+                <a:hlinkClick r:id="rId3"/>
+              </a:rPr>
+              <a:t>YouTube MCN setup</a:t>
+            </a:r>
+            <a:r>
+              <a:rPr sz="850">
+                <a:solidFill>
+                  <a:srgbClr val="8291A5"/>
+                </a:solidFill>
+                <a:latin typeface="Aptos"/>
+              </a:rPr>
+              <a:t> | </a:t>
+            </a:r>
+            <a:r>
+              <a:rPr sz="850" u="sng">
+                <a:solidFill>
+                  <a:srgbClr val="1A7DBC"/>
+                </a:solidFill>
+                <a:latin typeface="Aptos"/>
+                <a:hlinkClick r:id="rId4"/>
+              </a:rPr>
+              <a:t>IAB Creator Economy</a:t>
+            </a:r>
+          </a:p>
+        </p:txBody>
+      </p:sp>
+      <p:sp>
+        <p:nvSpPr>
+          <p:cNvPr id="11" name="TextBox 10"/>
+          <p:cNvSpPr txBox="1"/>
+          <p:nvPr/>
+        </p:nvSpPr>
+        <p:spPr>
+          <a:xfrm>
+            <a:off x="9189720" y="6428232"/>
+            <a:ext cx="2514600" cy="292608"/>
+          </a:xfrm>
+          <a:prstGeom prst="rect">
+            <a:avLst/>
+          </a:prstGeom>
+          <a:noFill/>
+        </p:spPr>
+        <p:txBody>
+          <a:bodyPr wrap="none">
+            <a:spAutoFit/>
+          </a:bodyPr>
+          <a:lstStyle/>
+          <a:p>
             <a:pPr algn="r">
-              <a:defRPr sz="1000">
+              <a:defRPr sz="900">
                 <a:solidFill>
                   <a:srgbClr val="6E8098"/>
                 </a:solidFill>
@@ -6502,7 +7148,7 @@
         <p:spPr>
           <a:xfrm>
             <a:off x="502920" y="6428232"/>
-            <a:ext cx="10972800" cy="292608"/>
+            <a:ext cx="8503920" cy="310896"/>
           </a:xfrm>
           <a:prstGeom prst="rect">
             <a:avLst/>
@@ -6515,8 +7161,95 @@
           </a:bodyPr>
           <a:lstStyle/>
           <a:p>
+            <a:pPr algn="l">
+              <a:spcAft>
+                <a:spcPts val="0"/>
+              </a:spcAft>
+            </a:pPr>
+            <a:r>
+              <a:rPr sz="850">
+                <a:solidFill>
+                  <a:srgbClr val="6E8098"/>
+                </a:solidFill>
+                <a:latin typeface="Aptos"/>
+              </a:rPr>
+              <a:t>Sources: </a:t>
+            </a:r>
+            <a:r>
+              <a:rPr sz="850" u="sng">
+                <a:solidFill>
+                  <a:srgbClr val="1A7DBC"/>
+                </a:solidFill>
+                <a:latin typeface="Aptos"/>
+                <a:hlinkClick r:id="rId2"/>
+              </a:rPr>
+              <a:t>EMARKETER</a:t>
+            </a:r>
+            <a:r>
+              <a:rPr sz="850">
+                <a:solidFill>
+                  <a:srgbClr val="8291A5"/>
+                </a:solidFill>
+                <a:latin typeface="Aptos"/>
+              </a:rPr>
+              <a:t> | </a:t>
+            </a:r>
+            <a:r>
+              <a:rPr sz="850" u="sng">
+                <a:solidFill>
+                  <a:srgbClr val="1A7DBC"/>
+                </a:solidFill>
+                <a:latin typeface="Aptos"/>
+                <a:hlinkClick r:id="rId3"/>
+              </a:rPr>
+              <a:t>NIQ Beauty 2025</a:t>
+            </a:r>
+            <a:r>
+              <a:rPr sz="850">
+                <a:solidFill>
+                  <a:srgbClr val="8291A5"/>
+                </a:solidFill>
+                <a:latin typeface="Aptos"/>
+              </a:rPr>
+              <a:t> | </a:t>
+            </a:r>
+            <a:r>
+              <a:rPr sz="850" u="sng">
+                <a:solidFill>
+                  <a:srgbClr val="1A7DBC"/>
+                </a:solidFill>
+                <a:latin typeface="Aptos"/>
+                <a:hlinkClick r:id="rId4"/>
+              </a:rPr>
+              <a:t>McKinsey 2025</a:t>
+            </a:r>
+          </a:p>
+        </p:txBody>
+      </p:sp>
+      <p:sp>
+        <p:nvSpPr>
+          <p:cNvPr id="6" name="TextBox 5"/>
+          <p:cNvSpPr txBox="1"/>
+          <p:nvPr/>
+        </p:nvSpPr>
+        <p:spPr>
+          <a:xfrm>
+            <a:off x="9189720" y="6428232"/>
+            <a:ext cx="2514600" cy="292608"/>
+          </a:xfrm>
+          <a:prstGeom prst="rect">
+            <a:avLst/>
+          </a:prstGeom>
+          <a:noFill/>
+        </p:spPr>
+        <p:txBody>
+          <a:bodyPr wrap="none">
+            <a:spAutoFit/>
+          </a:bodyPr>
+          <a:lstStyle/>
+          <a:p>
             <a:pPr algn="r">
-              <a:defRPr sz="1000">
+              <a:defRPr sz="900">
                 <a:solidFill>
                   <a:srgbClr val="6E8098"/>
                 </a:solidFill>
@@ -6987,7 +7720,7 @@
         <p:spPr>
           <a:xfrm>
             <a:off x="502920" y="6428232"/>
-            <a:ext cx="10972800" cy="292608"/>
+            <a:ext cx="8503920" cy="310896"/>
           </a:xfrm>
           <a:prstGeom prst="rect">
             <a:avLst/>
@@ -7000,8 +7733,95 @@
           </a:bodyPr>
           <a:lstStyle/>
           <a:p>
+            <a:pPr algn="l">
+              <a:spcAft>
+                <a:spcPts val="0"/>
+              </a:spcAft>
+            </a:pPr>
+            <a:r>
+              <a:rPr sz="850">
+                <a:solidFill>
+                  <a:srgbClr val="6E8098"/>
+                </a:solidFill>
+                <a:latin typeface="Aptos"/>
+              </a:rPr>
+              <a:t>Sources: </a:t>
+            </a:r>
+            <a:r>
+              <a:rPr sz="850" u="sng">
+                <a:solidFill>
+                  <a:srgbClr val="1A7DBC"/>
+                </a:solidFill>
+                <a:latin typeface="Aptos"/>
+                <a:hlinkClick r:id="rId2"/>
+              </a:rPr>
+              <a:t>Fashionista BOJ</a:t>
+            </a:r>
+            <a:r>
+              <a:rPr sz="850">
+                <a:solidFill>
+                  <a:srgbClr val="8291A5"/>
+                </a:solidFill>
+                <a:latin typeface="Aptos"/>
+              </a:rPr>
+              <a:t> | </a:t>
+            </a:r>
+            <a:r>
+              <a:rPr sz="850" u="sng">
+                <a:solidFill>
+                  <a:srgbClr val="1A7DBC"/>
+                </a:solidFill>
+                <a:latin typeface="Aptos"/>
+                <a:hlinkClick r:id="rId3"/>
+              </a:rPr>
+              <a:t>BOJ Rice Wonderland</a:t>
+            </a:r>
+            <a:r>
+              <a:rPr sz="850">
+                <a:solidFill>
+                  <a:srgbClr val="8291A5"/>
+                </a:solidFill>
+                <a:latin typeface="Aptos"/>
+              </a:rPr>
+              <a:t> | </a:t>
+            </a:r>
+            <a:r>
+              <a:rPr sz="850" u="sng">
+                <a:solidFill>
+                  <a:srgbClr val="1A7DBC"/>
+                </a:solidFill>
+                <a:latin typeface="Aptos"/>
+                <a:hlinkClick r:id="rId4"/>
+              </a:rPr>
+              <a:t>FDA SIA</a:t>
+            </a:r>
+          </a:p>
+        </p:txBody>
+      </p:sp>
+      <p:sp>
+        <p:nvSpPr>
+          <p:cNvPr id="11" name="TextBox 10"/>
+          <p:cNvSpPr txBox="1"/>
+          <p:nvPr/>
+        </p:nvSpPr>
+        <p:spPr>
+          <a:xfrm>
+            <a:off x="9189720" y="6428232"/>
+            <a:ext cx="2514600" cy="292608"/>
+          </a:xfrm>
+          <a:prstGeom prst="rect">
+            <a:avLst/>
+          </a:prstGeom>
+          <a:noFill/>
+        </p:spPr>
+        <p:txBody>
+          <a:bodyPr wrap="none">
+            <a:spAutoFit/>
+          </a:bodyPr>
+          <a:lstStyle/>
+          <a:p>
             <a:pPr algn="r">
-              <a:defRPr sz="1000">
+              <a:defRPr sz="900">
                 <a:solidFill>
                   <a:srgbClr val="6E8098"/>
                 </a:solidFill>
@@ -7456,7 +8276,7 @@
         <p:spPr>
           <a:xfrm>
             <a:off x="502920" y="6428232"/>
-            <a:ext cx="10972800" cy="292608"/>
+            <a:ext cx="8503920" cy="310896"/>
           </a:xfrm>
           <a:prstGeom prst="rect">
             <a:avLst/>
@@ -7469,8 +8289,75 @@
           </a:bodyPr>
           <a:lstStyle/>
           <a:p>
+            <a:pPr algn="l">
+              <a:spcAft>
+                <a:spcPts val="0"/>
+              </a:spcAft>
+            </a:pPr>
+            <a:r>
+              <a:rPr sz="850">
+                <a:solidFill>
+                  <a:srgbClr val="6E8098"/>
+                </a:solidFill>
+                <a:latin typeface="Aptos"/>
+              </a:rPr>
+              <a:t>Sources: </a:t>
+            </a:r>
+            <a:r>
+              <a:rPr sz="850" u="sng">
+                <a:solidFill>
+                  <a:srgbClr val="1A7DBC"/>
+                </a:solidFill>
+                <a:latin typeface="Aptos"/>
+                <a:hlinkClick r:id="rId2"/>
+              </a:rPr>
+              <a:t>YouTube Data API</a:t>
+            </a:r>
+            <a:r>
+              <a:rPr sz="850">
+                <a:solidFill>
+                  <a:srgbClr val="8291A5"/>
+                </a:solidFill>
+                <a:latin typeface="Aptos"/>
+              </a:rPr>
+              <a:t> | </a:t>
+            </a:r>
+            <a:r>
+              <a:rPr sz="850">
+                <a:solidFill>
+                  <a:srgbClr val="6E8098"/>
+                </a:solidFill>
+                <a:latin typeface="Aptos"/>
+              </a:rPr>
+              <a:t>Project data files (internal)</a:t>
+            </a:r>
+          </a:p>
+        </p:txBody>
+      </p:sp>
+      <p:sp>
+        <p:nvSpPr>
+          <p:cNvPr id="11" name="TextBox 10"/>
+          <p:cNvSpPr txBox="1"/>
+          <p:nvPr/>
+        </p:nvSpPr>
+        <p:spPr>
+          <a:xfrm>
+            <a:off x="9189720" y="6428232"/>
+            <a:ext cx="2514600" cy="292608"/>
+          </a:xfrm>
+          <a:prstGeom prst="rect">
+            <a:avLst/>
+          </a:prstGeom>
+          <a:noFill/>
+        </p:spPr>
+        <p:txBody>
+          <a:bodyPr wrap="none">
+            <a:spAutoFit/>
+          </a:bodyPr>
+          <a:lstStyle/>
+          <a:p>
             <a:pPr algn="r">
-              <a:defRPr sz="1000">
+              <a:defRPr sz="900">
                 <a:solidFill>
                   <a:srgbClr val="6E8098"/>
                 </a:solidFill>
@@ -7781,7 +8668,7 @@
         <p:spPr>
           <a:xfrm>
             <a:off x="502920" y="6428232"/>
-            <a:ext cx="10972800" cy="292608"/>
+            <a:ext cx="8503920" cy="310896"/>
           </a:xfrm>
           <a:prstGeom prst="rect">
             <a:avLst/>
@@ -7794,8 +8681,74 @@
           </a:bodyPr>
           <a:lstStyle/>
           <a:p>
+            <a:pPr algn="l">
+              <a:spcAft>
+                <a:spcPts val="0"/>
+              </a:spcAft>
+            </a:pPr>
+            <a:r>
+              <a:rPr sz="850">
+                <a:solidFill>
+                  <a:srgbClr val="6E8098"/>
+                </a:solidFill>
+                <a:latin typeface="Aptos"/>
+              </a:rPr>
+              <a:t>Sources: </a:t>
+            </a:r>
+            <a:r>
+              <a:rPr sz="850">
+                <a:solidFill>
+                  <a:srgbClr val="6E8098"/>
+                </a:solidFill>
+                <a:latin typeface="Aptos"/>
+              </a:rPr>
+              <a:t>Preprocessing pipeline (internal)</a:t>
+            </a:r>
+            <a:r>
+              <a:rPr sz="850">
+                <a:solidFill>
+                  <a:srgbClr val="8291A5"/>
+                </a:solidFill>
+                <a:latin typeface="Aptos"/>
+              </a:rPr>
+              <a:t> | </a:t>
+            </a:r>
+            <a:r>
+              <a:rPr sz="850">
+                <a:solidFill>
+                  <a:srgbClr val="6E8098"/>
+                </a:solidFill>
+                <a:latin typeface="Aptos"/>
+              </a:rPr>
+              <a:t>EDA plots (internal)</a:t>
+            </a:r>
+          </a:p>
+        </p:txBody>
+      </p:sp>
+      <p:sp>
+        <p:nvSpPr>
+          <p:cNvPr id="9" name="TextBox 8"/>
+          <p:cNvSpPr txBox="1"/>
+          <p:nvPr/>
+        </p:nvSpPr>
+        <p:spPr>
+          <a:xfrm>
+            <a:off x="9189720" y="6428232"/>
+            <a:ext cx="2514600" cy="292608"/>
+          </a:xfrm>
+          <a:prstGeom prst="rect">
+            <a:avLst/>
+          </a:prstGeom>
+          <a:noFill/>
+        </p:spPr>
+        <p:txBody>
+          <a:bodyPr wrap="none">
+            <a:spAutoFit/>
+          </a:bodyPr>
+          <a:lstStyle/>
+          <a:p>
             <a:pPr algn="r">
-              <a:defRPr sz="1000">
+              <a:defRPr sz="900">
                 <a:solidFill>
                   <a:srgbClr val="6E8098"/>
                 </a:solidFill>
@@ -8033,7 +8986,7 @@
         <p:spPr>
           <a:xfrm>
             <a:off x="502920" y="6428232"/>
-            <a:ext cx="10972800" cy="292608"/>
+            <a:ext cx="8503920" cy="310896"/>
           </a:xfrm>
           <a:prstGeom prst="rect">
             <a:avLst/>
@@ -8046,8 +8999,95 @@
           </a:bodyPr>
           <a:lstStyle/>
           <a:p>
+            <a:pPr algn="l">
+              <a:spcAft>
+                <a:spcPts val="0"/>
+              </a:spcAft>
+            </a:pPr>
+            <a:r>
+              <a:rPr sz="850">
+                <a:solidFill>
+                  <a:srgbClr val="6E8098"/>
+                </a:solidFill>
+                <a:latin typeface="Aptos"/>
+              </a:rPr>
+              <a:t>Sources: </a:t>
+            </a:r>
+            <a:r>
+              <a:rPr sz="850" u="sng">
+                <a:solidFill>
+                  <a:srgbClr val="1A7DBC"/>
+                </a:solidFill>
+                <a:latin typeface="Aptos"/>
+                <a:hlinkClick r:id="rId2"/>
+              </a:rPr>
+              <a:t>GroupKFold</a:t>
+            </a:r>
+            <a:r>
+              <a:rPr sz="850">
+                <a:solidFill>
+                  <a:srgbClr val="8291A5"/>
+                </a:solidFill>
+                <a:latin typeface="Aptos"/>
+              </a:rPr>
+              <a:t> | </a:t>
+            </a:r>
+            <a:r>
+              <a:rPr sz="850" u="sng">
+                <a:solidFill>
+                  <a:srgbClr val="1A7DBC"/>
+                </a:solidFill>
+                <a:latin typeface="Aptos"/>
+                <a:hlinkClick r:id="rId3"/>
+              </a:rPr>
+              <a:t>LightGBM</a:t>
+            </a:r>
+            <a:r>
+              <a:rPr sz="850">
+                <a:solidFill>
+                  <a:srgbClr val="8291A5"/>
+                </a:solidFill>
+                <a:latin typeface="Aptos"/>
+              </a:rPr>
+              <a:t> | </a:t>
+            </a:r>
+            <a:r>
+              <a:rPr sz="850" u="sng">
+                <a:solidFill>
+                  <a:srgbClr val="1A7DBC"/>
+                </a:solidFill>
+                <a:latin typeface="Aptos"/>
+                <a:hlinkClick r:id="rId4"/>
+              </a:rPr>
+              <a:t>SHAP</a:t>
+            </a:r>
+          </a:p>
+        </p:txBody>
+      </p:sp>
+      <p:sp>
+        <p:nvSpPr>
+          <p:cNvPr id="6" name="TextBox 5"/>
+          <p:cNvSpPr txBox="1"/>
+          <p:nvPr/>
+        </p:nvSpPr>
+        <p:spPr>
+          <a:xfrm>
+            <a:off x="9189720" y="6428232"/>
+            <a:ext cx="2514600" cy="292608"/>
+          </a:xfrm>
+          <a:prstGeom prst="rect">
+            <a:avLst/>
+          </a:prstGeom>
+          <a:noFill/>
+        </p:spPr>
+        <p:txBody>
+          <a:bodyPr wrap="none">
+            <a:spAutoFit/>
+          </a:bodyPr>
+          <a:lstStyle/>
+          <a:p>
             <a:pPr algn="r">
-              <a:defRPr sz="1000">
+              <a:defRPr sz="900">
                 <a:solidFill>
                   <a:srgbClr val="6E8098"/>
                 </a:solidFill>
@@ -8502,7 +9542,7 @@
         <p:spPr>
           <a:xfrm>
             <a:off x="502920" y="6428232"/>
-            <a:ext cx="10972800" cy="292608"/>
+            <a:ext cx="8503920" cy="310896"/>
           </a:xfrm>
           <a:prstGeom prst="rect">
             <a:avLst/>
@@ -8515,8 +9555,95 @@
           </a:bodyPr>
           <a:lstStyle/>
           <a:p>
+            <a:pPr algn="l">
+              <a:spcAft>
+                <a:spcPts val="0"/>
+              </a:spcAft>
+            </a:pPr>
+            <a:r>
+              <a:rPr sz="850">
+                <a:solidFill>
+                  <a:srgbClr val="6E8098"/>
+                </a:solidFill>
+                <a:latin typeface="Aptos"/>
+              </a:rPr>
+              <a:t>Sources: </a:t>
+            </a:r>
+            <a:r>
+              <a:rPr sz="850" u="sng">
+                <a:solidFill>
+                  <a:srgbClr val="1A7DBC"/>
+                </a:solidFill>
+                <a:latin typeface="Aptos"/>
+                <a:hlinkClick r:id="rId2"/>
+              </a:rPr>
+              <a:t>FTC Influencers</a:t>
+            </a:r>
+            <a:r>
+              <a:rPr sz="850">
+                <a:solidFill>
+                  <a:srgbClr val="8291A5"/>
+                </a:solidFill>
+                <a:latin typeface="Aptos"/>
+              </a:rPr>
+              <a:t> | </a:t>
+            </a:r>
+            <a:r>
+              <a:rPr sz="850" u="sng">
+                <a:solidFill>
+                  <a:srgbClr val="1A7DBC"/>
+                </a:solidFill>
+                <a:latin typeface="Aptos"/>
+                <a:hlinkClick r:id="rId3"/>
+              </a:rPr>
+              <a:t>FTC Endorsement Guides</a:t>
+            </a:r>
+            <a:r>
+              <a:rPr sz="850">
+                <a:solidFill>
+                  <a:srgbClr val="8291A5"/>
+                </a:solidFill>
+                <a:latin typeface="Aptos"/>
+              </a:rPr>
+              <a:t> | </a:t>
+            </a:r>
+            <a:r>
+              <a:rPr sz="850" u="sng">
+                <a:solidFill>
+                  <a:srgbClr val="1A7DBC"/>
+                </a:solidFill>
+                <a:latin typeface="Aptos"/>
+                <a:hlinkClick r:id="rId4"/>
+              </a:rPr>
+              <a:t>YouTube MCN reference</a:t>
+            </a:r>
+          </a:p>
+        </p:txBody>
+      </p:sp>
+      <p:sp>
+        <p:nvSpPr>
+          <p:cNvPr id="11" name="TextBox 10"/>
+          <p:cNvSpPr txBox="1"/>
+          <p:nvPr/>
+        </p:nvSpPr>
+        <p:spPr>
+          <a:xfrm>
+            <a:off x="9189720" y="6428232"/>
+            <a:ext cx="2514600" cy="292608"/>
+          </a:xfrm>
+          <a:prstGeom prst="rect">
+            <a:avLst/>
+          </a:prstGeom>
+          <a:noFill/>
+        </p:spPr>
+        <p:txBody>
+          <a:bodyPr wrap="none">
+            <a:spAutoFit/>
+          </a:bodyPr>
+          <a:lstStyle/>
+          <a:p>
             <a:pPr algn="r">
-              <a:defRPr sz="1000">
+              <a:defRPr sz="900">
                 <a:solidFill>
                   <a:srgbClr val="6E8098"/>
                 </a:solidFill>

--- a/slides/AI_MCN_Final_Presentation_EN.pptx
+++ b/slides/AI_MCN_Final_Presentation_EN.pptx
@@ -20,6 +20,16 @@
     <p:sldId id="268" r:id="rId19"/>
     <p:sldId id="269" r:id="rId20"/>
     <p:sldId id="270" r:id="rId21"/>
+    <p:sldId id="271" r:id="rId22"/>
+    <p:sldId id="272" r:id="rId23"/>
+    <p:sldId id="273" r:id="rId24"/>
+    <p:sldId id="274" r:id="rId25"/>
+    <p:sldId id="275" r:id="rId26"/>
+    <p:sldId id="276" r:id="rId27"/>
+    <p:sldId id="277" r:id="rId28"/>
+    <p:sldId id="278" r:id="rId29"/>
+    <p:sldId id="279" r:id="rId30"/>
+    <p:sldId id="280" r:id="rId31"/>
   </p:sldIdLst>
   <p:sldSz cx="12191695" cy="6858000" type="screen4x3"/>
   <p:notesSz cx="6858000" cy="9144000"/>
@@ -6123,6 +6133,2299 @@
 </p:sld>
 </file>
 
+<file path=ppt/slides/slide16.xml><?xml version="1.0" encoding="utf-8"?>
+<p:sld xmlns:a="http://schemas.openxmlformats.org/drawingml/2006/main" xmlns:p="http://schemas.openxmlformats.org/presentationml/2006/main" xmlns:r="http://schemas.openxmlformats.org/officeDocument/2006/relationships">
+  <p:cSld>
+    <p:spTree>
+      <p:nvGrpSpPr>
+        <p:cNvPr id="1" name=""/>
+        <p:cNvGrpSpPr/>
+        <p:nvPr/>
+      </p:nvGrpSpPr>
+      <p:grpSpPr/>
+      <p:sp>
+        <p:nvSpPr>
+          <p:cNvPr id="2" name="TextBox 1"/>
+          <p:cNvSpPr txBox="1"/>
+          <p:nvPr/>
+        </p:nvSpPr>
+        <p:spPr>
+          <a:xfrm>
+            <a:off x="594360" y="320040"/>
+            <a:ext cx="11064240" cy="914400"/>
+          </a:xfrm>
+          <a:prstGeom prst="rect">
+            <a:avLst/>
+          </a:prstGeom>
+          <a:noFill/>
+        </p:spPr>
+        <p:txBody>
+          <a:bodyPr wrap="none">
+            <a:spAutoFit/>
+          </a:bodyPr>
+          <a:lstStyle/>
+          <a:p>
+            <a:pPr>
+              <a:defRPr sz="3200" b="1">
+                <a:solidFill>
+                  <a:srgbClr val="0F2C59"/>
+                </a:solidFill>
+                <a:latin typeface="Aptos Display"/>
+              </a:defRPr>
+            </a:pPr>
+            <a:r>
+              <a:t>Backup: Model Performance Snapshot</a:t>
+            </a:r>
+          </a:p>
+        </p:txBody>
+      </p:sp>
+      <p:sp>
+        <p:nvSpPr>
+          <p:cNvPr id="3" name="Rectangle 2"/>
+          <p:cNvSpPr/>
+          <p:nvPr/>
+        </p:nvSpPr>
+        <p:spPr>
+          <a:xfrm>
+            <a:off x="566928" y="1755648"/>
+            <a:ext cx="2651760" cy="73152"/>
+          </a:xfrm>
+          <a:prstGeom prst="rect">
+            <a:avLst/>
+          </a:prstGeom>
+          <a:solidFill>
+            <a:srgbClr val="1A7DBC"/>
+          </a:solidFill>
+          <a:ln>
+            <a:noFill/>
+          </a:ln>
+        </p:spPr>
+        <p:style>
+          <a:lnRef idx="1">
+            <a:schemeClr val="accent1"/>
+          </a:lnRef>
+          <a:fillRef idx="3">
+            <a:schemeClr val="accent1"/>
+          </a:fillRef>
+          <a:effectRef idx="2">
+            <a:schemeClr val="accent1"/>
+          </a:effectRef>
+          <a:fontRef idx="minor">
+            <a:schemeClr val="lt1"/>
+          </a:fontRef>
+        </p:style>
+        <p:txBody>
+          <a:bodyPr rtlCol="0" anchor="ctr"/>
+          <a:lstStyle/>
+          <a:p>
+            <a:pPr algn="ctr"/>
+          </a:p>
+        </p:txBody>
+      </p:sp>
+      <p:pic>
+        <p:nvPicPr>
+          <p:cNvPr id="4" name="Picture 3" descr="model_benchmark_rmse.png"/>
+          <p:cNvPicPr>
+            <a:picLocks noChangeAspect="1"/>
+          </p:cNvPicPr>
+          <p:nvPr/>
+        </p:nvPicPr>
+        <p:blipFill>
+          <a:blip r:embed="rId2"/>
+          <a:stretch>
+            <a:fillRect/>
+          </a:stretch>
+        </p:blipFill>
+        <p:spPr>
+          <a:xfrm>
+            <a:off x="713232" y="1828800"/>
+            <a:ext cx="8412480" cy="4389120"/>
+          </a:xfrm>
+          <a:prstGeom prst="rect">
+            <a:avLst/>
+          </a:prstGeom>
+        </p:spPr>
+      </p:pic>
+      <p:sp>
+        <p:nvSpPr>
+          <p:cNvPr id="5" name="Rounded Rectangle 4"/>
+          <p:cNvSpPr/>
+          <p:nvPr/>
+        </p:nvSpPr>
+        <p:spPr>
+          <a:xfrm>
+            <a:off x="7269480" y="1828800"/>
+            <a:ext cx="4114800" cy="4389120"/>
+          </a:xfrm>
+          <a:prstGeom prst="roundRect">
+            <a:avLst/>
+          </a:prstGeom>
+          <a:solidFill>
+            <a:srgbClr val="F2F7FC"/>
+          </a:solidFill>
+          <a:ln w="15875">
+            <a:solidFill>
+              <a:srgbClr val="CDDCEE"/>
+            </a:solidFill>
+          </a:ln>
+        </p:spPr>
+        <p:style>
+          <a:lnRef idx="1">
+            <a:schemeClr val="accent1"/>
+          </a:lnRef>
+          <a:fillRef idx="3">
+            <a:schemeClr val="accent1"/>
+          </a:fillRef>
+          <a:effectRef idx="2">
+            <a:schemeClr val="accent1"/>
+          </a:effectRef>
+          <a:fontRef idx="minor">
+            <a:schemeClr val="lt1"/>
+          </a:fontRef>
+        </p:style>
+        <p:txBody>
+          <a:bodyPr rtlCol="0" anchor="ctr"/>
+          <a:lstStyle/>
+          <a:p>
+            <a:pPr algn="ctr"/>
+          </a:p>
+        </p:txBody>
+      </p:sp>
+      <p:sp>
+        <p:nvSpPr>
+          <p:cNvPr id="6" name="TextBox 5"/>
+          <p:cNvSpPr txBox="1"/>
+          <p:nvPr/>
+        </p:nvSpPr>
+        <p:spPr>
+          <a:xfrm>
+            <a:off x="7452360" y="1938528"/>
+            <a:ext cx="3840480" cy="347472"/>
+          </a:xfrm>
+          <a:prstGeom prst="rect">
+            <a:avLst/>
+          </a:prstGeom>
+          <a:noFill/>
+        </p:spPr>
+        <p:txBody>
+          <a:bodyPr wrap="none">
+            <a:spAutoFit/>
+          </a:bodyPr>
+          <a:lstStyle/>
+          <a:p>
+            <a:pPr>
+              <a:defRPr b="1" sz="1800">
+                <a:solidFill>
+                  <a:srgbClr val="133A66"/>
+                </a:solidFill>
+                <a:latin typeface="Aptos"/>
+              </a:defRPr>
+            </a:pPr>
+            <a:r>
+              <a:t>BOJ Full-Run Metrics</a:t>
+            </a:r>
+          </a:p>
+        </p:txBody>
+      </p:sp>
+      <p:sp>
+        <p:nvSpPr>
+          <p:cNvPr id="7" name="TextBox 6"/>
+          <p:cNvSpPr txBox="1"/>
+          <p:nvPr/>
+        </p:nvSpPr>
+        <p:spPr>
+          <a:xfrm>
+            <a:off x="7434072" y="2267712"/>
+            <a:ext cx="3858768" cy="3858768"/>
+          </a:xfrm>
+          <a:prstGeom prst="rect">
+            <a:avLst/>
+          </a:prstGeom>
+          <a:noFill/>
+        </p:spPr>
+        <p:txBody>
+          <a:bodyPr wrap="square">
+            <a:spAutoFit/>
+          </a:bodyPr>
+          <a:lstStyle/>
+          <a:p>
+            <a:pPr>
+              <a:spcAft>
+                <a:spcPts val="800"/>
+              </a:spcAft>
+              <a:defRPr sz="1300">
+                <a:solidFill>
+                  <a:srgbClr val="1C2D46"/>
+                </a:solidFill>
+                <a:latin typeface="Aptos"/>
+              </a:defRPr>
+            </a:pPr>
+            <a:r>
+              <a:t>Best model: LightGBM</a:t>
+            </a:r>
+          </a:p>
+          <a:p>
+            <a:pPr>
+              <a:spcAft>
+                <a:spcPts val="800"/>
+              </a:spcAft>
+              <a:defRPr sz="1300">
+                <a:solidFill>
+                  <a:srgbClr val="1C2D46"/>
+                </a:solidFill>
+                <a:latin typeface="Aptos"/>
+              </a:defRPr>
+            </a:pPr>
+            <a:r>
+              <a:t>Best RMSE: 0.00996</a:t>
+            </a:r>
+          </a:p>
+          <a:p>
+            <a:pPr>
+              <a:spcAft>
+                <a:spcPts val="800"/>
+              </a:spcAft>
+              <a:defRPr sz="1300">
+                <a:solidFill>
+                  <a:srgbClr val="1C2D46"/>
+                </a:solidFill>
+                <a:latin typeface="Aptos"/>
+              </a:defRPr>
+            </a:pPr>
+            <a:r>
+              <a:t>Baseline RMSE: 0.03800</a:t>
+            </a:r>
+          </a:p>
+          <a:p>
+            <a:pPr>
+              <a:spcAft>
+                <a:spcPts val="800"/>
+              </a:spcAft>
+              <a:defRPr sz="1300">
+                <a:solidFill>
+                  <a:srgbClr val="1C2D46"/>
+                </a:solidFill>
+                <a:latin typeface="Aptos"/>
+              </a:defRPr>
+            </a:pPr>
+            <a:r>
+              <a:t>Relative RMSE reduction: 73.8%</a:t>
+            </a:r>
+          </a:p>
+          <a:p>
+            <a:pPr>
+              <a:spcAft>
+                <a:spcPts val="800"/>
+              </a:spcAft>
+              <a:defRPr sz="1300">
+                <a:solidFill>
+                  <a:srgbClr val="1C2D46"/>
+                </a:solidFill>
+                <a:latin typeface="Aptos"/>
+              </a:defRPr>
+            </a:pPr>
+            <a:r>
+              <a:t>Best model selected by 5-fold GroupKFold RMSE.</a:t>
+            </a:r>
+          </a:p>
+          <a:p>
+            <a:pPr>
+              <a:spcAft>
+                <a:spcPts val="800"/>
+              </a:spcAft>
+              <a:defRPr sz="1300">
+                <a:solidFill>
+                  <a:srgbClr val="1C2D46"/>
+                </a:solidFill>
+                <a:latin typeface="Aptos"/>
+              </a:defRPr>
+            </a:pPr>
+            <a:r>
+              <a:t>BaselineMedian retained as reference in output table.</a:t>
+            </a:r>
+          </a:p>
+        </p:txBody>
+      </p:sp>
+      <p:sp>
+        <p:nvSpPr>
+          <p:cNvPr id="8" name="TextBox 7"/>
+          <p:cNvSpPr txBox="1"/>
+          <p:nvPr/>
+        </p:nvSpPr>
+        <p:spPr>
+          <a:xfrm>
+            <a:off x="502920" y="6428232"/>
+            <a:ext cx="8503920" cy="310896"/>
+          </a:xfrm>
+          <a:prstGeom prst="rect">
+            <a:avLst/>
+          </a:prstGeom>
+          <a:noFill/>
+        </p:spPr>
+        <p:txBody>
+          <a:bodyPr wrap="none">
+            <a:spAutoFit/>
+          </a:bodyPr>
+          <a:lstStyle/>
+          <a:p>
+            <a:pPr algn="l">
+              <a:spcAft>
+                <a:spcPts val="0"/>
+              </a:spcAft>
+            </a:pPr>
+            <a:r>
+              <a:rPr sz="850">
+                <a:solidFill>
+                  <a:srgbClr val="6E8098"/>
+                </a:solidFill>
+                <a:latin typeface="Aptos"/>
+              </a:rPr>
+              <a:t>Sources: </a:t>
+            </a:r>
+            <a:r>
+              <a:rPr sz="850">
+                <a:solidFill>
+                  <a:srgbClr val="6E8098"/>
+                </a:solidFill>
+                <a:latin typeface="Aptos"/>
+              </a:rPr>
+              <a:t>ml_cv_results.csv (internal)</a:t>
+            </a:r>
+            <a:r>
+              <a:rPr sz="850">
+                <a:solidFill>
+                  <a:srgbClr val="8291A5"/>
+                </a:solidFill>
+                <a:latin typeface="Aptos"/>
+              </a:rPr>
+              <a:t> | </a:t>
+            </a:r>
+            <a:r>
+              <a:rPr sz="850">
+                <a:solidFill>
+                  <a:srgbClr val="6E8098"/>
+                </a:solidFill>
+                <a:latin typeface="Aptos"/>
+              </a:rPr>
+              <a:t>presentation_summary_boj.json (internal)</a:t>
+            </a:r>
+            <a:r>
+              <a:rPr sz="850">
+                <a:solidFill>
+                  <a:srgbClr val="8291A5"/>
+                </a:solidFill>
+                <a:latin typeface="Aptos"/>
+              </a:rPr>
+              <a:t> | </a:t>
+            </a:r>
+            <a:r>
+              <a:rPr sz="850" u="sng">
+                <a:solidFill>
+                  <a:srgbClr val="1A7DBC"/>
+                </a:solidFill>
+                <a:latin typeface="Aptos"/>
+                <a:hlinkClick r:id="rId3"/>
+              </a:rPr>
+              <a:t>GroupKFold docs</a:t>
+            </a:r>
+          </a:p>
+        </p:txBody>
+      </p:sp>
+      <p:sp>
+        <p:nvSpPr>
+          <p:cNvPr id="9" name="TextBox 8"/>
+          <p:cNvSpPr txBox="1"/>
+          <p:nvPr/>
+        </p:nvSpPr>
+        <p:spPr>
+          <a:xfrm>
+            <a:off x="9189720" y="6428232"/>
+            <a:ext cx="2514600" cy="292608"/>
+          </a:xfrm>
+          <a:prstGeom prst="rect">
+            <a:avLst/>
+          </a:prstGeom>
+          <a:noFill/>
+        </p:spPr>
+        <p:txBody>
+          <a:bodyPr wrap="none">
+            <a:spAutoFit/>
+          </a:bodyPr>
+          <a:lstStyle/>
+          <a:p>
+            <a:pPr algn="r">
+              <a:defRPr sz="900">
+                <a:solidFill>
+                  <a:srgbClr val="6E8098"/>
+                </a:solidFill>
+                <a:latin typeface="Aptos"/>
+              </a:defRPr>
+            </a:pPr>
+            <a:r>
+              <a:t>Backup 16 | Model Results Detail</a:t>
+            </a:r>
+          </a:p>
+        </p:txBody>
+      </p:sp>
+    </p:spTree>
+  </p:cSld>
+  <p:clrMapOvr>
+    <a:masterClrMapping/>
+  </p:clrMapOvr>
+</p:sld>
+</file>
+
+<file path=ppt/slides/slide17.xml><?xml version="1.0" encoding="utf-8"?>
+<p:sld xmlns:a="http://schemas.openxmlformats.org/drawingml/2006/main" xmlns:p="http://schemas.openxmlformats.org/presentationml/2006/main" xmlns:r="http://schemas.openxmlformats.org/officeDocument/2006/relationships">
+  <p:cSld>
+    <p:spTree>
+      <p:nvGrpSpPr>
+        <p:cNvPr id="1" name=""/>
+        <p:cNvGrpSpPr/>
+        <p:nvPr/>
+      </p:nvGrpSpPr>
+      <p:grpSpPr/>
+      <p:sp>
+        <p:nvSpPr>
+          <p:cNvPr id="2" name="TextBox 1"/>
+          <p:cNvSpPr txBox="1"/>
+          <p:nvPr/>
+        </p:nvSpPr>
+        <p:spPr>
+          <a:xfrm>
+            <a:off x="594360" y="320040"/>
+            <a:ext cx="11064240" cy="914400"/>
+          </a:xfrm>
+          <a:prstGeom prst="rect">
+            <a:avLst/>
+          </a:prstGeom>
+          <a:noFill/>
+        </p:spPr>
+        <p:txBody>
+          <a:bodyPr wrap="none">
+            <a:spAutoFit/>
+          </a:bodyPr>
+          <a:lstStyle/>
+          <a:p>
+            <a:pPr>
+              <a:defRPr sz="3200" b="1">
+                <a:solidFill>
+                  <a:srgbClr val="0F2C59"/>
+                </a:solidFill>
+                <a:latin typeface="Aptos Display"/>
+              </a:defRPr>
+            </a:pPr>
+            <a:r>
+              <a:t>Backup: Top-Match Recommendation Anatomy</a:t>
+            </a:r>
+          </a:p>
+        </p:txBody>
+      </p:sp>
+      <p:sp>
+        <p:nvSpPr>
+          <p:cNvPr id="3" name="Rectangle 2"/>
+          <p:cNvSpPr/>
+          <p:nvPr/>
+        </p:nvSpPr>
+        <p:spPr>
+          <a:xfrm>
+            <a:off x="566928" y="1755648"/>
+            <a:ext cx="2651760" cy="73152"/>
+          </a:xfrm>
+          <a:prstGeom prst="rect">
+            <a:avLst/>
+          </a:prstGeom>
+          <a:solidFill>
+            <a:srgbClr val="1A7DBC"/>
+          </a:solidFill>
+          <a:ln>
+            <a:noFill/>
+          </a:ln>
+        </p:spPr>
+        <p:style>
+          <a:lnRef idx="1">
+            <a:schemeClr val="accent1"/>
+          </a:lnRef>
+          <a:fillRef idx="3">
+            <a:schemeClr val="accent1"/>
+          </a:fillRef>
+          <a:effectRef idx="2">
+            <a:schemeClr val="accent1"/>
+          </a:effectRef>
+          <a:fontRef idx="minor">
+            <a:schemeClr val="lt1"/>
+          </a:fontRef>
+        </p:style>
+        <p:txBody>
+          <a:bodyPr rtlCol="0" anchor="ctr"/>
+          <a:lstStyle/>
+          <a:p>
+            <a:pPr algn="ctr"/>
+          </a:p>
+        </p:txBody>
+      </p:sp>
+      <p:sp>
+        <p:nvSpPr>
+          <p:cNvPr id="4" name="Rounded Rectangle 3"/>
+          <p:cNvSpPr/>
+          <p:nvPr/>
+        </p:nvSpPr>
+        <p:spPr>
+          <a:xfrm>
+            <a:off x="621792" y="1828800"/>
+            <a:ext cx="5440680" cy="4480560"/>
+          </a:xfrm>
+          <a:prstGeom prst="roundRect">
+            <a:avLst/>
+          </a:prstGeom>
+          <a:solidFill>
+            <a:srgbClr val="F2F7FC"/>
+          </a:solidFill>
+          <a:ln w="15875">
+            <a:solidFill>
+              <a:srgbClr val="CDDCEE"/>
+            </a:solidFill>
+          </a:ln>
+        </p:spPr>
+        <p:style>
+          <a:lnRef idx="1">
+            <a:schemeClr val="accent1"/>
+          </a:lnRef>
+          <a:fillRef idx="3">
+            <a:schemeClr val="accent1"/>
+          </a:fillRef>
+          <a:effectRef idx="2">
+            <a:schemeClr val="accent1"/>
+          </a:effectRef>
+          <a:fontRef idx="minor">
+            <a:schemeClr val="lt1"/>
+          </a:fontRef>
+        </p:style>
+        <p:txBody>
+          <a:bodyPr rtlCol="0" anchor="ctr"/>
+          <a:lstStyle/>
+          <a:p>
+            <a:pPr algn="ctr"/>
+          </a:p>
+        </p:txBody>
+      </p:sp>
+      <p:sp>
+        <p:nvSpPr>
+          <p:cNvPr id="5" name="TextBox 4"/>
+          <p:cNvSpPr txBox="1"/>
+          <p:nvPr/>
+        </p:nvSpPr>
+        <p:spPr>
+          <a:xfrm>
+            <a:off x="804672" y="1938528"/>
+            <a:ext cx="5166360" cy="347472"/>
+          </a:xfrm>
+          <a:prstGeom prst="rect">
+            <a:avLst/>
+          </a:prstGeom>
+          <a:noFill/>
+        </p:spPr>
+        <p:txBody>
+          <a:bodyPr wrap="none">
+            <a:spAutoFit/>
+          </a:bodyPr>
+          <a:lstStyle/>
+          <a:p>
+            <a:pPr>
+              <a:defRPr b="1" sz="1700">
+                <a:solidFill>
+                  <a:srgbClr val="133A66"/>
+                </a:solidFill>
+                <a:latin typeface="Aptos"/>
+              </a:defRPr>
+            </a:pPr>
+            <a:r>
+              <a:t>What Each Recommendation Card Includes</a:t>
+            </a:r>
+          </a:p>
+        </p:txBody>
+      </p:sp>
+      <p:sp>
+        <p:nvSpPr>
+          <p:cNvPr id="6" name="TextBox 5"/>
+          <p:cNvSpPr txBox="1"/>
+          <p:nvPr/>
+        </p:nvSpPr>
+        <p:spPr>
+          <a:xfrm>
+            <a:off x="786384" y="2267712"/>
+            <a:ext cx="5184648" cy="3950208"/>
+          </a:xfrm>
+          <a:prstGeom prst="rect">
+            <a:avLst/>
+          </a:prstGeom>
+          <a:noFill/>
+        </p:spPr>
+        <p:txBody>
+          <a:bodyPr wrap="square">
+            <a:spAutoFit/>
+          </a:bodyPr>
+          <a:lstStyle/>
+          <a:p>
+            <a:pPr>
+              <a:spcAft>
+                <a:spcPts val="800"/>
+              </a:spcAft>
+              <a:defRPr sz="1300">
+                <a:solidFill>
+                  <a:srgbClr val="1C2D46"/>
+                </a:solidFill>
+                <a:latin typeface="Aptos"/>
+              </a:defRPr>
+            </a:pPr>
+            <a:r>
+              <a:t>Final Match Score (current ranking score in the tab)</a:t>
+            </a:r>
+          </a:p>
+          <a:p>
+            <a:pPr>
+              <a:spcAft>
+                <a:spcPts val="800"/>
+              </a:spcAft>
+              <a:defRPr sz="1300">
+                <a:solidFill>
+                  <a:srgbClr val="1C2D46"/>
+                </a:solidFill>
+                <a:latin typeface="Aptos"/>
+              </a:defRPr>
+            </a:pPr>
+            <a:r>
+              <a:t>Signal breakdown: SNA, TF-IDF, Semantic, Tone, Engagement, ML</a:t>
+            </a:r>
+          </a:p>
+          <a:p>
+            <a:pPr>
+              <a:spcAft>
+                <a:spcPts val="800"/>
+              </a:spcAft>
+              <a:defRPr sz="1300">
+                <a:solidFill>
+                  <a:srgbClr val="1C2D46"/>
+                </a:solidFill>
+                <a:latin typeface="Aptos"/>
+              </a:defRPr>
+            </a:pPr>
+            <a:r>
+              <a:t>Score controls: Base score, reliability multiplier, community id</a:t>
+            </a:r>
+          </a:p>
+          <a:p>
+            <a:pPr>
+              <a:spcAft>
+                <a:spcPts val="800"/>
+              </a:spcAft>
+              <a:defRPr sz="1300">
+                <a:solidFill>
+                  <a:srgbClr val="1C2D46"/>
+                </a:solidFill>
+                <a:latin typeface="Aptos"/>
+              </a:defRPr>
+            </a:pPr>
+            <a:r>
+              <a:t>Evidence label (High/Medium/Low) and fit label (Very Strong to Exploratory)</a:t>
+            </a:r>
+          </a:p>
+          <a:p>
+            <a:pPr>
+              <a:spcAft>
+                <a:spcPts val="800"/>
+              </a:spcAft>
+              <a:defRPr sz="1300">
+                <a:solidFill>
+                  <a:srgbClr val="1C2D46"/>
+                </a:solidFill>
+                <a:latin typeface="Aptos"/>
+              </a:defRPr>
+            </a:pPr>
+            <a:r>
+              <a:t>Channel snapshot, keyword summary, best/recent videos, recent comments</a:t>
+            </a:r>
+          </a:p>
+          <a:p>
+            <a:pPr>
+              <a:spcAft>
+                <a:spcPts val="800"/>
+              </a:spcAft>
+              <a:defRPr sz="1300">
+                <a:solidFill>
+                  <a:srgbClr val="1C2D46"/>
+                </a:solidFill>
+                <a:latin typeface="Aptos"/>
+              </a:defRPr>
+            </a:pPr>
+            <a:r>
+              <a:t>Red flags and rationale text for reviewer transparency</a:t>
+            </a:r>
+          </a:p>
+        </p:txBody>
+      </p:sp>
+      <p:sp>
+        <p:nvSpPr>
+          <p:cNvPr id="7" name="Rounded Rectangle 6"/>
+          <p:cNvSpPr/>
+          <p:nvPr/>
+        </p:nvSpPr>
+        <p:spPr>
+          <a:xfrm>
+            <a:off x="6144768" y="1828800"/>
+            <a:ext cx="5440680" cy="4480560"/>
+          </a:xfrm>
+          <a:prstGeom prst="roundRect">
+            <a:avLst/>
+          </a:prstGeom>
+          <a:solidFill>
+            <a:srgbClr val="F2F7FC"/>
+          </a:solidFill>
+          <a:ln w="15875">
+            <a:solidFill>
+              <a:srgbClr val="CDDCEE"/>
+            </a:solidFill>
+          </a:ln>
+        </p:spPr>
+        <p:style>
+          <a:lnRef idx="1">
+            <a:schemeClr val="accent1"/>
+          </a:lnRef>
+          <a:fillRef idx="3">
+            <a:schemeClr val="accent1"/>
+          </a:fillRef>
+          <a:effectRef idx="2">
+            <a:schemeClr val="accent1"/>
+          </a:effectRef>
+          <a:fontRef idx="minor">
+            <a:schemeClr val="lt1"/>
+          </a:fontRef>
+        </p:style>
+        <p:txBody>
+          <a:bodyPr rtlCol="0" anchor="ctr"/>
+          <a:lstStyle/>
+          <a:p>
+            <a:pPr algn="ctr"/>
+          </a:p>
+        </p:txBody>
+      </p:sp>
+      <p:sp>
+        <p:nvSpPr>
+          <p:cNvPr id="8" name="TextBox 7"/>
+          <p:cNvSpPr txBox="1"/>
+          <p:nvPr/>
+        </p:nvSpPr>
+        <p:spPr>
+          <a:xfrm>
+            <a:off x="6327648" y="1938528"/>
+            <a:ext cx="5166360" cy="347472"/>
+          </a:xfrm>
+          <a:prstGeom prst="rect">
+            <a:avLst/>
+          </a:prstGeom>
+          <a:noFill/>
+        </p:spPr>
+        <p:txBody>
+          <a:bodyPr wrap="none">
+            <a:spAutoFit/>
+          </a:bodyPr>
+          <a:lstStyle/>
+          <a:p>
+            <a:pPr>
+              <a:defRPr b="1" sz="1700">
+                <a:solidFill>
+                  <a:srgbClr val="133A66"/>
+                </a:solidFill>
+                <a:latin typeface="Aptos"/>
+              </a:defRPr>
+            </a:pPr>
+            <a:r>
+              <a:t>How to Read It for Decision-Making</a:t>
+            </a:r>
+          </a:p>
+        </p:txBody>
+      </p:sp>
+      <p:sp>
+        <p:nvSpPr>
+          <p:cNvPr id="9" name="TextBox 8"/>
+          <p:cNvSpPr txBox="1"/>
+          <p:nvPr/>
+        </p:nvSpPr>
+        <p:spPr>
+          <a:xfrm>
+            <a:off x="6309359" y="2267712"/>
+            <a:ext cx="5184648" cy="3950208"/>
+          </a:xfrm>
+          <a:prstGeom prst="rect">
+            <a:avLst/>
+          </a:prstGeom>
+          <a:noFill/>
+        </p:spPr>
+        <p:txBody>
+          <a:bodyPr wrap="square">
+            <a:spAutoFit/>
+          </a:bodyPr>
+          <a:lstStyle/>
+          <a:p>
+            <a:pPr>
+              <a:spcAft>
+                <a:spcPts val="800"/>
+              </a:spcAft>
+              <a:defRPr sz="1300">
+                <a:solidFill>
+                  <a:srgbClr val="1C2D46"/>
+                </a:solidFill>
+                <a:latin typeface="Aptos"/>
+              </a:defRPr>
+            </a:pPr>
+            <a:r>
+              <a:t>Start with Final Match Score and Evidence together.</a:t>
+            </a:r>
+          </a:p>
+          <a:p>
+            <a:pPr>
+              <a:spcAft>
+                <a:spcPts val="800"/>
+              </a:spcAft>
+              <a:defRPr sz="1300">
+                <a:solidFill>
+                  <a:srgbClr val="1C2D46"/>
+                </a:solidFill>
+                <a:latin typeface="Aptos"/>
+              </a:defRPr>
+            </a:pPr>
+            <a:r>
+              <a:t>Check reliability multiplier before trusting high base scores.</a:t>
+            </a:r>
+          </a:p>
+          <a:p>
+            <a:pPr>
+              <a:spcAft>
+                <a:spcPts val="800"/>
+              </a:spcAft>
+              <a:defRPr sz="1300">
+                <a:solidFill>
+                  <a:srgbClr val="1C2D46"/>
+                </a:solidFill>
+                <a:latin typeface="Aptos"/>
+              </a:defRPr>
+            </a:pPr>
+            <a:r>
+              <a:t>Review red flags for exclusions, low semantic fit, low activity.</a:t>
+            </a:r>
+          </a:p>
+          <a:p>
+            <a:pPr>
+              <a:spcAft>
+                <a:spcPts val="800"/>
+              </a:spcAft>
+              <a:defRPr sz="1300">
+                <a:solidFill>
+                  <a:srgbClr val="1C2D46"/>
+                </a:solidFill>
+                <a:latin typeface="Aptos"/>
+              </a:defRPr>
+            </a:pPr>
+            <a:r>
+              <a:t>Use video/comment context to verify qualitative brand fit.</a:t>
+            </a:r>
+          </a:p>
+          <a:p>
+            <a:pPr>
+              <a:spcAft>
+                <a:spcPts val="800"/>
+              </a:spcAft>
+              <a:defRPr sz="1300">
+                <a:solidFill>
+                  <a:srgbClr val="1C2D46"/>
+                </a:solidFill>
+                <a:latin typeface="Aptos"/>
+              </a:defRPr>
+            </a:pPr>
+            <a:r>
+              <a:t>Compare component mix by objective (awareness vs conversion).</a:t>
+            </a:r>
+          </a:p>
+          <a:p>
+            <a:pPr>
+              <a:spcAft>
+                <a:spcPts val="800"/>
+              </a:spcAft>
+              <a:defRPr sz="1300">
+                <a:solidFill>
+                  <a:srgbClr val="1C2D46"/>
+                </a:solidFill>
+                <a:latin typeface="Aptos"/>
+              </a:defRPr>
+            </a:pPr>
+            <a:r>
+              <a:t>Use diversity settings to avoid over-concentrated shortlist.</a:t>
+            </a:r>
+          </a:p>
+        </p:txBody>
+      </p:sp>
+      <p:sp>
+        <p:nvSpPr>
+          <p:cNvPr id="10" name="TextBox 9"/>
+          <p:cNvSpPr txBox="1"/>
+          <p:nvPr/>
+        </p:nvSpPr>
+        <p:spPr>
+          <a:xfrm>
+            <a:off x="502920" y="6428232"/>
+            <a:ext cx="8503920" cy="310896"/>
+          </a:xfrm>
+          <a:prstGeom prst="rect">
+            <a:avLst/>
+          </a:prstGeom>
+          <a:noFill/>
+        </p:spPr>
+        <p:txBody>
+          <a:bodyPr wrap="none">
+            <a:spAutoFit/>
+          </a:bodyPr>
+          <a:lstStyle/>
+          <a:p>
+            <a:pPr algn="l">
+              <a:spcAft>
+                <a:spcPts val="0"/>
+              </a:spcAft>
+            </a:pPr>
+            <a:r>
+              <a:rPr sz="850">
+                <a:solidFill>
+                  <a:srgbClr val="6E8098"/>
+                </a:solidFill>
+                <a:latin typeface="Aptos"/>
+              </a:rPr>
+              <a:t>Sources: </a:t>
+            </a:r>
+            <a:r>
+              <a:rPr sz="850">
+                <a:solidFill>
+                  <a:srgbClr val="6E8098"/>
+                </a:solidFill>
+                <a:latin typeface="Aptos"/>
+              </a:rPr>
+              <a:t>Top Matches tab code (app.py)</a:t>
+            </a:r>
+            <a:r>
+              <a:rPr sz="850">
+                <a:solidFill>
+                  <a:srgbClr val="8291A5"/>
+                </a:solidFill>
+                <a:latin typeface="Aptos"/>
+              </a:rPr>
+              <a:t> | </a:t>
+            </a:r>
+            <a:r>
+              <a:rPr sz="850">
+                <a:solidFill>
+                  <a:srgbClr val="6E8098"/>
+                </a:solidFill>
+                <a:latin typeface="Aptos"/>
+              </a:rPr>
+              <a:t>channel_details.py (internal)</a:t>
+            </a:r>
+            <a:r>
+              <a:rPr sz="850">
+                <a:solidFill>
+                  <a:srgbClr val="8291A5"/>
+                </a:solidFill>
+                <a:latin typeface="Aptos"/>
+              </a:rPr>
+              <a:t> | </a:t>
+            </a:r>
+            <a:r>
+              <a:rPr sz="850">
+                <a:solidFill>
+                  <a:srgbClr val="6E8098"/>
+                </a:solidFill>
+                <a:latin typeface="Aptos"/>
+              </a:rPr>
+              <a:t>ranking.py (internal)</a:t>
+            </a:r>
+          </a:p>
+        </p:txBody>
+      </p:sp>
+      <p:sp>
+        <p:nvSpPr>
+          <p:cNvPr id="11" name="TextBox 10"/>
+          <p:cNvSpPr txBox="1"/>
+          <p:nvPr/>
+        </p:nvSpPr>
+        <p:spPr>
+          <a:xfrm>
+            <a:off x="9189720" y="6428232"/>
+            <a:ext cx="2514600" cy="292608"/>
+          </a:xfrm>
+          <a:prstGeom prst="rect">
+            <a:avLst/>
+          </a:prstGeom>
+          <a:noFill/>
+        </p:spPr>
+        <p:txBody>
+          <a:bodyPr wrap="none">
+            <a:spAutoFit/>
+          </a:bodyPr>
+          <a:lstStyle/>
+          <a:p>
+            <a:pPr algn="r">
+              <a:defRPr sz="900">
+                <a:solidFill>
+                  <a:srgbClr val="6E8098"/>
+                </a:solidFill>
+                <a:latin typeface="Aptos"/>
+              </a:defRPr>
+            </a:pPr>
+            <a:r>
+              <a:t>Backup 17 | Recommendation Interpretation</a:t>
+            </a:r>
+          </a:p>
+        </p:txBody>
+      </p:sp>
+    </p:spTree>
+  </p:cSld>
+  <p:clrMapOvr>
+    <a:masterClrMapping/>
+  </p:clrMapOvr>
+</p:sld>
+</file>
+
+<file path=ppt/slides/slide18.xml><?xml version="1.0" encoding="utf-8"?>
+<p:sld xmlns:a="http://schemas.openxmlformats.org/drawingml/2006/main" xmlns:p="http://schemas.openxmlformats.org/presentationml/2006/main" xmlns:r="http://schemas.openxmlformats.org/officeDocument/2006/relationships">
+  <p:cSld>
+    <p:spTree>
+      <p:nvGrpSpPr>
+        <p:cNvPr id="1" name=""/>
+        <p:cNvGrpSpPr/>
+        <p:nvPr/>
+      </p:nvGrpSpPr>
+      <p:grpSpPr/>
+      <p:sp>
+        <p:nvSpPr>
+          <p:cNvPr id="2" name="TextBox 1"/>
+          <p:cNvSpPr txBox="1"/>
+          <p:nvPr/>
+        </p:nvSpPr>
+        <p:spPr>
+          <a:xfrm>
+            <a:off x="594360" y="320040"/>
+            <a:ext cx="11064240" cy="914400"/>
+          </a:xfrm>
+          <a:prstGeom prst="rect">
+            <a:avLst/>
+          </a:prstGeom>
+          <a:noFill/>
+        </p:spPr>
+        <p:txBody>
+          <a:bodyPr wrap="none">
+            <a:spAutoFit/>
+          </a:bodyPr>
+          <a:lstStyle/>
+          <a:p>
+            <a:pPr>
+              <a:defRPr sz="3200" b="1">
+                <a:solidFill>
+                  <a:srgbClr val="0F2C59"/>
+                </a:solidFill>
+                <a:latin typeface="Aptos Display"/>
+              </a:defRPr>
+            </a:pPr>
+            <a:r>
+              <a:t>Backup: Network Studio Interpretation Guide</a:t>
+            </a:r>
+          </a:p>
+        </p:txBody>
+      </p:sp>
+      <p:sp>
+        <p:nvSpPr>
+          <p:cNvPr id="3" name="Rectangle 2"/>
+          <p:cNvSpPr/>
+          <p:nvPr/>
+        </p:nvSpPr>
+        <p:spPr>
+          <a:xfrm>
+            <a:off x="566928" y="1755648"/>
+            <a:ext cx="2651760" cy="73152"/>
+          </a:xfrm>
+          <a:prstGeom prst="rect">
+            <a:avLst/>
+          </a:prstGeom>
+          <a:solidFill>
+            <a:srgbClr val="1A7DBC"/>
+          </a:solidFill>
+          <a:ln>
+            <a:noFill/>
+          </a:ln>
+        </p:spPr>
+        <p:style>
+          <a:lnRef idx="1">
+            <a:schemeClr val="accent1"/>
+          </a:lnRef>
+          <a:fillRef idx="3">
+            <a:schemeClr val="accent1"/>
+          </a:fillRef>
+          <a:effectRef idx="2">
+            <a:schemeClr val="accent1"/>
+          </a:effectRef>
+          <a:fontRef idx="minor">
+            <a:schemeClr val="lt1"/>
+          </a:fontRef>
+        </p:style>
+        <p:txBody>
+          <a:bodyPr rtlCol="0" anchor="ctr"/>
+          <a:lstStyle/>
+          <a:p>
+            <a:pPr algn="ctr"/>
+          </a:p>
+        </p:txBody>
+      </p:sp>
+      <p:sp>
+        <p:nvSpPr>
+          <p:cNvPr id="4" name="Rounded Rectangle 3"/>
+          <p:cNvSpPr/>
+          <p:nvPr/>
+        </p:nvSpPr>
+        <p:spPr>
+          <a:xfrm>
+            <a:off x="621792" y="1828800"/>
+            <a:ext cx="5440680" cy="4480560"/>
+          </a:xfrm>
+          <a:prstGeom prst="roundRect">
+            <a:avLst/>
+          </a:prstGeom>
+          <a:solidFill>
+            <a:srgbClr val="F2F7FC"/>
+          </a:solidFill>
+          <a:ln w="15875">
+            <a:solidFill>
+              <a:srgbClr val="CDDCEE"/>
+            </a:solidFill>
+          </a:ln>
+        </p:spPr>
+        <p:style>
+          <a:lnRef idx="1">
+            <a:schemeClr val="accent1"/>
+          </a:lnRef>
+          <a:fillRef idx="3">
+            <a:schemeClr val="accent1"/>
+          </a:fillRef>
+          <a:effectRef idx="2">
+            <a:schemeClr val="accent1"/>
+          </a:effectRef>
+          <a:fontRef idx="minor">
+            <a:schemeClr val="lt1"/>
+          </a:fontRef>
+        </p:style>
+        <p:txBody>
+          <a:bodyPr rtlCol="0" anchor="ctr"/>
+          <a:lstStyle/>
+          <a:p>
+            <a:pPr algn="ctr"/>
+          </a:p>
+        </p:txBody>
+      </p:sp>
+      <p:sp>
+        <p:nvSpPr>
+          <p:cNvPr id="5" name="TextBox 4"/>
+          <p:cNvSpPr txBox="1"/>
+          <p:nvPr/>
+        </p:nvSpPr>
+        <p:spPr>
+          <a:xfrm>
+            <a:off x="804672" y="1938528"/>
+            <a:ext cx="5166360" cy="347472"/>
+          </a:xfrm>
+          <a:prstGeom prst="rect">
+            <a:avLst/>
+          </a:prstGeom>
+          <a:noFill/>
+        </p:spPr>
+        <p:txBody>
+          <a:bodyPr wrap="none">
+            <a:spAutoFit/>
+          </a:bodyPr>
+          <a:lstStyle/>
+          <a:p>
+            <a:pPr>
+              <a:defRPr b="1" sz="1700">
+                <a:solidFill>
+                  <a:srgbClr val="133A66"/>
+                </a:solidFill>
+                <a:latin typeface="Aptos"/>
+              </a:defRPr>
+            </a:pPr>
+            <a:r>
+              <a:t>What the Network View Represents</a:t>
+            </a:r>
+          </a:p>
+        </p:txBody>
+      </p:sp>
+      <p:sp>
+        <p:nvSpPr>
+          <p:cNvPr id="6" name="TextBox 5"/>
+          <p:cNvSpPr txBox="1"/>
+          <p:nvPr/>
+        </p:nvSpPr>
+        <p:spPr>
+          <a:xfrm>
+            <a:off x="786384" y="2267712"/>
+            <a:ext cx="5184648" cy="3950208"/>
+          </a:xfrm>
+          <a:prstGeom prst="rect">
+            <a:avLst/>
+          </a:prstGeom>
+          <a:noFill/>
+        </p:spPr>
+        <p:txBody>
+          <a:bodyPr wrap="square">
+            <a:spAutoFit/>
+          </a:bodyPr>
+          <a:lstStyle/>
+          <a:p>
+            <a:pPr>
+              <a:spcAft>
+                <a:spcPts val="800"/>
+              </a:spcAft>
+              <a:defRPr sz="1300">
+                <a:solidFill>
+                  <a:srgbClr val="1C2D46"/>
+                </a:solidFill>
+                <a:latin typeface="Aptos"/>
+              </a:defRPr>
+            </a:pPr>
+            <a:r>
+              <a:t>Node = creator channel; edge = shared-tag relationship.</a:t>
+            </a:r>
+          </a:p>
+          <a:p>
+            <a:pPr>
+              <a:spcAft>
+                <a:spcPts val="800"/>
+              </a:spcAft>
+              <a:defRPr sz="1300">
+                <a:solidFill>
+                  <a:srgbClr val="1C2D46"/>
+                </a:solidFill>
+                <a:latin typeface="Aptos"/>
+              </a:defRPr>
+            </a:pPr>
+            <a:r>
+              <a:t>Edge weight = count of shared tags above threshold.</a:t>
+            </a:r>
+          </a:p>
+          <a:p>
+            <a:pPr>
+              <a:spcAft>
+                <a:spcPts val="800"/>
+              </a:spcAft>
+              <a:defRPr sz="1300">
+                <a:solidFill>
+                  <a:srgbClr val="1C2D46"/>
+                </a:solidFill>
+                <a:latin typeface="Aptos"/>
+              </a:defRPr>
+            </a:pPr>
+            <a:r>
+              <a:t>Node color = community cluster id.</a:t>
+            </a:r>
+          </a:p>
+          <a:p>
+            <a:pPr>
+              <a:spcAft>
+                <a:spcPts val="800"/>
+              </a:spcAft>
+              <a:defRPr sz="1300">
+                <a:solidFill>
+                  <a:srgbClr val="1C2D46"/>
+                </a:solidFill>
+                <a:latin typeface="Aptos"/>
+              </a:defRPr>
+            </a:pPr>
+            <a:r>
+              <a:t>Node size increases with final score in graph view.</a:t>
+            </a:r>
+          </a:p>
+          <a:p>
+            <a:pPr>
+              <a:spcAft>
+                <a:spcPts val="800"/>
+              </a:spcAft>
+              <a:defRPr sz="1300">
+                <a:solidFill>
+                  <a:srgbClr val="1C2D46"/>
+                </a:solidFill>
+                <a:latin typeface="Aptos"/>
+              </a:defRPr>
+            </a:pPr>
+            <a:r>
+              <a:t>Over-common tags are dropped to reduce graph noise.</a:t>
+            </a:r>
+          </a:p>
+          <a:p>
+            <a:pPr>
+              <a:spcAft>
+                <a:spcPts val="800"/>
+              </a:spcAft>
+              <a:defRPr sz="1300">
+                <a:solidFill>
+                  <a:srgbClr val="1C2D46"/>
+                </a:solidFill>
+                <a:latin typeface="Aptos"/>
+              </a:defRPr>
+            </a:pPr>
+            <a:r>
+              <a:t>Micro communities can be separated as community -1.</a:t>
+            </a:r>
+          </a:p>
+        </p:txBody>
+      </p:sp>
+      <p:sp>
+        <p:nvSpPr>
+          <p:cNvPr id="7" name="Rounded Rectangle 6"/>
+          <p:cNvSpPr/>
+          <p:nvPr/>
+        </p:nvSpPr>
+        <p:spPr>
+          <a:xfrm>
+            <a:off x="6144768" y="1828800"/>
+            <a:ext cx="5440680" cy="4480560"/>
+          </a:xfrm>
+          <a:prstGeom prst="roundRect">
+            <a:avLst/>
+          </a:prstGeom>
+          <a:solidFill>
+            <a:srgbClr val="F2F7FC"/>
+          </a:solidFill>
+          <a:ln w="15875">
+            <a:solidFill>
+              <a:srgbClr val="CDDCEE"/>
+            </a:solidFill>
+          </a:ln>
+        </p:spPr>
+        <p:style>
+          <a:lnRef idx="1">
+            <a:schemeClr val="accent1"/>
+          </a:lnRef>
+          <a:fillRef idx="3">
+            <a:schemeClr val="accent1"/>
+          </a:fillRef>
+          <a:effectRef idx="2">
+            <a:schemeClr val="accent1"/>
+          </a:effectRef>
+          <a:fontRef idx="minor">
+            <a:schemeClr val="lt1"/>
+          </a:fontRef>
+        </p:style>
+        <p:txBody>
+          <a:bodyPr rtlCol="0" anchor="ctr"/>
+          <a:lstStyle/>
+          <a:p>
+            <a:pPr algn="ctr"/>
+          </a:p>
+        </p:txBody>
+      </p:sp>
+      <p:sp>
+        <p:nvSpPr>
+          <p:cNvPr id="8" name="TextBox 7"/>
+          <p:cNvSpPr txBox="1"/>
+          <p:nvPr/>
+        </p:nvSpPr>
+        <p:spPr>
+          <a:xfrm>
+            <a:off x="6327648" y="1938528"/>
+            <a:ext cx="5166360" cy="347472"/>
+          </a:xfrm>
+          <a:prstGeom prst="rect">
+            <a:avLst/>
+          </a:prstGeom>
+          <a:noFill/>
+        </p:spPr>
+        <p:txBody>
+          <a:bodyPr wrap="none">
+            <a:spAutoFit/>
+          </a:bodyPr>
+          <a:lstStyle/>
+          <a:p>
+            <a:pPr>
+              <a:defRPr b="1" sz="1700">
+                <a:solidFill>
+                  <a:srgbClr val="133A66"/>
+                </a:solidFill>
+                <a:latin typeface="Aptos"/>
+              </a:defRPr>
+            </a:pPr>
+            <a:r>
+              <a:t>How Bias Diagnostics Are Used</a:t>
+            </a:r>
+          </a:p>
+        </p:txBody>
+      </p:sp>
+      <p:sp>
+        <p:nvSpPr>
+          <p:cNvPr id="9" name="TextBox 8"/>
+          <p:cNvSpPr txBox="1"/>
+          <p:nvPr/>
+        </p:nvSpPr>
+        <p:spPr>
+          <a:xfrm>
+            <a:off x="6309359" y="2267712"/>
+            <a:ext cx="5184648" cy="3950208"/>
+          </a:xfrm>
+          <a:prstGeom prst="rect">
+            <a:avLst/>
+          </a:prstGeom>
+          <a:noFill/>
+        </p:spPr>
+        <p:txBody>
+          <a:bodyPr wrap="square">
+            <a:spAutoFit/>
+          </a:bodyPr>
+          <a:lstStyle/>
+          <a:p>
+            <a:pPr>
+              <a:spcAft>
+                <a:spcPts val="800"/>
+              </a:spcAft>
+              <a:defRPr sz="1300">
+                <a:solidFill>
+                  <a:srgbClr val="1C2D46"/>
+                </a:solidFill>
+                <a:latin typeface="Aptos"/>
+              </a:defRPr>
+            </a:pPr>
+            <a:r>
+              <a:t>Degree Top Overlap compares centrality-only vs hybrid ranking.</a:t>
+            </a:r>
+          </a:p>
+          <a:p>
+            <a:pPr>
+              <a:spcAft>
+                <a:spcPts val="800"/>
+              </a:spcAft>
+              <a:defRPr sz="1300">
+                <a:solidFill>
+                  <a:srgbClr val="1C2D46"/>
+                </a:solidFill>
+                <a:latin typeface="Aptos"/>
+              </a:defRPr>
+            </a:pPr>
+            <a:r>
+              <a:t>Lower overlap suggests reduced popularity-only bias.</a:t>
+            </a:r>
+          </a:p>
+          <a:p>
+            <a:pPr>
+              <a:spcAft>
+                <a:spcPts val="800"/>
+              </a:spcAft>
+              <a:defRPr sz="1300">
+                <a:solidFill>
+                  <a:srgbClr val="1C2D46"/>
+                </a:solidFill>
+                <a:latin typeface="Aptos"/>
+              </a:defRPr>
+            </a:pPr>
+            <a:r>
+              <a:t>Unique communities in Top-N reflects portfolio diversity.</a:t>
+            </a:r>
+          </a:p>
+          <a:p>
+            <a:pPr>
+              <a:spcAft>
+                <a:spcPts val="800"/>
+              </a:spcAft>
+              <a:defRPr sz="1300">
+                <a:solidFill>
+                  <a:srgbClr val="1C2D46"/>
+                </a:solidFill>
+                <a:latin typeface="Aptos"/>
+              </a:defRPr>
+            </a:pPr>
+            <a:r>
+              <a:t>Community distribution chart reveals concentration risk.</a:t>
+            </a:r>
+          </a:p>
+          <a:p>
+            <a:pPr>
+              <a:spcAft>
+                <a:spcPts val="800"/>
+              </a:spcAft>
+              <a:defRPr sz="1300">
+                <a:solidFill>
+                  <a:srgbClr val="1C2D46"/>
+                </a:solidFill>
+                <a:latin typeface="Aptos"/>
+              </a:defRPr>
+            </a:pPr>
+            <a:r>
+              <a:t>Min edge / node sliders help stress-test shortlist stability.</a:t>
+            </a:r>
+          </a:p>
+          <a:p>
+            <a:pPr>
+              <a:spcAft>
+                <a:spcPts val="800"/>
+              </a:spcAft>
+              <a:defRPr sz="1300">
+                <a:solidFill>
+                  <a:srgbClr val="1C2D46"/>
+                </a:solidFill>
+                <a:latin typeface="Aptos"/>
+              </a:defRPr>
+            </a:pPr>
+            <a:r>
+              <a:t>Use diagnostics before final outreach decisions.</a:t>
+            </a:r>
+          </a:p>
+        </p:txBody>
+      </p:sp>
+      <p:sp>
+        <p:nvSpPr>
+          <p:cNvPr id="10" name="TextBox 9"/>
+          <p:cNvSpPr txBox="1"/>
+          <p:nvPr/>
+        </p:nvSpPr>
+        <p:spPr>
+          <a:xfrm>
+            <a:off x="502920" y="6428232"/>
+            <a:ext cx="8503920" cy="310896"/>
+          </a:xfrm>
+          <a:prstGeom prst="rect">
+            <a:avLst/>
+          </a:prstGeom>
+          <a:noFill/>
+        </p:spPr>
+        <p:txBody>
+          <a:bodyPr wrap="none">
+            <a:spAutoFit/>
+          </a:bodyPr>
+          <a:lstStyle/>
+          <a:p>
+            <a:pPr algn="l">
+              <a:spcAft>
+                <a:spcPts val="0"/>
+              </a:spcAft>
+            </a:pPr>
+            <a:r>
+              <a:rPr sz="850">
+                <a:solidFill>
+                  <a:srgbClr val="6E8098"/>
+                </a:solidFill>
+                <a:latin typeface="Aptos"/>
+              </a:rPr>
+              <a:t>Sources: </a:t>
+            </a:r>
+            <a:r>
+              <a:rPr sz="850">
+                <a:solidFill>
+                  <a:srgbClr val="6E8098"/>
+                </a:solidFill>
+                <a:latin typeface="Aptos"/>
+              </a:rPr>
+              <a:t>network_scoring.py (internal)</a:t>
+            </a:r>
+            <a:r>
+              <a:rPr sz="850">
+                <a:solidFill>
+                  <a:srgbClr val="8291A5"/>
+                </a:solidFill>
+                <a:latin typeface="Aptos"/>
+              </a:rPr>
+              <a:t> | </a:t>
+            </a:r>
+            <a:r>
+              <a:rPr sz="850">
+                <a:solidFill>
+                  <a:srgbClr val="6E8098"/>
+                </a:solidFill>
+                <a:latin typeface="Aptos"/>
+              </a:rPr>
+              <a:t>orchestrator.py bias report (internal)</a:t>
+            </a:r>
+            <a:r>
+              <a:rPr sz="850">
+                <a:solidFill>
+                  <a:srgbClr val="8291A5"/>
+                </a:solidFill>
+                <a:latin typeface="Aptos"/>
+              </a:rPr>
+              <a:t> | </a:t>
+            </a:r>
+            <a:r>
+              <a:rPr sz="850">
+                <a:solidFill>
+                  <a:srgbClr val="6E8098"/>
+                </a:solidFill>
+                <a:latin typeface="Aptos"/>
+              </a:rPr>
+              <a:t>Network Studio UI (app.py)</a:t>
+            </a:r>
+          </a:p>
+        </p:txBody>
+      </p:sp>
+      <p:sp>
+        <p:nvSpPr>
+          <p:cNvPr id="11" name="TextBox 10"/>
+          <p:cNvSpPr txBox="1"/>
+          <p:nvPr/>
+        </p:nvSpPr>
+        <p:spPr>
+          <a:xfrm>
+            <a:off x="9189720" y="6428232"/>
+            <a:ext cx="2514600" cy="292608"/>
+          </a:xfrm>
+          <a:prstGeom prst="rect">
+            <a:avLst/>
+          </a:prstGeom>
+          <a:noFill/>
+        </p:spPr>
+        <p:txBody>
+          <a:bodyPr wrap="none">
+            <a:spAutoFit/>
+          </a:bodyPr>
+          <a:lstStyle/>
+          <a:p>
+            <a:pPr algn="r">
+              <a:defRPr sz="900">
+                <a:solidFill>
+                  <a:srgbClr val="6E8098"/>
+                </a:solidFill>
+                <a:latin typeface="Aptos"/>
+              </a:defRPr>
+            </a:pPr>
+            <a:r>
+              <a:t>Backup 18 | Network Diagnostics</a:t>
+            </a:r>
+          </a:p>
+        </p:txBody>
+      </p:sp>
+    </p:spTree>
+  </p:cSld>
+  <p:clrMapOvr>
+    <a:masterClrMapping/>
+  </p:clrMapOvr>
+</p:sld>
+</file>
+
+<file path=ppt/slides/slide19.xml><?xml version="1.0" encoding="utf-8"?>
+<p:sld xmlns:a="http://schemas.openxmlformats.org/drawingml/2006/main" xmlns:p="http://schemas.openxmlformats.org/presentationml/2006/main" xmlns:r="http://schemas.openxmlformats.org/officeDocument/2006/relationships">
+  <p:cSld>
+    <p:spTree>
+      <p:nvGrpSpPr>
+        <p:cNvPr id="1" name=""/>
+        <p:cNvGrpSpPr/>
+        <p:nvPr/>
+      </p:nvGrpSpPr>
+      <p:grpSpPr/>
+      <p:sp>
+        <p:nvSpPr>
+          <p:cNvPr id="2" name="TextBox 1"/>
+          <p:cNvSpPr txBox="1"/>
+          <p:nvPr/>
+        </p:nvSpPr>
+        <p:spPr>
+          <a:xfrm>
+            <a:off x="594360" y="320040"/>
+            <a:ext cx="11064240" cy="914400"/>
+          </a:xfrm>
+          <a:prstGeom prst="rect">
+            <a:avLst/>
+          </a:prstGeom>
+          <a:noFill/>
+        </p:spPr>
+        <p:txBody>
+          <a:bodyPr wrap="none">
+            <a:spAutoFit/>
+          </a:bodyPr>
+          <a:lstStyle/>
+          <a:p>
+            <a:pPr>
+              <a:defRPr sz="3200" b="1">
+                <a:solidFill>
+                  <a:srgbClr val="0F2C59"/>
+                </a:solidFill>
+                <a:latin typeface="Aptos Display"/>
+              </a:defRPr>
+            </a:pPr>
+            <a:r>
+              <a:t>Backup: Text Intelligence Interpretation Guide</a:t>
+            </a:r>
+          </a:p>
+        </p:txBody>
+      </p:sp>
+      <p:sp>
+        <p:nvSpPr>
+          <p:cNvPr id="3" name="Rectangle 2"/>
+          <p:cNvSpPr/>
+          <p:nvPr/>
+        </p:nvSpPr>
+        <p:spPr>
+          <a:xfrm>
+            <a:off x="566928" y="1755648"/>
+            <a:ext cx="2651760" cy="73152"/>
+          </a:xfrm>
+          <a:prstGeom prst="rect">
+            <a:avLst/>
+          </a:prstGeom>
+          <a:solidFill>
+            <a:srgbClr val="1A7DBC"/>
+          </a:solidFill>
+          <a:ln>
+            <a:noFill/>
+          </a:ln>
+        </p:spPr>
+        <p:style>
+          <a:lnRef idx="1">
+            <a:schemeClr val="accent1"/>
+          </a:lnRef>
+          <a:fillRef idx="3">
+            <a:schemeClr val="accent1"/>
+          </a:fillRef>
+          <a:effectRef idx="2">
+            <a:schemeClr val="accent1"/>
+          </a:effectRef>
+          <a:fontRef idx="minor">
+            <a:schemeClr val="lt1"/>
+          </a:fontRef>
+        </p:style>
+        <p:txBody>
+          <a:bodyPr rtlCol="0" anchor="ctr"/>
+          <a:lstStyle/>
+          <a:p>
+            <a:pPr algn="ctr"/>
+          </a:p>
+        </p:txBody>
+      </p:sp>
+      <p:sp>
+        <p:nvSpPr>
+          <p:cNvPr id="4" name="Rounded Rectangle 3"/>
+          <p:cNvSpPr/>
+          <p:nvPr/>
+        </p:nvSpPr>
+        <p:spPr>
+          <a:xfrm>
+            <a:off x="621792" y="1828800"/>
+            <a:ext cx="5440680" cy="4480560"/>
+          </a:xfrm>
+          <a:prstGeom prst="roundRect">
+            <a:avLst/>
+          </a:prstGeom>
+          <a:solidFill>
+            <a:srgbClr val="F2F7FC"/>
+          </a:solidFill>
+          <a:ln w="15875">
+            <a:solidFill>
+              <a:srgbClr val="CDDCEE"/>
+            </a:solidFill>
+          </a:ln>
+        </p:spPr>
+        <p:style>
+          <a:lnRef idx="1">
+            <a:schemeClr val="accent1"/>
+          </a:lnRef>
+          <a:fillRef idx="3">
+            <a:schemeClr val="accent1"/>
+          </a:fillRef>
+          <a:effectRef idx="2">
+            <a:schemeClr val="accent1"/>
+          </a:effectRef>
+          <a:fontRef idx="minor">
+            <a:schemeClr val="lt1"/>
+          </a:fontRef>
+        </p:style>
+        <p:txBody>
+          <a:bodyPr rtlCol="0" anchor="ctr"/>
+          <a:lstStyle/>
+          <a:p>
+            <a:pPr algn="ctr"/>
+          </a:p>
+        </p:txBody>
+      </p:sp>
+      <p:sp>
+        <p:nvSpPr>
+          <p:cNvPr id="5" name="TextBox 4"/>
+          <p:cNvSpPr txBox="1"/>
+          <p:nvPr/>
+        </p:nvSpPr>
+        <p:spPr>
+          <a:xfrm>
+            <a:off x="804672" y="1938528"/>
+            <a:ext cx="5166360" cy="347472"/>
+          </a:xfrm>
+          <a:prstGeom prst="rect">
+            <a:avLst/>
+          </a:prstGeom>
+          <a:noFill/>
+        </p:spPr>
+        <p:txBody>
+          <a:bodyPr wrap="none">
+            <a:spAutoFit/>
+          </a:bodyPr>
+          <a:lstStyle/>
+          <a:p>
+            <a:pPr>
+              <a:defRPr b="1" sz="1700">
+                <a:solidFill>
+                  <a:srgbClr val="133A66"/>
+                </a:solidFill>
+                <a:latin typeface="Aptos"/>
+              </a:defRPr>
+            </a:pPr>
+            <a:r>
+              <a:t>Charts and Metrics</a:t>
+            </a:r>
+          </a:p>
+        </p:txBody>
+      </p:sp>
+      <p:sp>
+        <p:nvSpPr>
+          <p:cNvPr id="6" name="TextBox 5"/>
+          <p:cNvSpPr txBox="1"/>
+          <p:nvPr/>
+        </p:nvSpPr>
+        <p:spPr>
+          <a:xfrm>
+            <a:off x="786384" y="2267712"/>
+            <a:ext cx="5184648" cy="3950208"/>
+          </a:xfrm>
+          <a:prstGeom prst="rect">
+            <a:avLst/>
+          </a:prstGeom>
+          <a:noFill/>
+        </p:spPr>
+        <p:txBody>
+          <a:bodyPr wrap="square">
+            <a:spAutoFit/>
+          </a:bodyPr>
+          <a:lstStyle/>
+          <a:p>
+            <a:pPr>
+              <a:spcAft>
+                <a:spcPts val="800"/>
+              </a:spcAft>
+              <a:defRPr sz="1300">
+                <a:solidFill>
+                  <a:srgbClr val="1C2D46"/>
+                </a:solidFill>
+                <a:latin typeface="Aptos"/>
+              </a:defRPr>
+            </a:pPr>
+            <a:r>
+              <a:t>Text Match Map: X=TF-IDF, Y=Semantic, color=Evidence, size~views.</a:t>
+            </a:r>
+          </a:p>
+          <a:p>
+            <a:pPr>
+              <a:spcAft>
+                <a:spcPts val="800"/>
+              </a:spcAft>
+              <a:defRPr sz="1300">
+                <a:solidFill>
+                  <a:srgbClr val="1C2D46"/>
+                </a:solidFill>
+                <a:latin typeface="Aptos"/>
+              </a:defRPr>
+            </a:pPr>
+            <a:r>
+              <a:t>Top Terms: frequent words in top candidate text corpus.</a:t>
+            </a:r>
+          </a:p>
+          <a:p>
+            <a:pPr>
+              <a:spcAft>
+                <a:spcPts val="800"/>
+              </a:spcAft>
+              <a:defRPr sz="1300">
+                <a:solidFill>
+                  <a:srgbClr val="1C2D46"/>
+                </a:solidFill>
+                <a:latin typeface="Aptos"/>
+              </a:defRPr>
+            </a:pPr>
+            <a:r>
+              <a:t>Keyword Coverage: share of channels containing each tracked keyword.</a:t>
+            </a:r>
+          </a:p>
+          <a:p>
+            <a:pPr>
+              <a:spcAft>
+                <a:spcPts val="800"/>
+              </a:spcAft>
+              <a:defRPr sz="1300">
+                <a:solidFill>
+                  <a:srgbClr val="1C2D46"/>
+                </a:solidFill>
+                <a:latin typeface="Aptos"/>
+              </a:defRPr>
+            </a:pPr>
+            <a:r>
+              <a:t>Leaderboard: TF-IDF, Semantic, Tone, Final score side-by-side.</a:t>
+            </a:r>
+          </a:p>
+          <a:p>
+            <a:pPr>
+              <a:spcAft>
+                <a:spcPts val="800"/>
+              </a:spcAft>
+              <a:defRPr sz="1300">
+                <a:solidFill>
+                  <a:srgbClr val="1C2D46"/>
+                </a:solidFill>
+                <a:latin typeface="Aptos"/>
+              </a:defRPr>
+            </a:pPr>
+            <a:r>
+              <a:t>Campaign words from audience/USP/must-keywords shape query vector.</a:t>
+            </a:r>
+          </a:p>
+          <a:p>
+            <a:pPr>
+              <a:spcAft>
+                <a:spcPts val="800"/>
+              </a:spcAft>
+              <a:defRPr sz="1300">
+                <a:solidFill>
+                  <a:srgbClr val="1C2D46"/>
+                </a:solidFill>
+                <a:latin typeface="Aptos"/>
+              </a:defRPr>
+            </a:pPr>
+            <a:r>
+              <a:t>Exclude words can directly lower relevance scores.</a:t>
+            </a:r>
+          </a:p>
+        </p:txBody>
+      </p:sp>
+      <p:sp>
+        <p:nvSpPr>
+          <p:cNvPr id="7" name="Rounded Rectangle 6"/>
+          <p:cNvSpPr/>
+          <p:nvPr/>
+        </p:nvSpPr>
+        <p:spPr>
+          <a:xfrm>
+            <a:off x="6144768" y="1828800"/>
+            <a:ext cx="5440680" cy="4480560"/>
+          </a:xfrm>
+          <a:prstGeom prst="roundRect">
+            <a:avLst/>
+          </a:prstGeom>
+          <a:solidFill>
+            <a:srgbClr val="F2F7FC"/>
+          </a:solidFill>
+          <a:ln w="15875">
+            <a:solidFill>
+              <a:srgbClr val="CDDCEE"/>
+            </a:solidFill>
+          </a:ln>
+        </p:spPr>
+        <p:style>
+          <a:lnRef idx="1">
+            <a:schemeClr val="accent1"/>
+          </a:lnRef>
+          <a:fillRef idx="3">
+            <a:schemeClr val="accent1"/>
+          </a:fillRef>
+          <a:effectRef idx="2">
+            <a:schemeClr val="accent1"/>
+          </a:effectRef>
+          <a:fontRef idx="minor">
+            <a:schemeClr val="lt1"/>
+          </a:fontRef>
+        </p:style>
+        <p:txBody>
+          <a:bodyPr rtlCol="0" anchor="ctr"/>
+          <a:lstStyle/>
+          <a:p>
+            <a:pPr algn="ctr"/>
+          </a:p>
+        </p:txBody>
+      </p:sp>
+      <p:sp>
+        <p:nvSpPr>
+          <p:cNvPr id="8" name="TextBox 7"/>
+          <p:cNvSpPr txBox="1"/>
+          <p:nvPr/>
+        </p:nvSpPr>
+        <p:spPr>
+          <a:xfrm>
+            <a:off x="6327648" y="1938528"/>
+            <a:ext cx="5166360" cy="347472"/>
+          </a:xfrm>
+          <a:prstGeom prst="rect">
+            <a:avLst/>
+          </a:prstGeom>
+          <a:noFill/>
+        </p:spPr>
+        <p:txBody>
+          <a:bodyPr wrap="none">
+            <a:spAutoFit/>
+          </a:bodyPr>
+          <a:lstStyle/>
+          <a:p>
+            <a:pPr>
+              <a:defRPr b="1" sz="1700">
+                <a:solidFill>
+                  <a:srgbClr val="133A66"/>
+                </a:solidFill>
+                <a:latin typeface="Aptos"/>
+              </a:defRPr>
+            </a:pPr>
+            <a:r>
+              <a:t>How to Use in Client Reviews</a:t>
+            </a:r>
+          </a:p>
+        </p:txBody>
+      </p:sp>
+      <p:sp>
+        <p:nvSpPr>
+          <p:cNvPr id="9" name="TextBox 8"/>
+          <p:cNvSpPr txBox="1"/>
+          <p:nvPr/>
+        </p:nvSpPr>
+        <p:spPr>
+          <a:xfrm>
+            <a:off x="6309359" y="2267712"/>
+            <a:ext cx="5184648" cy="3950208"/>
+          </a:xfrm>
+          <a:prstGeom prst="rect">
+            <a:avLst/>
+          </a:prstGeom>
+          <a:noFill/>
+        </p:spPr>
+        <p:txBody>
+          <a:bodyPr wrap="square">
+            <a:spAutoFit/>
+          </a:bodyPr>
+          <a:lstStyle/>
+          <a:p>
+            <a:pPr>
+              <a:spcAft>
+                <a:spcPts val="800"/>
+              </a:spcAft>
+              <a:defRPr sz="1300">
+                <a:solidFill>
+                  <a:srgbClr val="1C2D46"/>
+                </a:solidFill>
+                <a:latin typeface="Aptos"/>
+              </a:defRPr>
+            </a:pPr>
+            <a:r>
+              <a:t>Upper-right map region = strongest language + meaning fit.</a:t>
+            </a:r>
+          </a:p>
+          <a:p>
+            <a:pPr>
+              <a:spcAft>
+                <a:spcPts val="800"/>
+              </a:spcAft>
+              <a:defRPr sz="1300">
+                <a:solidFill>
+                  <a:srgbClr val="1C2D46"/>
+                </a:solidFill>
+                <a:latin typeface="Aptos"/>
+              </a:defRPr>
+            </a:pPr>
+            <a:r>
+              <a:t>High TF-IDF but low semantic means superficial keyword overlap.</a:t>
+            </a:r>
+          </a:p>
+          <a:p>
+            <a:pPr>
+              <a:spcAft>
+                <a:spcPts val="800"/>
+              </a:spcAft>
+              <a:defRPr sz="1300">
+                <a:solidFill>
+                  <a:srgbClr val="1C2D46"/>
+                </a:solidFill>
+                <a:latin typeface="Aptos"/>
+              </a:defRPr>
+            </a:pPr>
+            <a:r>
+              <a:t>Low must-keyword coverage indicates query or data-gap issue.</a:t>
+            </a:r>
+          </a:p>
+          <a:p>
+            <a:pPr>
+              <a:spcAft>
+                <a:spcPts val="800"/>
+              </a:spcAft>
+              <a:defRPr sz="1300">
+                <a:solidFill>
+                  <a:srgbClr val="1C2D46"/>
+                </a:solidFill>
+                <a:latin typeface="Aptos"/>
+              </a:defRPr>
+            </a:pPr>
+            <a:r>
+              <a:t>Term chart validates whether shortlist matches campaign language.</a:t>
+            </a:r>
+          </a:p>
+          <a:p>
+            <a:pPr>
+              <a:spcAft>
+                <a:spcPts val="800"/>
+              </a:spcAft>
+              <a:defRPr sz="1300">
+                <a:solidFill>
+                  <a:srgbClr val="1C2D46"/>
+                </a:solidFill>
+                <a:latin typeface="Aptos"/>
+              </a:defRPr>
+            </a:pPr>
+            <a:r>
+              <a:t>Use with Top-Match evidence labels for safer final picks.</a:t>
+            </a:r>
+          </a:p>
+          <a:p>
+            <a:pPr>
+              <a:spcAft>
+                <a:spcPts val="800"/>
+              </a:spcAft>
+              <a:defRPr sz="1300">
+                <a:solidFill>
+                  <a:srgbClr val="1C2D46"/>
+                </a:solidFill>
+                <a:latin typeface="Aptos"/>
+              </a:defRPr>
+            </a:pPr>
+            <a:r>
+              <a:t>Document rationale from this tab in client memo.</a:t>
+            </a:r>
+          </a:p>
+        </p:txBody>
+      </p:sp>
+      <p:sp>
+        <p:nvSpPr>
+          <p:cNvPr id="10" name="TextBox 9"/>
+          <p:cNvSpPr txBox="1"/>
+          <p:nvPr/>
+        </p:nvSpPr>
+        <p:spPr>
+          <a:xfrm>
+            <a:off x="502920" y="6428232"/>
+            <a:ext cx="8503920" cy="310896"/>
+          </a:xfrm>
+          <a:prstGeom prst="rect">
+            <a:avLst/>
+          </a:prstGeom>
+          <a:noFill/>
+        </p:spPr>
+        <p:txBody>
+          <a:bodyPr wrap="none">
+            <a:spAutoFit/>
+          </a:bodyPr>
+          <a:lstStyle/>
+          <a:p>
+            <a:pPr algn="l">
+              <a:spcAft>
+                <a:spcPts val="0"/>
+              </a:spcAft>
+            </a:pPr>
+            <a:r>
+              <a:rPr sz="850">
+                <a:solidFill>
+                  <a:srgbClr val="6E8098"/>
+                </a:solidFill>
+                <a:latin typeface="Aptos"/>
+              </a:rPr>
+              <a:t>Sources: </a:t>
+            </a:r>
+            <a:r>
+              <a:rPr sz="850">
+                <a:solidFill>
+                  <a:srgbClr val="6E8098"/>
+                </a:solidFill>
+                <a:latin typeface="Aptos"/>
+              </a:rPr>
+              <a:t>text_scoring.py (internal)</a:t>
+            </a:r>
+            <a:r>
+              <a:rPr sz="850">
+                <a:solidFill>
+                  <a:srgbClr val="8291A5"/>
+                </a:solidFill>
+                <a:latin typeface="Aptos"/>
+              </a:rPr>
+              <a:t> | </a:t>
+            </a:r>
+            <a:r>
+              <a:rPr sz="850">
+                <a:solidFill>
+                  <a:srgbClr val="6E8098"/>
+                </a:solidFill>
+                <a:latin typeface="Aptos"/>
+              </a:rPr>
+              <a:t>semantic_enrichment.py (internal)</a:t>
+            </a:r>
+            <a:r>
+              <a:rPr sz="850">
+                <a:solidFill>
+                  <a:srgbClr val="8291A5"/>
+                </a:solidFill>
+                <a:latin typeface="Aptos"/>
+              </a:rPr>
+              <a:t> | </a:t>
+            </a:r>
+            <a:r>
+              <a:rPr sz="850">
+                <a:solidFill>
+                  <a:srgbClr val="6E8098"/>
+                </a:solidFill>
+                <a:latin typeface="Aptos"/>
+              </a:rPr>
+              <a:t>Text Intelligence UI (app.py)</a:t>
+            </a:r>
+          </a:p>
+        </p:txBody>
+      </p:sp>
+      <p:sp>
+        <p:nvSpPr>
+          <p:cNvPr id="11" name="TextBox 10"/>
+          <p:cNvSpPr txBox="1"/>
+          <p:nvPr/>
+        </p:nvSpPr>
+        <p:spPr>
+          <a:xfrm>
+            <a:off x="9189720" y="6428232"/>
+            <a:ext cx="2514600" cy="292608"/>
+          </a:xfrm>
+          <a:prstGeom prst="rect">
+            <a:avLst/>
+          </a:prstGeom>
+          <a:noFill/>
+        </p:spPr>
+        <p:txBody>
+          <a:bodyPr wrap="none">
+            <a:spAutoFit/>
+          </a:bodyPr>
+          <a:lstStyle/>
+          <a:p>
+            <a:pPr algn="r">
+              <a:defRPr sz="900">
+                <a:solidFill>
+                  <a:srgbClr val="6E8098"/>
+                </a:solidFill>
+                <a:latin typeface="Aptos"/>
+              </a:defRPr>
+            </a:pPr>
+            <a:r>
+              <a:t>Backup 19 | Text Diagnostics</a:t>
+            </a:r>
+          </a:p>
+        </p:txBody>
+      </p:sp>
+    </p:spTree>
+  </p:cSld>
+  <p:clrMapOvr>
+    <a:masterClrMapping/>
+  </p:clrMapOvr>
+</p:sld>
+</file>
+
 <file path=ppt/slides/slide2.xml><?xml version="1.0" encoding="utf-8"?>
 <p:sld xmlns:a="http://schemas.openxmlformats.org/drawingml/2006/main" xmlns:p="http://schemas.openxmlformats.org/presentationml/2006/main" xmlns:r="http://schemas.openxmlformats.org/officeDocument/2006/relationships">
   <p:cSld>
@@ -6427,6 +8730,3375 @@
             </a:pPr>
             <a:r>
               <a:t>Section 2 | Roadmap</a:t>
+            </a:r>
+          </a:p>
+        </p:txBody>
+      </p:sp>
+    </p:spTree>
+  </p:cSld>
+  <p:clrMapOvr>
+    <a:masterClrMapping/>
+  </p:clrMapOvr>
+</p:sld>
+</file>
+
+<file path=ppt/slides/slide20.xml><?xml version="1.0" encoding="utf-8"?>
+<p:sld xmlns:a="http://schemas.openxmlformats.org/drawingml/2006/main" xmlns:p="http://schemas.openxmlformats.org/presentationml/2006/main" xmlns:r="http://schemas.openxmlformats.org/officeDocument/2006/relationships">
+  <p:cSld>
+    <p:spTree>
+      <p:nvGrpSpPr>
+        <p:cNvPr id="1" name=""/>
+        <p:cNvGrpSpPr/>
+        <p:nvPr/>
+      </p:nvGrpSpPr>
+      <p:grpSpPr/>
+      <p:sp>
+        <p:nvSpPr>
+          <p:cNvPr id="2" name="TextBox 1"/>
+          <p:cNvSpPr txBox="1"/>
+          <p:nvPr/>
+        </p:nvSpPr>
+        <p:spPr>
+          <a:xfrm>
+            <a:off x="594360" y="320040"/>
+            <a:ext cx="11064240" cy="914400"/>
+          </a:xfrm>
+          <a:prstGeom prst="rect">
+            <a:avLst/>
+          </a:prstGeom>
+          <a:noFill/>
+        </p:spPr>
+        <p:txBody>
+          <a:bodyPr wrap="none">
+            <a:spAutoFit/>
+          </a:bodyPr>
+          <a:lstStyle/>
+          <a:p>
+            <a:pPr>
+              <a:defRPr sz="3200" b="1">
+                <a:solidFill>
+                  <a:srgbClr val="0F2C59"/>
+                </a:solidFill>
+                <a:latin typeface="Aptos Display"/>
+              </a:defRPr>
+            </a:pPr>
+            <a:r>
+              <a:t>Backup: ROI Lab Interpretation Guide</a:t>
+            </a:r>
+          </a:p>
+        </p:txBody>
+      </p:sp>
+      <p:sp>
+        <p:nvSpPr>
+          <p:cNvPr id="3" name="Rectangle 2"/>
+          <p:cNvSpPr/>
+          <p:nvPr/>
+        </p:nvSpPr>
+        <p:spPr>
+          <a:xfrm>
+            <a:off x="566928" y="1755648"/>
+            <a:ext cx="2651760" cy="73152"/>
+          </a:xfrm>
+          <a:prstGeom prst="rect">
+            <a:avLst/>
+          </a:prstGeom>
+          <a:solidFill>
+            <a:srgbClr val="1A7DBC"/>
+          </a:solidFill>
+          <a:ln>
+            <a:noFill/>
+          </a:ln>
+        </p:spPr>
+        <p:style>
+          <a:lnRef idx="1">
+            <a:schemeClr val="accent1"/>
+          </a:lnRef>
+          <a:fillRef idx="3">
+            <a:schemeClr val="accent1"/>
+          </a:fillRef>
+          <a:effectRef idx="2">
+            <a:schemeClr val="accent1"/>
+          </a:effectRef>
+          <a:fontRef idx="minor">
+            <a:schemeClr val="lt1"/>
+          </a:fontRef>
+        </p:style>
+        <p:txBody>
+          <a:bodyPr rtlCol="0" anchor="ctr"/>
+          <a:lstStyle/>
+          <a:p>
+            <a:pPr algn="ctr"/>
+          </a:p>
+        </p:txBody>
+      </p:sp>
+      <p:sp>
+        <p:nvSpPr>
+          <p:cNvPr id="4" name="Rounded Rectangle 3"/>
+          <p:cNvSpPr/>
+          <p:nvPr/>
+        </p:nvSpPr>
+        <p:spPr>
+          <a:xfrm>
+            <a:off x="621792" y="1828800"/>
+            <a:ext cx="5440680" cy="4480560"/>
+          </a:xfrm>
+          <a:prstGeom prst="roundRect">
+            <a:avLst/>
+          </a:prstGeom>
+          <a:solidFill>
+            <a:srgbClr val="F2F7FC"/>
+          </a:solidFill>
+          <a:ln w="15875">
+            <a:solidFill>
+              <a:srgbClr val="CDDCEE"/>
+            </a:solidFill>
+          </a:ln>
+        </p:spPr>
+        <p:style>
+          <a:lnRef idx="1">
+            <a:schemeClr val="accent1"/>
+          </a:lnRef>
+          <a:fillRef idx="3">
+            <a:schemeClr val="accent1"/>
+          </a:fillRef>
+          <a:effectRef idx="2">
+            <a:schemeClr val="accent1"/>
+          </a:effectRef>
+          <a:fontRef idx="minor">
+            <a:schemeClr val="lt1"/>
+          </a:fontRef>
+        </p:style>
+        <p:txBody>
+          <a:bodyPr rtlCol="0" anchor="ctr"/>
+          <a:lstStyle/>
+          <a:p>
+            <a:pPr algn="ctr"/>
+          </a:p>
+        </p:txBody>
+      </p:sp>
+      <p:sp>
+        <p:nvSpPr>
+          <p:cNvPr id="5" name="TextBox 4"/>
+          <p:cNvSpPr txBox="1"/>
+          <p:nvPr/>
+        </p:nvSpPr>
+        <p:spPr>
+          <a:xfrm>
+            <a:off x="804672" y="1938528"/>
+            <a:ext cx="5166360" cy="347472"/>
+          </a:xfrm>
+          <a:prstGeom prst="rect">
+            <a:avLst/>
+          </a:prstGeom>
+          <a:noFill/>
+        </p:spPr>
+        <p:txBody>
+          <a:bodyPr wrap="none">
+            <a:spAutoFit/>
+          </a:bodyPr>
+          <a:lstStyle/>
+          <a:p>
+            <a:pPr>
+              <a:defRPr b="1" sz="1700">
+                <a:solidFill>
+                  <a:srgbClr val="133A66"/>
+                </a:solidFill>
+                <a:latin typeface="Aptos"/>
+              </a:defRPr>
+            </a:pPr>
+            <a:r>
+              <a:t>ROI Simulator Mechanics</a:t>
+            </a:r>
+          </a:p>
+        </p:txBody>
+      </p:sp>
+      <p:sp>
+        <p:nvSpPr>
+          <p:cNvPr id="6" name="TextBox 5"/>
+          <p:cNvSpPr txBox="1"/>
+          <p:nvPr/>
+        </p:nvSpPr>
+        <p:spPr>
+          <a:xfrm>
+            <a:off x="786384" y="2267712"/>
+            <a:ext cx="5184648" cy="3950208"/>
+          </a:xfrm>
+          <a:prstGeom prst="rect">
+            <a:avLst/>
+          </a:prstGeom>
+          <a:noFill/>
+        </p:spPr>
+        <p:txBody>
+          <a:bodyPr wrap="square">
+            <a:spAutoFit/>
+          </a:bodyPr>
+          <a:lstStyle/>
+          <a:p>
+            <a:pPr>
+              <a:spcAft>
+                <a:spcPts val="800"/>
+              </a:spcAft>
+              <a:defRPr sz="1300">
+                <a:solidFill>
+                  <a:srgbClr val="1C2D46"/>
+                </a:solidFill>
+                <a:latin typeface="Aptos"/>
+              </a:defRPr>
+            </a:pPr>
+            <a:r>
+              <a:t>Inputs: Budget, CPM, CTR, CVR, AOV</a:t>
+            </a:r>
+          </a:p>
+          <a:p>
+            <a:pPr>
+              <a:spcAft>
+                <a:spcPts val="800"/>
+              </a:spcAft>
+              <a:defRPr sz="1300">
+                <a:solidFill>
+                  <a:srgbClr val="1C2D46"/>
+                </a:solidFill>
+                <a:latin typeface="Aptos"/>
+              </a:defRPr>
+            </a:pPr>
+            <a:r>
+              <a:t>Impressions = (Budget / CPM) * 1000</a:t>
+            </a:r>
+          </a:p>
+          <a:p>
+            <a:pPr>
+              <a:spcAft>
+                <a:spcPts val="800"/>
+              </a:spcAft>
+              <a:defRPr sz="1300">
+                <a:solidFill>
+                  <a:srgbClr val="1C2D46"/>
+                </a:solidFill>
+                <a:latin typeface="Aptos"/>
+              </a:defRPr>
+            </a:pPr>
+            <a:r>
+              <a:t>Clicks = Impressions * CTR</a:t>
+            </a:r>
+          </a:p>
+          <a:p>
+            <a:pPr>
+              <a:spcAft>
+                <a:spcPts val="800"/>
+              </a:spcAft>
+              <a:defRPr sz="1300">
+                <a:solidFill>
+                  <a:srgbClr val="1C2D46"/>
+                </a:solidFill>
+                <a:latin typeface="Aptos"/>
+              </a:defRPr>
+            </a:pPr>
+            <a:r>
+              <a:t>Conversions = Clicks * CVR</a:t>
+            </a:r>
+          </a:p>
+          <a:p>
+            <a:pPr>
+              <a:spcAft>
+                <a:spcPts val="800"/>
+              </a:spcAft>
+              <a:defRPr sz="1300">
+                <a:solidFill>
+                  <a:srgbClr val="1C2D46"/>
+                </a:solidFill>
+                <a:latin typeface="Aptos"/>
+              </a:defRPr>
+            </a:pPr>
+            <a:r>
+              <a:t>Revenue = Conversions * AOV</a:t>
+            </a:r>
+          </a:p>
+          <a:p>
+            <a:pPr>
+              <a:spcAft>
+                <a:spcPts val="800"/>
+              </a:spcAft>
+              <a:defRPr sz="1300">
+                <a:solidFill>
+                  <a:srgbClr val="1C2D46"/>
+                </a:solidFill>
+                <a:latin typeface="Aptos"/>
+              </a:defRPr>
+            </a:pPr>
+            <a:r>
+              <a:t>ROAS = Revenue / Budget (plus low/high range)</a:t>
+            </a:r>
+          </a:p>
+        </p:txBody>
+      </p:sp>
+      <p:sp>
+        <p:nvSpPr>
+          <p:cNvPr id="7" name="Rounded Rectangle 6"/>
+          <p:cNvSpPr/>
+          <p:nvPr/>
+        </p:nvSpPr>
+        <p:spPr>
+          <a:xfrm>
+            <a:off x="6144768" y="1828800"/>
+            <a:ext cx="5440680" cy="4480560"/>
+          </a:xfrm>
+          <a:prstGeom prst="roundRect">
+            <a:avLst/>
+          </a:prstGeom>
+          <a:solidFill>
+            <a:srgbClr val="F2F7FC"/>
+          </a:solidFill>
+          <a:ln w="15875">
+            <a:solidFill>
+              <a:srgbClr val="CDDCEE"/>
+            </a:solidFill>
+          </a:ln>
+        </p:spPr>
+        <p:style>
+          <a:lnRef idx="1">
+            <a:schemeClr val="accent1"/>
+          </a:lnRef>
+          <a:fillRef idx="3">
+            <a:schemeClr val="accent1"/>
+          </a:fillRef>
+          <a:effectRef idx="2">
+            <a:schemeClr val="accent1"/>
+          </a:effectRef>
+          <a:fontRef idx="minor">
+            <a:schemeClr val="lt1"/>
+          </a:fontRef>
+        </p:style>
+        <p:txBody>
+          <a:bodyPr rtlCol="0" anchor="ctr"/>
+          <a:lstStyle/>
+          <a:p>
+            <a:pPr algn="ctr"/>
+          </a:p>
+        </p:txBody>
+      </p:sp>
+      <p:sp>
+        <p:nvSpPr>
+          <p:cNvPr id="8" name="TextBox 7"/>
+          <p:cNvSpPr txBox="1"/>
+          <p:nvPr/>
+        </p:nvSpPr>
+        <p:spPr>
+          <a:xfrm>
+            <a:off x="6327648" y="1938528"/>
+            <a:ext cx="5166360" cy="347472"/>
+          </a:xfrm>
+          <a:prstGeom prst="rect">
+            <a:avLst/>
+          </a:prstGeom>
+          <a:noFill/>
+        </p:spPr>
+        <p:txBody>
+          <a:bodyPr wrap="none">
+            <a:spAutoFit/>
+          </a:bodyPr>
+          <a:lstStyle/>
+          <a:p>
+            <a:pPr>
+              <a:defRPr b="1" sz="1700">
+                <a:solidFill>
+                  <a:srgbClr val="133A66"/>
+                </a:solidFill>
+                <a:latin typeface="Aptos"/>
+              </a:defRPr>
+            </a:pPr>
+            <a:r>
+              <a:t>Business Use and Caveats</a:t>
+            </a:r>
+          </a:p>
+        </p:txBody>
+      </p:sp>
+      <p:sp>
+        <p:nvSpPr>
+          <p:cNvPr id="9" name="TextBox 8"/>
+          <p:cNvSpPr txBox="1"/>
+          <p:nvPr/>
+        </p:nvSpPr>
+        <p:spPr>
+          <a:xfrm>
+            <a:off x="6309359" y="2267712"/>
+            <a:ext cx="5184648" cy="3950208"/>
+          </a:xfrm>
+          <a:prstGeom prst="rect">
+            <a:avLst/>
+          </a:prstGeom>
+          <a:noFill/>
+        </p:spPr>
+        <p:txBody>
+          <a:bodyPr wrap="square">
+            <a:spAutoFit/>
+          </a:bodyPr>
+          <a:lstStyle/>
+          <a:p>
+            <a:pPr>
+              <a:spcAft>
+                <a:spcPts val="800"/>
+              </a:spcAft>
+              <a:defRPr sz="1300">
+                <a:solidFill>
+                  <a:srgbClr val="1C2D46"/>
+                </a:solidFill>
+                <a:latin typeface="Aptos"/>
+              </a:defRPr>
+            </a:pPr>
+            <a:r>
+              <a:t>Use for scenario planning, not causal proof.</a:t>
+            </a:r>
+          </a:p>
+          <a:p>
+            <a:pPr>
+              <a:spcAft>
+                <a:spcPts val="800"/>
+              </a:spcAft>
+              <a:defRPr sz="1300">
+                <a:solidFill>
+                  <a:srgbClr val="1C2D46"/>
+                </a:solidFill>
+                <a:latin typeface="Aptos"/>
+              </a:defRPr>
+            </a:pPr>
+            <a:r>
+              <a:t>Budget-sensitivity chart shows efficiency vs scale tradeoff.</a:t>
+            </a:r>
+          </a:p>
+          <a:p>
+            <a:pPr>
+              <a:spcAft>
+                <a:spcPts val="800"/>
+              </a:spcAft>
+              <a:defRPr sz="1300">
+                <a:solidFill>
+                  <a:srgbClr val="1C2D46"/>
+                </a:solidFill>
+                <a:latin typeface="Aptos"/>
+              </a:defRPr>
+            </a:pPr>
+            <a:r>
+              <a:t>Useful for pre-campaign expectation setting with finance teams.</a:t>
+            </a:r>
+          </a:p>
+          <a:p>
+            <a:pPr>
+              <a:spcAft>
+                <a:spcPts val="800"/>
+              </a:spcAft>
+              <a:defRPr sz="1300">
+                <a:solidFill>
+                  <a:srgbClr val="1C2D46"/>
+                </a:solidFill>
+                <a:latin typeface="Aptos"/>
+              </a:defRPr>
+            </a:pPr>
+            <a:r>
+              <a:t>Can compare assumptions across shortlist compositions.</a:t>
+            </a:r>
+          </a:p>
+          <a:p>
+            <a:pPr>
+              <a:spcAft>
+                <a:spcPts val="800"/>
+              </a:spcAft>
+              <a:defRPr sz="1300">
+                <a:solidFill>
+                  <a:srgbClr val="1C2D46"/>
+                </a:solidFill>
+                <a:latin typeface="Aptos"/>
+              </a:defRPr>
+            </a:pPr>
+            <a:r>
+              <a:t>Actual performance still depends on creative and execution quality.</a:t>
+            </a:r>
+          </a:p>
+          <a:p>
+            <a:pPr>
+              <a:spcAft>
+                <a:spcPts val="800"/>
+              </a:spcAft>
+              <a:defRPr sz="1300">
+                <a:solidFill>
+                  <a:srgbClr val="1C2D46"/>
+                </a:solidFill>
+                <a:latin typeface="Aptos"/>
+              </a:defRPr>
+            </a:pPr>
+            <a:r>
+              <a:t>Should be recalibrated with real campaign outcomes.</a:t>
+            </a:r>
+          </a:p>
+        </p:txBody>
+      </p:sp>
+      <p:sp>
+        <p:nvSpPr>
+          <p:cNvPr id="10" name="TextBox 9"/>
+          <p:cNvSpPr txBox="1"/>
+          <p:nvPr/>
+        </p:nvSpPr>
+        <p:spPr>
+          <a:xfrm>
+            <a:off x="502920" y="6428232"/>
+            <a:ext cx="8503920" cy="310896"/>
+          </a:xfrm>
+          <a:prstGeom prst="rect">
+            <a:avLst/>
+          </a:prstGeom>
+          <a:noFill/>
+        </p:spPr>
+        <p:txBody>
+          <a:bodyPr wrap="none">
+            <a:spAutoFit/>
+          </a:bodyPr>
+          <a:lstStyle/>
+          <a:p>
+            <a:pPr algn="l">
+              <a:spcAft>
+                <a:spcPts val="0"/>
+              </a:spcAft>
+            </a:pPr>
+            <a:r>
+              <a:rPr sz="850">
+                <a:solidFill>
+                  <a:srgbClr val="6E8098"/>
+                </a:solidFill>
+                <a:latin typeface="Aptos"/>
+              </a:rPr>
+              <a:t>Sources: </a:t>
+            </a:r>
+            <a:r>
+              <a:rPr sz="850">
+                <a:solidFill>
+                  <a:srgbClr val="6E8098"/>
+                </a:solidFill>
+                <a:latin typeface="Aptos"/>
+              </a:rPr>
+              <a:t>roi_simulation.py (internal)</a:t>
+            </a:r>
+            <a:r>
+              <a:rPr sz="850">
+                <a:solidFill>
+                  <a:srgbClr val="8291A5"/>
+                </a:solidFill>
+                <a:latin typeface="Aptos"/>
+              </a:rPr>
+              <a:t> | </a:t>
+            </a:r>
+            <a:r>
+              <a:rPr sz="850">
+                <a:solidFill>
+                  <a:srgbClr val="6E8098"/>
+                </a:solidFill>
+                <a:latin typeface="Aptos"/>
+              </a:rPr>
+              <a:t>ROI tab UI (app.py)</a:t>
+            </a:r>
+            <a:r>
+              <a:rPr sz="850">
+                <a:solidFill>
+                  <a:srgbClr val="8291A5"/>
+                </a:solidFill>
+                <a:latin typeface="Aptos"/>
+              </a:rPr>
+              <a:t> | </a:t>
+            </a:r>
+            <a:r>
+              <a:rPr sz="850" u="sng">
+                <a:solidFill>
+                  <a:srgbClr val="1A7DBC"/>
+                </a:solidFill>
+                <a:latin typeface="Aptos"/>
+                <a:hlinkClick r:id="rId2"/>
+              </a:rPr>
+              <a:t>IAB creator spend context</a:t>
+            </a:r>
+          </a:p>
+        </p:txBody>
+      </p:sp>
+      <p:sp>
+        <p:nvSpPr>
+          <p:cNvPr id="11" name="TextBox 10"/>
+          <p:cNvSpPr txBox="1"/>
+          <p:nvPr/>
+        </p:nvSpPr>
+        <p:spPr>
+          <a:xfrm>
+            <a:off x="9189720" y="6428232"/>
+            <a:ext cx="2514600" cy="292608"/>
+          </a:xfrm>
+          <a:prstGeom prst="rect">
+            <a:avLst/>
+          </a:prstGeom>
+          <a:noFill/>
+        </p:spPr>
+        <p:txBody>
+          <a:bodyPr wrap="none">
+            <a:spAutoFit/>
+          </a:bodyPr>
+          <a:lstStyle/>
+          <a:p>
+            <a:pPr algn="r">
+              <a:defRPr sz="900">
+                <a:solidFill>
+                  <a:srgbClr val="6E8098"/>
+                </a:solidFill>
+                <a:latin typeface="Aptos"/>
+              </a:defRPr>
+            </a:pPr>
+            <a:r>
+              <a:t>Backup 20 | ROI Interpretation</a:t>
+            </a:r>
+          </a:p>
+        </p:txBody>
+      </p:sp>
+    </p:spTree>
+  </p:cSld>
+  <p:clrMapOvr>
+    <a:masterClrMapping/>
+  </p:clrMapOvr>
+</p:sld>
+</file>
+
+<file path=ppt/slides/slide21.xml><?xml version="1.0" encoding="utf-8"?>
+<p:sld xmlns:a="http://schemas.openxmlformats.org/drawingml/2006/main" xmlns:p="http://schemas.openxmlformats.org/presentationml/2006/main" xmlns:r="http://schemas.openxmlformats.org/officeDocument/2006/relationships">
+  <p:cSld>
+    <p:spTree>
+      <p:nvGrpSpPr>
+        <p:cNvPr id="1" name=""/>
+        <p:cNvGrpSpPr/>
+        <p:nvPr/>
+      </p:nvGrpSpPr>
+      <p:grpSpPr/>
+      <p:sp>
+        <p:nvSpPr>
+          <p:cNvPr id="2" name="TextBox 1"/>
+          <p:cNvSpPr txBox="1"/>
+          <p:nvPr/>
+        </p:nvSpPr>
+        <p:spPr>
+          <a:xfrm>
+            <a:off x="594360" y="320040"/>
+            <a:ext cx="11064240" cy="914400"/>
+          </a:xfrm>
+          <a:prstGeom prst="rect">
+            <a:avLst/>
+          </a:prstGeom>
+          <a:noFill/>
+        </p:spPr>
+        <p:txBody>
+          <a:bodyPr wrap="none">
+            <a:spAutoFit/>
+          </a:bodyPr>
+          <a:lstStyle/>
+          <a:p>
+            <a:pPr>
+              <a:defRPr sz="3200" b="1">
+                <a:solidFill>
+                  <a:srgbClr val="0F2C59"/>
+                </a:solidFill>
+                <a:latin typeface="Aptos Display"/>
+              </a:defRPr>
+            </a:pPr>
+            <a:r>
+              <a:t>Backup: Business Impact Detail</a:t>
+            </a:r>
+          </a:p>
+        </p:txBody>
+      </p:sp>
+      <p:sp>
+        <p:nvSpPr>
+          <p:cNvPr id="3" name="Rectangle 2"/>
+          <p:cNvSpPr/>
+          <p:nvPr/>
+        </p:nvSpPr>
+        <p:spPr>
+          <a:xfrm>
+            <a:off x="566928" y="1755648"/>
+            <a:ext cx="2651760" cy="73152"/>
+          </a:xfrm>
+          <a:prstGeom prst="rect">
+            <a:avLst/>
+          </a:prstGeom>
+          <a:solidFill>
+            <a:srgbClr val="1A7DBC"/>
+          </a:solidFill>
+          <a:ln>
+            <a:noFill/>
+          </a:ln>
+        </p:spPr>
+        <p:style>
+          <a:lnRef idx="1">
+            <a:schemeClr val="accent1"/>
+          </a:lnRef>
+          <a:fillRef idx="3">
+            <a:schemeClr val="accent1"/>
+          </a:fillRef>
+          <a:effectRef idx="2">
+            <a:schemeClr val="accent1"/>
+          </a:effectRef>
+          <a:fontRef idx="minor">
+            <a:schemeClr val="lt1"/>
+          </a:fontRef>
+        </p:style>
+        <p:txBody>
+          <a:bodyPr rtlCol="0" anchor="ctr"/>
+          <a:lstStyle/>
+          <a:p>
+            <a:pPr algn="ctr"/>
+          </a:p>
+        </p:txBody>
+      </p:sp>
+      <p:sp>
+        <p:nvSpPr>
+          <p:cNvPr id="4" name="Rounded Rectangle 3"/>
+          <p:cNvSpPr/>
+          <p:nvPr/>
+        </p:nvSpPr>
+        <p:spPr>
+          <a:xfrm>
+            <a:off x="621792" y="1828800"/>
+            <a:ext cx="5440680" cy="4480560"/>
+          </a:xfrm>
+          <a:prstGeom prst="roundRect">
+            <a:avLst/>
+          </a:prstGeom>
+          <a:solidFill>
+            <a:srgbClr val="F2F7FC"/>
+          </a:solidFill>
+          <a:ln w="15875">
+            <a:solidFill>
+              <a:srgbClr val="CDDCEE"/>
+            </a:solidFill>
+          </a:ln>
+        </p:spPr>
+        <p:style>
+          <a:lnRef idx="1">
+            <a:schemeClr val="accent1"/>
+          </a:lnRef>
+          <a:fillRef idx="3">
+            <a:schemeClr val="accent1"/>
+          </a:fillRef>
+          <a:effectRef idx="2">
+            <a:schemeClr val="accent1"/>
+          </a:effectRef>
+          <a:fontRef idx="minor">
+            <a:schemeClr val="lt1"/>
+          </a:fontRef>
+        </p:style>
+        <p:txBody>
+          <a:bodyPr rtlCol="0" anchor="ctr"/>
+          <a:lstStyle/>
+          <a:p>
+            <a:pPr algn="ctr"/>
+          </a:p>
+        </p:txBody>
+      </p:sp>
+      <p:sp>
+        <p:nvSpPr>
+          <p:cNvPr id="5" name="TextBox 4"/>
+          <p:cNvSpPr txBox="1"/>
+          <p:nvPr/>
+        </p:nvSpPr>
+        <p:spPr>
+          <a:xfrm>
+            <a:off x="804672" y="1938528"/>
+            <a:ext cx="5166360" cy="347472"/>
+          </a:xfrm>
+          <a:prstGeom prst="rect">
+            <a:avLst/>
+          </a:prstGeom>
+          <a:noFill/>
+        </p:spPr>
+        <p:txBody>
+          <a:bodyPr wrap="none">
+            <a:spAutoFit/>
+          </a:bodyPr>
+          <a:lstStyle/>
+          <a:p>
+            <a:pPr>
+              <a:defRPr b="1" sz="1700">
+                <a:solidFill>
+                  <a:srgbClr val="133A66"/>
+                </a:solidFill>
+                <a:latin typeface="Aptos"/>
+              </a:defRPr>
+            </a:pPr>
+            <a:r>
+              <a:t>Expected Impact for Brand Teams</a:t>
+            </a:r>
+          </a:p>
+        </p:txBody>
+      </p:sp>
+      <p:sp>
+        <p:nvSpPr>
+          <p:cNvPr id="6" name="TextBox 5"/>
+          <p:cNvSpPr txBox="1"/>
+          <p:nvPr/>
+        </p:nvSpPr>
+        <p:spPr>
+          <a:xfrm>
+            <a:off x="786384" y="2267712"/>
+            <a:ext cx="5184648" cy="3950208"/>
+          </a:xfrm>
+          <a:prstGeom prst="rect">
+            <a:avLst/>
+          </a:prstGeom>
+          <a:noFill/>
+        </p:spPr>
+        <p:txBody>
+          <a:bodyPr wrap="square">
+            <a:spAutoFit/>
+          </a:bodyPr>
+          <a:lstStyle/>
+          <a:p>
+            <a:pPr>
+              <a:spcAft>
+                <a:spcPts val="800"/>
+              </a:spcAft>
+              <a:defRPr sz="1300">
+                <a:solidFill>
+                  <a:srgbClr val="1C2D46"/>
+                </a:solidFill>
+                <a:latin typeface="Aptos"/>
+              </a:defRPr>
+            </a:pPr>
+            <a:r>
+              <a:t>Shortens creator research-to-shortlist cycle.</a:t>
+            </a:r>
+          </a:p>
+          <a:p>
+            <a:pPr>
+              <a:spcAft>
+                <a:spcPts val="800"/>
+              </a:spcAft>
+              <a:defRPr sz="1300">
+                <a:solidFill>
+                  <a:srgbClr val="1C2D46"/>
+                </a:solidFill>
+                <a:latin typeface="Aptos"/>
+              </a:defRPr>
+            </a:pPr>
+            <a:r>
+              <a:t>Converts opaque creator selection into transparent scorecards.</a:t>
+            </a:r>
+          </a:p>
+          <a:p>
+            <a:pPr>
+              <a:spcAft>
+                <a:spcPts val="800"/>
+              </a:spcAft>
+              <a:defRPr sz="1300">
+                <a:solidFill>
+                  <a:srgbClr val="1C2D46"/>
+                </a:solidFill>
+                <a:latin typeface="Aptos"/>
+              </a:defRPr>
+            </a:pPr>
+            <a:r>
+              <a:t>Adds reliability penalties to reduce false-positive picks.</a:t>
+            </a:r>
+          </a:p>
+          <a:p>
+            <a:pPr>
+              <a:spcAft>
+                <a:spcPts val="800"/>
+              </a:spcAft>
+              <a:defRPr sz="1300">
+                <a:solidFill>
+                  <a:srgbClr val="1C2D46"/>
+                </a:solidFill>
+                <a:latin typeface="Aptos"/>
+              </a:defRPr>
+            </a:pPr>
+            <a:r>
+              <a:t>Supports benchmark-based discussions with stakeholders.</a:t>
+            </a:r>
+          </a:p>
+          <a:p>
+            <a:pPr>
+              <a:spcAft>
+                <a:spcPts val="800"/>
+              </a:spcAft>
+              <a:defRPr sz="1300">
+                <a:solidFill>
+                  <a:srgbClr val="1C2D46"/>
+                </a:solidFill>
+                <a:latin typeface="Aptos"/>
+              </a:defRPr>
+            </a:pPr>
+            <a:r>
+              <a:t>Enables repeatable weekly operating rhythm.</a:t>
+            </a:r>
+          </a:p>
+          <a:p>
+            <a:pPr>
+              <a:spcAft>
+                <a:spcPts val="800"/>
+              </a:spcAft>
+              <a:defRPr sz="1300">
+                <a:solidFill>
+                  <a:srgbClr val="1C2D46"/>
+                </a:solidFill>
+                <a:latin typeface="Aptos"/>
+              </a:defRPr>
+            </a:pPr>
+            <a:r>
+              <a:t>Improves auditability for campaign post-mortems.</a:t>
+            </a:r>
+          </a:p>
+        </p:txBody>
+      </p:sp>
+      <p:sp>
+        <p:nvSpPr>
+          <p:cNvPr id="7" name="Rounded Rectangle 6"/>
+          <p:cNvSpPr/>
+          <p:nvPr/>
+        </p:nvSpPr>
+        <p:spPr>
+          <a:xfrm>
+            <a:off x="6144768" y="1828800"/>
+            <a:ext cx="5440680" cy="4480560"/>
+          </a:xfrm>
+          <a:prstGeom prst="roundRect">
+            <a:avLst/>
+          </a:prstGeom>
+          <a:solidFill>
+            <a:srgbClr val="F2F7FC"/>
+          </a:solidFill>
+          <a:ln w="15875">
+            <a:solidFill>
+              <a:srgbClr val="CDDCEE"/>
+            </a:solidFill>
+          </a:ln>
+        </p:spPr>
+        <p:style>
+          <a:lnRef idx="1">
+            <a:schemeClr val="accent1"/>
+          </a:lnRef>
+          <a:fillRef idx="3">
+            <a:schemeClr val="accent1"/>
+          </a:fillRef>
+          <a:effectRef idx="2">
+            <a:schemeClr val="accent1"/>
+          </a:effectRef>
+          <a:fontRef idx="minor">
+            <a:schemeClr val="lt1"/>
+          </a:fontRef>
+        </p:style>
+        <p:txBody>
+          <a:bodyPr rtlCol="0" anchor="ctr"/>
+          <a:lstStyle/>
+          <a:p>
+            <a:pPr algn="ctr"/>
+          </a:p>
+        </p:txBody>
+      </p:sp>
+      <p:sp>
+        <p:nvSpPr>
+          <p:cNvPr id="8" name="TextBox 7"/>
+          <p:cNvSpPr txBox="1"/>
+          <p:nvPr/>
+        </p:nvSpPr>
+        <p:spPr>
+          <a:xfrm>
+            <a:off x="6327648" y="1938528"/>
+            <a:ext cx="5166360" cy="347472"/>
+          </a:xfrm>
+          <a:prstGeom prst="rect">
+            <a:avLst/>
+          </a:prstGeom>
+          <a:noFill/>
+        </p:spPr>
+        <p:txBody>
+          <a:bodyPr wrap="none">
+            <a:spAutoFit/>
+          </a:bodyPr>
+          <a:lstStyle/>
+          <a:p>
+            <a:pPr>
+              <a:defRPr b="1" sz="1700">
+                <a:solidFill>
+                  <a:srgbClr val="133A66"/>
+                </a:solidFill>
+                <a:latin typeface="Aptos"/>
+              </a:defRPr>
+            </a:pPr>
+            <a:r>
+              <a:t>Why the Timing Is Urgent</a:t>
+            </a:r>
+          </a:p>
+        </p:txBody>
+      </p:sp>
+      <p:sp>
+        <p:nvSpPr>
+          <p:cNvPr id="9" name="TextBox 8"/>
+          <p:cNvSpPr txBox="1"/>
+          <p:nvPr/>
+        </p:nvSpPr>
+        <p:spPr>
+          <a:xfrm>
+            <a:off x="6309359" y="2267712"/>
+            <a:ext cx="5184648" cy="3950208"/>
+          </a:xfrm>
+          <a:prstGeom prst="rect">
+            <a:avLst/>
+          </a:prstGeom>
+          <a:noFill/>
+        </p:spPr>
+        <p:txBody>
+          <a:bodyPr wrap="square">
+            <a:spAutoFit/>
+          </a:bodyPr>
+          <a:lstStyle/>
+          <a:p>
+            <a:pPr>
+              <a:spcAft>
+                <a:spcPts val="800"/>
+              </a:spcAft>
+              <a:defRPr sz="1300">
+                <a:solidFill>
+                  <a:srgbClr val="1C2D46"/>
+                </a:solidFill>
+                <a:latin typeface="Aptos"/>
+              </a:defRPr>
+            </a:pPr>
+            <a:r>
+              <a:t>Creator budget scale is increasing rapidly.</a:t>
+            </a:r>
+          </a:p>
+          <a:p>
+            <a:pPr>
+              <a:spcAft>
+                <a:spcPts val="800"/>
+              </a:spcAft>
+              <a:defRPr sz="1300">
+                <a:solidFill>
+                  <a:srgbClr val="1C2D46"/>
+                </a:solidFill>
+                <a:latin typeface="Aptos"/>
+              </a:defRPr>
+            </a:pPr>
+            <a:r>
+              <a:t>Teams still report time and ROI measurement friction.</a:t>
+            </a:r>
+          </a:p>
+          <a:p>
+            <a:pPr>
+              <a:spcAft>
+                <a:spcPts val="800"/>
+              </a:spcAft>
+              <a:defRPr sz="1300">
+                <a:solidFill>
+                  <a:srgbClr val="1C2D46"/>
+                </a:solidFill>
+                <a:latin typeface="Aptos"/>
+              </a:defRPr>
+            </a:pPr>
+            <a:r>
+              <a:t>Beauty category adds extra pressure via high social influence.</a:t>
+            </a:r>
+          </a:p>
+          <a:p>
+            <a:pPr>
+              <a:spcAft>
+                <a:spcPts val="800"/>
+              </a:spcAft>
+              <a:defRPr sz="1300">
+                <a:solidFill>
+                  <a:srgbClr val="1C2D46"/>
+                </a:solidFill>
+                <a:latin typeface="Aptos"/>
+              </a:defRPr>
+            </a:pPr>
+            <a:r>
+              <a:t>Higher CAC increases cost of poor creator matching.</a:t>
+            </a:r>
+          </a:p>
+          <a:p>
+            <a:pPr>
+              <a:spcAft>
+                <a:spcPts val="800"/>
+              </a:spcAft>
+              <a:defRPr sz="1300">
+                <a:solidFill>
+                  <a:srgbClr val="1C2D46"/>
+                </a:solidFill>
+                <a:latin typeface="Aptos"/>
+              </a:defRPr>
+            </a:pPr>
+            <a:r>
+              <a:t>Brands need decision systems, not one-off creator lists.</a:t>
+            </a:r>
+          </a:p>
+          <a:p>
+            <a:pPr>
+              <a:spcAft>
+                <a:spcPts val="800"/>
+              </a:spcAft>
+              <a:defRPr sz="1300">
+                <a:solidFill>
+                  <a:srgbClr val="1C2D46"/>
+                </a:solidFill>
+                <a:latin typeface="Aptos"/>
+              </a:defRPr>
+            </a:pPr>
+            <a:r>
+              <a:t>AI-MCN framing reduces dependency on opaque intermediaries.</a:t>
+            </a:r>
+          </a:p>
+        </p:txBody>
+      </p:sp>
+      <p:sp>
+        <p:nvSpPr>
+          <p:cNvPr id="10" name="TextBox 9"/>
+          <p:cNvSpPr txBox="1"/>
+          <p:nvPr/>
+        </p:nvSpPr>
+        <p:spPr>
+          <a:xfrm>
+            <a:off x="502920" y="6428232"/>
+            <a:ext cx="8503920" cy="310896"/>
+          </a:xfrm>
+          <a:prstGeom prst="rect">
+            <a:avLst/>
+          </a:prstGeom>
+          <a:noFill/>
+        </p:spPr>
+        <p:txBody>
+          <a:bodyPr wrap="none">
+            <a:spAutoFit/>
+          </a:bodyPr>
+          <a:lstStyle/>
+          <a:p>
+            <a:pPr algn="l">
+              <a:spcAft>
+                <a:spcPts val="0"/>
+              </a:spcAft>
+            </a:pPr>
+            <a:r>
+              <a:rPr sz="850">
+                <a:solidFill>
+                  <a:srgbClr val="6E8098"/>
+                </a:solidFill>
+                <a:latin typeface="Aptos"/>
+              </a:rPr>
+              <a:t>Sources: </a:t>
+            </a:r>
+            <a:r>
+              <a:rPr sz="850" u="sng">
+                <a:solidFill>
+                  <a:srgbClr val="1A7DBC"/>
+                </a:solidFill>
+                <a:latin typeface="Aptos"/>
+                <a:hlinkClick r:id="rId2"/>
+              </a:rPr>
+              <a:t>IAB Creator Economy 2025</a:t>
+            </a:r>
+            <a:r>
+              <a:rPr sz="850">
+                <a:solidFill>
+                  <a:srgbClr val="8291A5"/>
+                </a:solidFill>
+                <a:latin typeface="Aptos"/>
+              </a:rPr>
+              <a:t> | </a:t>
+            </a:r>
+            <a:r>
+              <a:rPr sz="850" u="sng">
+                <a:solidFill>
+                  <a:srgbClr val="1A7DBC"/>
+                </a:solidFill>
+                <a:latin typeface="Aptos"/>
+                <a:hlinkClick r:id="rId3"/>
+              </a:rPr>
+              <a:t>EMARKETER 2025</a:t>
+            </a:r>
+            <a:r>
+              <a:rPr sz="850">
+                <a:solidFill>
+                  <a:srgbClr val="8291A5"/>
+                </a:solidFill>
+                <a:latin typeface="Aptos"/>
+              </a:rPr>
+              <a:t> | </a:t>
+            </a:r>
+            <a:r>
+              <a:rPr sz="850" u="sng">
+                <a:solidFill>
+                  <a:srgbClr val="1A7DBC"/>
+                </a:solidFill>
+                <a:latin typeface="Aptos"/>
+                <a:hlinkClick r:id="rId4"/>
+              </a:rPr>
+              <a:t>Sprout workload findings</a:t>
+            </a:r>
+          </a:p>
+        </p:txBody>
+      </p:sp>
+      <p:sp>
+        <p:nvSpPr>
+          <p:cNvPr id="11" name="TextBox 10"/>
+          <p:cNvSpPr txBox="1"/>
+          <p:nvPr/>
+        </p:nvSpPr>
+        <p:spPr>
+          <a:xfrm>
+            <a:off x="9189720" y="6428232"/>
+            <a:ext cx="2514600" cy="292608"/>
+          </a:xfrm>
+          <a:prstGeom prst="rect">
+            <a:avLst/>
+          </a:prstGeom>
+          <a:noFill/>
+        </p:spPr>
+        <p:txBody>
+          <a:bodyPr wrap="none">
+            <a:spAutoFit/>
+          </a:bodyPr>
+          <a:lstStyle/>
+          <a:p>
+            <a:pPr algn="r">
+              <a:defRPr sz="900">
+                <a:solidFill>
+                  <a:srgbClr val="6E8098"/>
+                </a:solidFill>
+                <a:latin typeface="Aptos"/>
+              </a:defRPr>
+            </a:pPr>
+            <a:r>
+              <a:t>Backup 21 | Impact Detail</a:t>
+            </a:r>
+          </a:p>
+        </p:txBody>
+      </p:sp>
+    </p:spTree>
+  </p:cSld>
+  <p:clrMapOvr>
+    <a:masterClrMapping/>
+  </p:clrMapOvr>
+</p:sld>
+</file>
+
+<file path=ppt/slides/slide22.xml><?xml version="1.0" encoding="utf-8"?>
+<p:sld xmlns:a="http://schemas.openxmlformats.org/drawingml/2006/main" xmlns:p="http://schemas.openxmlformats.org/presentationml/2006/main" xmlns:r="http://schemas.openxmlformats.org/officeDocument/2006/relationships">
+  <p:cSld>
+    <p:spTree>
+      <p:nvGrpSpPr>
+        <p:cNvPr id="1" name=""/>
+        <p:cNvGrpSpPr/>
+        <p:nvPr/>
+      </p:nvGrpSpPr>
+      <p:grpSpPr/>
+      <p:sp>
+        <p:nvSpPr>
+          <p:cNvPr id="2" name="TextBox 1"/>
+          <p:cNvSpPr txBox="1"/>
+          <p:nvPr/>
+        </p:nvSpPr>
+        <p:spPr>
+          <a:xfrm>
+            <a:off x="594360" y="320040"/>
+            <a:ext cx="11064240" cy="914400"/>
+          </a:xfrm>
+          <a:prstGeom prst="rect">
+            <a:avLst/>
+          </a:prstGeom>
+          <a:noFill/>
+        </p:spPr>
+        <p:txBody>
+          <a:bodyPr wrap="none">
+            <a:spAutoFit/>
+          </a:bodyPr>
+          <a:lstStyle/>
+          <a:p>
+            <a:pPr>
+              <a:defRPr sz="3200" b="1">
+                <a:solidFill>
+                  <a:srgbClr val="0F2C59"/>
+                </a:solidFill>
+                <a:latin typeface="Aptos Display"/>
+              </a:defRPr>
+            </a:pPr>
+            <a:r>
+              <a:t>Backup: Limitations and Governance Detail</a:t>
+            </a:r>
+          </a:p>
+        </p:txBody>
+      </p:sp>
+      <p:sp>
+        <p:nvSpPr>
+          <p:cNvPr id="3" name="Rectangle 2"/>
+          <p:cNvSpPr/>
+          <p:nvPr/>
+        </p:nvSpPr>
+        <p:spPr>
+          <a:xfrm>
+            <a:off x="566928" y="1755648"/>
+            <a:ext cx="2651760" cy="73152"/>
+          </a:xfrm>
+          <a:prstGeom prst="rect">
+            <a:avLst/>
+          </a:prstGeom>
+          <a:solidFill>
+            <a:srgbClr val="1A7DBC"/>
+          </a:solidFill>
+          <a:ln>
+            <a:noFill/>
+          </a:ln>
+        </p:spPr>
+        <p:style>
+          <a:lnRef idx="1">
+            <a:schemeClr val="accent1"/>
+          </a:lnRef>
+          <a:fillRef idx="3">
+            <a:schemeClr val="accent1"/>
+          </a:fillRef>
+          <a:effectRef idx="2">
+            <a:schemeClr val="accent1"/>
+          </a:effectRef>
+          <a:fontRef idx="minor">
+            <a:schemeClr val="lt1"/>
+          </a:fontRef>
+        </p:style>
+        <p:txBody>
+          <a:bodyPr rtlCol="0" anchor="ctr"/>
+          <a:lstStyle/>
+          <a:p>
+            <a:pPr algn="ctr"/>
+          </a:p>
+        </p:txBody>
+      </p:sp>
+      <p:sp>
+        <p:nvSpPr>
+          <p:cNvPr id="4" name="Rounded Rectangle 3"/>
+          <p:cNvSpPr/>
+          <p:nvPr/>
+        </p:nvSpPr>
+        <p:spPr>
+          <a:xfrm>
+            <a:off x="621792" y="1828800"/>
+            <a:ext cx="5440680" cy="4480560"/>
+          </a:xfrm>
+          <a:prstGeom prst="roundRect">
+            <a:avLst/>
+          </a:prstGeom>
+          <a:solidFill>
+            <a:srgbClr val="F2F7FC"/>
+          </a:solidFill>
+          <a:ln w="15875">
+            <a:solidFill>
+              <a:srgbClr val="CDDCEE"/>
+            </a:solidFill>
+          </a:ln>
+        </p:spPr>
+        <p:style>
+          <a:lnRef idx="1">
+            <a:schemeClr val="accent1"/>
+          </a:lnRef>
+          <a:fillRef idx="3">
+            <a:schemeClr val="accent1"/>
+          </a:fillRef>
+          <a:effectRef idx="2">
+            <a:schemeClr val="accent1"/>
+          </a:effectRef>
+          <a:fontRef idx="minor">
+            <a:schemeClr val="lt1"/>
+          </a:fontRef>
+        </p:style>
+        <p:txBody>
+          <a:bodyPr rtlCol="0" anchor="ctr"/>
+          <a:lstStyle/>
+          <a:p>
+            <a:pPr algn="ctr"/>
+          </a:p>
+        </p:txBody>
+      </p:sp>
+      <p:sp>
+        <p:nvSpPr>
+          <p:cNvPr id="5" name="TextBox 4"/>
+          <p:cNvSpPr txBox="1"/>
+          <p:nvPr/>
+        </p:nvSpPr>
+        <p:spPr>
+          <a:xfrm>
+            <a:off x="804672" y="1938528"/>
+            <a:ext cx="5166360" cy="347472"/>
+          </a:xfrm>
+          <a:prstGeom prst="rect">
+            <a:avLst/>
+          </a:prstGeom>
+          <a:noFill/>
+        </p:spPr>
+        <p:txBody>
+          <a:bodyPr wrap="none">
+            <a:spAutoFit/>
+          </a:bodyPr>
+          <a:lstStyle/>
+          <a:p>
+            <a:pPr>
+              <a:defRPr b="1" sz="1700">
+                <a:solidFill>
+                  <a:srgbClr val="133A66"/>
+                </a:solidFill>
+                <a:latin typeface="Aptos"/>
+              </a:defRPr>
+            </a:pPr>
+            <a:r>
+              <a:t>Current Technical Constraints</a:t>
+            </a:r>
+          </a:p>
+        </p:txBody>
+      </p:sp>
+      <p:sp>
+        <p:nvSpPr>
+          <p:cNvPr id="6" name="TextBox 5"/>
+          <p:cNvSpPr txBox="1"/>
+          <p:nvPr/>
+        </p:nvSpPr>
+        <p:spPr>
+          <a:xfrm>
+            <a:off x="786384" y="2267712"/>
+            <a:ext cx="5184648" cy="3950208"/>
+          </a:xfrm>
+          <a:prstGeom prst="rect">
+            <a:avLst/>
+          </a:prstGeom>
+          <a:noFill/>
+        </p:spPr>
+        <p:txBody>
+          <a:bodyPr wrap="square">
+            <a:spAutoFit/>
+          </a:bodyPr>
+          <a:lstStyle/>
+          <a:p>
+            <a:pPr>
+              <a:spcAft>
+                <a:spcPts val="800"/>
+              </a:spcAft>
+              <a:defRPr sz="1300">
+                <a:solidFill>
+                  <a:srgbClr val="1C2D46"/>
+                </a:solidFill>
+                <a:latin typeface="Aptos"/>
+              </a:defRPr>
+            </a:pPr>
+            <a:r>
+              <a:t>Dataset is pre-collected, not full live multi-platform ingestion.</a:t>
+            </a:r>
+          </a:p>
+          <a:p>
+            <a:pPr>
+              <a:spcAft>
+                <a:spcPts val="800"/>
+              </a:spcAft>
+              <a:defRPr sz="1300">
+                <a:solidFill>
+                  <a:srgbClr val="1C2D46"/>
+                </a:solidFill>
+                <a:latin typeface="Aptos"/>
+              </a:defRPr>
+            </a:pPr>
+            <a:r>
+              <a:t>Coverage depends on available YouTube data and keyword filters.</a:t>
+            </a:r>
+          </a:p>
+          <a:p>
+            <a:pPr>
+              <a:spcAft>
+                <a:spcPts val="800"/>
+              </a:spcAft>
+              <a:defRPr sz="1300">
+                <a:solidFill>
+                  <a:srgbClr val="1C2D46"/>
+                </a:solidFill>
+                <a:latin typeface="Aptos"/>
+              </a:defRPr>
+            </a:pPr>
+            <a:r>
+              <a:t>ROI output is assumption-based simulation.</a:t>
+            </a:r>
+          </a:p>
+          <a:p>
+            <a:pPr>
+              <a:spcAft>
+                <a:spcPts val="800"/>
+              </a:spcAft>
+              <a:defRPr sz="1300">
+                <a:solidFill>
+                  <a:srgbClr val="1C2D46"/>
+                </a:solidFill>
+                <a:latin typeface="Aptos"/>
+              </a:defRPr>
+            </a:pPr>
+            <a:r>
+              <a:t>Semantic enrichment quality depends on text richness.</a:t>
+            </a:r>
+          </a:p>
+          <a:p>
+            <a:pPr>
+              <a:spcAft>
+                <a:spcPts val="800"/>
+              </a:spcAft>
+              <a:defRPr sz="1300">
+                <a:solidFill>
+                  <a:srgbClr val="1C2D46"/>
+                </a:solidFill>
+                <a:latin typeface="Aptos"/>
+              </a:defRPr>
+            </a:pPr>
+            <a:r>
+              <a:t>Community structure may still be concentrated in sub-niches.</a:t>
+            </a:r>
+          </a:p>
+          <a:p>
+            <a:pPr>
+              <a:spcAft>
+                <a:spcPts val="800"/>
+              </a:spcAft>
+              <a:defRPr sz="1300">
+                <a:solidFill>
+                  <a:srgbClr val="1C2D46"/>
+                </a:solidFill>
+                <a:latin typeface="Aptos"/>
+              </a:defRPr>
+            </a:pPr>
+            <a:r>
+              <a:t>Cloud demo mode can use reduced snapshot data.</a:t>
+            </a:r>
+          </a:p>
+        </p:txBody>
+      </p:sp>
+      <p:sp>
+        <p:nvSpPr>
+          <p:cNvPr id="7" name="Rounded Rectangle 6"/>
+          <p:cNvSpPr/>
+          <p:nvPr/>
+        </p:nvSpPr>
+        <p:spPr>
+          <a:xfrm>
+            <a:off x="6144768" y="1828800"/>
+            <a:ext cx="5440680" cy="4480560"/>
+          </a:xfrm>
+          <a:prstGeom prst="roundRect">
+            <a:avLst/>
+          </a:prstGeom>
+          <a:solidFill>
+            <a:srgbClr val="F2F7FC"/>
+          </a:solidFill>
+          <a:ln w="15875">
+            <a:solidFill>
+              <a:srgbClr val="CDDCEE"/>
+            </a:solidFill>
+          </a:ln>
+        </p:spPr>
+        <p:style>
+          <a:lnRef idx="1">
+            <a:schemeClr val="accent1"/>
+          </a:lnRef>
+          <a:fillRef idx="3">
+            <a:schemeClr val="accent1"/>
+          </a:fillRef>
+          <a:effectRef idx="2">
+            <a:schemeClr val="accent1"/>
+          </a:effectRef>
+          <a:fontRef idx="minor">
+            <a:schemeClr val="lt1"/>
+          </a:fontRef>
+        </p:style>
+        <p:txBody>
+          <a:bodyPr rtlCol="0" anchor="ctr"/>
+          <a:lstStyle/>
+          <a:p>
+            <a:pPr algn="ctr"/>
+          </a:p>
+        </p:txBody>
+      </p:sp>
+      <p:sp>
+        <p:nvSpPr>
+          <p:cNvPr id="8" name="TextBox 7"/>
+          <p:cNvSpPr txBox="1"/>
+          <p:nvPr/>
+        </p:nvSpPr>
+        <p:spPr>
+          <a:xfrm>
+            <a:off x="6327648" y="1938528"/>
+            <a:ext cx="5166360" cy="347472"/>
+          </a:xfrm>
+          <a:prstGeom prst="rect">
+            <a:avLst/>
+          </a:prstGeom>
+          <a:noFill/>
+        </p:spPr>
+        <p:txBody>
+          <a:bodyPr wrap="none">
+            <a:spAutoFit/>
+          </a:bodyPr>
+          <a:lstStyle/>
+          <a:p>
+            <a:pPr>
+              <a:defRPr b="1" sz="1700">
+                <a:solidFill>
+                  <a:srgbClr val="133A66"/>
+                </a:solidFill>
+                <a:latin typeface="Aptos"/>
+              </a:defRPr>
+            </a:pPr>
+            <a:r>
+              <a:t>Governance and Compliance Controls</a:t>
+            </a:r>
+          </a:p>
+        </p:txBody>
+      </p:sp>
+      <p:sp>
+        <p:nvSpPr>
+          <p:cNvPr id="9" name="TextBox 8"/>
+          <p:cNvSpPr txBox="1"/>
+          <p:nvPr/>
+        </p:nvSpPr>
+        <p:spPr>
+          <a:xfrm>
+            <a:off x="6309359" y="2267712"/>
+            <a:ext cx="5184648" cy="3950208"/>
+          </a:xfrm>
+          <a:prstGeom prst="rect">
+            <a:avLst/>
+          </a:prstGeom>
+          <a:noFill/>
+        </p:spPr>
+        <p:txBody>
+          <a:bodyPr wrap="square">
+            <a:spAutoFit/>
+          </a:bodyPr>
+          <a:lstStyle/>
+          <a:p>
+            <a:pPr>
+              <a:spcAft>
+                <a:spcPts val="800"/>
+              </a:spcAft>
+              <a:defRPr sz="1300">
+                <a:solidFill>
+                  <a:srgbClr val="1C2D46"/>
+                </a:solidFill>
+                <a:latin typeface="Aptos"/>
+              </a:defRPr>
+            </a:pPr>
+            <a:r>
+              <a:t>FTC disclosure and endorsement compliance must be enforced.</a:t>
+            </a:r>
+          </a:p>
+          <a:p>
+            <a:pPr>
+              <a:spcAft>
+                <a:spcPts val="800"/>
+              </a:spcAft>
+              <a:defRPr sz="1300">
+                <a:solidFill>
+                  <a:srgbClr val="1C2D46"/>
+                </a:solidFill>
+                <a:latin typeface="Aptos"/>
+              </a:defRPr>
+            </a:pPr>
+            <a:r>
+              <a:t>Claim safety checks needed for product-specific messaging.</a:t>
+            </a:r>
+          </a:p>
+          <a:p>
+            <a:pPr>
+              <a:spcAft>
+                <a:spcPts val="800"/>
+              </a:spcAft>
+              <a:defRPr sz="1300">
+                <a:solidFill>
+                  <a:srgbClr val="1C2D46"/>
+                </a:solidFill>
+                <a:latin typeface="Aptos"/>
+              </a:defRPr>
+            </a:pPr>
+            <a:r>
+              <a:t>Brand safety workflow should include human reviewer checkpoints.</a:t>
+            </a:r>
+          </a:p>
+          <a:p>
+            <a:pPr>
+              <a:spcAft>
+                <a:spcPts val="800"/>
+              </a:spcAft>
+              <a:defRPr sz="1300">
+                <a:solidFill>
+                  <a:srgbClr val="1C2D46"/>
+                </a:solidFill>
+                <a:latin typeface="Aptos"/>
+              </a:defRPr>
+            </a:pPr>
+            <a:r>
+              <a:t>Bias checks should be monitored as data evolves.</a:t>
+            </a:r>
+          </a:p>
+          <a:p>
+            <a:pPr>
+              <a:spcAft>
+                <a:spcPts val="800"/>
+              </a:spcAft>
+              <a:defRPr sz="1300">
+                <a:solidFill>
+                  <a:srgbClr val="1C2D46"/>
+                </a:solidFill>
+                <a:latin typeface="Aptos"/>
+              </a:defRPr>
+            </a:pPr>
+            <a:r>
+              <a:t>Recommendation logs should be retained for auditability.</a:t>
+            </a:r>
+          </a:p>
+          <a:p>
+            <a:pPr>
+              <a:spcAft>
+                <a:spcPts val="800"/>
+              </a:spcAft>
+              <a:defRPr sz="1300">
+                <a:solidFill>
+                  <a:srgbClr val="1C2D46"/>
+                </a:solidFill>
+                <a:latin typeface="Aptos"/>
+              </a:defRPr>
+            </a:pPr>
+            <a:r>
+              <a:t>Legal/marketing sign-off needed before launch decisions.</a:t>
+            </a:r>
+          </a:p>
+        </p:txBody>
+      </p:sp>
+      <p:sp>
+        <p:nvSpPr>
+          <p:cNvPr id="10" name="TextBox 9"/>
+          <p:cNvSpPr txBox="1"/>
+          <p:nvPr/>
+        </p:nvSpPr>
+        <p:spPr>
+          <a:xfrm>
+            <a:off x="502920" y="6428232"/>
+            <a:ext cx="8503920" cy="310896"/>
+          </a:xfrm>
+          <a:prstGeom prst="rect">
+            <a:avLst/>
+          </a:prstGeom>
+          <a:noFill/>
+        </p:spPr>
+        <p:txBody>
+          <a:bodyPr wrap="none">
+            <a:spAutoFit/>
+          </a:bodyPr>
+          <a:lstStyle/>
+          <a:p>
+            <a:pPr algn="l">
+              <a:spcAft>
+                <a:spcPts val="0"/>
+              </a:spcAft>
+            </a:pPr>
+            <a:r>
+              <a:rPr sz="850">
+                <a:solidFill>
+                  <a:srgbClr val="6E8098"/>
+                </a:solidFill>
+                <a:latin typeface="Aptos"/>
+              </a:rPr>
+              <a:t>Sources: </a:t>
+            </a:r>
+            <a:r>
+              <a:rPr sz="850" u="sng">
+                <a:solidFill>
+                  <a:srgbClr val="1A7DBC"/>
+                </a:solidFill>
+                <a:latin typeface="Aptos"/>
+                <a:hlinkClick r:id="rId2"/>
+              </a:rPr>
+              <a:t>FTC Influencers</a:t>
+            </a:r>
+            <a:r>
+              <a:rPr sz="850">
+                <a:solidFill>
+                  <a:srgbClr val="8291A5"/>
+                </a:solidFill>
+                <a:latin typeface="Aptos"/>
+              </a:rPr>
+              <a:t> | </a:t>
+            </a:r>
+            <a:r>
+              <a:rPr sz="850" u="sng">
+                <a:solidFill>
+                  <a:srgbClr val="1A7DBC"/>
+                </a:solidFill>
+                <a:latin typeface="Aptos"/>
+                <a:hlinkClick r:id="rId3"/>
+              </a:rPr>
+              <a:t>FTC Endorsement Guides</a:t>
+            </a:r>
+            <a:r>
+              <a:rPr sz="850">
+                <a:solidFill>
+                  <a:srgbClr val="8291A5"/>
+                </a:solidFill>
+                <a:latin typeface="Aptos"/>
+              </a:rPr>
+              <a:t> | </a:t>
+            </a:r>
+            <a:r>
+              <a:rPr sz="850" u="sng">
+                <a:solidFill>
+                  <a:srgbClr val="1A7DBC"/>
+                </a:solidFill>
+                <a:latin typeface="Aptos"/>
+                <a:hlinkClick r:id="rId4"/>
+              </a:rPr>
+              <a:t>FDA SIA</a:t>
+            </a:r>
+          </a:p>
+        </p:txBody>
+      </p:sp>
+      <p:sp>
+        <p:nvSpPr>
+          <p:cNvPr id="11" name="TextBox 10"/>
+          <p:cNvSpPr txBox="1"/>
+          <p:nvPr/>
+        </p:nvSpPr>
+        <p:spPr>
+          <a:xfrm>
+            <a:off x="9189720" y="6428232"/>
+            <a:ext cx="2514600" cy="292608"/>
+          </a:xfrm>
+          <a:prstGeom prst="rect">
+            <a:avLst/>
+          </a:prstGeom>
+          <a:noFill/>
+        </p:spPr>
+        <p:txBody>
+          <a:bodyPr wrap="none">
+            <a:spAutoFit/>
+          </a:bodyPr>
+          <a:lstStyle/>
+          <a:p>
+            <a:pPr algn="r">
+              <a:defRPr sz="900">
+                <a:solidFill>
+                  <a:srgbClr val="6E8098"/>
+                </a:solidFill>
+                <a:latin typeface="Aptos"/>
+              </a:defRPr>
+            </a:pPr>
+            <a:r>
+              <a:t>Backup 22 | Limitations &amp; Compliance</a:t>
+            </a:r>
+          </a:p>
+        </p:txBody>
+      </p:sp>
+    </p:spTree>
+  </p:cSld>
+  <p:clrMapOvr>
+    <a:masterClrMapping/>
+  </p:clrMapOvr>
+</p:sld>
+</file>
+
+<file path=ppt/slides/slide23.xml><?xml version="1.0" encoding="utf-8"?>
+<p:sld xmlns:a="http://schemas.openxmlformats.org/drawingml/2006/main" xmlns:p="http://schemas.openxmlformats.org/presentationml/2006/main" xmlns:r="http://schemas.openxmlformats.org/officeDocument/2006/relationships">
+  <p:cSld>
+    <p:spTree>
+      <p:nvGrpSpPr>
+        <p:cNvPr id="1" name=""/>
+        <p:cNvGrpSpPr/>
+        <p:nvPr/>
+      </p:nvGrpSpPr>
+      <p:grpSpPr/>
+      <p:sp>
+        <p:nvSpPr>
+          <p:cNvPr id="2" name="TextBox 1"/>
+          <p:cNvSpPr txBox="1"/>
+          <p:nvPr/>
+        </p:nvSpPr>
+        <p:spPr>
+          <a:xfrm>
+            <a:off x="594360" y="320040"/>
+            <a:ext cx="11064240" cy="914400"/>
+          </a:xfrm>
+          <a:prstGeom prst="rect">
+            <a:avLst/>
+          </a:prstGeom>
+          <a:noFill/>
+        </p:spPr>
+        <p:txBody>
+          <a:bodyPr wrap="none">
+            <a:spAutoFit/>
+          </a:bodyPr>
+          <a:lstStyle/>
+          <a:p>
+            <a:pPr>
+              <a:defRPr sz="3200" b="1">
+                <a:solidFill>
+                  <a:srgbClr val="0F2C59"/>
+                </a:solidFill>
+                <a:latin typeface="Aptos Display"/>
+              </a:defRPr>
+            </a:pPr>
+            <a:r>
+              <a:t>Backup: 90-Day Operational Roadmap</a:t>
+            </a:r>
+          </a:p>
+        </p:txBody>
+      </p:sp>
+      <p:sp>
+        <p:nvSpPr>
+          <p:cNvPr id="3" name="Rectangle 2"/>
+          <p:cNvSpPr/>
+          <p:nvPr/>
+        </p:nvSpPr>
+        <p:spPr>
+          <a:xfrm>
+            <a:off x="566928" y="1755648"/>
+            <a:ext cx="2651760" cy="73152"/>
+          </a:xfrm>
+          <a:prstGeom prst="rect">
+            <a:avLst/>
+          </a:prstGeom>
+          <a:solidFill>
+            <a:srgbClr val="1A7DBC"/>
+          </a:solidFill>
+          <a:ln>
+            <a:noFill/>
+          </a:ln>
+        </p:spPr>
+        <p:style>
+          <a:lnRef idx="1">
+            <a:schemeClr val="accent1"/>
+          </a:lnRef>
+          <a:fillRef idx="3">
+            <a:schemeClr val="accent1"/>
+          </a:fillRef>
+          <a:effectRef idx="2">
+            <a:schemeClr val="accent1"/>
+          </a:effectRef>
+          <a:fontRef idx="minor">
+            <a:schemeClr val="lt1"/>
+          </a:fontRef>
+        </p:style>
+        <p:txBody>
+          <a:bodyPr rtlCol="0" anchor="ctr"/>
+          <a:lstStyle/>
+          <a:p>
+            <a:pPr algn="ctr"/>
+          </a:p>
+        </p:txBody>
+      </p:sp>
+      <p:sp>
+        <p:nvSpPr>
+          <p:cNvPr id="4" name="Rounded Rectangle 3"/>
+          <p:cNvSpPr/>
+          <p:nvPr/>
+        </p:nvSpPr>
+        <p:spPr>
+          <a:xfrm>
+            <a:off x="621792" y="1828800"/>
+            <a:ext cx="5440680" cy="4480560"/>
+          </a:xfrm>
+          <a:prstGeom prst="roundRect">
+            <a:avLst/>
+          </a:prstGeom>
+          <a:solidFill>
+            <a:srgbClr val="F2F7FC"/>
+          </a:solidFill>
+          <a:ln w="15875">
+            <a:solidFill>
+              <a:srgbClr val="CDDCEE"/>
+            </a:solidFill>
+          </a:ln>
+        </p:spPr>
+        <p:style>
+          <a:lnRef idx="1">
+            <a:schemeClr val="accent1"/>
+          </a:lnRef>
+          <a:fillRef idx="3">
+            <a:schemeClr val="accent1"/>
+          </a:fillRef>
+          <a:effectRef idx="2">
+            <a:schemeClr val="accent1"/>
+          </a:effectRef>
+          <a:fontRef idx="minor">
+            <a:schemeClr val="lt1"/>
+          </a:fontRef>
+        </p:style>
+        <p:txBody>
+          <a:bodyPr rtlCol="0" anchor="ctr"/>
+          <a:lstStyle/>
+          <a:p>
+            <a:pPr algn="ctr"/>
+          </a:p>
+        </p:txBody>
+      </p:sp>
+      <p:sp>
+        <p:nvSpPr>
+          <p:cNvPr id="5" name="TextBox 4"/>
+          <p:cNvSpPr txBox="1"/>
+          <p:nvPr/>
+        </p:nvSpPr>
+        <p:spPr>
+          <a:xfrm>
+            <a:off x="804672" y="1938528"/>
+            <a:ext cx="5166360" cy="347472"/>
+          </a:xfrm>
+          <a:prstGeom prst="rect">
+            <a:avLst/>
+          </a:prstGeom>
+          <a:noFill/>
+        </p:spPr>
+        <p:txBody>
+          <a:bodyPr wrap="none">
+            <a:spAutoFit/>
+          </a:bodyPr>
+          <a:lstStyle/>
+          <a:p>
+            <a:pPr>
+              <a:defRPr b="1" sz="1700">
+                <a:solidFill>
+                  <a:srgbClr val="133A66"/>
+                </a:solidFill>
+                <a:latin typeface="Aptos"/>
+              </a:defRPr>
+            </a:pPr>
+            <a:r>
+              <a:t>Phase 1 (0-30 Days)</a:t>
+            </a:r>
+          </a:p>
+        </p:txBody>
+      </p:sp>
+      <p:sp>
+        <p:nvSpPr>
+          <p:cNvPr id="6" name="TextBox 5"/>
+          <p:cNvSpPr txBox="1"/>
+          <p:nvPr/>
+        </p:nvSpPr>
+        <p:spPr>
+          <a:xfrm>
+            <a:off x="786384" y="2267712"/>
+            <a:ext cx="5184648" cy="3950208"/>
+          </a:xfrm>
+          <a:prstGeom prst="rect">
+            <a:avLst/>
+          </a:prstGeom>
+          <a:noFill/>
+        </p:spPr>
+        <p:txBody>
+          <a:bodyPr wrap="square">
+            <a:spAutoFit/>
+          </a:bodyPr>
+          <a:lstStyle/>
+          <a:p>
+            <a:pPr>
+              <a:spcAft>
+                <a:spcPts val="800"/>
+              </a:spcAft>
+              <a:defRPr sz="1300">
+                <a:solidFill>
+                  <a:srgbClr val="1C2D46"/>
+                </a:solidFill>
+                <a:latin typeface="Aptos"/>
+              </a:defRPr>
+            </a:pPr>
+            <a:r>
+              <a:t>Lock weekly pipeline schedule and dashboard review cadence.</a:t>
+            </a:r>
+          </a:p>
+          <a:p>
+            <a:pPr>
+              <a:spcAft>
+                <a:spcPts val="800"/>
+              </a:spcAft>
+              <a:defRPr sz="1300">
+                <a:solidFill>
+                  <a:srgbClr val="1C2D46"/>
+                </a:solidFill>
+                <a:latin typeface="Aptos"/>
+              </a:defRPr>
+            </a:pPr>
+            <a:r>
+              <a:t>Define reviewer checklist for low-evidence channels.</a:t>
+            </a:r>
+          </a:p>
+          <a:p>
+            <a:pPr>
+              <a:spcAft>
+                <a:spcPts val="800"/>
+              </a:spcAft>
+              <a:defRPr sz="1300">
+                <a:solidFill>
+                  <a:srgbClr val="1C2D46"/>
+                </a:solidFill>
+                <a:latin typeface="Aptos"/>
+              </a:defRPr>
+            </a:pPr>
+            <a:r>
+              <a:t>Standardize export package for brand decision meetings.</a:t>
+            </a:r>
+          </a:p>
+          <a:p>
+            <a:pPr>
+              <a:spcAft>
+                <a:spcPts val="800"/>
+              </a:spcAft>
+              <a:defRPr sz="1300">
+                <a:solidFill>
+                  <a:srgbClr val="1C2D46"/>
+                </a:solidFill>
+                <a:latin typeface="Aptos"/>
+              </a:defRPr>
+            </a:pPr>
+            <a:r>
+              <a:t>Set benchmark brands by category for context comparison.</a:t>
+            </a:r>
+          </a:p>
+          <a:p>
+            <a:pPr>
+              <a:spcAft>
+                <a:spcPts val="800"/>
+              </a:spcAft>
+              <a:defRPr sz="1300">
+                <a:solidFill>
+                  <a:srgbClr val="1C2D46"/>
+                </a:solidFill>
+                <a:latin typeface="Aptos"/>
+              </a:defRPr>
+            </a:pPr>
+            <a:r>
+              <a:t>Track turnaround time and reviewer agreement metrics.</a:t>
+            </a:r>
+          </a:p>
+        </p:txBody>
+      </p:sp>
+      <p:sp>
+        <p:nvSpPr>
+          <p:cNvPr id="7" name="Rounded Rectangle 6"/>
+          <p:cNvSpPr/>
+          <p:nvPr/>
+        </p:nvSpPr>
+        <p:spPr>
+          <a:xfrm>
+            <a:off x="6144768" y="1828800"/>
+            <a:ext cx="5440680" cy="4480560"/>
+          </a:xfrm>
+          <a:prstGeom prst="roundRect">
+            <a:avLst/>
+          </a:prstGeom>
+          <a:solidFill>
+            <a:srgbClr val="F2F7FC"/>
+          </a:solidFill>
+          <a:ln w="15875">
+            <a:solidFill>
+              <a:srgbClr val="CDDCEE"/>
+            </a:solidFill>
+          </a:ln>
+        </p:spPr>
+        <p:style>
+          <a:lnRef idx="1">
+            <a:schemeClr val="accent1"/>
+          </a:lnRef>
+          <a:fillRef idx="3">
+            <a:schemeClr val="accent1"/>
+          </a:fillRef>
+          <a:effectRef idx="2">
+            <a:schemeClr val="accent1"/>
+          </a:effectRef>
+          <a:fontRef idx="minor">
+            <a:schemeClr val="lt1"/>
+          </a:fontRef>
+        </p:style>
+        <p:txBody>
+          <a:bodyPr rtlCol="0" anchor="ctr"/>
+          <a:lstStyle/>
+          <a:p>
+            <a:pPr algn="ctr"/>
+          </a:p>
+        </p:txBody>
+      </p:sp>
+      <p:sp>
+        <p:nvSpPr>
+          <p:cNvPr id="8" name="TextBox 7"/>
+          <p:cNvSpPr txBox="1"/>
+          <p:nvPr/>
+        </p:nvSpPr>
+        <p:spPr>
+          <a:xfrm>
+            <a:off x="6327648" y="1938528"/>
+            <a:ext cx="5166360" cy="347472"/>
+          </a:xfrm>
+          <a:prstGeom prst="rect">
+            <a:avLst/>
+          </a:prstGeom>
+          <a:noFill/>
+        </p:spPr>
+        <p:txBody>
+          <a:bodyPr wrap="none">
+            <a:spAutoFit/>
+          </a:bodyPr>
+          <a:lstStyle/>
+          <a:p>
+            <a:pPr>
+              <a:defRPr b="1" sz="1700">
+                <a:solidFill>
+                  <a:srgbClr val="133A66"/>
+                </a:solidFill>
+                <a:latin typeface="Aptos"/>
+              </a:defRPr>
+            </a:pPr>
+            <a:r>
+              <a:t>Phase 2-3 (31-90 Days)</a:t>
+            </a:r>
+          </a:p>
+        </p:txBody>
+      </p:sp>
+      <p:sp>
+        <p:nvSpPr>
+          <p:cNvPr id="9" name="TextBox 8"/>
+          <p:cNvSpPr txBox="1"/>
+          <p:nvPr/>
+        </p:nvSpPr>
+        <p:spPr>
+          <a:xfrm>
+            <a:off x="6309359" y="2267712"/>
+            <a:ext cx="5184648" cy="3950208"/>
+          </a:xfrm>
+          <a:prstGeom prst="rect">
+            <a:avLst/>
+          </a:prstGeom>
+          <a:noFill/>
+        </p:spPr>
+        <p:txBody>
+          <a:bodyPr wrap="square">
+            <a:spAutoFit/>
+          </a:bodyPr>
+          <a:lstStyle/>
+          <a:p>
+            <a:pPr>
+              <a:spcAft>
+                <a:spcPts val="800"/>
+              </a:spcAft>
+              <a:defRPr sz="1300">
+                <a:solidFill>
+                  <a:srgbClr val="1C2D46"/>
+                </a:solidFill>
+                <a:latin typeface="Aptos"/>
+              </a:defRPr>
+            </a:pPr>
+            <a:r>
+              <a:t>Add live connectors and larger benchmark panel coverage.</a:t>
+            </a:r>
+          </a:p>
+          <a:p>
+            <a:pPr>
+              <a:spcAft>
+                <a:spcPts val="800"/>
+              </a:spcAft>
+              <a:defRPr sz="1300">
+                <a:solidFill>
+                  <a:srgbClr val="1C2D46"/>
+                </a:solidFill>
+                <a:latin typeface="Aptos"/>
+              </a:defRPr>
+            </a:pPr>
+            <a:r>
+              <a:t>Run pilot with real outreach and campaign outcomes.</a:t>
+            </a:r>
+          </a:p>
+          <a:p>
+            <a:pPr>
+              <a:spcAft>
+                <a:spcPts val="800"/>
+              </a:spcAft>
+              <a:defRPr sz="1300">
+                <a:solidFill>
+                  <a:srgbClr val="1C2D46"/>
+                </a:solidFill>
+                <a:latin typeface="Aptos"/>
+              </a:defRPr>
+            </a:pPr>
+            <a:r>
+              <a:t>Compare predicted vs realized metrics and recalibrate model.</a:t>
+            </a:r>
+          </a:p>
+          <a:p>
+            <a:pPr>
+              <a:spcAft>
+                <a:spcPts val="800"/>
+              </a:spcAft>
+              <a:defRPr sz="1300">
+                <a:solidFill>
+                  <a:srgbClr val="1C2D46"/>
+                </a:solidFill>
+                <a:latin typeface="Aptos"/>
+              </a:defRPr>
+            </a:pPr>
+            <a:r>
+              <a:t>Add fairness constraints and stronger monitoring alerts.</a:t>
+            </a:r>
+          </a:p>
+          <a:p>
+            <a:pPr>
+              <a:spcAft>
+                <a:spcPts val="800"/>
+              </a:spcAft>
+              <a:defRPr sz="1300">
+                <a:solidFill>
+                  <a:srgbClr val="1C2D46"/>
+                </a:solidFill>
+                <a:latin typeface="Aptos"/>
+              </a:defRPr>
+            </a:pPr>
+            <a:r>
+              <a:t>Finalize operating playbook for in-house AI-MCN workflow.</a:t>
+            </a:r>
+          </a:p>
+        </p:txBody>
+      </p:sp>
+      <p:sp>
+        <p:nvSpPr>
+          <p:cNvPr id="10" name="TextBox 9"/>
+          <p:cNvSpPr txBox="1"/>
+          <p:nvPr/>
+        </p:nvSpPr>
+        <p:spPr>
+          <a:xfrm>
+            <a:off x="502920" y="6428232"/>
+            <a:ext cx="8503920" cy="310896"/>
+          </a:xfrm>
+          <a:prstGeom prst="rect">
+            <a:avLst/>
+          </a:prstGeom>
+          <a:noFill/>
+        </p:spPr>
+        <p:txBody>
+          <a:bodyPr wrap="none">
+            <a:spAutoFit/>
+          </a:bodyPr>
+          <a:lstStyle/>
+          <a:p>
+            <a:pPr algn="l">
+              <a:spcAft>
+                <a:spcPts val="0"/>
+              </a:spcAft>
+            </a:pPr>
+            <a:r>
+              <a:rPr sz="850">
+                <a:solidFill>
+                  <a:srgbClr val="6E8098"/>
+                </a:solidFill>
+                <a:latin typeface="Aptos"/>
+              </a:rPr>
+              <a:t>Sources: </a:t>
+            </a:r>
+            <a:r>
+              <a:rPr sz="850">
+                <a:solidFill>
+                  <a:srgbClr val="6E8098"/>
+                </a:solidFill>
+                <a:latin typeface="Aptos"/>
+              </a:rPr>
+              <a:t>orchestrator.py (internal)</a:t>
+            </a:r>
+            <a:r>
+              <a:rPr sz="850">
+                <a:solidFill>
+                  <a:srgbClr val="8291A5"/>
+                </a:solidFill>
+                <a:latin typeface="Aptos"/>
+              </a:rPr>
+              <a:t> | </a:t>
+            </a:r>
+            <a:r>
+              <a:rPr sz="850">
+                <a:solidFill>
+                  <a:srgbClr val="6E8098"/>
+                </a:solidFill>
+                <a:latin typeface="Aptos"/>
+              </a:rPr>
+              <a:t>app.py workflow (internal)</a:t>
+            </a:r>
+            <a:r>
+              <a:rPr sz="850">
+                <a:solidFill>
+                  <a:srgbClr val="8291A5"/>
+                </a:solidFill>
+                <a:latin typeface="Aptos"/>
+              </a:rPr>
+              <a:t> | </a:t>
+            </a:r>
+            <a:r>
+              <a:rPr sz="850">
+                <a:solidFill>
+                  <a:srgbClr val="6E8098"/>
+                </a:solidFill>
+                <a:latin typeface="Aptos"/>
+              </a:rPr>
+              <a:t>AI_MCN_Analysis_Explainer_EN.md (internal)</a:t>
+            </a:r>
+          </a:p>
+        </p:txBody>
+      </p:sp>
+      <p:sp>
+        <p:nvSpPr>
+          <p:cNvPr id="11" name="TextBox 10"/>
+          <p:cNvSpPr txBox="1"/>
+          <p:nvPr/>
+        </p:nvSpPr>
+        <p:spPr>
+          <a:xfrm>
+            <a:off x="9189720" y="6428232"/>
+            <a:ext cx="2514600" cy="292608"/>
+          </a:xfrm>
+          <a:prstGeom prst="rect">
+            <a:avLst/>
+          </a:prstGeom>
+          <a:noFill/>
+        </p:spPr>
+        <p:txBody>
+          <a:bodyPr wrap="none">
+            <a:spAutoFit/>
+          </a:bodyPr>
+          <a:lstStyle/>
+          <a:p>
+            <a:pPr algn="r">
+              <a:defRPr sz="900">
+                <a:solidFill>
+                  <a:srgbClr val="6E8098"/>
+                </a:solidFill>
+                <a:latin typeface="Aptos"/>
+              </a:defRPr>
+            </a:pPr>
+            <a:r>
+              <a:t>Backup 23 | Roadmap</a:t>
+            </a:r>
+          </a:p>
+        </p:txBody>
+      </p:sp>
+    </p:spTree>
+  </p:cSld>
+  <p:clrMapOvr>
+    <a:masterClrMapping/>
+  </p:clrMapOvr>
+</p:sld>
+</file>
+
+<file path=ppt/slides/slide24.xml><?xml version="1.0" encoding="utf-8"?>
+<p:sld xmlns:a="http://schemas.openxmlformats.org/drawingml/2006/main" xmlns:p="http://schemas.openxmlformats.org/presentationml/2006/main" xmlns:r="http://schemas.openxmlformats.org/officeDocument/2006/relationships">
+  <p:cSld>
+    <p:spTree>
+      <p:nvGrpSpPr>
+        <p:cNvPr id="1" name=""/>
+        <p:cNvGrpSpPr/>
+        <p:nvPr/>
+      </p:nvGrpSpPr>
+      <p:grpSpPr/>
+      <p:sp>
+        <p:nvSpPr>
+          <p:cNvPr id="2" name="TextBox 1"/>
+          <p:cNvSpPr txBox="1"/>
+          <p:nvPr/>
+        </p:nvSpPr>
+        <p:spPr>
+          <a:xfrm>
+            <a:off x="594360" y="320040"/>
+            <a:ext cx="11064240" cy="914400"/>
+          </a:xfrm>
+          <a:prstGeom prst="rect">
+            <a:avLst/>
+          </a:prstGeom>
+          <a:noFill/>
+        </p:spPr>
+        <p:txBody>
+          <a:bodyPr wrap="none">
+            <a:spAutoFit/>
+          </a:bodyPr>
+          <a:lstStyle/>
+          <a:p>
+            <a:pPr>
+              <a:defRPr sz="3200" b="1">
+                <a:solidFill>
+                  <a:srgbClr val="0F2C59"/>
+                </a:solidFill>
+                <a:latin typeface="Aptos Display"/>
+              </a:defRPr>
+            </a:pPr>
+            <a:r>
+              <a:t>Backup: AI Tool Usage Detail</a:t>
+            </a:r>
+          </a:p>
+        </p:txBody>
+      </p:sp>
+      <p:sp>
+        <p:nvSpPr>
+          <p:cNvPr id="3" name="Rectangle 2"/>
+          <p:cNvSpPr/>
+          <p:nvPr/>
+        </p:nvSpPr>
+        <p:spPr>
+          <a:xfrm>
+            <a:off x="566928" y="1755648"/>
+            <a:ext cx="2651760" cy="73152"/>
+          </a:xfrm>
+          <a:prstGeom prst="rect">
+            <a:avLst/>
+          </a:prstGeom>
+          <a:solidFill>
+            <a:srgbClr val="1A7DBC"/>
+          </a:solidFill>
+          <a:ln>
+            <a:noFill/>
+          </a:ln>
+        </p:spPr>
+        <p:style>
+          <a:lnRef idx="1">
+            <a:schemeClr val="accent1"/>
+          </a:lnRef>
+          <a:fillRef idx="3">
+            <a:schemeClr val="accent1"/>
+          </a:fillRef>
+          <a:effectRef idx="2">
+            <a:schemeClr val="accent1"/>
+          </a:effectRef>
+          <a:fontRef idx="minor">
+            <a:schemeClr val="lt1"/>
+          </a:fontRef>
+        </p:style>
+        <p:txBody>
+          <a:bodyPr rtlCol="0" anchor="ctr"/>
+          <a:lstStyle/>
+          <a:p>
+            <a:pPr algn="ctr"/>
+          </a:p>
+        </p:txBody>
+      </p:sp>
+      <p:sp>
+        <p:nvSpPr>
+          <p:cNvPr id="4" name="Rounded Rectangle 3"/>
+          <p:cNvSpPr/>
+          <p:nvPr/>
+        </p:nvSpPr>
+        <p:spPr>
+          <a:xfrm>
+            <a:off x="621792" y="1828800"/>
+            <a:ext cx="5440680" cy="4480560"/>
+          </a:xfrm>
+          <a:prstGeom prst="roundRect">
+            <a:avLst/>
+          </a:prstGeom>
+          <a:solidFill>
+            <a:srgbClr val="F2F7FC"/>
+          </a:solidFill>
+          <a:ln w="15875">
+            <a:solidFill>
+              <a:srgbClr val="CDDCEE"/>
+            </a:solidFill>
+          </a:ln>
+        </p:spPr>
+        <p:style>
+          <a:lnRef idx="1">
+            <a:schemeClr val="accent1"/>
+          </a:lnRef>
+          <a:fillRef idx="3">
+            <a:schemeClr val="accent1"/>
+          </a:fillRef>
+          <a:effectRef idx="2">
+            <a:schemeClr val="accent1"/>
+          </a:effectRef>
+          <a:fontRef idx="minor">
+            <a:schemeClr val="lt1"/>
+          </a:fontRef>
+        </p:style>
+        <p:txBody>
+          <a:bodyPr rtlCol="0" anchor="ctr"/>
+          <a:lstStyle/>
+          <a:p>
+            <a:pPr algn="ctr"/>
+          </a:p>
+        </p:txBody>
+      </p:sp>
+      <p:sp>
+        <p:nvSpPr>
+          <p:cNvPr id="5" name="TextBox 4"/>
+          <p:cNvSpPr txBox="1"/>
+          <p:nvPr/>
+        </p:nvSpPr>
+        <p:spPr>
+          <a:xfrm>
+            <a:off x="804672" y="1938528"/>
+            <a:ext cx="5166360" cy="347472"/>
+          </a:xfrm>
+          <a:prstGeom prst="rect">
+            <a:avLst/>
+          </a:prstGeom>
+          <a:noFill/>
+        </p:spPr>
+        <p:txBody>
+          <a:bodyPr wrap="none">
+            <a:spAutoFit/>
+          </a:bodyPr>
+          <a:lstStyle/>
+          <a:p>
+            <a:pPr>
+              <a:defRPr b="1" sz="1700">
+                <a:solidFill>
+                  <a:srgbClr val="133A66"/>
+                </a:solidFill>
+                <a:latin typeface="Aptos"/>
+              </a:defRPr>
+            </a:pPr>
+            <a:r>
+              <a:t>Where AI Tools Accelerated Work</a:t>
+            </a:r>
+          </a:p>
+        </p:txBody>
+      </p:sp>
+      <p:sp>
+        <p:nvSpPr>
+          <p:cNvPr id="6" name="TextBox 5"/>
+          <p:cNvSpPr txBox="1"/>
+          <p:nvPr/>
+        </p:nvSpPr>
+        <p:spPr>
+          <a:xfrm>
+            <a:off x="786384" y="2267712"/>
+            <a:ext cx="5184648" cy="3950208"/>
+          </a:xfrm>
+          <a:prstGeom prst="rect">
+            <a:avLst/>
+          </a:prstGeom>
+          <a:noFill/>
+        </p:spPr>
+        <p:txBody>
+          <a:bodyPr wrap="square">
+            <a:spAutoFit/>
+          </a:bodyPr>
+          <a:lstStyle/>
+          <a:p>
+            <a:pPr>
+              <a:spcAft>
+                <a:spcPts val="800"/>
+              </a:spcAft>
+              <a:defRPr sz="1300">
+                <a:solidFill>
+                  <a:srgbClr val="1C2D46"/>
+                </a:solidFill>
+                <a:latin typeface="Aptos"/>
+              </a:defRPr>
+            </a:pPr>
+            <a:r>
+              <a:t>Research synthesis and structuring references for slides.</a:t>
+            </a:r>
+          </a:p>
+          <a:p>
+            <a:pPr>
+              <a:spcAft>
+                <a:spcPts val="800"/>
+              </a:spcAft>
+              <a:defRPr sz="1300">
+                <a:solidFill>
+                  <a:srgbClr val="1C2D46"/>
+                </a:solidFill>
+                <a:latin typeface="Aptos"/>
+              </a:defRPr>
+            </a:pPr>
+            <a:r>
+              <a:t>Implementation support across data, ML, and UI modules.</a:t>
+            </a:r>
+          </a:p>
+          <a:p>
+            <a:pPr>
+              <a:spcAft>
+                <a:spcPts val="800"/>
+              </a:spcAft>
+              <a:defRPr sz="1300">
+                <a:solidFill>
+                  <a:srgbClr val="1C2D46"/>
+                </a:solidFill>
+                <a:latin typeface="Aptos"/>
+              </a:defRPr>
+            </a:pPr>
+            <a:r>
+              <a:t>Debugging support for pipeline/runtime issues.</a:t>
+            </a:r>
+          </a:p>
+          <a:p>
+            <a:pPr>
+              <a:spcAft>
+                <a:spcPts val="800"/>
+              </a:spcAft>
+              <a:defRPr sz="1300">
+                <a:solidFill>
+                  <a:srgbClr val="1C2D46"/>
+                </a:solidFill>
+                <a:latin typeface="Aptos"/>
+              </a:defRPr>
+            </a:pPr>
+            <a:r>
+              <a:t>Documentation drafting and bilingual explainer production.</a:t>
+            </a:r>
+          </a:p>
+          <a:p>
+            <a:pPr>
+              <a:spcAft>
+                <a:spcPts val="800"/>
+              </a:spcAft>
+              <a:defRPr sz="1300">
+                <a:solidFill>
+                  <a:srgbClr val="1C2D46"/>
+                </a:solidFill>
+                <a:latin typeface="Aptos"/>
+              </a:defRPr>
+            </a:pPr>
+            <a:r>
+              <a:t>Presentation refinement and narrative iteration.</a:t>
+            </a:r>
+          </a:p>
+        </p:txBody>
+      </p:sp>
+      <p:sp>
+        <p:nvSpPr>
+          <p:cNvPr id="7" name="Rounded Rectangle 6"/>
+          <p:cNvSpPr/>
+          <p:nvPr/>
+        </p:nvSpPr>
+        <p:spPr>
+          <a:xfrm>
+            <a:off x="6144768" y="1828800"/>
+            <a:ext cx="5440680" cy="4480560"/>
+          </a:xfrm>
+          <a:prstGeom prst="roundRect">
+            <a:avLst/>
+          </a:prstGeom>
+          <a:solidFill>
+            <a:srgbClr val="F2F7FC"/>
+          </a:solidFill>
+          <a:ln w="15875">
+            <a:solidFill>
+              <a:srgbClr val="CDDCEE"/>
+            </a:solidFill>
+          </a:ln>
+        </p:spPr>
+        <p:style>
+          <a:lnRef idx="1">
+            <a:schemeClr val="accent1"/>
+          </a:lnRef>
+          <a:fillRef idx="3">
+            <a:schemeClr val="accent1"/>
+          </a:fillRef>
+          <a:effectRef idx="2">
+            <a:schemeClr val="accent1"/>
+          </a:effectRef>
+          <a:fontRef idx="minor">
+            <a:schemeClr val="lt1"/>
+          </a:fontRef>
+        </p:style>
+        <p:txBody>
+          <a:bodyPr rtlCol="0" anchor="ctr"/>
+          <a:lstStyle/>
+          <a:p>
+            <a:pPr algn="ctr"/>
+          </a:p>
+        </p:txBody>
+      </p:sp>
+      <p:sp>
+        <p:nvSpPr>
+          <p:cNvPr id="8" name="TextBox 7"/>
+          <p:cNvSpPr txBox="1"/>
+          <p:nvPr/>
+        </p:nvSpPr>
+        <p:spPr>
+          <a:xfrm>
+            <a:off x="6327648" y="1938528"/>
+            <a:ext cx="5166360" cy="347472"/>
+          </a:xfrm>
+          <a:prstGeom prst="rect">
+            <a:avLst/>
+          </a:prstGeom>
+          <a:noFill/>
+        </p:spPr>
+        <p:txBody>
+          <a:bodyPr wrap="none">
+            <a:spAutoFit/>
+          </a:bodyPr>
+          <a:lstStyle/>
+          <a:p>
+            <a:pPr>
+              <a:defRPr b="1" sz="1700">
+                <a:solidFill>
+                  <a:srgbClr val="133A66"/>
+                </a:solidFill>
+                <a:latin typeface="Aptos"/>
+              </a:defRPr>
+            </a:pPr>
+            <a:r>
+              <a:t>Human-Owned Responsibilities</a:t>
+            </a:r>
+          </a:p>
+        </p:txBody>
+      </p:sp>
+      <p:sp>
+        <p:nvSpPr>
+          <p:cNvPr id="9" name="TextBox 8"/>
+          <p:cNvSpPr txBox="1"/>
+          <p:nvPr/>
+        </p:nvSpPr>
+        <p:spPr>
+          <a:xfrm>
+            <a:off x="6309359" y="2267712"/>
+            <a:ext cx="5184648" cy="3950208"/>
+          </a:xfrm>
+          <a:prstGeom prst="rect">
+            <a:avLst/>
+          </a:prstGeom>
+          <a:noFill/>
+        </p:spPr>
+        <p:txBody>
+          <a:bodyPr wrap="square">
+            <a:spAutoFit/>
+          </a:bodyPr>
+          <a:lstStyle/>
+          <a:p>
+            <a:pPr>
+              <a:spcAft>
+                <a:spcPts val="800"/>
+              </a:spcAft>
+              <a:defRPr sz="1300">
+                <a:solidFill>
+                  <a:srgbClr val="1C2D46"/>
+                </a:solidFill>
+                <a:latin typeface="Aptos"/>
+              </a:defRPr>
+            </a:pPr>
+            <a:r>
+              <a:t>Client problem framing and objective definition.</a:t>
+            </a:r>
+          </a:p>
+          <a:p>
+            <a:pPr>
+              <a:spcAft>
+                <a:spcPts val="800"/>
+              </a:spcAft>
+              <a:defRPr sz="1300">
+                <a:solidFill>
+                  <a:srgbClr val="1C2D46"/>
+                </a:solidFill>
+                <a:latin typeface="Aptos"/>
+              </a:defRPr>
+            </a:pPr>
+            <a:r>
+              <a:t>Method selection and validation logic design.</a:t>
+            </a:r>
+          </a:p>
+          <a:p>
+            <a:pPr>
+              <a:spcAft>
+                <a:spcPts val="800"/>
+              </a:spcAft>
+              <a:defRPr sz="1300">
+                <a:solidFill>
+                  <a:srgbClr val="1C2D46"/>
+                </a:solidFill>
+                <a:latin typeface="Aptos"/>
+              </a:defRPr>
+            </a:pPr>
+            <a:r>
+              <a:t>Quality control on model outputs and interpretation.</a:t>
+            </a:r>
+          </a:p>
+          <a:p>
+            <a:pPr>
+              <a:spcAft>
+                <a:spcPts val="800"/>
+              </a:spcAft>
+              <a:defRPr sz="1300">
+                <a:solidFill>
+                  <a:srgbClr val="1C2D46"/>
+                </a:solidFill>
+                <a:latin typeface="Aptos"/>
+              </a:defRPr>
+            </a:pPr>
+            <a:r>
+              <a:t>Risk/compliance framing and stakeholder communication.</a:t>
+            </a:r>
+          </a:p>
+          <a:p>
+            <a:pPr>
+              <a:spcAft>
+                <a:spcPts val="800"/>
+              </a:spcAft>
+              <a:defRPr sz="1300">
+                <a:solidFill>
+                  <a:srgbClr val="1C2D46"/>
+                </a:solidFill>
+                <a:latin typeface="Aptos"/>
+              </a:defRPr>
+            </a:pPr>
+            <a:r>
+              <a:t>Final recommendation accountability remained with team.</a:t>
+            </a:r>
+          </a:p>
+        </p:txBody>
+      </p:sp>
+      <p:sp>
+        <p:nvSpPr>
+          <p:cNvPr id="10" name="TextBox 9"/>
+          <p:cNvSpPr txBox="1"/>
+          <p:nvPr/>
+        </p:nvSpPr>
+        <p:spPr>
+          <a:xfrm>
+            <a:off x="502920" y="6428232"/>
+            <a:ext cx="8503920" cy="310896"/>
+          </a:xfrm>
+          <a:prstGeom prst="rect">
+            <a:avLst/>
+          </a:prstGeom>
+          <a:noFill/>
+        </p:spPr>
+        <p:txBody>
+          <a:bodyPr wrap="none">
+            <a:spAutoFit/>
+          </a:bodyPr>
+          <a:lstStyle/>
+          <a:p>
+            <a:pPr algn="l">
+              <a:spcAft>
+                <a:spcPts val="0"/>
+              </a:spcAft>
+            </a:pPr>
+            <a:r>
+              <a:rPr sz="850">
+                <a:solidFill>
+                  <a:srgbClr val="6E8098"/>
+                </a:solidFill>
+                <a:latin typeface="Aptos"/>
+              </a:rPr>
+              <a:t>Sources: </a:t>
+            </a:r>
+            <a:r>
+              <a:rPr sz="850" u="sng">
+                <a:solidFill>
+                  <a:srgbClr val="1A7DBC"/>
+                </a:solidFill>
+                <a:latin typeface="Aptos"/>
+                <a:hlinkClick r:id="rId2"/>
+              </a:rPr>
+              <a:t>OpenAI docs</a:t>
+            </a:r>
+            <a:r>
+              <a:rPr sz="850">
+                <a:solidFill>
+                  <a:srgbClr val="8291A5"/>
+                </a:solidFill>
+                <a:latin typeface="Aptos"/>
+              </a:rPr>
+              <a:t> | </a:t>
+            </a:r>
+            <a:r>
+              <a:rPr sz="850">
+                <a:solidFill>
+                  <a:srgbClr val="6E8098"/>
+                </a:solidFill>
+                <a:latin typeface="Aptos"/>
+              </a:rPr>
+              <a:t>Internal repo artifacts</a:t>
+            </a:r>
+          </a:p>
+        </p:txBody>
+      </p:sp>
+      <p:sp>
+        <p:nvSpPr>
+          <p:cNvPr id="11" name="TextBox 10"/>
+          <p:cNvSpPr txBox="1"/>
+          <p:nvPr/>
+        </p:nvSpPr>
+        <p:spPr>
+          <a:xfrm>
+            <a:off x="9189720" y="6428232"/>
+            <a:ext cx="2514600" cy="292608"/>
+          </a:xfrm>
+          <a:prstGeom prst="rect">
+            <a:avLst/>
+          </a:prstGeom>
+          <a:noFill/>
+        </p:spPr>
+        <p:txBody>
+          <a:bodyPr wrap="none">
+            <a:spAutoFit/>
+          </a:bodyPr>
+          <a:lstStyle/>
+          <a:p>
+            <a:pPr algn="r">
+              <a:defRPr sz="900">
+                <a:solidFill>
+                  <a:srgbClr val="6E8098"/>
+                </a:solidFill>
+                <a:latin typeface="Aptos"/>
+              </a:defRPr>
+            </a:pPr>
+            <a:r>
+              <a:t>Backup 24 | AI Tooling Detail</a:t>
+            </a:r>
+          </a:p>
+        </p:txBody>
+      </p:sp>
+    </p:spTree>
+  </p:cSld>
+  <p:clrMapOvr>
+    <a:masterClrMapping/>
+  </p:clrMapOvr>
+</p:sld>
+</file>
+
+<file path=ppt/slides/slide25.xml><?xml version="1.0" encoding="utf-8"?>
+<p:sld xmlns:a="http://schemas.openxmlformats.org/drawingml/2006/main" xmlns:p="http://schemas.openxmlformats.org/presentationml/2006/main" xmlns:r="http://schemas.openxmlformats.org/officeDocument/2006/relationships">
+  <p:cSld>
+    <p:spTree>
+      <p:nvGrpSpPr>
+        <p:cNvPr id="1" name=""/>
+        <p:cNvGrpSpPr/>
+        <p:nvPr/>
+      </p:nvGrpSpPr>
+      <p:grpSpPr/>
+      <p:sp>
+        <p:nvSpPr>
+          <p:cNvPr id="2" name="TextBox 1"/>
+          <p:cNvSpPr txBox="1"/>
+          <p:nvPr/>
+        </p:nvSpPr>
+        <p:spPr>
+          <a:xfrm>
+            <a:off x="594360" y="320040"/>
+            <a:ext cx="11064240" cy="914400"/>
+          </a:xfrm>
+          <a:prstGeom prst="rect">
+            <a:avLst/>
+          </a:prstGeom>
+          <a:noFill/>
+        </p:spPr>
+        <p:txBody>
+          <a:bodyPr wrap="none">
+            <a:spAutoFit/>
+          </a:bodyPr>
+          <a:lstStyle/>
+          <a:p>
+            <a:pPr>
+              <a:defRPr sz="3200" b="1">
+                <a:solidFill>
+                  <a:srgbClr val="0F2C59"/>
+                </a:solidFill>
+                <a:latin typeface="Aptos Display"/>
+              </a:defRPr>
+            </a:pPr>
+            <a:r>
+              <a:t>Backup: Research Library for Team Follow-up</a:t>
+            </a:r>
+          </a:p>
+        </p:txBody>
+      </p:sp>
+      <p:sp>
+        <p:nvSpPr>
+          <p:cNvPr id="3" name="Rectangle 2"/>
+          <p:cNvSpPr/>
+          <p:nvPr/>
+        </p:nvSpPr>
+        <p:spPr>
+          <a:xfrm>
+            <a:off x="566928" y="1755648"/>
+            <a:ext cx="2651760" cy="73152"/>
+          </a:xfrm>
+          <a:prstGeom prst="rect">
+            <a:avLst/>
+          </a:prstGeom>
+          <a:solidFill>
+            <a:srgbClr val="1A7DBC"/>
+          </a:solidFill>
+          <a:ln>
+            <a:noFill/>
+          </a:ln>
+        </p:spPr>
+        <p:style>
+          <a:lnRef idx="1">
+            <a:schemeClr val="accent1"/>
+          </a:lnRef>
+          <a:fillRef idx="3">
+            <a:schemeClr val="accent1"/>
+          </a:fillRef>
+          <a:effectRef idx="2">
+            <a:schemeClr val="accent1"/>
+          </a:effectRef>
+          <a:fontRef idx="minor">
+            <a:schemeClr val="lt1"/>
+          </a:fontRef>
+        </p:style>
+        <p:txBody>
+          <a:bodyPr rtlCol="0" anchor="ctr"/>
+          <a:lstStyle/>
+          <a:p>
+            <a:pPr algn="ctr"/>
+          </a:p>
+        </p:txBody>
+      </p:sp>
+      <p:sp>
+        <p:nvSpPr>
+          <p:cNvPr id="4" name="TextBox 3"/>
+          <p:cNvSpPr txBox="1"/>
+          <p:nvPr/>
+        </p:nvSpPr>
+        <p:spPr>
+          <a:xfrm>
+            <a:off x="713232" y="1828800"/>
+            <a:ext cx="10972800" cy="4480560"/>
+          </a:xfrm>
+          <a:prstGeom prst="rect">
+            <a:avLst/>
+          </a:prstGeom>
+          <a:noFill/>
+        </p:spPr>
+        <p:txBody>
+          <a:bodyPr wrap="square">
+            <a:spAutoFit/>
+          </a:bodyPr>
+          <a:lstStyle/>
+          <a:p>
+            <a:pPr>
+              <a:spcAft>
+                <a:spcPts val="800"/>
+              </a:spcAft>
+              <a:defRPr sz="1500">
+                <a:solidFill>
+                  <a:srgbClr val="1C2D46"/>
+                </a:solidFill>
+                <a:latin typeface="Aptos"/>
+              </a:defRPr>
+            </a:pPr>
+            <a:r>
+              <a:t>Market spend: EMARKETER (Mar 13, 2025), IAB (Nov 20, 2025), Goldman Sachs creator economy outlook.</a:t>
+            </a:r>
+          </a:p>
+          <a:p>
+            <a:pPr>
+              <a:spcAft>
+                <a:spcPts val="800"/>
+              </a:spcAft>
+              <a:defRPr sz="1500">
+                <a:solidFill>
+                  <a:srgbClr val="1C2D46"/>
+                </a:solidFill>
+                <a:latin typeface="Aptos"/>
+              </a:defRPr>
+            </a:pPr>
+            <a:r>
+              <a:t>Operational pain: Sprout Social workload findings; Linqia 2023/2026 benchmark reports.</a:t>
+            </a:r>
+          </a:p>
+          <a:p>
+            <a:pPr>
+              <a:spcAft>
+                <a:spcPts val="800"/>
+              </a:spcAft>
+              <a:defRPr sz="1500">
+                <a:solidFill>
+                  <a:srgbClr val="1C2D46"/>
+                </a:solidFill>
+                <a:latin typeface="Aptos"/>
+              </a:defRPr>
+            </a:pPr>
+            <a:r>
+              <a:t>Beauty context: NIQ global beauty growth + K-beauty landscape; McKinsey 2025 beauty outlook.</a:t>
+            </a:r>
+          </a:p>
+          <a:p>
+            <a:pPr>
+              <a:spcAft>
+                <a:spcPts val="800"/>
+              </a:spcAft>
+              <a:defRPr sz="1500">
+                <a:solidFill>
+                  <a:srgbClr val="1C2D46"/>
+                </a:solidFill>
+                <a:latin typeface="Aptos"/>
+              </a:defRPr>
+            </a:pPr>
+            <a:r>
+              <a:t>Client context: BOJ official campaign pages + public U.S. strategy coverage.</a:t>
+            </a:r>
+          </a:p>
+          <a:p>
+            <a:pPr>
+              <a:spcAft>
+                <a:spcPts val="800"/>
+              </a:spcAft>
+              <a:defRPr sz="1500">
+                <a:solidFill>
+                  <a:srgbClr val="1C2D46"/>
+                </a:solidFill>
+                <a:latin typeface="Aptos"/>
+              </a:defRPr>
+            </a:pPr>
+            <a:r>
+              <a:t>Governance: FTC influencer disclosures/endorsement guides, YouTube MCN documentation, FDA sunscreen policy context.</a:t>
+            </a:r>
+          </a:p>
+          <a:p>
+            <a:pPr>
+              <a:spcAft>
+                <a:spcPts val="800"/>
+              </a:spcAft>
+              <a:defRPr sz="1500">
+                <a:solidFill>
+                  <a:srgbClr val="1C2D46"/>
+                </a:solidFill>
+                <a:latin typeface="Aptos"/>
+              </a:defRPr>
+            </a:pPr>
+            <a:r>
+              <a:t>All links are included in slide markdown and sources footer for teammate reading.</a:t>
+            </a:r>
+          </a:p>
+        </p:txBody>
+      </p:sp>
+      <p:sp>
+        <p:nvSpPr>
+          <p:cNvPr id="5" name="TextBox 4"/>
+          <p:cNvSpPr txBox="1"/>
+          <p:nvPr/>
+        </p:nvSpPr>
+        <p:spPr>
+          <a:xfrm>
+            <a:off x="502920" y="6428232"/>
+            <a:ext cx="8503920" cy="310896"/>
+          </a:xfrm>
+          <a:prstGeom prst="rect">
+            <a:avLst/>
+          </a:prstGeom>
+          <a:noFill/>
+        </p:spPr>
+        <p:txBody>
+          <a:bodyPr wrap="none">
+            <a:spAutoFit/>
+          </a:bodyPr>
+          <a:lstStyle/>
+          <a:p>
+            <a:pPr algn="l">
+              <a:spcAft>
+                <a:spcPts val="0"/>
+              </a:spcAft>
+            </a:pPr>
+            <a:r>
+              <a:rPr sz="850">
+                <a:solidFill>
+                  <a:srgbClr val="6E8098"/>
+                </a:solidFill>
+                <a:latin typeface="Aptos"/>
+              </a:rPr>
+              <a:t>Sources: </a:t>
+            </a:r>
+            <a:r>
+              <a:rPr sz="850" u="sng">
+                <a:solidFill>
+                  <a:srgbClr val="1A7DBC"/>
+                </a:solidFill>
+                <a:latin typeface="Aptos"/>
+                <a:hlinkClick r:id="rId2"/>
+              </a:rPr>
+              <a:t>EMARKETER</a:t>
+            </a:r>
+            <a:r>
+              <a:rPr sz="850">
+                <a:solidFill>
+                  <a:srgbClr val="8291A5"/>
+                </a:solidFill>
+                <a:latin typeface="Aptos"/>
+              </a:rPr>
+              <a:t> | </a:t>
+            </a:r>
+            <a:r>
+              <a:rPr sz="850" u="sng">
+                <a:solidFill>
+                  <a:srgbClr val="1A7DBC"/>
+                </a:solidFill>
+                <a:latin typeface="Aptos"/>
+                <a:hlinkClick r:id="rId3"/>
+              </a:rPr>
+              <a:t>IAB</a:t>
+            </a:r>
+            <a:r>
+              <a:rPr sz="850">
+                <a:solidFill>
+                  <a:srgbClr val="8291A5"/>
+                </a:solidFill>
+                <a:latin typeface="Aptos"/>
+              </a:rPr>
+              <a:t> | </a:t>
+            </a:r>
+            <a:r>
+              <a:rPr sz="850" u="sng">
+                <a:solidFill>
+                  <a:srgbClr val="1A7DBC"/>
+                </a:solidFill>
+                <a:latin typeface="Aptos"/>
+                <a:hlinkClick r:id="rId4"/>
+              </a:rPr>
+              <a:t>NIQ</a:t>
+            </a:r>
+            <a:r>
+              <a:rPr sz="850">
+                <a:solidFill>
+                  <a:srgbClr val="8291A5"/>
+                </a:solidFill>
+                <a:latin typeface="Aptos"/>
+              </a:rPr>
+              <a:t> | </a:t>
+            </a:r>
+            <a:r>
+              <a:rPr sz="850" u="sng">
+                <a:solidFill>
+                  <a:srgbClr val="1A7DBC"/>
+                </a:solidFill>
+                <a:latin typeface="Aptos"/>
+                <a:hlinkClick r:id="rId5"/>
+              </a:rPr>
+              <a:t>McKinsey</a:t>
+            </a:r>
+          </a:p>
+        </p:txBody>
+      </p:sp>
+      <p:sp>
+        <p:nvSpPr>
+          <p:cNvPr id="6" name="TextBox 5"/>
+          <p:cNvSpPr txBox="1"/>
+          <p:nvPr/>
+        </p:nvSpPr>
+        <p:spPr>
+          <a:xfrm>
+            <a:off x="9189720" y="6428232"/>
+            <a:ext cx="2514600" cy="292608"/>
+          </a:xfrm>
+          <a:prstGeom prst="rect">
+            <a:avLst/>
+          </a:prstGeom>
+          <a:noFill/>
+        </p:spPr>
+        <p:txBody>
+          <a:bodyPr wrap="none">
+            <a:spAutoFit/>
+          </a:bodyPr>
+          <a:lstStyle/>
+          <a:p>
+            <a:pPr algn="r">
+              <a:defRPr sz="900">
+                <a:solidFill>
+                  <a:srgbClr val="6E8098"/>
+                </a:solidFill>
+                <a:latin typeface="Aptos"/>
+              </a:defRPr>
+            </a:pPr>
+            <a:r>
+              <a:t>Backup 25 | References</a:t>
             </a:r>
           </a:p>
         </p:txBody>
